--- a/docs/jeju-safety/제주드론치안_발제초안.pptx
+++ b/docs/jeju-safety/제주드론치안_발제초안.pptx
@@ -17,9 +17,10 @@
     <p:sldId id="265" r:id="rId11"/>
     <p:sldId id="266" r:id="rId12"/>
     <p:sldId id="267" r:id="rId13"/>
+    <p:sldId id="268" r:id="rId14"/>
   </p:sldIdLst>
   <p:notesMasterIdLst>
-    <p:notesMasterId r:id="rId14"/>
+    <p:notesMasterId r:id="rId15"/>
   </p:notesMasterIdLst>
   <p:sldSz cx="9144000" cy="5143500"/>
   <p:notesSz cx="5143500" cy="9144000"/>
@@ -513,7 +514,7 @@
           <a:p>
             <a:r>
               <a:rPr lang="en-US" dirty="0"/>
-              <a:t>도정이 이미 잘하고 있는 것을 인정하는 데서 출발한다. 비판이 아니라 보완 제안임을 톤으로 전달할 것.</a:t>
+              <a:t>제주가 위험하다는 말로 시작하지 않는다. 자료를 먼저 확인했다는 태도로 연다.</a:t>
             </a:r>
             <a:endParaRPr lang="en-US" dirty="0"/>
           </a:p>
@@ -777,7 +778,7 @@
           <a:p>
             <a:r>
               <a:rPr lang="en-US" dirty="0"/>
-              <a:t>마무리: 제주가 먼저 하면 전국이 따라 쓰는 제주형 표준 모델이자, 제주가 수출하는 산업이 된다.</a:t>
+              <a:t/>
             </a:r>
             <a:endParaRPr lang="en-US" dirty="0"/>
           </a:p>
@@ -801,6 +802,94 @@
             <a:fld id="{F7021451-1387-4CA6-816F-3879F97B5CBC}" type="slidenum">
               <a:rPr lang="en-US"/>
               <a:t>12</a:t>
+            </a:fld>
+            <a:endParaRPr lang="en-US"/>
+          </a:p>
+        </p:txBody>
+      </p:sp>
+    </p:spTree>
+    <p:extLst>
+      <p:ext uri="{BB962C8B-B14F-4D97-AF65-F5344CB8AC3E}">
+        <p14:creationId xmlns:p14="http://schemas.microsoft.com/office/powerpoint/2010/main" val="1024086991"/>
+      </p:ext>
+    </p:extLst>
+  </p:cSld>
+  <p:clrMapOvr>
+    <a:masterClrMapping/>
+  </p:clrMapOvr>
+</p:notes>
+</file>
+
+<file path=ppt/notesSlides/notesSlide13.xml><?xml version="1.0" encoding="utf-8"?>
+<p:notes xmlns:a="http://schemas.openxmlformats.org/drawingml/2006/main" xmlns:r="http://schemas.openxmlformats.org/officeDocument/2006/relationships" xmlns:p="http://schemas.openxmlformats.org/presentationml/2006/main">
+  <p:cSld>
+    <p:spTree>
+      <p:nvGrpSpPr>
+        <p:cNvPr id="1" name=""/>
+        <p:cNvGrpSpPr/>
+        <p:nvPr/>
+      </p:nvGrpSpPr>
+      <p:grpSpPr>
+        <a:xfrm>
+          <a:off x="0" y="0"/>
+          <a:ext cx="0" cy="0"/>
+          <a:chOff x="0" y="0"/>
+          <a:chExt cx="0" cy="0"/>
+        </a:xfrm>
+      </p:grpSpPr>
+      <p:sp>
+        <p:nvSpPr>
+          <p:cNvPr id="2" name="Slide Image Placeholder 1"/>
+          <p:cNvSpPr>
+            <a:spLocks noGrp="1" noRot="1" noChangeAspect="1"/>
+          </p:cNvSpPr>
+          <p:nvPr>
+            <p:ph type="sldImg"/>
+          </p:nvPr>
+        </p:nvSpPr>
+        <p:spPr/>
+      </p:sp>
+      <p:sp>
+        <p:nvSpPr>
+          <p:cNvPr id="3" name="Notes Placeholder 2"/>
+          <p:cNvSpPr>
+            <a:spLocks noGrp="1"/>
+          </p:cNvSpPr>
+          <p:nvPr>
+            <p:ph type="body" idx="1"/>
+          </p:nvPr>
+        </p:nvSpPr>
+        <p:spPr/>
+        <p:txBody>
+          <a:bodyPr/>
+          <a:lstStyle/>
+          <a:p>
+            <a:r>
+              <a:rPr lang="en-US" dirty="0"/>
+              <a:t>마무리: 제주가 먼저 하면 전국이 따라 쓰는 제주형 표준 모델이자, 제주가 수출하는 산업이 된다.</a:t>
+            </a:r>
+            <a:endParaRPr lang="en-US" dirty="0"/>
+          </a:p>
+        </p:txBody>
+      </p:sp>
+      <p:sp>
+        <p:nvSpPr>
+          <p:cNvPr id="4" name="Slide Number Placeholder 3"/>
+          <p:cNvSpPr>
+            <a:spLocks noGrp="1"/>
+          </p:cNvSpPr>
+          <p:nvPr>
+            <p:ph type="sldNum" sz="quarter" idx="10"/>
+          </p:nvPr>
+        </p:nvSpPr>
+        <p:spPr/>
+        <p:txBody>
+          <a:bodyPr/>
+          <a:lstStyle/>
+          <a:p>
+            <a:fld id="{F7021451-1387-4CA6-816F-3879F97B5CBC}" type="slidenum">
+              <a:rPr lang="en-US"/>
+              <a:t>13</a:t>
             </a:fld>
             <a:endParaRPr lang="en-US"/>
           </a:p>
@@ -2107,7 +2196,7 @@
                 <a:ea typeface="맑은 고딕" pitchFamily="34" charset="-122"/>
                 <a:cs typeface="맑은 고딕" pitchFamily="34" charset="-120"/>
               </a:rPr>
-              <a:t>제언 ③   거버넌스 — 조례가 곧 면허증</a:t>
+              <a:t>제언 ②   규제 — 특구 연장에 한 줄</a:t>
             </a:r>
             <a:endParaRPr lang="en-US" sz="2800" dirty="0"/>
           </a:p>
@@ -2146,7 +2235,7 @@
                 <a:ea typeface="맑은 고딕" pitchFamily="34" charset="-122"/>
                 <a:cs typeface="맑은 고딕" pitchFamily="34" charset="-120"/>
               </a:rPr>
-              <a:t>기체를 띄우기 전에 원칙을 먼저 세웁니다</a:t>
+              <a:t>세 가지 제언 중 가장 빠르고, 가장 적은 비용으로 가능합니다</a:t>
             </a:r>
             <a:endParaRPr lang="en-US" sz="1300" dirty="0"/>
           </a:p>
@@ -2154,26 +2243,189 @@
       </p:sp>
       <p:sp>
         <p:nvSpPr>
-          <p:cNvPr id="4" name="Shape 2"/>
+          <p:cNvPr id="4" name="Text 2"/>
+          <p:cNvSpPr txBox="1"/>
+          <p:nvPr/>
+        </p:nvSpPr>
+        <p:spPr>
+          <a:xfrm>
+            <a:off x="548640" y="1600200"/>
+            <a:ext cx="3749040" cy="777240"/>
+          </a:xfrm>
+          <a:prstGeom prst="rect">
+            <a:avLst/>
+          </a:prstGeom>
+          <a:noFill/>
+          <a:ln/>
+        </p:spPr>
+        <p:txBody>
+          <a:bodyPr wrap="square" lIns="0" tIns="0" rIns="0" bIns="0" rtlCol="0" anchor="ctr"/>
+          <a:lstStyle/>
+          <a:p>
+            <a:pPr indent="0" marL="0">
+              <a:buNone/>
+            </a:pPr>
+            <a:r>
+              <a:rPr lang="en-US" sz="4200" b="1" dirty="0">
+                <a:solidFill>
+                  <a:srgbClr val="065A82"/>
+                </a:solidFill>
+                <a:latin typeface="맑은 고딕" pitchFamily="34" charset="0"/>
+                <a:ea typeface="맑은 고딕" pitchFamily="34" charset="-122"/>
+                <a:cs typeface="맑은 고딕" pitchFamily="34" charset="-120"/>
+              </a:rPr>
+              <a:t>1,283㎢</a:t>
+            </a:r>
+            <a:endParaRPr lang="en-US" sz="4200" dirty="0"/>
+          </a:p>
+        </p:txBody>
+      </p:sp>
+      <p:sp>
+        <p:nvSpPr>
+          <p:cNvPr id="5" name="Text 3"/>
+          <p:cNvSpPr txBox="1"/>
+          <p:nvPr/>
+        </p:nvSpPr>
+        <p:spPr>
+          <a:xfrm>
+            <a:off x="594360" y="2395728"/>
+            <a:ext cx="3749040" cy="640080"/>
+          </a:xfrm>
+          <a:prstGeom prst="rect">
+            <a:avLst/>
+          </a:prstGeom>
+          <a:noFill/>
+          <a:ln/>
+        </p:spPr>
+        <p:txBody>
+          <a:bodyPr wrap="square" lIns="0" tIns="0" rIns="0" bIns="0" rtlCol="0" anchor="ctr"/>
+          <a:lstStyle/>
+          <a:p>
+            <a:pPr indent="0" marL="0">
+              <a:lnSpc>
+                <a:spcPct val="115000"/>
+              </a:lnSpc>
+              <a:buNone/>
+            </a:pPr>
+            <a:r>
+              <a:rPr lang="en-US" sz="1500" b="1" dirty="0">
+                <a:solidFill>
+                  <a:srgbClr val="10243A"/>
+                </a:solidFill>
+                <a:latin typeface="맑은 고딕" pitchFamily="34" charset="0"/>
+                <a:ea typeface="맑은 고딕" pitchFamily="34" charset="-122"/>
+                <a:cs typeface="맑은 고딕" pitchFamily="34" charset="-120"/>
+              </a:rPr>
+              <a:t>전국 최대 규모</a:t>
+            </a:r>
+            <a:endParaRPr lang="en-US" sz="1500" dirty="0"/>
+          </a:p>
+          <a:p>
+            <a:pPr indent="0" marL="0">
+              <a:lnSpc>
+                <a:spcPct val="115000"/>
+              </a:lnSpc>
+              <a:buNone/>
+            </a:pPr>
+            <a:r>
+              <a:rPr lang="en-US" sz="1500" b="1" dirty="0">
+                <a:solidFill>
+                  <a:srgbClr val="10243A"/>
+                </a:solidFill>
+                <a:latin typeface="맑은 고딕" pitchFamily="34" charset="0"/>
+                <a:ea typeface="맑은 고딕" pitchFamily="34" charset="-122"/>
+                <a:cs typeface="맑은 고딕" pitchFamily="34" charset="-120"/>
+              </a:rPr>
+              <a:t>드론특별자유화구역</a:t>
+            </a:r>
+            <a:endParaRPr lang="en-US" sz="1500" dirty="0"/>
+          </a:p>
+        </p:txBody>
+      </p:sp>
+      <p:sp>
+        <p:nvSpPr>
+          <p:cNvPr id="6" name="Text 4"/>
+          <p:cNvSpPr txBox="1"/>
+          <p:nvPr/>
+        </p:nvSpPr>
+        <p:spPr>
+          <a:xfrm>
+            <a:off x="594360" y="3090672"/>
+            <a:ext cx="3749040" cy="640080"/>
+          </a:xfrm>
+          <a:prstGeom prst="rect">
+            <a:avLst/>
+          </a:prstGeom>
+          <a:noFill/>
+          <a:ln/>
+        </p:spPr>
+        <p:txBody>
+          <a:bodyPr wrap="square" lIns="0" tIns="0" rIns="0" bIns="0" rtlCol="0" anchor="ctr"/>
+          <a:lstStyle/>
+          <a:p>
+            <a:pPr indent="0" marL="0">
+              <a:lnSpc>
+                <a:spcPct val="120000"/>
+              </a:lnSpc>
+              <a:buNone/>
+            </a:pPr>
+            <a:r>
+              <a:rPr lang="en-US" sz="1100" dirty="0">
+                <a:solidFill>
+                  <a:srgbClr val="5A6A78"/>
+                </a:solidFill>
+                <a:latin typeface="맑은 고딕" pitchFamily="34" charset="0"/>
+                <a:ea typeface="맑은 고딕" pitchFamily="34" charset="-122"/>
+                <a:cs typeface="맑은 고딕" pitchFamily="34" charset="-120"/>
+              </a:rPr>
+              <a:t>2021년 1차 지정 이후 운영 중이며,</a:t>
+            </a:r>
+            <a:endParaRPr lang="en-US" sz="1100" dirty="0"/>
+          </a:p>
+          <a:p>
+            <a:pPr indent="0" marL="0">
+              <a:lnSpc>
+                <a:spcPct val="120000"/>
+              </a:lnSpc>
+              <a:buNone/>
+            </a:pPr>
+            <a:r>
+              <a:rPr lang="en-US" sz="1100" dirty="0">
+                <a:solidFill>
+                  <a:srgbClr val="5A6A78"/>
+                </a:solidFill>
+                <a:latin typeface="맑은 고딕" pitchFamily="34" charset="0"/>
+                <a:ea typeface="맑은 고딕" pitchFamily="34" charset="-122"/>
+                <a:cs typeface="맑은 고딕" pitchFamily="34" charset="-120"/>
+              </a:rPr>
+              <a:t>3차 연장(2027. 6.)을 신청한 상태입니다.</a:t>
+            </a:r>
+            <a:endParaRPr lang="en-US" sz="1100" dirty="0"/>
+          </a:p>
+        </p:txBody>
+      </p:sp>
+      <p:sp>
+        <p:nvSpPr>
+          <p:cNvPr id="7" name="Shape 5"/>
           <p:cNvSpPr/>
           <p:nvPr/>
         </p:nvSpPr>
         <p:spPr>
           <a:xfrm>
-            <a:off x="548640" y="1572768"/>
-            <a:ext cx="3931920" cy="1115568"/>
+            <a:off x="4663440" y="1572768"/>
+            <a:ext cx="3931920" cy="2194560"/>
           </a:xfrm>
           <a:prstGeom prst="roundRect">
             <a:avLst>
-              <a:gd name="adj" fmla="val 4918"/>
+              <a:gd name="adj" fmla="val 2500"/>
             </a:avLst>
           </a:prstGeom>
           <a:solidFill>
-            <a:srgbClr val="F2F6F9"/>
+            <a:srgbClr val="10243A"/>
           </a:solidFill>
           <a:ln w="12700">
             <a:solidFill>
-              <a:srgbClr val="E3EAF0"/>
+              <a:srgbClr val="10243A"/>
             </a:solidFill>
             <a:prstDash val="solid"/>
           </a:ln>
@@ -2188,53 +2440,53 @@
       </p:sp>
       <p:sp>
         <p:nvSpPr>
-          <p:cNvPr id="5" name="Text 3"/>
-          <p:cNvSpPr txBox="1"/>
-          <p:nvPr/>
-        </p:nvSpPr>
-        <p:spPr>
-          <a:xfrm>
-            <a:off x="749808" y="1700784"/>
-            <a:ext cx="3566160" cy="329184"/>
-          </a:xfrm>
-          <a:prstGeom prst="rect">
-            <a:avLst/>
-          </a:prstGeom>
-          <a:noFill/>
-          <a:ln/>
-        </p:spPr>
-        <p:txBody>
-          <a:bodyPr wrap="square" lIns="0" tIns="0" rIns="0" bIns="0" rtlCol="0" anchor="ctr"/>
-          <a:lstStyle/>
-          <a:p>
-            <a:pPr indent="0" marL="0">
-              <a:buNone/>
-            </a:pPr>
-            <a:r>
-              <a:rPr lang="en-US" sz="1500" b="1" dirty="0">
-                <a:solidFill>
-                  <a:srgbClr val="065A82"/>
-                </a:solidFill>
-                <a:latin typeface="맑은 고딕" pitchFamily="34" charset="0"/>
-                <a:ea typeface="맑은 고딕" pitchFamily="34" charset="-122"/>
-                <a:cs typeface="맑은 고딕" pitchFamily="34" charset="-120"/>
-              </a:rPr>
-              <a:t>촬영 사실 표시</a:t>
-            </a:r>
-            <a:endParaRPr lang="en-US" sz="1500" dirty="0"/>
-          </a:p>
-        </p:txBody>
-      </p:sp>
-      <p:sp>
-        <p:nvSpPr>
-          <p:cNvPr id="6" name="Text 4"/>
-          <p:cNvSpPr txBox="1"/>
-          <p:nvPr/>
-        </p:nvSpPr>
-        <p:spPr>
-          <a:xfrm>
-            <a:off x="749808" y="2048256"/>
-            <a:ext cx="3566160" cy="548640"/>
+          <p:cNvPr id="8" name="Text 6"/>
+          <p:cNvSpPr txBox="1"/>
+          <p:nvPr/>
+        </p:nvSpPr>
+        <p:spPr>
+          <a:xfrm>
+            <a:off x="4937760" y="1783080"/>
+            <a:ext cx="3383280" cy="365760"/>
+          </a:xfrm>
+          <a:prstGeom prst="rect">
+            <a:avLst/>
+          </a:prstGeom>
+          <a:noFill/>
+          <a:ln/>
+        </p:spPr>
+        <p:txBody>
+          <a:bodyPr wrap="square" lIns="0" tIns="0" rIns="0" bIns="0" rtlCol="0" anchor="ctr"/>
+          <a:lstStyle/>
+          <a:p>
+            <a:pPr indent="0" marL="0">
+              <a:buNone/>
+            </a:pPr>
+            <a:r>
+              <a:rPr lang="en-US" sz="1300" dirty="0">
+                <a:solidFill>
+                  <a:srgbClr val="8FB4C9"/>
+                </a:solidFill>
+                <a:latin typeface="맑은 고딕" pitchFamily="34" charset="0"/>
+                <a:ea typeface="맑은 고딕" pitchFamily="34" charset="-122"/>
+                <a:cs typeface="맑은 고딕" pitchFamily="34" charset="-120"/>
+              </a:rPr>
+              <a:t>연장 신청서에 담아 주십시오</a:t>
+            </a:r>
+            <a:endParaRPr lang="en-US" sz="1300" dirty="0"/>
+          </a:p>
+        </p:txBody>
+      </p:sp>
+      <p:sp>
+        <p:nvSpPr>
+          <p:cNvPr id="9" name="Text 7"/>
+          <p:cNvSpPr txBox="1"/>
+          <p:nvPr/>
+        </p:nvSpPr>
+        <p:spPr>
+          <a:xfrm>
+            <a:off x="4937760" y="2194560"/>
+            <a:ext cx="3383280" cy="1005840"/>
           </a:xfrm>
           <a:prstGeom prst="rect">
             <a:avLst/>
@@ -2253,17 +2505,17 @@
               <a:buNone/>
             </a:pPr>
             <a:r>
-              <a:rPr lang="en-US" sz="1100" dirty="0">
-                <a:solidFill>
-                  <a:srgbClr val="5A6A78"/>
-                </a:solidFill>
-                <a:latin typeface="맑은 고딕" pitchFamily="34" charset="0"/>
-                <a:ea typeface="맑은 고딕" pitchFamily="34" charset="-122"/>
-                <a:cs typeface="맑은 고딕" pitchFamily="34" charset="-120"/>
-              </a:rPr>
-              <a:t>언제 어디서 촬영되는지</a:t>
-            </a:r>
-            <a:endParaRPr lang="en-US" sz="1100" dirty="0"/>
+              <a:rPr lang="en-US" sz="1800" b="1" dirty="0">
+                <a:solidFill>
+                  <a:srgbClr val="FFFFFF"/>
+                </a:solidFill>
+                <a:latin typeface="맑은 고딕" pitchFamily="34" charset="0"/>
+                <a:ea typeface="맑은 고딕" pitchFamily="34" charset="-122"/>
+                <a:cs typeface="맑은 고딕" pitchFamily="34" charset="-120"/>
+              </a:rPr>
+              <a:t>치안 · 구조 목적</a:t>
+            </a:r>
+            <a:endParaRPr lang="en-US" sz="1800" dirty="0"/>
           </a:p>
           <a:p>
             <a:pPr indent="0" marL="0">
@@ -2273,15 +2525,74 @@
               <a:buNone/>
             </a:pPr>
             <a:r>
+              <a:rPr lang="en-US" sz="1800" b="1" dirty="0">
+                <a:solidFill>
+                  <a:srgbClr val="FFFFFF"/>
+                </a:solidFill>
+                <a:latin typeface="맑은 고딕" pitchFamily="34" charset="0"/>
+                <a:ea typeface="맑은 고딕" pitchFamily="34" charset="-122"/>
+                <a:cs typeface="맑은 고딕" pitchFamily="34" charset="-120"/>
+              </a:rPr>
+              <a:t>비가시권(BVLOS) · 야간비행</a:t>
+            </a:r>
+            <a:endParaRPr lang="en-US" sz="1800" dirty="0"/>
+          </a:p>
+          <a:p>
+            <a:pPr indent="0" marL="0">
+              <a:lnSpc>
+                <a:spcPct val="120000"/>
+              </a:lnSpc>
+              <a:buNone/>
+            </a:pPr>
+            <a:r>
+              <a:rPr lang="en-US" sz="1800" b="1" dirty="0">
+                <a:solidFill>
+                  <a:srgbClr val="FFFFFF"/>
+                </a:solidFill>
+                <a:latin typeface="맑은 고딕" pitchFamily="34" charset="0"/>
+                <a:ea typeface="맑은 고딕" pitchFamily="34" charset="-122"/>
+                <a:cs typeface="맑은 고딕" pitchFamily="34" charset="-120"/>
+              </a:rPr>
+              <a:t>상시 승인 트랙</a:t>
+            </a:r>
+            <a:endParaRPr lang="en-US" sz="1800" dirty="0"/>
+          </a:p>
+        </p:txBody>
+      </p:sp>
+      <p:sp>
+        <p:nvSpPr>
+          <p:cNvPr id="10" name="Text 8"/>
+          <p:cNvSpPr txBox="1"/>
+          <p:nvPr/>
+        </p:nvSpPr>
+        <p:spPr>
+          <a:xfrm>
+            <a:off x="4937760" y="3291840"/>
+            <a:ext cx="3383280" cy="365760"/>
+          </a:xfrm>
+          <a:prstGeom prst="rect">
+            <a:avLst/>
+          </a:prstGeom>
+          <a:noFill/>
+          <a:ln/>
+        </p:spPr>
+        <p:txBody>
+          <a:bodyPr wrap="square" lIns="0" tIns="0" rIns="0" bIns="0" rtlCol="0" anchor="ctr"/>
+          <a:lstStyle/>
+          <a:p>
+            <a:pPr indent="0" marL="0">
+              <a:buNone/>
+            </a:pPr>
+            <a:r>
               <a:rPr lang="en-US" sz="1100" dirty="0">
                 <a:solidFill>
-                  <a:srgbClr val="5A6A78"/>
-                </a:solidFill>
-                <a:latin typeface="맑은 고딕" pitchFamily="34" charset="0"/>
-                <a:ea typeface="맑은 고딕" pitchFamily="34" charset="-122"/>
-                <a:cs typeface="맑은 고딕" pitchFamily="34" charset="-120"/>
-              </a:rPr>
-              <a:t>도민이 알 수 있게 한다</a:t>
+                  <a:srgbClr val="CADCFC"/>
+                </a:solidFill>
+                <a:latin typeface="맑은 고딕" pitchFamily="34" charset="0"/>
+                <a:ea typeface="맑은 고딕" pitchFamily="34" charset="-122"/>
+                <a:cs typeface="맑은 고딕" pitchFamily="34" charset="-120"/>
+              </a:rPr>
+              <a:t>DFR 체계의 기술적 전제가 바로 이 두 가지입니다.</a:t>
             </a:r>
             <a:endParaRPr lang="en-US" sz="1100" dirty="0"/>
           </a:p>
@@ -2289,211 +2600,30 @@
       </p:sp>
       <p:sp>
         <p:nvSpPr>
-          <p:cNvPr id="7" name="Shape 5"/>
+          <p:cNvPr id="11" name="Shape 9"/>
           <p:cNvSpPr/>
           <p:nvPr/>
         </p:nvSpPr>
         <p:spPr>
           <a:xfrm>
-            <a:off x="4663440" y="1572768"/>
-            <a:ext cx="3931920" cy="1115568"/>
+            <a:off x="548640" y="4023360"/>
+            <a:ext cx="8046720" cy="566928"/>
           </a:xfrm>
           <a:prstGeom prst="roundRect">
             <a:avLst>
-              <a:gd name="adj" fmla="val 4918"/>
+              <a:gd name="adj" fmla="val 12903"/>
             </a:avLst>
           </a:prstGeom>
           <a:solidFill>
-            <a:srgbClr val="F2F6F9"/>
+            <a:srgbClr val="E0523C"/>
           </a:solidFill>
           <a:ln w="12700">
             <a:solidFill>
-              <a:srgbClr val="E3EAF0"/>
+              <a:srgbClr val="E0523C"/>
             </a:solidFill>
             <a:prstDash val="solid"/>
           </a:ln>
-          <a:effectLst>
-            <a:outerShdw sx="100000" sy="100000" kx="0" ky="0" algn="bl" rotWithShape="0" blurRad="101600" dist="25400" dir="5400000">
-              <a:srgbClr val="0B1B2B">
-                <a:alpha val="12000"/>
-              </a:srgbClr>
-            </a:outerShdw>
-          </a:effectLst>
-        </p:spPr>
-      </p:sp>
-      <p:sp>
-        <p:nvSpPr>
-          <p:cNvPr id="8" name="Text 6"/>
-          <p:cNvSpPr txBox="1"/>
-          <p:nvPr/>
-        </p:nvSpPr>
-        <p:spPr>
-          <a:xfrm>
-            <a:off x="4864608" y="1700784"/>
-            <a:ext cx="3566160" cy="329184"/>
-          </a:xfrm>
-          <a:prstGeom prst="rect">
-            <a:avLst/>
-          </a:prstGeom>
-          <a:noFill/>
-          <a:ln/>
-        </p:spPr>
-        <p:txBody>
-          <a:bodyPr wrap="square" lIns="0" tIns="0" rIns="0" bIns="0" rtlCol="0" anchor="ctr"/>
-          <a:lstStyle/>
-          <a:p>
-            <a:pPr indent="0" marL="0">
-              <a:buNone/>
-            </a:pPr>
-            <a:r>
-              <a:rPr lang="en-US" sz="1500" b="1" dirty="0">
-                <a:solidFill>
-                  <a:srgbClr val="065A82"/>
-                </a:solidFill>
-                <a:latin typeface="맑은 고딕" pitchFamily="34" charset="0"/>
-                <a:ea typeface="맑은 고딕" pitchFamily="34" charset="-122"/>
-                <a:cs typeface="맑은 고딕" pitchFamily="34" charset="-120"/>
-              </a:rPr>
-              <a:t>목적 외 이용 금지</a:t>
-            </a:r>
-            <a:endParaRPr lang="en-US" sz="1500" dirty="0"/>
-          </a:p>
-        </p:txBody>
-      </p:sp>
-      <p:sp>
-        <p:nvSpPr>
-          <p:cNvPr id="9" name="Text 7"/>
-          <p:cNvSpPr txBox="1"/>
-          <p:nvPr/>
-        </p:nvSpPr>
-        <p:spPr>
-          <a:xfrm>
-            <a:off x="4864608" y="2048256"/>
-            <a:ext cx="3566160" cy="548640"/>
-          </a:xfrm>
-          <a:prstGeom prst="rect">
-            <a:avLst/>
-          </a:prstGeom>
-          <a:noFill/>
-          <a:ln/>
-        </p:spPr>
-        <p:txBody>
-          <a:bodyPr wrap="square" lIns="0" tIns="0" rIns="0" bIns="0" rtlCol="0" anchor="ctr"/>
-          <a:lstStyle/>
-          <a:p>
-            <a:pPr indent="0" marL="0">
-              <a:lnSpc>
-                <a:spcPct val="120000"/>
-              </a:lnSpc>
-              <a:buNone/>
-            </a:pPr>
-            <a:r>
-              <a:rPr lang="en-US" sz="1100" dirty="0">
-                <a:solidFill>
-                  <a:srgbClr val="5A6A78"/>
-                </a:solidFill>
-                <a:latin typeface="맑은 고딕" pitchFamily="34" charset="0"/>
-                <a:ea typeface="맑은 고딕" pitchFamily="34" charset="-122"/>
-                <a:cs typeface="맑은 고딕" pitchFamily="34" charset="-120"/>
-              </a:rPr>
-              <a:t>신고 기반 출동 원칙,</a:t>
-            </a:r>
-            <a:endParaRPr lang="en-US" sz="1100" dirty="0"/>
-          </a:p>
-          <a:p>
-            <a:pPr indent="0" marL="0">
-              <a:lnSpc>
-                <a:spcPct val="120000"/>
-              </a:lnSpc>
-              <a:buNone/>
-            </a:pPr>
-            <a:r>
-              <a:rPr lang="en-US" sz="1100" dirty="0">
-                <a:solidFill>
-                  <a:srgbClr val="5A6A78"/>
-                </a:solidFill>
-                <a:latin typeface="맑은 고딕" pitchFamily="34" charset="0"/>
-                <a:ea typeface="맑은 고딕" pitchFamily="34" charset="-122"/>
-                <a:cs typeface="맑은 고딕" pitchFamily="34" charset="-120"/>
-              </a:rPr>
-              <a:t>상시 배회 감시가 아니다</a:t>
-            </a:r>
-            <a:endParaRPr lang="en-US" sz="1100" dirty="0"/>
-          </a:p>
-        </p:txBody>
-      </p:sp>
-      <p:sp>
-        <p:nvSpPr>
-          <p:cNvPr id="10" name="Shape 8"/>
-          <p:cNvSpPr/>
-          <p:nvPr/>
-        </p:nvSpPr>
-        <p:spPr>
-          <a:xfrm>
-            <a:off x="548640" y="2834640"/>
-            <a:ext cx="3931920" cy="1115568"/>
-          </a:xfrm>
-          <a:prstGeom prst="roundRect">
-            <a:avLst>
-              <a:gd name="adj" fmla="val 4918"/>
-            </a:avLst>
-          </a:prstGeom>
-          <a:solidFill>
-            <a:srgbClr val="F2F6F9"/>
-          </a:solidFill>
-          <a:ln w="12700">
-            <a:solidFill>
-              <a:srgbClr val="E3EAF0"/>
-            </a:solidFill>
-            <a:prstDash val="solid"/>
-          </a:ln>
-          <a:effectLst>
-            <a:outerShdw sx="100000" sy="100000" kx="0" ky="0" algn="bl" rotWithShape="0" blurRad="101600" dist="25400" dir="5400000">
-              <a:srgbClr val="0B1B2B">
-                <a:alpha val="12000"/>
-              </a:srgbClr>
-            </a:outerShdw>
-          </a:effectLst>
-        </p:spPr>
-      </p:sp>
-      <p:sp>
-        <p:nvSpPr>
-          <p:cNvPr id="11" name="Text 9"/>
-          <p:cNvSpPr txBox="1"/>
-          <p:nvPr/>
-        </p:nvSpPr>
-        <p:spPr>
-          <a:xfrm>
-            <a:off x="749808" y="2962656"/>
-            <a:ext cx="3566160" cy="329184"/>
-          </a:xfrm>
-          <a:prstGeom prst="rect">
-            <a:avLst/>
-          </a:prstGeom>
-          <a:noFill/>
-          <a:ln/>
-        </p:spPr>
-        <p:txBody>
-          <a:bodyPr wrap="square" lIns="0" tIns="0" rIns="0" bIns="0" rtlCol="0" anchor="ctr"/>
-          <a:lstStyle/>
-          <a:p>
-            <a:pPr indent="0" marL="0">
-              <a:buNone/>
-            </a:pPr>
-            <a:r>
-              <a:rPr lang="en-US" sz="1500" b="1" dirty="0">
-                <a:solidFill>
-                  <a:srgbClr val="065A82"/>
-                </a:solidFill>
-                <a:latin typeface="맑은 고딕" pitchFamily="34" charset="0"/>
-                <a:ea typeface="맑은 고딕" pitchFamily="34" charset="-122"/>
-                <a:cs typeface="맑은 고딕" pitchFamily="34" charset="-120"/>
-              </a:rPr>
-              <a:t>보관기간 · 접근 로그</a:t>
-            </a:r>
-            <a:endParaRPr lang="en-US" sz="1500" dirty="0"/>
-          </a:p>
-        </p:txBody>
+        </p:spPr>
       </p:sp>
       <p:sp>
         <p:nvSpPr>
@@ -2503,229 +2633,32 @@
         </p:nvSpPr>
         <p:spPr>
           <a:xfrm>
-            <a:off x="749808" y="3310128"/>
-            <a:ext cx="3566160" cy="548640"/>
-          </a:xfrm>
-          <a:prstGeom prst="rect">
-            <a:avLst/>
-          </a:prstGeom>
-          <a:noFill/>
-          <a:ln/>
-        </p:spPr>
-        <p:txBody>
-          <a:bodyPr wrap="square" lIns="0" tIns="0" rIns="0" bIns="0" rtlCol="0" anchor="ctr"/>
-          <a:lstStyle/>
-          <a:p>
-            <a:pPr indent="0" marL="0">
-              <a:lnSpc>
-                <a:spcPct val="120000"/>
-              </a:lnSpc>
-              <a:buNone/>
-            </a:pPr>
-            <a:r>
-              <a:rPr lang="en-US" sz="1100" dirty="0">
-                <a:solidFill>
-                  <a:srgbClr val="5A6A78"/>
-                </a:solidFill>
-                <a:latin typeface="맑은 고딕" pitchFamily="34" charset="0"/>
-                <a:ea typeface="맑은 고딕" pitchFamily="34" charset="-122"/>
-                <a:cs typeface="맑은 고딕" pitchFamily="34" charset="-120"/>
-              </a:rPr>
-              <a:t>누가 언제 어떤 영상을</a:t>
-            </a:r>
-            <a:endParaRPr lang="en-US" sz="1100" dirty="0"/>
-          </a:p>
-          <a:p>
-            <a:pPr indent="0" marL="0">
-              <a:lnSpc>
-                <a:spcPct val="120000"/>
-              </a:lnSpc>
-              <a:buNone/>
-            </a:pPr>
-            <a:r>
-              <a:rPr lang="en-US" sz="1100" dirty="0">
-                <a:solidFill>
-                  <a:srgbClr val="5A6A78"/>
-                </a:solidFill>
-                <a:latin typeface="맑은 고딕" pitchFamily="34" charset="0"/>
-                <a:ea typeface="맑은 고딕" pitchFamily="34" charset="-122"/>
-                <a:cs typeface="맑은 고딕" pitchFamily="34" charset="-120"/>
-              </a:rPr>
-              <a:t>열람했는지 자동 기록</a:t>
-            </a:r>
-            <a:endParaRPr lang="en-US" sz="1100" dirty="0"/>
-          </a:p>
-        </p:txBody>
-      </p:sp>
-      <p:sp>
-        <p:nvSpPr>
-          <p:cNvPr id="13" name="Shape 11"/>
-          <p:cNvSpPr/>
-          <p:nvPr/>
-        </p:nvSpPr>
-        <p:spPr>
-          <a:xfrm>
-            <a:off x="4663440" y="2834640"/>
-            <a:ext cx="3931920" cy="1115568"/>
-          </a:xfrm>
-          <a:prstGeom prst="roundRect">
-            <a:avLst>
-              <a:gd name="adj" fmla="val 4918"/>
-            </a:avLst>
-          </a:prstGeom>
-          <a:solidFill>
-            <a:srgbClr val="F2F6F9"/>
-          </a:solidFill>
-          <a:ln w="12700">
-            <a:solidFill>
-              <a:srgbClr val="E3EAF0"/>
-            </a:solidFill>
-            <a:prstDash val="solid"/>
-          </a:ln>
-          <a:effectLst>
-            <a:outerShdw sx="100000" sy="100000" kx="0" ky="0" algn="bl" rotWithShape="0" blurRad="101600" dist="25400" dir="5400000">
-              <a:srgbClr val="0B1B2B">
-                <a:alpha val="12000"/>
-              </a:srgbClr>
-            </a:outerShdw>
-          </a:effectLst>
-        </p:spPr>
-      </p:sp>
-      <p:sp>
-        <p:nvSpPr>
-          <p:cNvPr id="14" name="Text 12"/>
-          <p:cNvSpPr txBox="1"/>
-          <p:nvPr/>
-        </p:nvSpPr>
-        <p:spPr>
-          <a:xfrm>
-            <a:off x="4864608" y="2962656"/>
-            <a:ext cx="3566160" cy="329184"/>
-          </a:xfrm>
-          <a:prstGeom prst="rect">
-            <a:avLst/>
-          </a:prstGeom>
-          <a:noFill/>
-          <a:ln/>
-        </p:spPr>
-        <p:txBody>
-          <a:bodyPr wrap="square" lIns="0" tIns="0" rIns="0" bIns="0" rtlCol="0" anchor="ctr"/>
-          <a:lstStyle/>
-          <a:p>
-            <a:pPr indent="0" marL="0">
-              <a:buNone/>
-            </a:pPr>
-            <a:r>
-              <a:rPr lang="en-US" sz="1500" b="1" dirty="0">
-                <a:solidFill>
-                  <a:srgbClr val="065A82"/>
-                </a:solidFill>
-                <a:latin typeface="맑은 고딕" pitchFamily="34" charset="0"/>
-                <a:ea typeface="맑은 고딕" pitchFamily="34" charset="-122"/>
-                <a:cs typeface="맑은 고딕" pitchFamily="34" charset="-120"/>
-              </a:rPr>
-              <a:t>도민 감시기구</a:t>
-            </a:r>
-            <a:endParaRPr lang="en-US" sz="1500" dirty="0"/>
-          </a:p>
-        </p:txBody>
-      </p:sp>
-      <p:sp>
-        <p:nvSpPr>
-          <p:cNvPr id="15" name="Text 13"/>
-          <p:cNvSpPr txBox="1"/>
-          <p:nvPr/>
-        </p:nvSpPr>
-        <p:spPr>
-          <a:xfrm>
-            <a:off x="4864608" y="3310128"/>
-            <a:ext cx="3566160" cy="548640"/>
-          </a:xfrm>
-          <a:prstGeom prst="rect">
-            <a:avLst/>
-          </a:prstGeom>
-          <a:noFill/>
-          <a:ln/>
-        </p:spPr>
-        <p:txBody>
-          <a:bodyPr wrap="square" lIns="0" tIns="0" rIns="0" bIns="0" rtlCol="0" anchor="ctr"/>
-          <a:lstStyle/>
-          <a:p>
-            <a:pPr indent="0" marL="0">
-              <a:lnSpc>
-                <a:spcPct val="120000"/>
-              </a:lnSpc>
-              <a:buNone/>
-            </a:pPr>
-            <a:r>
-              <a:rPr lang="en-US" sz="1100" dirty="0">
-                <a:solidFill>
-                  <a:srgbClr val="5A6A78"/>
-                </a:solidFill>
-                <a:latin typeface="맑은 고딕" pitchFamily="34" charset="0"/>
-                <a:ea typeface="맑은 고딕" pitchFamily="34" charset="-122"/>
-                <a:cs typeface="맑은 고딕" pitchFamily="34" charset="-120"/>
-              </a:rPr>
-              <a:t>운영 실태를 도민이</a:t>
-            </a:r>
-            <a:endParaRPr lang="en-US" sz="1100" dirty="0"/>
-          </a:p>
-          <a:p>
-            <a:pPr indent="0" marL="0">
-              <a:lnSpc>
-                <a:spcPct val="120000"/>
-              </a:lnSpc>
-              <a:buNone/>
-            </a:pPr>
-            <a:r>
-              <a:rPr lang="en-US" sz="1100" dirty="0">
-                <a:solidFill>
-                  <a:srgbClr val="5A6A78"/>
-                </a:solidFill>
-                <a:latin typeface="맑은 고딕" pitchFamily="34" charset="0"/>
-                <a:ea typeface="맑은 고딕" pitchFamily="34" charset="-122"/>
-                <a:cs typeface="맑은 고딕" pitchFamily="34" charset="-120"/>
-              </a:rPr>
-              <a:t>직접 점검한다</a:t>
-            </a:r>
-            <a:endParaRPr lang="en-US" sz="1100" dirty="0"/>
-          </a:p>
-        </p:txBody>
-      </p:sp>
-      <p:sp>
-        <p:nvSpPr>
-          <p:cNvPr id="16" name="Text 14"/>
-          <p:cNvSpPr txBox="1"/>
-          <p:nvPr/>
-        </p:nvSpPr>
-        <p:spPr>
-          <a:xfrm>
-            <a:off x="548640" y="4224528"/>
-            <a:ext cx="8046720" cy="365760"/>
-          </a:xfrm>
-          <a:prstGeom prst="rect">
-            <a:avLst/>
-          </a:prstGeom>
-          <a:noFill/>
-          <a:ln/>
-        </p:spPr>
-        <p:txBody>
-          <a:bodyPr wrap="square" lIns="0" tIns="0" rIns="0" bIns="0" rtlCol="0" anchor="ctr"/>
-          <a:lstStyle/>
-          <a:p>
-            <a:pPr indent="0" marL="0">
+            <a:off x="548640" y="4023360"/>
+            <a:ext cx="8046720" cy="566928"/>
+          </a:xfrm>
+          <a:prstGeom prst="rect">
+            <a:avLst/>
+          </a:prstGeom>
+          <a:noFill/>
+          <a:ln/>
+        </p:spPr>
+        <p:txBody>
+          <a:bodyPr wrap="square" lIns="0" tIns="0" rIns="0" bIns="0" rtlCol="0" anchor="ctr"/>
+          <a:lstStyle/>
+          <a:p>
+            <a:pPr algn="ctr" indent="0" marL="0">
               <a:buNone/>
             </a:pPr>
             <a:r>
               <a:rPr lang="en-US" sz="1400" b="1" dirty="0">
                 <a:solidFill>
-                  <a:srgbClr val="10243A"/>
-                </a:solidFill>
-                <a:latin typeface="맑은 고딕" pitchFamily="34" charset="0"/>
-                <a:ea typeface="맑은 고딕" pitchFamily="34" charset="-122"/>
-                <a:cs typeface="맑은 고딕" pitchFamily="34" charset="-120"/>
-              </a:rPr>
-              <a:t>＋  민간 드론 인력 등록제 · 출동 계약제 — 자원봉사가 아니라 산업으로</a:t>
+                  <a:srgbClr val="FFFFFF"/>
+                </a:solidFill>
+                <a:latin typeface="맑은 고딕" pitchFamily="34" charset="0"/>
+                <a:ea typeface="맑은 고딕" pitchFamily="34" charset="-122"/>
+                <a:cs typeface="맑은 고딕" pitchFamily="34" charset="-120"/>
+              </a:rPr>
+              <a:t>국회 입법을 기다릴 필요가 없습니다 — 제주도 권한 안에서, 신청서 한 줄로 열리는 문입니다</a:t>
             </a:r>
             <a:endParaRPr lang="en-US" sz="1400" dirty="0"/>
           </a:p>
@@ -2781,7 +2714,7 @@
               <a:buNone/>
             </a:pPr>
             <a:r>
-              <a:rPr lang="en-US" sz="3200" b="1" dirty="0">
+              <a:rPr lang="en-US" sz="2800" b="1" dirty="0">
                 <a:solidFill>
                   <a:srgbClr val="10243A"/>
                 </a:solidFill>
@@ -2789,9 +2722,691 @@
                 <a:ea typeface="맑은 고딕" pitchFamily="34" charset="-122"/>
                 <a:cs typeface="맑은 고딕" pitchFamily="34" charset="-120"/>
               </a:rPr>
+              <a:t>제언 ③   거버넌스 — 조례가 곧 면허증</a:t>
+            </a:r>
+            <a:endParaRPr lang="en-US" sz="2800" dirty="0"/>
+          </a:p>
+        </p:txBody>
+      </p:sp>
+      <p:sp>
+        <p:nvSpPr>
+          <p:cNvPr id="3" name="Text 1"/>
+          <p:cNvSpPr txBox="1"/>
+          <p:nvPr/>
+        </p:nvSpPr>
+        <p:spPr>
+          <a:xfrm>
+            <a:off x="548640" y="941832"/>
+            <a:ext cx="8046720" cy="329184"/>
+          </a:xfrm>
+          <a:prstGeom prst="rect">
+            <a:avLst/>
+          </a:prstGeom>
+          <a:noFill/>
+          <a:ln/>
+        </p:spPr>
+        <p:txBody>
+          <a:bodyPr wrap="square" lIns="0" tIns="0" rIns="0" bIns="0" rtlCol="0" anchor="ctr"/>
+          <a:lstStyle/>
+          <a:p>
+            <a:pPr indent="0" marL="0">
+              <a:buNone/>
+            </a:pPr>
+            <a:r>
+              <a:rPr lang="en-US" sz="1300" dirty="0">
+                <a:solidFill>
+                  <a:srgbClr val="5A6A78"/>
+                </a:solidFill>
+                <a:latin typeface="맑은 고딕" pitchFamily="34" charset="0"/>
+                <a:ea typeface="맑은 고딕" pitchFamily="34" charset="-122"/>
+                <a:cs typeface="맑은 고딕" pitchFamily="34" charset="-120"/>
+              </a:rPr>
+              <a:t>기체를 띄우기 전에 원칙을 먼저 세웁니다</a:t>
+            </a:r>
+            <a:endParaRPr lang="en-US" sz="1300" dirty="0"/>
+          </a:p>
+        </p:txBody>
+      </p:sp>
+      <p:sp>
+        <p:nvSpPr>
+          <p:cNvPr id="4" name="Shape 2"/>
+          <p:cNvSpPr/>
+          <p:nvPr/>
+        </p:nvSpPr>
+        <p:spPr>
+          <a:xfrm>
+            <a:off x="548640" y="1572768"/>
+            <a:ext cx="3931920" cy="1115568"/>
+          </a:xfrm>
+          <a:prstGeom prst="roundRect">
+            <a:avLst>
+              <a:gd name="adj" fmla="val 4918"/>
+            </a:avLst>
+          </a:prstGeom>
+          <a:solidFill>
+            <a:srgbClr val="F2F6F9"/>
+          </a:solidFill>
+          <a:ln w="12700">
+            <a:solidFill>
+              <a:srgbClr val="E3EAF0"/>
+            </a:solidFill>
+            <a:prstDash val="solid"/>
+          </a:ln>
+          <a:effectLst>
+            <a:outerShdw sx="100000" sy="100000" kx="0" ky="0" algn="bl" rotWithShape="0" blurRad="101600" dist="25400" dir="5400000">
+              <a:srgbClr val="0B1B2B">
+                <a:alpha val="12000"/>
+              </a:srgbClr>
+            </a:outerShdw>
+          </a:effectLst>
+        </p:spPr>
+      </p:sp>
+      <p:sp>
+        <p:nvSpPr>
+          <p:cNvPr id="5" name="Text 3"/>
+          <p:cNvSpPr txBox="1"/>
+          <p:nvPr/>
+        </p:nvSpPr>
+        <p:spPr>
+          <a:xfrm>
+            <a:off x="749808" y="1700784"/>
+            <a:ext cx="3566160" cy="329184"/>
+          </a:xfrm>
+          <a:prstGeom prst="rect">
+            <a:avLst/>
+          </a:prstGeom>
+          <a:noFill/>
+          <a:ln/>
+        </p:spPr>
+        <p:txBody>
+          <a:bodyPr wrap="square" lIns="0" tIns="0" rIns="0" bIns="0" rtlCol="0" anchor="ctr"/>
+          <a:lstStyle/>
+          <a:p>
+            <a:pPr indent="0" marL="0">
+              <a:buNone/>
+            </a:pPr>
+            <a:r>
+              <a:rPr lang="en-US" sz="1500" b="1" dirty="0">
+                <a:solidFill>
+                  <a:srgbClr val="065A82"/>
+                </a:solidFill>
+                <a:latin typeface="맑은 고딕" pitchFamily="34" charset="0"/>
+                <a:ea typeface="맑은 고딕" pitchFamily="34" charset="-122"/>
+                <a:cs typeface="맑은 고딕" pitchFamily="34" charset="-120"/>
+              </a:rPr>
+              <a:t>촬영 사실 표시</a:t>
+            </a:r>
+            <a:endParaRPr lang="en-US" sz="1500" dirty="0"/>
+          </a:p>
+        </p:txBody>
+      </p:sp>
+      <p:sp>
+        <p:nvSpPr>
+          <p:cNvPr id="6" name="Text 4"/>
+          <p:cNvSpPr txBox="1"/>
+          <p:nvPr/>
+        </p:nvSpPr>
+        <p:spPr>
+          <a:xfrm>
+            <a:off x="749808" y="2048256"/>
+            <a:ext cx="3566160" cy="548640"/>
+          </a:xfrm>
+          <a:prstGeom prst="rect">
+            <a:avLst/>
+          </a:prstGeom>
+          <a:noFill/>
+          <a:ln/>
+        </p:spPr>
+        <p:txBody>
+          <a:bodyPr wrap="square" lIns="0" tIns="0" rIns="0" bIns="0" rtlCol="0" anchor="ctr"/>
+          <a:lstStyle/>
+          <a:p>
+            <a:pPr indent="0" marL="0">
+              <a:lnSpc>
+                <a:spcPct val="120000"/>
+              </a:lnSpc>
+              <a:buNone/>
+            </a:pPr>
+            <a:r>
+              <a:rPr lang="en-US" sz="1100" dirty="0">
+                <a:solidFill>
+                  <a:srgbClr val="5A6A78"/>
+                </a:solidFill>
+                <a:latin typeface="맑은 고딕" pitchFamily="34" charset="0"/>
+                <a:ea typeface="맑은 고딕" pitchFamily="34" charset="-122"/>
+                <a:cs typeface="맑은 고딕" pitchFamily="34" charset="-120"/>
+              </a:rPr>
+              <a:t>언제 어디서 촬영되는지</a:t>
+            </a:r>
+            <a:endParaRPr lang="en-US" sz="1100" dirty="0"/>
+          </a:p>
+          <a:p>
+            <a:pPr indent="0" marL="0">
+              <a:lnSpc>
+                <a:spcPct val="120000"/>
+              </a:lnSpc>
+              <a:buNone/>
+            </a:pPr>
+            <a:r>
+              <a:rPr lang="en-US" sz="1100" dirty="0">
+                <a:solidFill>
+                  <a:srgbClr val="5A6A78"/>
+                </a:solidFill>
+                <a:latin typeface="맑은 고딕" pitchFamily="34" charset="0"/>
+                <a:ea typeface="맑은 고딕" pitchFamily="34" charset="-122"/>
+                <a:cs typeface="맑은 고딕" pitchFamily="34" charset="-120"/>
+              </a:rPr>
+              <a:t>도민이 알 수 있게 한다</a:t>
+            </a:r>
+            <a:endParaRPr lang="en-US" sz="1100" dirty="0"/>
+          </a:p>
+        </p:txBody>
+      </p:sp>
+      <p:sp>
+        <p:nvSpPr>
+          <p:cNvPr id="7" name="Shape 5"/>
+          <p:cNvSpPr/>
+          <p:nvPr/>
+        </p:nvSpPr>
+        <p:spPr>
+          <a:xfrm>
+            <a:off x="4663440" y="1572768"/>
+            <a:ext cx="3931920" cy="1115568"/>
+          </a:xfrm>
+          <a:prstGeom prst="roundRect">
+            <a:avLst>
+              <a:gd name="adj" fmla="val 4918"/>
+            </a:avLst>
+          </a:prstGeom>
+          <a:solidFill>
+            <a:srgbClr val="F2F6F9"/>
+          </a:solidFill>
+          <a:ln w="12700">
+            <a:solidFill>
+              <a:srgbClr val="E3EAF0"/>
+            </a:solidFill>
+            <a:prstDash val="solid"/>
+          </a:ln>
+          <a:effectLst>
+            <a:outerShdw sx="100000" sy="100000" kx="0" ky="0" algn="bl" rotWithShape="0" blurRad="101600" dist="25400" dir="5400000">
+              <a:srgbClr val="0B1B2B">
+                <a:alpha val="12000"/>
+              </a:srgbClr>
+            </a:outerShdw>
+          </a:effectLst>
+        </p:spPr>
+      </p:sp>
+      <p:sp>
+        <p:nvSpPr>
+          <p:cNvPr id="8" name="Text 6"/>
+          <p:cNvSpPr txBox="1"/>
+          <p:nvPr/>
+        </p:nvSpPr>
+        <p:spPr>
+          <a:xfrm>
+            <a:off x="4864608" y="1700784"/>
+            <a:ext cx="3566160" cy="329184"/>
+          </a:xfrm>
+          <a:prstGeom prst="rect">
+            <a:avLst/>
+          </a:prstGeom>
+          <a:noFill/>
+          <a:ln/>
+        </p:spPr>
+        <p:txBody>
+          <a:bodyPr wrap="square" lIns="0" tIns="0" rIns="0" bIns="0" rtlCol="0" anchor="ctr"/>
+          <a:lstStyle/>
+          <a:p>
+            <a:pPr indent="0" marL="0">
+              <a:buNone/>
+            </a:pPr>
+            <a:r>
+              <a:rPr lang="en-US" sz="1500" b="1" dirty="0">
+                <a:solidFill>
+                  <a:srgbClr val="065A82"/>
+                </a:solidFill>
+                <a:latin typeface="맑은 고딕" pitchFamily="34" charset="0"/>
+                <a:ea typeface="맑은 고딕" pitchFamily="34" charset="-122"/>
+                <a:cs typeface="맑은 고딕" pitchFamily="34" charset="-120"/>
+              </a:rPr>
+              <a:t>목적 외 이용 금지</a:t>
+            </a:r>
+            <a:endParaRPr lang="en-US" sz="1500" dirty="0"/>
+          </a:p>
+        </p:txBody>
+      </p:sp>
+      <p:sp>
+        <p:nvSpPr>
+          <p:cNvPr id="9" name="Text 7"/>
+          <p:cNvSpPr txBox="1"/>
+          <p:nvPr/>
+        </p:nvSpPr>
+        <p:spPr>
+          <a:xfrm>
+            <a:off x="4864608" y="2048256"/>
+            <a:ext cx="3566160" cy="548640"/>
+          </a:xfrm>
+          <a:prstGeom prst="rect">
+            <a:avLst/>
+          </a:prstGeom>
+          <a:noFill/>
+          <a:ln/>
+        </p:spPr>
+        <p:txBody>
+          <a:bodyPr wrap="square" lIns="0" tIns="0" rIns="0" bIns="0" rtlCol="0" anchor="ctr"/>
+          <a:lstStyle/>
+          <a:p>
+            <a:pPr indent="0" marL="0">
+              <a:lnSpc>
+                <a:spcPct val="120000"/>
+              </a:lnSpc>
+              <a:buNone/>
+            </a:pPr>
+            <a:r>
+              <a:rPr lang="en-US" sz="1100" dirty="0">
+                <a:solidFill>
+                  <a:srgbClr val="5A6A78"/>
+                </a:solidFill>
+                <a:latin typeface="맑은 고딕" pitchFamily="34" charset="0"/>
+                <a:ea typeface="맑은 고딕" pitchFamily="34" charset="-122"/>
+                <a:cs typeface="맑은 고딕" pitchFamily="34" charset="-120"/>
+              </a:rPr>
+              <a:t>신고 기반 출동 원칙,</a:t>
+            </a:r>
+            <a:endParaRPr lang="en-US" sz="1100" dirty="0"/>
+          </a:p>
+          <a:p>
+            <a:pPr indent="0" marL="0">
+              <a:lnSpc>
+                <a:spcPct val="120000"/>
+              </a:lnSpc>
+              <a:buNone/>
+            </a:pPr>
+            <a:r>
+              <a:rPr lang="en-US" sz="1100" dirty="0">
+                <a:solidFill>
+                  <a:srgbClr val="5A6A78"/>
+                </a:solidFill>
+                <a:latin typeface="맑은 고딕" pitchFamily="34" charset="0"/>
+                <a:ea typeface="맑은 고딕" pitchFamily="34" charset="-122"/>
+                <a:cs typeface="맑은 고딕" pitchFamily="34" charset="-120"/>
+              </a:rPr>
+              <a:t>상시 배회 감시가 아니다</a:t>
+            </a:r>
+            <a:endParaRPr lang="en-US" sz="1100" dirty="0"/>
+          </a:p>
+        </p:txBody>
+      </p:sp>
+      <p:sp>
+        <p:nvSpPr>
+          <p:cNvPr id="10" name="Shape 8"/>
+          <p:cNvSpPr/>
+          <p:nvPr/>
+        </p:nvSpPr>
+        <p:spPr>
+          <a:xfrm>
+            <a:off x="548640" y="2834640"/>
+            <a:ext cx="3931920" cy="1115568"/>
+          </a:xfrm>
+          <a:prstGeom prst="roundRect">
+            <a:avLst>
+              <a:gd name="adj" fmla="val 4918"/>
+            </a:avLst>
+          </a:prstGeom>
+          <a:solidFill>
+            <a:srgbClr val="F2F6F9"/>
+          </a:solidFill>
+          <a:ln w="12700">
+            <a:solidFill>
+              <a:srgbClr val="E3EAF0"/>
+            </a:solidFill>
+            <a:prstDash val="solid"/>
+          </a:ln>
+          <a:effectLst>
+            <a:outerShdw sx="100000" sy="100000" kx="0" ky="0" algn="bl" rotWithShape="0" blurRad="101600" dist="25400" dir="5400000">
+              <a:srgbClr val="0B1B2B">
+                <a:alpha val="12000"/>
+              </a:srgbClr>
+            </a:outerShdw>
+          </a:effectLst>
+        </p:spPr>
+      </p:sp>
+      <p:sp>
+        <p:nvSpPr>
+          <p:cNvPr id="11" name="Text 9"/>
+          <p:cNvSpPr txBox="1"/>
+          <p:nvPr/>
+        </p:nvSpPr>
+        <p:spPr>
+          <a:xfrm>
+            <a:off x="749808" y="2962656"/>
+            <a:ext cx="3566160" cy="329184"/>
+          </a:xfrm>
+          <a:prstGeom prst="rect">
+            <a:avLst/>
+          </a:prstGeom>
+          <a:noFill/>
+          <a:ln/>
+        </p:spPr>
+        <p:txBody>
+          <a:bodyPr wrap="square" lIns="0" tIns="0" rIns="0" bIns="0" rtlCol="0" anchor="ctr"/>
+          <a:lstStyle/>
+          <a:p>
+            <a:pPr indent="0" marL="0">
+              <a:buNone/>
+            </a:pPr>
+            <a:r>
+              <a:rPr lang="en-US" sz="1500" b="1" dirty="0">
+                <a:solidFill>
+                  <a:srgbClr val="065A82"/>
+                </a:solidFill>
+                <a:latin typeface="맑은 고딕" pitchFamily="34" charset="0"/>
+                <a:ea typeface="맑은 고딕" pitchFamily="34" charset="-122"/>
+                <a:cs typeface="맑은 고딕" pitchFamily="34" charset="-120"/>
+              </a:rPr>
+              <a:t>보관기간 · 접근 로그</a:t>
+            </a:r>
+            <a:endParaRPr lang="en-US" sz="1500" dirty="0"/>
+          </a:p>
+        </p:txBody>
+      </p:sp>
+      <p:sp>
+        <p:nvSpPr>
+          <p:cNvPr id="12" name="Text 10"/>
+          <p:cNvSpPr txBox="1"/>
+          <p:nvPr/>
+        </p:nvSpPr>
+        <p:spPr>
+          <a:xfrm>
+            <a:off x="749808" y="3310128"/>
+            <a:ext cx="3566160" cy="548640"/>
+          </a:xfrm>
+          <a:prstGeom prst="rect">
+            <a:avLst/>
+          </a:prstGeom>
+          <a:noFill/>
+          <a:ln/>
+        </p:spPr>
+        <p:txBody>
+          <a:bodyPr wrap="square" lIns="0" tIns="0" rIns="0" bIns="0" rtlCol="0" anchor="ctr"/>
+          <a:lstStyle/>
+          <a:p>
+            <a:pPr indent="0" marL="0">
+              <a:lnSpc>
+                <a:spcPct val="120000"/>
+              </a:lnSpc>
+              <a:buNone/>
+            </a:pPr>
+            <a:r>
+              <a:rPr lang="en-US" sz="1100" dirty="0">
+                <a:solidFill>
+                  <a:srgbClr val="5A6A78"/>
+                </a:solidFill>
+                <a:latin typeface="맑은 고딕" pitchFamily="34" charset="0"/>
+                <a:ea typeface="맑은 고딕" pitchFamily="34" charset="-122"/>
+                <a:cs typeface="맑은 고딕" pitchFamily="34" charset="-120"/>
+              </a:rPr>
+              <a:t>누가 언제 어떤 영상을</a:t>
+            </a:r>
+            <a:endParaRPr lang="en-US" sz="1100" dirty="0"/>
+          </a:p>
+          <a:p>
+            <a:pPr indent="0" marL="0">
+              <a:lnSpc>
+                <a:spcPct val="120000"/>
+              </a:lnSpc>
+              <a:buNone/>
+            </a:pPr>
+            <a:r>
+              <a:rPr lang="en-US" sz="1100" dirty="0">
+                <a:solidFill>
+                  <a:srgbClr val="5A6A78"/>
+                </a:solidFill>
+                <a:latin typeface="맑은 고딕" pitchFamily="34" charset="0"/>
+                <a:ea typeface="맑은 고딕" pitchFamily="34" charset="-122"/>
+                <a:cs typeface="맑은 고딕" pitchFamily="34" charset="-120"/>
+              </a:rPr>
+              <a:t>열람했는지 자동 기록</a:t>
+            </a:r>
+            <a:endParaRPr lang="en-US" sz="1100" dirty="0"/>
+          </a:p>
+        </p:txBody>
+      </p:sp>
+      <p:sp>
+        <p:nvSpPr>
+          <p:cNvPr id="13" name="Shape 11"/>
+          <p:cNvSpPr/>
+          <p:nvPr/>
+        </p:nvSpPr>
+        <p:spPr>
+          <a:xfrm>
+            <a:off x="4663440" y="2834640"/>
+            <a:ext cx="3931920" cy="1115568"/>
+          </a:xfrm>
+          <a:prstGeom prst="roundRect">
+            <a:avLst>
+              <a:gd name="adj" fmla="val 4918"/>
+            </a:avLst>
+          </a:prstGeom>
+          <a:solidFill>
+            <a:srgbClr val="F2F6F9"/>
+          </a:solidFill>
+          <a:ln w="12700">
+            <a:solidFill>
+              <a:srgbClr val="E3EAF0"/>
+            </a:solidFill>
+            <a:prstDash val="solid"/>
+          </a:ln>
+          <a:effectLst>
+            <a:outerShdw sx="100000" sy="100000" kx="0" ky="0" algn="bl" rotWithShape="0" blurRad="101600" dist="25400" dir="5400000">
+              <a:srgbClr val="0B1B2B">
+                <a:alpha val="12000"/>
+              </a:srgbClr>
+            </a:outerShdw>
+          </a:effectLst>
+        </p:spPr>
+      </p:sp>
+      <p:sp>
+        <p:nvSpPr>
+          <p:cNvPr id="14" name="Text 12"/>
+          <p:cNvSpPr txBox="1"/>
+          <p:nvPr/>
+        </p:nvSpPr>
+        <p:spPr>
+          <a:xfrm>
+            <a:off x="4864608" y="2962656"/>
+            <a:ext cx="3566160" cy="329184"/>
+          </a:xfrm>
+          <a:prstGeom prst="rect">
+            <a:avLst/>
+          </a:prstGeom>
+          <a:noFill/>
+          <a:ln/>
+        </p:spPr>
+        <p:txBody>
+          <a:bodyPr wrap="square" lIns="0" tIns="0" rIns="0" bIns="0" rtlCol="0" anchor="ctr"/>
+          <a:lstStyle/>
+          <a:p>
+            <a:pPr indent="0" marL="0">
+              <a:buNone/>
+            </a:pPr>
+            <a:r>
+              <a:rPr lang="en-US" sz="1500" b="1" dirty="0">
+                <a:solidFill>
+                  <a:srgbClr val="065A82"/>
+                </a:solidFill>
+                <a:latin typeface="맑은 고딕" pitchFamily="34" charset="0"/>
+                <a:ea typeface="맑은 고딕" pitchFamily="34" charset="-122"/>
+                <a:cs typeface="맑은 고딕" pitchFamily="34" charset="-120"/>
+              </a:rPr>
+              <a:t>도민 감시기구</a:t>
+            </a:r>
+            <a:endParaRPr lang="en-US" sz="1500" dirty="0"/>
+          </a:p>
+        </p:txBody>
+      </p:sp>
+      <p:sp>
+        <p:nvSpPr>
+          <p:cNvPr id="15" name="Text 13"/>
+          <p:cNvSpPr txBox="1"/>
+          <p:nvPr/>
+        </p:nvSpPr>
+        <p:spPr>
+          <a:xfrm>
+            <a:off x="4864608" y="3310128"/>
+            <a:ext cx="3566160" cy="548640"/>
+          </a:xfrm>
+          <a:prstGeom prst="rect">
+            <a:avLst/>
+          </a:prstGeom>
+          <a:noFill/>
+          <a:ln/>
+        </p:spPr>
+        <p:txBody>
+          <a:bodyPr wrap="square" lIns="0" tIns="0" rIns="0" bIns="0" rtlCol="0" anchor="ctr"/>
+          <a:lstStyle/>
+          <a:p>
+            <a:pPr indent="0" marL="0">
+              <a:lnSpc>
+                <a:spcPct val="120000"/>
+              </a:lnSpc>
+              <a:buNone/>
+            </a:pPr>
+            <a:r>
+              <a:rPr lang="en-US" sz="1100" dirty="0">
+                <a:solidFill>
+                  <a:srgbClr val="5A6A78"/>
+                </a:solidFill>
+                <a:latin typeface="맑은 고딕" pitchFamily="34" charset="0"/>
+                <a:ea typeface="맑은 고딕" pitchFamily="34" charset="-122"/>
+                <a:cs typeface="맑은 고딕" pitchFamily="34" charset="-120"/>
+              </a:rPr>
+              <a:t>운영 실태를 도민이</a:t>
+            </a:r>
+            <a:endParaRPr lang="en-US" sz="1100" dirty="0"/>
+          </a:p>
+          <a:p>
+            <a:pPr indent="0" marL="0">
+              <a:lnSpc>
+                <a:spcPct val="120000"/>
+              </a:lnSpc>
+              <a:buNone/>
+            </a:pPr>
+            <a:r>
+              <a:rPr lang="en-US" sz="1100" dirty="0">
+                <a:solidFill>
+                  <a:srgbClr val="5A6A78"/>
+                </a:solidFill>
+                <a:latin typeface="맑은 고딕" pitchFamily="34" charset="0"/>
+                <a:ea typeface="맑은 고딕" pitchFamily="34" charset="-122"/>
+                <a:cs typeface="맑은 고딕" pitchFamily="34" charset="-120"/>
+              </a:rPr>
+              <a:t>직접 점검한다</a:t>
+            </a:r>
+            <a:endParaRPr lang="en-US" sz="1100" dirty="0"/>
+          </a:p>
+        </p:txBody>
+      </p:sp>
+      <p:sp>
+        <p:nvSpPr>
+          <p:cNvPr id="16" name="Text 14"/>
+          <p:cNvSpPr txBox="1"/>
+          <p:nvPr/>
+        </p:nvSpPr>
+        <p:spPr>
+          <a:xfrm>
+            <a:off x="548640" y="4407408"/>
+            <a:ext cx="8046720" cy="365760"/>
+          </a:xfrm>
+          <a:prstGeom prst="rect">
+            <a:avLst/>
+          </a:prstGeom>
+          <a:noFill/>
+          <a:ln/>
+        </p:spPr>
+        <p:txBody>
+          <a:bodyPr wrap="square" lIns="0" tIns="0" rIns="0" bIns="0" rtlCol="0" anchor="ctr"/>
+          <a:lstStyle/>
+          <a:p>
+            <a:pPr indent="0" marL="0">
+              <a:buNone/>
+            </a:pPr>
+            <a:r>
+              <a:rPr lang="en-US" sz="1200" dirty="0">
+                <a:solidFill>
+                  <a:srgbClr val="10243A"/>
+                </a:solidFill>
+                <a:latin typeface="맑은 고딕" pitchFamily="34" charset="0"/>
+                <a:ea typeface="맑은 고딕" pitchFamily="34" charset="-122"/>
+                <a:cs typeface="맑은 고딕" pitchFamily="34" charset="-120"/>
+              </a:rPr>
+              <a:t>＋  민간 드론 인력 등록제 · 출동 계약제 — 자원봉사가 아니라 산업으로</a:t>
+            </a:r>
+            <a:endParaRPr lang="en-US" sz="1200" dirty="0"/>
+          </a:p>
+        </p:txBody>
+      </p:sp>
+    </p:spTree>
+  </p:cSld>
+  <p:clrMapOvr>
+    <a:masterClrMapping/>
+  </p:clrMapOvr>
+</p:sld>
+</file>
+
+<file path=ppt/slides/slide12.xml><?xml version="1.0" encoding="utf-8"?>
+<p:sld xmlns:a="http://schemas.openxmlformats.org/drawingml/2006/main" xmlns:r="http://schemas.openxmlformats.org/officeDocument/2006/relationships" xmlns:p="http://schemas.openxmlformats.org/presentationml/2006/main">
+  <p:cSld name="Slide 12">
+    <p:spTree>
+      <p:nvGrpSpPr>
+        <p:cNvPr id="1" name=""/>
+        <p:cNvGrpSpPr/>
+        <p:nvPr/>
+      </p:nvGrpSpPr>
+      <p:grpSpPr>
+        <a:xfrm>
+          <a:off x="0" y="0"/>
+          <a:ext cx="0" cy="0"/>
+          <a:chOff x="0" y="0"/>
+          <a:chExt cx="0" cy="0"/>
+        </a:xfrm>
+      </p:grpSpPr>
+      <p:sp>
+        <p:nvSpPr>
+          <p:cNvPr id="2" name="Text 0"/>
+          <p:cNvSpPr txBox="1"/>
+          <p:nvPr/>
+        </p:nvSpPr>
+        <p:spPr>
+          <a:xfrm>
+            <a:off x="548640" y="384048"/>
+            <a:ext cx="8046720" cy="566928"/>
+          </a:xfrm>
+          <a:prstGeom prst="rect">
+            <a:avLst/>
+          </a:prstGeom>
+          <a:noFill/>
+          <a:ln/>
+        </p:spPr>
+        <p:txBody>
+          <a:bodyPr wrap="square" lIns="0" tIns="0" rIns="0" bIns="0" rtlCol="0" anchor="ctr"/>
+          <a:lstStyle/>
+          <a:p>
+            <a:pPr indent="0" marL="0">
+              <a:buNone/>
+            </a:pPr>
+            <a:r>
+              <a:rPr lang="en-US" sz="3000" b="1" dirty="0">
+                <a:solidFill>
+                  <a:srgbClr val="10243A"/>
+                </a:solidFill>
+                <a:latin typeface="맑은 고딕" pitchFamily="34" charset="0"/>
+                <a:ea typeface="맑은 고딕" pitchFamily="34" charset="-122"/>
+                <a:cs typeface="맑은 고딕" pitchFamily="34" charset="-120"/>
+              </a:rPr>
               <a:t>하나의 인프라, 여러 임무</a:t>
             </a:r>
-            <a:endParaRPr lang="en-US" sz="3200" dirty="0"/>
+            <a:endParaRPr lang="en-US" sz="3000" dirty="0"/>
           </a:p>
         </p:txBody>
       </p:sp>
@@ -3335,7 +3950,7 @@
         </p:nvSpPr>
         <p:spPr>
           <a:xfrm>
-            <a:off x="548640" y="4370832"/>
+            <a:off x="548640" y="4407408"/>
             <a:ext cx="8046720" cy="365760"/>
           </a:xfrm>
           <a:prstGeom prst="rect">
@@ -3374,9 +3989,9 @@
 </p:sld>
 </file>
 
-<file path=ppt/slides/slide12.xml><?xml version="1.0" encoding="utf-8"?>
+<file path=ppt/slides/slide13.xml><?xml version="1.0" encoding="utf-8"?>
 <p:sld xmlns:a="http://schemas.openxmlformats.org/drawingml/2006/main" xmlns:r="http://schemas.openxmlformats.org/officeDocument/2006/relationships" xmlns:p="http://schemas.openxmlformats.org/presentationml/2006/main">
-  <p:cSld name="Slide 12">
+  <p:cSld name="Slide 13">
     <p:bg>
       <p:bgPr>
         <a:solidFill>
@@ -3423,7 +4038,7 @@
               <a:buNone/>
             </a:pPr>
             <a:r>
-              <a:rPr lang="en-US" sz="3200" b="1" dirty="0">
+              <a:rPr lang="en-US" sz="3000" b="1" dirty="0">
                 <a:solidFill>
                   <a:srgbClr val="FFFFFF"/>
                 </a:solidFill>
@@ -3433,7 +4048,7 @@
               </a:rPr>
               <a:t>로드맵과 지표</a:t>
             </a:r>
-            <a:endParaRPr lang="en-US" sz="3200" dirty="0"/>
+            <a:endParaRPr lang="en-US" sz="3000" dirty="0"/>
           </a:p>
         </p:txBody>
       </p:sp>
@@ -3657,7 +4272,7 @@
                 <a:ea typeface="맑은 고딕" pitchFamily="34" charset="-122"/>
                 <a:cs typeface="맑은 고딕" pitchFamily="34" charset="-120"/>
               </a:rPr>
-              <a:t>대상지 선정</a:t>
+              <a:t>도착시간 실측 공개</a:t>
             </a:r>
             <a:endParaRPr lang="en-US" sz="950" dirty="0"/>
           </a:p>
@@ -4389,7 +5004,7 @@
                 <a:ea typeface="맑은 고딕" pitchFamily="34" charset="-122"/>
                 <a:cs typeface="맑은 고딕" pitchFamily="34" charset="-120"/>
               </a:rPr>
-              <a:t>초기 3시간 내 발견율</a:t>
+              <a:t>초동 확인 자동 수행률</a:t>
             </a:r>
             <a:endParaRPr lang="en-US" sz="950" dirty="0"/>
           </a:p>
@@ -4626,7 +5241,7 @@
                 <a:ea typeface="맑은 고딕" pitchFamily="34" charset="-122"/>
                 <a:cs typeface="맑은 고딕" pitchFamily="34" charset="-120"/>
               </a:rPr>
-              <a:t>"신고가 들어오고 3분 뒤, 하늘에서 그곳을 볼 수 있는가"  —  그것이 안전의 실질입니다.</a:t>
+              <a:t>"신고 3분 뒤 하늘에서 그곳을 볼 수 있는가, 그 확인이 기록으로 남는가"</a:t>
             </a:r>
             <a:endParaRPr lang="en-US" sz="1400" dirty="0"/>
           </a:p>
@@ -4682,7 +5297,7 @@
               <a:buNone/>
             </a:pPr>
             <a:r>
-              <a:rPr lang="en-US" sz="3200" b="1" dirty="0">
+              <a:rPr lang="en-US" sz="3000" b="1" dirty="0">
                 <a:solidFill>
                   <a:srgbClr val="10243A"/>
                 </a:solidFill>
@@ -4690,9 +5305,9 @@
                 <a:ea typeface="맑은 고딕" pitchFamily="34" charset="-122"/>
                 <a:cs typeface="맑은 고딕" pitchFamily="34" charset="-120"/>
               </a:rPr>
-              <a:t>제주가 이미 가진 것</a:t>
-            </a:r>
-            <a:endParaRPr lang="en-US" sz="3200" dirty="0"/>
+              <a:t>제주는 자원이 부족한 곳이 아닙니다</a:t>
+            </a:r>
+            <a:endParaRPr lang="en-US" sz="3000" dirty="0"/>
           </a:p>
         </p:txBody>
       </p:sp>
@@ -4729,7 +5344,7 @@
                 <a:ea typeface="맑은 고딕" pitchFamily="34" charset="-122"/>
                 <a:cs typeface="맑은 고딕" pitchFamily="34" charset="-120"/>
               </a:rPr>
-              <a:t>자산은 이미 갖춰져 있습니다</a:t>
+              <a:t>발제를 준비하며 공개 통계를 먼저 확인했습니다</a:t>
             </a:r>
             <a:endParaRPr lang="en-US" sz="1300" dirty="0"/>
           </a:p>
@@ -4794,7 +5409,7 @@
               <a:buNone/>
             </a:pPr>
             <a:r>
-              <a:rPr lang="en-US" sz="2400" b="1" dirty="0">
+              <a:rPr lang="en-US" sz="2200" b="1" dirty="0">
                 <a:solidFill>
                   <a:srgbClr val="065A82"/>
                 </a:solidFill>
@@ -4802,9 +5417,9 @@
                 <a:ea typeface="맑은 고딕" pitchFamily="34" charset="-122"/>
                 <a:cs typeface="맑은 고딕" pitchFamily="34" charset="-120"/>
               </a:rPr>
-              <a:t>유일</a:t>
-            </a:r>
-            <a:endParaRPr lang="en-US" sz="2400" dirty="0"/>
+              <a:t>314명</a:t>
+            </a:r>
+            <a:endParaRPr lang="en-US" sz="2200" dirty="0"/>
           </a:p>
         </p:txBody>
       </p:sp>
@@ -4833,7 +5448,7 @@
               <a:buNone/>
             </a:pPr>
             <a:r>
-              <a:rPr lang="en-US" sz="1300" b="1" dirty="0">
+              <a:rPr lang="en-US" sz="1200" b="1" dirty="0">
                 <a:solidFill>
                   <a:srgbClr val="10243A"/>
                 </a:solidFill>
@@ -4841,9 +5456,9 @@
                 <a:ea typeface="맑은 고딕" pitchFamily="34" charset="-122"/>
                 <a:cs typeface="맑은 고딕" pitchFamily="34" charset="-120"/>
               </a:rPr>
-              <a:t>전국 유일 자치경찰단</a:t>
-            </a:r>
-            <a:endParaRPr lang="en-US" sz="1300" dirty="0"/>
+              <a:t>경찰관 1인당 담당인구</a:t>
+            </a:r>
+            <a:endParaRPr lang="en-US" sz="1200" dirty="0"/>
           </a:p>
         </p:txBody>
       </p:sp>
@@ -4883,7 +5498,7 @@
                 <a:ea typeface="맑은 고딕" pitchFamily="34" charset="-122"/>
                 <a:cs typeface="맑은 고딕" pitchFamily="34" charset="-120"/>
               </a:rPr>
-              <a:t>도지사가 직접 지휘하는</a:t>
+              <a:t>전국 평균 391명보다</a:t>
             </a:r>
             <a:endParaRPr lang="en-US" sz="1000" dirty="0"/>
           </a:p>
@@ -4903,7 +5518,7 @@
                 <a:ea typeface="맑은 고딕" pitchFamily="34" charset="-122"/>
                 <a:cs typeface="맑은 고딕" pitchFamily="34" charset="-120"/>
               </a:rPr>
-              <a:t>치안 자원</a:t>
+              <a:t>오히려 적습니다</a:t>
             </a:r>
             <a:endParaRPr lang="en-US" sz="1000" dirty="0"/>
           </a:p>
@@ -4968,7 +5583,7 @@
               <a:buNone/>
             </a:pPr>
             <a:r>
-              <a:rPr lang="en-US" sz="2400" b="1" dirty="0">
+              <a:rPr lang="en-US" sz="2200" b="1" dirty="0">
                 <a:solidFill>
                   <a:srgbClr val="065A82"/>
                 </a:solidFill>
@@ -4976,9 +5591,9 @@
                 <a:ea typeface="맑은 고딕" pitchFamily="34" charset="-122"/>
                 <a:cs typeface="맑은 고딕" pitchFamily="34" charset="-120"/>
               </a:rPr>
-              <a:t>최초</a:t>
-            </a:r>
-            <a:endParaRPr lang="en-US" sz="2400" dirty="0"/>
+              <a:t>19,096대</a:t>
+            </a:r>
+            <a:endParaRPr lang="en-US" sz="2200" dirty="0"/>
           </a:p>
         </p:txBody>
       </p:sp>
@@ -5007,7 +5622,7 @@
               <a:buNone/>
             </a:pPr>
             <a:r>
-              <a:rPr lang="en-US" sz="1300" b="1" dirty="0">
+              <a:rPr lang="en-US" sz="1200" b="1" dirty="0">
                 <a:solidFill>
                   <a:srgbClr val="10243A"/>
                 </a:solidFill>
@@ -5015,9 +5630,9 @@
                 <a:ea typeface="맑은 고딕" pitchFamily="34" charset="-122"/>
                 <a:cs typeface="맑은 고딕" pitchFamily="34" charset="-120"/>
               </a:rPr>
-              <a:t>전국 최초 AI 치안드론</a:t>
-            </a:r>
-            <a:endParaRPr lang="en-US" sz="1300" dirty="0"/>
+              <a:t>방범용 CCTV</a:t>
+            </a:r>
+            <a:endParaRPr lang="en-US" sz="1200" dirty="0"/>
           </a:p>
         </p:txBody>
       </p:sp>
@@ -5057,7 +5672,7 @@
                 <a:ea typeface="맑은 고딕" pitchFamily="34" charset="-122"/>
                 <a:cs typeface="맑은 고딕" pitchFamily="34" charset="-120"/>
               </a:rPr>
-              <a:t>2027년 현장 투입 예정</a:t>
+              <a:t>인구 1,000명당 28.8대</a:t>
             </a:r>
             <a:endParaRPr lang="en-US" sz="1000" dirty="0"/>
           </a:p>
@@ -5077,7 +5692,7 @@
                 <a:ea typeface="맑은 고딕" pitchFamily="34" charset="-122"/>
                 <a:cs typeface="맑은 고딕" pitchFamily="34" charset="-120"/>
               </a:rPr>
-              <a:t>(국비 8억 · 도비 2억)</a:t>
+              <a:t>전국 평균의 두 배</a:t>
             </a:r>
             <a:endParaRPr lang="en-US" sz="1000" dirty="0"/>
           </a:p>
@@ -5142,7 +5757,7 @@
               <a:buNone/>
             </a:pPr>
             <a:r>
-              <a:rPr lang="en-US" sz="2400" b="1" dirty="0">
+              <a:rPr lang="en-US" sz="2200" b="1" dirty="0">
                 <a:solidFill>
                   <a:srgbClr val="065A82"/>
                 </a:solidFill>
@@ -5150,9 +5765,9 @@
                 <a:ea typeface="맑은 고딕" pitchFamily="34" charset="-122"/>
                 <a:cs typeface="맑은 고딕" pitchFamily="34" charset="-120"/>
               </a:rPr>
-              <a:t>1,283㎢</a:t>
-            </a:r>
-            <a:endParaRPr lang="en-US" sz="2400" dirty="0"/>
+              <a:t>85명</a:t>
+            </a:r>
+            <a:endParaRPr lang="en-US" sz="2200" dirty="0"/>
           </a:p>
         </p:txBody>
       </p:sp>
@@ -5181,7 +5796,7 @@
               <a:buNone/>
             </a:pPr>
             <a:r>
-              <a:rPr lang="en-US" sz="1300" b="1" dirty="0">
+              <a:rPr lang="en-US" sz="1200" b="1" dirty="0">
                 <a:solidFill>
                   <a:srgbClr val="10243A"/>
                 </a:solidFill>
@@ -5189,9 +5804,9 @@
                 <a:ea typeface="맑은 고딕" pitchFamily="34" charset="-122"/>
                 <a:cs typeface="맑은 고딕" pitchFamily="34" charset="-120"/>
               </a:rPr>
-              <a:t>전국 최대 드론특구</a:t>
-            </a:r>
-            <a:endParaRPr lang="en-US" sz="1300" dirty="0"/>
+              <a:t>통합관제센터 관제요원</a:t>
+            </a:r>
+            <a:endParaRPr lang="en-US" sz="1200" dirty="0"/>
           </a:p>
         </p:txBody>
       </p:sp>
@@ -5231,7 +5846,7 @@
                 <a:ea typeface="맑은 고딕" pitchFamily="34" charset="-122"/>
                 <a:cs typeface="맑은 고딕" pitchFamily="34" charset="-120"/>
               </a:rPr>
-              <a:t>비가시권 · 야간 실증이</a:t>
+              <a:t>5조 3교대</a:t>
             </a:r>
             <a:endParaRPr lang="en-US" sz="1000" dirty="0"/>
           </a:p>
@@ -5251,7 +5866,7 @@
                 <a:ea typeface="맑은 고딕" pitchFamily="34" charset="-122"/>
                 <a:cs typeface="맑은 고딕" pitchFamily="34" charset="-120"/>
               </a:rPr>
-              <a:t>제도적으로 가능</a:t>
+              <a:t>24시간 관제</a:t>
             </a:r>
             <a:endParaRPr lang="en-US" sz="1000" dirty="0"/>
           </a:p>
@@ -5316,7 +5931,7 @@
               <a:buNone/>
             </a:pPr>
             <a:r>
-              <a:rPr lang="en-US" sz="2400" b="1" dirty="0">
+              <a:rPr lang="en-US" sz="2200" b="1" dirty="0">
                 <a:solidFill>
                   <a:srgbClr val="065A82"/>
                 </a:solidFill>
@@ -5324,9 +5939,9 @@
                 <a:ea typeface="맑은 고딕" pitchFamily="34" charset="-122"/>
                 <a:cs typeface="맑은 고딕" pitchFamily="34" charset="-120"/>
               </a:rPr>
-              <a:t>1,543명</a:t>
-            </a:r>
-            <a:endParaRPr lang="en-US" sz="2400" dirty="0"/>
+              <a:t>9,717건</a:t>
+            </a:r>
+            <a:endParaRPr lang="en-US" sz="2200" dirty="0"/>
           </a:p>
         </p:txBody>
       </p:sp>
@@ -5355,7 +5970,7 @@
               <a:buNone/>
             </a:pPr>
             <a:r>
-              <a:rPr lang="en-US" sz="1300" b="1" dirty="0">
+              <a:rPr lang="en-US" sz="1200" b="1" dirty="0">
                 <a:solidFill>
                   <a:srgbClr val="10243A"/>
                 </a:solidFill>
@@ -5363,9 +5978,9 @@
                 <a:ea typeface="맑은 고딕" pitchFamily="34" charset="-122"/>
                 <a:cs typeface="맑은 고딕" pitchFamily="34" charset="-120"/>
               </a:rPr>
-              <a:t>민관 공동체 치안망</a:t>
-            </a:r>
-            <a:endParaRPr lang="en-US" sz="1300" dirty="0"/>
+              <a:t>CCTV 관제 사고 예방</a:t>
+            </a:r>
+            <a:endParaRPr lang="en-US" sz="1200" dirty="0"/>
           </a:p>
         </p:txBody>
       </p:sp>
@@ -5405,7 +6020,7 @@
                 <a:ea typeface="맑은 고딕" pitchFamily="34" charset="-122"/>
                 <a:cs typeface="맑은 고딕" pitchFamily="34" charset="-120"/>
               </a:rPr>
-              <a:t>주민자치경찰대 · 시니어</a:t>
+              <a:t>전년 대비 40% 증가</a:t>
             </a:r>
             <a:endParaRPr lang="en-US" sz="1000" dirty="0"/>
           </a:p>
@@ -5425,7 +6040,7 @@
                 <a:ea typeface="맑은 고딕" pitchFamily="34" charset="-122"/>
                 <a:cs typeface="맑은 고딕" pitchFamily="34" charset="-120"/>
               </a:rPr>
-              <a:t>민간경비 · 민간드론</a:t>
+              <a:t>(2025년)</a:t>
             </a:r>
             <a:endParaRPr lang="en-US" sz="1000" dirty="0"/>
           </a:p>
@@ -5439,7 +6054,7 @@
         </p:nvSpPr>
         <p:spPr>
           <a:xfrm>
-            <a:off x="548640" y="4160520"/>
+            <a:off x="548640" y="4407408"/>
             <a:ext cx="8046720" cy="365760"/>
           </a:xfrm>
           <a:prstGeom prst="rect">
@@ -5456,7 +6071,7 @@
               <a:buNone/>
             </a:pPr>
             <a:r>
-              <a:rPr lang="en-US" sz="1400" dirty="0">
+              <a:rPr lang="en-US" sz="1200" dirty="0">
                 <a:solidFill>
                   <a:srgbClr val="10243A"/>
                 </a:solidFill>
@@ -5464,9 +6079,48 @@
                 <a:ea typeface="맑은 고딕" pitchFamily="34" charset="-122"/>
                 <a:cs typeface="맑은 고딕" pitchFamily="34" charset="-120"/>
               </a:rPr>
-              <a:t>새 사업을 만들자는 제안이 아닙니다. 있는 자산을 잇자는 제안입니다.</a:t>
-            </a:r>
-            <a:endParaRPr lang="en-US" sz="1400" dirty="0"/>
+              <a:t>인력도, 장비도, 관제 체계도 전국 평균보다 앞서 있습니다.</a:t>
+            </a:r>
+            <a:endParaRPr lang="en-US" sz="1200" dirty="0"/>
+          </a:p>
+        </p:txBody>
+      </p:sp>
+      <p:sp>
+        <p:nvSpPr>
+          <p:cNvPr id="21" name="Text 19"/>
+          <p:cNvSpPr txBox="1"/>
+          <p:nvPr/>
+        </p:nvSpPr>
+        <p:spPr>
+          <a:xfrm>
+            <a:off x="548640" y="4773168"/>
+            <a:ext cx="8046720" cy="256032"/>
+          </a:xfrm>
+          <a:prstGeom prst="rect">
+            <a:avLst/>
+          </a:prstGeom>
+          <a:noFill/>
+          <a:ln/>
+        </p:spPr>
+        <p:txBody>
+          <a:bodyPr wrap="square" lIns="0" tIns="0" rIns="0" bIns="0" rtlCol="0" anchor="ctr"/>
+          <a:lstStyle/>
+          <a:p>
+            <a:pPr indent="0" marL="0">
+              <a:buNone/>
+            </a:pPr>
+            <a:r>
+              <a:rPr lang="en-US" sz="850" dirty="0">
+                <a:solidFill>
+                  <a:srgbClr val="8895A2"/>
+                </a:solidFill>
+                <a:latin typeface="맑은 고딕" pitchFamily="34" charset="0"/>
+                <a:ea typeface="맑은 고딕" pitchFamily="34" charset="-122"/>
+                <a:cs typeface="맑은 고딕" pitchFamily="34" charset="-120"/>
+              </a:rPr>
+              <a:t>출처: 경찰청 경찰통계연보(2024) · 제주특별자치도 CCTV 운영 현황(2025 상반기) — 원자료 재확인 필요</a:t>
+            </a:r>
+            <a:endParaRPr lang="en-US" sz="850" dirty="0"/>
           </a:p>
         </p:txBody>
       </p:sp>
@@ -5481,6 +6135,804 @@
 <file path=ppt/slides/slide3.xml><?xml version="1.0" encoding="utf-8"?>
 <p:sld xmlns:a="http://schemas.openxmlformats.org/drawingml/2006/main" xmlns:r="http://schemas.openxmlformats.org/officeDocument/2006/relationships" xmlns:p="http://schemas.openxmlformats.org/presentationml/2006/main">
   <p:cSld name="Slide 3">
+    <p:spTree>
+      <p:nvGrpSpPr>
+        <p:cNvPr id="1" name=""/>
+        <p:cNvGrpSpPr/>
+        <p:nvPr/>
+      </p:nvGrpSpPr>
+      <p:grpSpPr>
+        <a:xfrm>
+          <a:off x="0" y="0"/>
+          <a:ext cx="0" cy="0"/>
+          <a:chOff x="0" y="0"/>
+          <a:chExt cx="0" cy="0"/>
+        </a:xfrm>
+      </p:grpSpPr>
+      <p:sp>
+        <p:nvSpPr>
+          <p:cNvPr id="2" name="Text 0"/>
+          <p:cNvSpPr txBox="1"/>
+          <p:nvPr/>
+        </p:nvSpPr>
+        <p:spPr>
+          <a:xfrm>
+            <a:off x="548640" y="384048"/>
+            <a:ext cx="8046720" cy="566928"/>
+          </a:xfrm>
+          <a:prstGeom prst="rect">
+            <a:avLst/>
+          </a:prstGeom>
+          <a:noFill/>
+          <a:ln/>
+        </p:spPr>
+        <p:txBody>
+          <a:bodyPr wrap="square" lIns="0" tIns="0" rIns="0" bIns="0" rtlCol="0" anchor="ctr"/>
+          <a:lstStyle/>
+          <a:p>
+            <a:pPr indent="0" marL="0">
+              <a:buNone/>
+            </a:pPr>
+            <a:r>
+              <a:rPr lang="en-US" sz="3000" b="1" dirty="0">
+                <a:solidFill>
+                  <a:srgbClr val="10243A"/>
+                </a:solidFill>
+                <a:latin typeface="맑은 고딕" pitchFamily="34" charset="0"/>
+                <a:ea typeface="맑은 고딕" pitchFamily="34" charset="-122"/>
+                <a:cs typeface="맑은 고딕" pitchFamily="34" charset="-120"/>
+              </a:rPr>
+              <a:t>'범죄율 전국 1위'는 분모의 문제입니다</a:t>
+            </a:r>
+            <a:endParaRPr lang="en-US" sz="3000" dirty="0"/>
+          </a:p>
+        </p:txBody>
+      </p:sp>
+      <p:sp>
+        <p:nvSpPr>
+          <p:cNvPr id="3" name="Text 1"/>
+          <p:cNvSpPr txBox="1"/>
+          <p:nvPr/>
+        </p:nvSpPr>
+        <p:spPr>
+          <a:xfrm>
+            <a:off x="548640" y="941832"/>
+            <a:ext cx="8046720" cy="329184"/>
+          </a:xfrm>
+          <a:prstGeom prst="rect">
+            <a:avLst/>
+          </a:prstGeom>
+          <a:noFill/>
+          <a:ln/>
+        </p:spPr>
+        <p:txBody>
+          <a:bodyPr wrap="square" lIns="0" tIns="0" rIns="0" bIns="0" rtlCol="0" anchor="ctr"/>
+          <a:lstStyle/>
+          <a:p>
+            <a:pPr indent="0" marL="0">
+              <a:buNone/>
+            </a:pPr>
+            <a:r>
+              <a:rPr lang="en-US" sz="1300" dirty="0">
+                <a:solidFill>
+                  <a:srgbClr val="5A6A78"/>
+                </a:solidFill>
+                <a:latin typeface="맑은 고딕" pitchFamily="34" charset="0"/>
+                <a:ea typeface="맑은 고딕" pitchFamily="34" charset="-122"/>
+                <a:cs typeface="맑은 고딕" pitchFamily="34" charset="-120"/>
+              </a:rPr>
+              <a:t>범죄 건수에는 관광객이 들어가고, 분모에는 들어가지 않습니다</a:t>
+            </a:r>
+            <a:endParaRPr lang="en-US" sz="1300" dirty="0"/>
+          </a:p>
+        </p:txBody>
+      </p:sp>
+      <p:sp>
+        <p:nvSpPr>
+          <p:cNvPr id="4" name="Shape 2"/>
+          <p:cNvSpPr/>
+          <p:nvPr/>
+        </p:nvSpPr>
+        <p:spPr>
+          <a:xfrm>
+            <a:off x="548640" y="1554480"/>
+            <a:ext cx="3886200" cy="1371600"/>
+          </a:xfrm>
+          <a:prstGeom prst="roundRect">
+            <a:avLst>
+              <a:gd name="adj" fmla="val 4000"/>
+            </a:avLst>
+          </a:prstGeom>
+          <a:solidFill>
+            <a:srgbClr val="F2F6F9"/>
+          </a:solidFill>
+          <a:ln w="12700">
+            <a:solidFill>
+              <a:srgbClr val="E3EAF0"/>
+            </a:solidFill>
+            <a:prstDash val="solid"/>
+          </a:ln>
+          <a:effectLst>
+            <a:outerShdw sx="100000" sy="100000" kx="0" ky="0" algn="bl" rotWithShape="0" blurRad="101600" dist="25400" dir="5400000">
+              <a:srgbClr val="0B1B2B">
+                <a:alpha val="12000"/>
+              </a:srgbClr>
+            </a:outerShdw>
+          </a:effectLst>
+        </p:spPr>
+      </p:sp>
+      <p:sp>
+        <p:nvSpPr>
+          <p:cNvPr id="5" name="Text 3"/>
+          <p:cNvSpPr txBox="1"/>
+          <p:nvPr/>
+        </p:nvSpPr>
+        <p:spPr>
+          <a:xfrm>
+            <a:off x="777240" y="1691640"/>
+            <a:ext cx="3383280" cy="274320"/>
+          </a:xfrm>
+          <a:prstGeom prst="rect">
+            <a:avLst/>
+          </a:prstGeom>
+          <a:noFill/>
+          <a:ln/>
+        </p:spPr>
+        <p:txBody>
+          <a:bodyPr wrap="square" lIns="0" tIns="0" rIns="0" bIns="0" rtlCol="0" anchor="ctr"/>
+          <a:lstStyle/>
+          <a:p>
+            <a:pPr indent="0" marL="0">
+              <a:buNone/>
+            </a:pPr>
+            <a:r>
+              <a:rPr lang="en-US" sz="1100" dirty="0">
+                <a:solidFill>
+                  <a:srgbClr val="5A6A78"/>
+                </a:solidFill>
+                <a:latin typeface="맑은 고딕" pitchFamily="34" charset="0"/>
+                <a:ea typeface="맑은 고딕" pitchFamily="34" charset="-122"/>
+                <a:cs typeface="맑은 고딕" pitchFamily="34" charset="-120"/>
+              </a:rPr>
+              <a:t>공표 범죄 발생비</a:t>
+            </a:r>
+            <a:endParaRPr lang="en-US" sz="1100" dirty="0"/>
+          </a:p>
+        </p:txBody>
+      </p:sp>
+      <p:sp>
+        <p:nvSpPr>
+          <p:cNvPr id="6" name="Text 4"/>
+          <p:cNvSpPr txBox="1"/>
+          <p:nvPr/>
+        </p:nvSpPr>
+        <p:spPr>
+          <a:xfrm>
+            <a:off x="777240" y="1965960"/>
+            <a:ext cx="3383280" cy="502920"/>
+          </a:xfrm>
+          <a:prstGeom prst="rect">
+            <a:avLst/>
+          </a:prstGeom>
+          <a:noFill/>
+          <a:ln/>
+        </p:spPr>
+        <p:txBody>
+          <a:bodyPr wrap="square" lIns="0" tIns="0" rIns="0" bIns="0" rtlCol="0" anchor="ctr"/>
+          <a:lstStyle/>
+          <a:p>
+            <a:pPr indent="0" marL="0">
+              <a:buNone/>
+            </a:pPr>
+            <a:r>
+              <a:rPr lang="en-US" sz="3000" b="1" dirty="0">
+                <a:solidFill>
+                  <a:srgbClr val="E0523C"/>
+                </a:solidFill>
+                <a:latin typeface="맑은 고딕" pitchFamily="34" charset="0"/>
+                <a:ea typeface="맑은 고딕" pitchFamily="34" charset="-122"/>
+                <a:cs typeface="맑은 고딕" pitchFamily="34" charset="-120"/>
+              </a:rPr>
+              <a:t>4,193.8건</a:t>
+            </a:r>
+            <a:endParaRPr lang="en-US" sz="3000" dirty="0"/>
+          </a:p>
+        </p:txBody>
+      </p:sp>
+      <p:sp>
+        <p:nvSpPr>
+          <p:cNvPr id="7" name="Text 5"/>
+          <p:cNvSpPr txBox="1"/>
+          <p:nvPr/>
+        </p:nvSpPr>
+        <p:spPr>
+          <a:xfrm>
+            <a:off x="777240" y="2487168"/>
+            <a:ext cx="3383280" cy="274320"/>
+          </a:xfrm>
+          <a:prstGeom prst="rect">
+            <a:avLst/>
+          </a:prstGeom>
+          <a:noFill/>
+          <a:ln/>
+        </p:spPr>
+        <p:txBody>
+          <a:bodyPr wrap="square" lIns="0" tIns="0" rIns="0" bIns="0" rtlCol="0" anchor="ctr"/>
+          <a:lstStyle/>
+          <a:p>
+            <a:pPr indent="0" marL="0">
+              <a:buNone/>
+            </a:pPr>
+            <a:r>
+              <a:rPr lang="en-US" sz="1000" dirty="0">
+                <a:solidFill>
+                  <a:srgbClr val="5A6A78"/>
+                </a:solidFill>
+                <a:latin typeface="맑은 고딕" pitchFamily="34" charset="0"/>
+                <a:ea typeface="맑은 고딕" pitchFamily="34" charset="-122"/>
+                <a:cs typeface="맑은 고딕" pitchFamily="34" charset="-120"/>
+              </a:rPr>
+              <a:t>인구 10만 명당 · 전국 1위 · 분모 66만 명</a:t>
+            </a:r>
+            <a:endParaRPr lang="en-US" sz="1000" dirty="0"/>
+          </a:p>
+        </p:txBody>
+      </p:sp>
+      <p:sp>
+        <p:nvSpPr>
+          <p:cNvPr id="8" name="Shape 6"/>
+          <p:cNvSpPr/>
+          <p:nvPr/>
+        </p:nvSpPr>
+        <p:spPr>
+          <a:xfrm>
+            <a:off x="4709160" y="1554480"/>
+            <a:ext cx="3886200" cy="1371600"/>
+          </a:xfrm>
+          <a:prstGeom prst="roundRect">
+            <a:avLst>
+              <a:gd name="adj" fmla="val 4000"/>
+            </a:avLst>
+          </a:prstGeom>
+          <a:solidFill>
+            <a:srgbClr val="10243A"/>
+          </a:solidFill>
+          <a:ln w="12700">
+            <a:solidFill>
+              <a:srgbClr val="10243A"/>
+            </a:solidFill>
+            <a:prstDash val="solid"/>
+          </a:ln>
+          <a:effectLst>
+            <a:outerShdw sx="100000" sy="100000" kx="0" ky="0" algn="bl" rotWithShape="0" blurRad="101600" dist="25400" dir="5400000">
+              <a:srgbClr val="0B1B2B">
+                <a:alpha val="12000"/>
+              </a:srgbClr>
+            </a:outerShdw>
+          </a:effectLst>
+        </p:spPr>
+      </p:sp>
+      <p:sp>
+        <p:nvSpPr>
+          <p:cNvPr id="9" name="Text 7"/>
+          <p:cNvSpPr txBox="1"/>
+          <p:nvPr/>
+        </p:nvSpPr>
+        <p:spPr>
+          <a:xfrm>
+            <a:off x="4937760" y="1691640"/>
+            <a:ext cx="3383280" cy="274320"/>
+          </a:xfrm>
+          <a:prstGeom prst="rect">
+            <a:avLst/>
+          </a:prstGeom>
+          <a:noFill/>
+          <a:ln/>
+        </p:spPr>
+        <p:txBody>
+          <a:bodyPr wrap="square" lIns="0" tIns="0" rIns="0" bIns="0" rtlCol="0" anchor="ctr"/>
+          <a:lstStyle/>
+          <a:p>
+            <a:pPr indent="0" marL="0">
+              <a:buNone/>
+            </a:pPr>
+            <a:r>
+              <a:rPr lang="en-US" sz="1100" dirty="0">
+                <a:solidFill>
+                  <a:srgbClr val="8FB4C9"/>
+                </a:solidFill>
+                <a:latin typeface="맑은 고딕" pitchFamily="34" charset="0"/>
+                <a:ea typeface="맑은 고딕" pitchFamily="34" charset="-122"/>
+                <a:cs typeface="맑은 고딕" pitchFamily="34" charset="-120"/>
+              </a:rPr>
+              <a:t>생활인구 82만 명으로 보정</a:t>
+            </a:r>
+            <a:endParaRPr lang="en-US" sz="1100" dirty="0"/>
+          </a:p>
+        </p:txBody>
+      </p:sp>
+      <p:sp>
+        <p:nvSpPr>
+          <p:cNvPr id="10" name="Text 8"/>
+          <p:cNvSpPr txBox="1"/>
+          <p:nvPr/>
+        </p:nvSpPr>
+        <p:spPr>
+          <a:xfrm>
+            <a:off x="4937760" y="1965960"/>
+            <a:ext cx="3383280" cy="502920"/>
+          </a:xfrm>
+          <a:prstGeom prst="rect">
+            <a:avLst/>
+          </a:prstGeom>
+          <a:noFill/>
+          <a:ln/>
+        </p:spPr>
+        <p:txBody>
+          <a:bodyPr wrap="square" lIns="0" tIns="0" rIns="0" bIns="0" rtlCol="0" anchor="ctr"/>
+          <a:lstStyle/>
+          <a:p>
+            <a:pPr indent="0" marL="0">
+              <a:buNone/>
+            </a:pPr>
+            <a:r>
+              <a:rPr lang="en-US" sz="3000" b="1" dirty="0">
+                <a:solidFill>
+                  <a:srgbClr val="FFFFFF"/>
+                </a:solidFill>
+                <a:latin typeface="맑은 고딕" pitchFamily="34" charset="0"/>
+                <a:ea typeface="맑은 고딕" pitchFamily="34" charset="-122"/>
+                <a:cs typeface="맑은 고딕" pitchFamily="34" charset="-120"/>
+              </a:rPr>
+              <a:t>약 3,390건</a:t>
+            </a:r>
+            <a:endParaRPr lang="en-US" sz="3000" dirty="0"/>
+          </a:p>
+        </p:txBody>
+      </p:sp>
+      <p:sp>
+        <p:nvSpPr>
+          <p:cNvPr id="11" name="Text 9"/>
+          <p:cNvSpPr txBox="1"/>
+          <p:nvPr/>
+        </p:nvSpPr>
+        <p:spPr>
+          <a:xfrm>
+            <a:off x="4937760" y="2487168"/>
+            <a:ext cx="3383280" cy="274320"/>
+          </a:xfrm>
+          <a:prstGeom prst="rect">
+            <a:avLst/>
+          </a:prstGeom>
+          <a:noFill/>
+          <a:ln/>
+        </p:spPr>
+        <p:txBody>
+          <a:bodyPr wrap="square" lIns="0" tIns="0" rIns="0" bIns="0" rtlCol="0" anchor="ctr"/>
+          <a:lstStyle/>
+          <a:p>
+            <a:pPr indent="0" marL="0">
+              <a:buNone/>
+            </a:pPr>
+            <a:r>
+              <a:rPr lang="en-US" sz="1000" dirty="0">
+                <a:solidFill>
+                  <a:srgbClr val="CADCFC"/>
+                </a:solidFill>
+                <a:latin typeface="맑은 고딕" pitchFamily="34" charset="0"/>
+                <a:ea typeface="맑은 고딕" pitchFamily="34" charset="-122"/>
+                <a:cs typeface="맑은 고딕" pitchFamily="34" charset="-120"/>
+              </a:rPr>
+              <a:t>전국 평균 3,343건과 거의 같습니다</a:t>
+            </a:r>
+            <a:endParaRPr lang="en-US" sz="1000" dirty="0"/>
+          </a:p>
+        </p:txBody>
+      </p:sp>
+      <p:sp>
+        <p:nvSpPr>
+          <p:cNvPr id="12" name="Shape 10"/>
+          <p:cNvSpPr/>
+          <p:nvPr/>
+        </p:nvSpPr>
+        <p:spPr>
+          <a:xfrm>
+            <a:off x="548640" y="3154680"/>
+            <a:ext cx="2596896" cy="749808"/>
+          </a:xfrm>
+          <a:prstGeom prst="roundRect">
+            <a:avLst>
+              <a:gd name="adj" fmla="val 7317"/>
+            </a:avLst>
+          </a:prstGeom>
+          <a:solidFill>
+            <a:srgbClr val="F2F6F9"/>
+          </a:solidFill>
+          <a:ln w="12700">
+            <a:solidFill>
+              <a:srgbClr val="E3EAF0"/>
+            </a:solidFill>
+            <a:prstDash val="solid"/>
+          </a:ln>
+        </p:spPr>
+      </p:sp>
+      <p:sp>
+        <p:nvSpPr>
+          <p:cNvPr id="13" name="Text 11"/>
+          <p:cNvSpPr txBox="1"/>
+          <p:nvPr/>
+        </p:nvSpPr>
+        <p:spPr>
+          <a:xfrm>
+            <a:off x="713232" y="3246120"/>
+            <a:ext cx="2286000" cy="329184"/>
+          </a:xfrm>
+          <a:prstGeom prst="rect">
+            <a:avLst/>
+          </a:prstGeom>
+          <a:noFill/>
+          <a:ln/>
+        </p:spPr>
+        <p:txBody>
+          <a:bodyPr wrap="square" lIns="0" tIns="0" rIns="0" bIns="0" rtlCol="0" anchor="ctr"/>
+          <a:lstStyle/>
+          <a:p>
+            <a:pPr indent="0" marL="0">
+              <a:buNone/>
+            </a:pPr>
+            <a:r>
+              <a:rPr lang="en-US" sz="1600" b="1" dirty="0">
+                <a:solidFill>
+                  <a:srgbClr val="065A82"/>
+                </a:solidFill>
+                <a:latin typeface="맑은 고딕" pitchFamily="34" charset="0"/>
+                <a:ea typeface="맑은 고딕" pitchFamily="34" charset="-122"/>
+                <a:cs typeface="맑은 고딕" pitchFamily="34" charset="-120"/>
+              </a:rPr>
+              <a:t>1,384만 명</a:t>
+            </a:r>
+            <a:endParaRPr lang="en-US" sz="1600" dirty="0"/>
+          </a:p>
+        </p:txBody>
+      </p:sp>
+      <p:sp>
+        <p:nvSpPr>
+          <p:cNvPr id="14" name="Text 12"/>
+          <p:cNvSpPr txBox="1"/>
+          <p:nvPr/>
+        </p:nvSpPr>
+        <p:spPr>
+          <a:xfrm>
+            <a:off x="713232" y="3584448"/>
+            <a:ext cx="2286000" cy="256032"/>
+          </a:xfrm>
+          <a:prstGeom prst="rect">
+            <a:avLst/>
+          </a:prstGeom>
+          <a:noFill/>
+          <a:ln/>
+        </p:spPr>
+        <p:txBody>
+          <a:bodyPr wrap="square" lIns="0" tIns="0" rIns="0" bIns="0" rtlCol="0" anchor="ctr"/>
+          <a:lstStyle/>
+          <a:p>
+            <a:pPr indent="0" marL="0">
+              <a:buNone/>
+            </a:pPr>
+            <a:r>
+              <a:rPr lang="en-US" sz="1000" dirty="0">
+                <a:solidFill>
+                  <a:srgbClr val="5A6A78"/>
+                </a:solidFill>
+                <a:latin typeface="맑은 고딕" pitchFamily="34" charset="0"/>
+                <a:ea typeface="맑은 고딕" pitchFamily="34" charset="-122"/>
+                <a:cs typeface="맑은 고딕" pitchFamily="34" charset="-120"/>
+              </a:rPr>
+              <a:t>2025년 제주 방문 관광객</a:t>
+            </a:r>
+            <a:endParaRPr lang="en-US" sz="1000" dirty="0"/>
+          </a:p>
+        </p:txBody>
+      </p:sp>
+      <p:sp>
+        <p:nvSpPr>
+          <p:cNvPr id="15" name="Shape 13"/>
+          <p:cNvSpPr/>
+          <p:nvPr/>
+        </p:nvSpPr>
+        <p:spPr>
+          <a:xfrm>
+            <a:off x="3273552" y="3154680"/>
+            <a:ext cx="2596896" cy="749808"/>
+          </a:xfrm>
+          <a:prstGeom prst="roundRect">
+            <a:avLst>
+              <a:gd name="adj" fmla="val 7317"/>
+            </a:avLst>
+          </a:prstGeom>
+          <a:solidFill>
+            <a:srgbClr val="F2F6F9"/>
+          </a:solidFill>
+          <a:ln w="12700">
+            <a:solidFill>
+              <a:srgbClr val="E3EAF0"/>
+            </a:solidFill>
+            <a:prstDash val="solid"/>
+          </a:ln>
+        </p:spPr>
+      </p:sp>
+      <p:sp>
+        <p:nvSpPr>
+          <p:cNvPr id="16" name="Text 14"/>
+          <p:cNvSpPr txBox="1"/>
+          <p:nvPr/>
+        </p:nvSpPr>
+        <p:spPr>
+          <a:xfrm>
+            <a:off x="3438144" y="3246120"/>
+            <a:ext cx="2286000" cy="329184"/>
+          </a:xfrm>
+          <a:prstGeom prst="rect">
+            <a:avLst/>
+          </a:prstGeom>
+          <a:noFill/>
+          <a:ln/>
+        </p:spPr>
+        <p:txBody>
+          <a:bodyPr wrap="square" lIns="0" tIns="0" rIns="0" bIns="0" rtlCol="0" anchor="ctr"/>
+          <a:lstStyle/>
+          <a:p>
+            <a:pPr indent="0" marL="0">
+              <a:buNone/>
+            </a:pPr>
+            <a:r>
+              <a:rPr lang="en-US" sz="1600" b="1" dirty="0">
+                <a:solidFill>
+                  <a:srgbClr val="065A82"/>
+                </a:solidFill>
+                <a:latin typeface="맑은 고딕" pitchFamily="34" charset="0"/>
+                <a:ea typeface="맑은 고딕" pitchFamily="34" charset="-122"/>
+                <a:cs typeface="맑은 고딕" pitchFamily="34" charset="-120"/>
+              </a:rPr>
+              <a:t>66만 명</a:t>
+            </a:r>
+            <a:endParaRPr lang="en-US" sz="1600" dirty="0"/>
+          </a:p>
+        </p:txBody>
+      </p:sp>
+      <p:sp>
+        <p:nvSpPr>
+          <p:cNvPr id="17" name="Text 15"/>
+          <p:cNvSpPr txBox="1"/>
+          <p:nvPr/>
+        </p:nvSpPr>
+        <p:spPr>
+          <a:xfrm>
+            <a:off x="3438144" y="3584448"/>
+            <a:ext cx="2286000" cy="256032"/>
+          </a:xfrm>
+          <a:prstGeom prst="rect">
+            <a:avLst/>
+          </a:prstGeom>
+          <a:noFill/>
+          <a:ln/>
+        </p:spPr>
+        <p:txBody>
+          <a:bodyPr wrap="square" lIns="0" tIns="0" rIns="0" bIns="0" rtlCol="0" anchor="ctr"/>
+          <a:lstStyle/>
+          <a:p>
+            <a:pPr indent="0" marL="0">
+              <a:buNone/>
+            </a:pPr>
+            <a:r>
+              <a:rPr lang="en-US" sz="1000" dirty="0">
+                <a:solidFill>
+                  <a:srgbClr val="5A6A78"/>
+                </a:solidFill>
+                <a:latin typeface="맑은 고딕" pitchFamily="34" charset="0"/>
+                <a:ea typeface="맑은 고딕" pitchFamily="34" charset="-122"/>
+                <a:cs typeface="맑은 고딕" pitchFamily="34" charset="-120"/>
+              </a:rPr>
+              <a:t>주민등록인구 (2026. 6.)</a:t>
+            </a:r>
+            <a:endParaRPr lang="en-US" sz="1000" dirty="0"/>
+          </a:p>
+        </p:txBody>
+      </p:sp>
+      <p:sp>
+        <p:nvSpPr>
+          <p:cNvPr id="18" name="Shape 16"/>
+          <p:cNvSpPr/>
+          <p:nvPr/>
+        </p:nvSpPr>
+        <p:spPr>
+          <a:xfrm>
+            <a:off x="5998464" y="3154680"/>
+            <a:ext cx="2596896" cy="749808"/>
+          </a:xfrm>
+          <a:prstGeom prst="roundRect">
+            <a:avLst>
+              <a:gd name="adj" fmla="val 7317"/>
+            </a:avLst>
+          </a:prstGeom>
+          <a:solidFill>
+            <a:srgbClr val="F2F6F9"/>
+          </a:solidFill>
+          <a:ln w="12700">
+            <a:solidFill>
+              <a:srgbClr val="E3EAF0"/>
+            </a:solidFill>
+            <a:prstDash val="solid"/>
+          </a:ln>
+        </p:spPr>
+      </p:sp>
+      <p:sp>
+        <p:nvSpPr>
+          <p:cNvPr id="19" name="Text 17"/>
+          <p:cNvSpPr txBox="1"/>
+          <p:nvPr/>
+        </p:nvSpPr>
+        <p:spPr>
+          <a:xfrm>
+            <a:off x="6163056" y="3246120"/>
+            <a:ext cx="2286000" cy="329184"/>
+          </a:xfrm>
+          <a:prstGeom prst="rect">
+            <a:avLst/>
+          </a:prstGeom>
+          <a:noFill/>
+          <a:ln/>
+        </p:spPr>
+        <p:txBody>
+          <a:bodyPr wrap="square" lIns="0" tIns="0" rIns="0" bIns="0" rtlCol="0" anchor="ctr"/>
+          <a:lstStyle/>
+          <a:p>
+            <a:pPr indent="0" marL="0">
+              <a:buNone/>
+            </a:pPr>
+            <a:r>
+              <a:rPr lang="en-US" sz="1600" b="1" dirty="0">
+                <a:solidFill>
+                  <a:srgbClr val="065A82"/>
+                </a:solidFill>
+                <a:latin typeface="맑은 고딕" pitchFamily="34" charset="0"/>
+                <a:ea typeface="맑은 고딕" pitchFamily="34" charset="-122"/>
+                <a:cs typeface="맑은 고딕" pitchFamily="34" charset="-120"/>
+              </a:rPr>
+              <a:t>82만 명</a:t>
+            </a:r>
+            <a:endParaRPr lang="en-US" sz="1600" dirty="0"/>
+          </a:p>
+        </p:txBody>
+      </p:sp>
+      <p:sp>
+        <p:nvSpPr>
+          <p:cNvPr id="20" name="Text 18"/>
+          <p:cNvSpPr txBox="1"/>
+          <p:nvPr/>
+        </p:nvSpPr>
+        <p:spPr>
+          <a:xfrm>
+            <a:off x="6163056" y="3584448"/>
+            <a:ext cx="2286000" cy="256032"/>
+          </a:xfrm>
+          <a:prstGeom prst="rect">
+            <a:avLst/>
+          </a:prstGeom>
+          <a:noFill/>
+          <a:ln/>
+        </p:spPr>
+        <p:txBody>
+          <a:bodyPr wrap="square" lIns="0" tIns="0" rIns="0" bIns="0" rtlCol="0" anchor="ctr"/>
+          <a:lstStyle/>
+          <a:p>
+            <a:pPr indent="0" marL="0">
+              <a:buNone/>
+            </a:pPr>
+            <a:r>
+              <a:rPr lang="en-US" sz="1000" dirty="0">
+                <a:solidFill>
+                  <a:srgbClr val="5A6A78"/>
+                </a:solidFill>
+                <a:latin typeface="맑은 고딕" pitchFamily="34" charset="0"/>
+                <a:ea typeface="맑은 고딕" pitchFamily="34" charset="-122"/>
+                <a:cs typeface="맑은 고딕" pitchFamily="34" charset="-120"/>
+              </a:rPr>
+              <a:t>도 추계 생활인구</a:t>
+            </a:r>
+            <a:endParaRPr lang="en-US" sz="1000" dirty="0"/>
+          </a:p>
+        </p:txBody>
+      </p:sp>
+      <p:sp>
+        <p:nvSpPr>
+          <p:cNvPr id="21" name="Text 19"/>
+          <p:cNvSpPr txBox="1"/>
+          <p:nvPr/>
+        </p:nvSpPr>
+        <p:spPr>
+          <a:xfrm>
+            <a:off x="548640" y="4407408"/>
+            <a:ext cx="8046720" cy="365760"/>
+          </a:xfrm>
+          <a:prstGeom prst="rect">
+            <a:avLst/>
+          </a:prstGeom>
+          <a:noFill/>
+          <a:ln/>
+        </p:spPr>
+        <p:txBody>
+          <a:bodyPr wrap="square" lIns="0" tIns="0" rIns="0" bIns="0" rtlCol="0" anchor="ctr"/>
+          <a:lstStyle/>
+          <a:p>
+            <a:pPr indent="0" marL="0">
+              <a:buNone/>
+            </a:pPr>
+            <a:r>
+              <a:rPr lang="en-US" sz="1200" dirty="0">
+                <a:solidFill>
+                  <a:srgbClr val="10243A"/>
+                </a:solidFill>
+                <a:latin typeface="맑은 고딕" pitchFamily="34" charset="0"/>
+                <a:ea typeface="맑은 고딕" pitchFamily="34" charset="-122"/>
+                <a:cs typeface="맑은 고딕" pitchFamily="34" charset="-120"/>
+              </a:rPr>
+              <a:t>그렇다면 질문이 달라져야 합니다 — 부족하지 않은데, 왜 불안은 줄지 않는가.</a:t>
+            </a:r>
+            <a:endParaRPr lang="en-US" sz="1200" dirty="0"/>
+          </a:p>
+        </p:txBody>
+      </p:sp>
+      <p:sp>
+        <p:nvSpPr>
+          <p:cNvPr id="22" name="Text 20"/>
+          <p:cNvSpPr txBox="1"/>
+          <p:nvPr/>
+        </p:nvSpPr>
+        <p:spPr>
+          <a:xfrm>
+            <a:off x="548640" y="4773168"/>
+            <a:ext cx="8046720" cy="256032"/>
+          </a:xfrm>
+          <a:prstGeom prst="rect">
+            <a:avLst/>
+          </a:prstGeom>
+          <a:noFill/>
+          <a:ln/>
+        </p:spPr>
+        <p:txBody>
+          <a:bodyPr wrap="square" lIns="0" tIns="0" rIns="0" bIns="0" rtlCol="0" anchor="ctr"/>
+          <a:lstStyle/>
+          <a:p>
+            <a:pPr indent="0" marL="0">
+              <a:buNone/>
+            </a:pPr>
+            <a:r>
+              <a:rPr lang="en-US" sz="850" dirty="0">
+                <a:solidFill>
+                  <a:srgbClr val="8895A2"/>
+                </a:solidFill>
+                <a:latin typeface="맑은 고딕" pitchFamily="34" charset="0"/>
+                <a:ea typeface="맑은 고딕" pitchFamily="34" charset="-122"/>
+                <a:cs typeface="맑은 고딕" pitchFamily="34" charset="-120"/>
+              </a:rPr>
+              <a:t>출처: 경찰청 2025 범죄통계 · 행정안전부 주민등록인구 · 제주도관광협회 / 보정치는 단순 안분에 따른 개략 검산</a:t>
+            </a:r>
+            <a:endParaRPr lang="en-US" sz="850" dirty="0"/>
+          </a:p>
+        </p:txBody>
+      </p:sp>
+    </p:spTree>
+  </p:cSld>
+  <p:clrMapOvr>
+    <a:masterClrMapping/>
+  </p:clrMapOvr>
+</p:sld>
+</file>
+
+<file path=ppt/slides/slide4.xml><?xml version="1.0" encoding="utf-8"?>
+<p:sld xmlns:a="http://schemas.openxmlformats.org/drawingml/2006/main" xmlns:r="http://schemas.openxmlformats.org/officeDocument/2006/relationships" xmlns:p="http://schemas.openxmlformats.org/presentationml/2006/main">
+  <p:cSld name="Slide 4">
     <p:bg>
       <p:bgPr>
         <a:solidFill>
@@ -5527,7 +6979,7 @@
               <a:buNone/>
             </a:pPr>
             <a:r>
-              <a:rPr lang="en-US" sz="3200" b="1" dirty="0">
+              <a:rPr lang="en-US" sz="3000" b="1" dirty="0">
                 <a:solidFill>
                   <a:srgbClr val="FFFFFF"/>
                 </a:solidFill>
@@ -5535,9 +6987,9 @@
                 <a:ea typeface="맑은 고딕" pitchFamily="34" charset="-122"/>
                 <a:cs typeface="맑은 고딕" pitchFamily="34" charset="-120"/>
               </a:rPr>
-              <a:t>그런데 왜 불안은 줄지 않는가</a:t>
-            </a:r>
-            <a:endParaRPr lang="en-US" sz="3200" dirty="0"/>
+              <a:t>비어 있는 곳은 두 군데뿐입니다</a:t>
+            </a:r>
+            <a:endParaRPr lang="en-US" sz="3000" dirty="0"/>
           </a:p>
         </p:txBody>
       </p:sp>
@@ -5574,7 +7026,7 @@
                 <a:ea typeface="맑은 고딕" pitchFamily="34" charset="-122"/>
                 <a:cs typeface="맑은 고딕" pitchFamily="34" charset="-120"/>
               </a:rPr>
-              <a:t>네 가지 자산을 잇는 한 칸이 비어 있습니다</a:t>
+              <a:t>둘 다 사람을 더 뽑아서 메울 수 없는 공백입니다</a:t>
             </a:r>
             <a:endParaRPr lang="en-US" sz="1300" dirty="0"/>
           </a:p>
@@ -5588,12 +7040,12 @@
         </p:nvSpPr>
         <p:spPr>
           <a:xfrm>
-            <a:off x="548640" y="1600200"/>
-            <a:ext cx="1883664" cy="777240"/>
+            <a:off x="548640" y="1463040"/>
+            <a:ext cx="3931920" cy="2834640"/>
           </a:xfrm>
           <a:prstGeom prst="roundRect">
             <a:avLst>
-              <a:gd name="adj" fmla="val 7059"/>
+              <a:gd name="adj" fmla="val 1935"/>
             </a:avLst>
           </a:prstGeom>
           <a:solidFill>
@@ -5601,7 +7053,7 @@
           </a:solidFill>
           <a:ln w="12700">
             <a:solidFill>
-              <a:srgbClr val="1B3A57"/>
+              <a:srgbClr val="27506F"/>
             </a:solidFill>
             <a:prstDash val="solid"/>
           </a:ln>
@@ -5615,24 +7067,102 @@
         </p:nvSpPr>
         <p:spPr>
           <a:xfrm>
-            <a:off x="548640" y="1600200"/>
-            <a:ext cx="1883664" cy="777240"/>
-          </a:xfrm>
-          <a:prstGeom prst="rect">
-            <a:avLst/>
-          </a:prstGeom>
-          <a:noFill/>
-          <a:ln/>
-        </p:spPr>
-        <p:txBody>
-          <a:bodyPr wrap="square" lIns="0" tIns="0" rIns="0" bIns="0" rtlCol="0" anchor="ctr"/>
-          <a:lstStyle/>
-          <a:p>
-            <a:pPr algn="ctr" indent="0" marL="0">
-              <a:buNone/>
-            </a:pPr>
-            <a:r>
-              <a:rPr lang="en-US" sz="1300" dirty="0">
+            <a:off x="768096" y="1600200"/>
+            <a:ext cx="3474720" cy="256032"/>
+          </a:xfrm>
+          <a:prstGeom prst="rect">
+            <a:avLst/>
+          </a:prstGeom>
+          <a:noFill/>
+          <a:ln/>
+        </p:spPr>
+        <p:txBody>
+          <a:bodyPr wrap="square" lIns="0" tIns="0" rIns="0" bIns="0" rtlCol="0" anchor="ctr"/>
+          <a:lstStyle/>
+          <a:p>
+            <a:pPr indent="0" marL="0">
+              <a:buNone/>
+            </a:pPr>
+            <a:r>
+              <a:rPr lang="en-US" sz="1100" b="1" dirty="0">
+                <a:solidFill>
+                  <a:srgbClr val="E0523C"/>
+                </a:solidFill>
+                <a:latin typeface="맑은 고딕" pitchFamily="34" charset="0"/>
+                <a:ea typeface="맑은 고딕" pitchFamily="34" charset="-122"/>
+                <a:cs typeface="맑은 고딕" pitchFamily="34" charset="-120"/>
+              </a:rPr>
+              <a:t>공백 ①</a:t>
+            </a:r>
+            <a:endParaRPr lang="en-US" sz="1100" dirty="0"/>
+          </a:p>
+        </p:txBody>
+      </p:sp>
+      <p:sp>
+        <p:nvSpPr>
+          <p:cNvPr id="6" name="Text 4"/>
+          <p:cNvSpPr txBox="1"/>
+          <p:nvPr/>
+        </p:nvSpPr>
+        <p:spPr>
+          <a:xfrm>
+            <a:off x="768096" y="1856232"/>
+            <a:ext cx="3474720" cy="329184"/>
+          </a:xfrm>
+          <a:prstGeom prst="rect">
+            <a:avLst/>
+          </a:prstGeom>
+          <a:noFill/>
+          <a:ln/>
+        </p:spPr>
+        <p:txBody>
+          <a:bodyPr wrap="square" lIns="0" tIns="0" rIns="0" bIns="0" rtlCol="0" anchor="ctr"/>
+          <a:lstStyle/>
+          <a:p>
+            <a:pPr indent="0" marL="0">
+              <a:buNone/>
+            </a:pPr>
+            <a:r>
+              <a:rPr lang="en-US" sz="1600" b="1" dirty="0">
+                <a:solidFill>
+                  <a:srgbClr val="FFFFFF"/>
+                </a:solidFill>
+                <a:latin typeface="맑은 고딕" pitchFamily="34" charset="0"/>
+                <a:ea typeface="맑은 고딕" pitchFamily="34" charset="-122"/>
+                <a:cs typeface="맑은 고딕" pitchFamily="34" charset="-120"/>
+              </a:rPr>
+              <a:t>자원이 닿지 않는 공간</a:t>
+            </a:r>
+            <a:endParaRPr lang="en-US" sz="1600" dirty="0"/>
+          </a:p>
+        </p:txBody>
+      </p:sp>
+      <p:sp>
+        <p:nvSpPr>
+          <p:cNvPr id="7" name="Text 5"/>
+          <p:cNvSpPr txBox="1"/>
+          <p:nvPr/>
+        </p:nvSpPr>
+        <p:spPr>
+          <a:xfrm>
+            <a:off x="768096" y="2304288"/>
+            <a:ext cx="3474720" cy="256032"/>
+          </a:xfrm>
+          <a:prstGeom prst="rect">
+            <a:avLst/>
+          </a:prstGeom>
+          <a:noFill/>
+          <a:ln/>
+        </p:spPr>
+        <p:txBody>
+          <a:bodyPr wrap="square" lIns="0" tIns="0" rIns="0" bIns="0" rtlCol="0" anchor="ctr"/>
+          <a:lstStyle/>
+          <a:p>
+            <a:pPr indent="0" marL="0">
+              <a:buNone/>
+            </a:pPr>
+            <a:r>
+              <a:rPr lang="en-US" sz="1200" b="1" dirty="0">
                 <a:solidFill>
                   <a:srgbClr val="CADCFC"/>
                 </a:solidFill>
@@ -5640,26 +7170,230 @@
                 <a:ea typeface="맑은 고딕" pitchFamily="34" charset="-122"/>
                 <a:cs typeface="맑은 고딕" pitchFamily="34" charset="-120"/>
               </a:rPr>
-              <a:t>자치경찰단</a:t>
-            </a:r>
-            <a:endParaRPr lang="en-US" sz="1300" dirty="0"/>
-          </a:p>
-        </p:txBody>
-      </p:sp>
-      <p:sp>
-        <p:nvSpPr>
-          <p:cNvPr id="6" name="Shape 4"/>
+              <a:t>CCTV 19,096대</a:t>
+            </a:r>
+            <a:endParaRPr lang="en-US" sz="1200" dirty="0"/>
+          </a:p>
+        </p:txBody>
+      </p:sp>
+      <p:sp>
+        <p:nvSpPr>
+          <p:cNvPr id="8" name="Text 6"/>
+          <p:cNvSpPr txBox="1"/>
+          <p:nvPr/>
+        </p:nvSpPr>
+        <p:spPr>
+          <a:xfrm>
+            <a:off x="768096" y="2551176"/>
+            <a:ext cx="3474720" cy="347472"/>
+          </a:xfrm>
+          <a:prstGeom prst="rect">
+            <a:avLst/>
+          </a:prstGeom>
+          <a:noFill/>
+          <a:ln/>
+        </p:spPr>
+        <p:txBody>
+          <a:bodyPr wrap="square" lIns="0" tIns="0" rIns="0" bIns="0" rtlCol="0" anchor="ctr"/>
+          <a:lstStyle/>
+          <a:p>
+            <a:pPr indent="0" marL="0">
+              <a:lnSpc>
+                <a:spcPct val="115000"/>
+              </a:lnSpc>
+              <a:buNone/>
+            </a:pPr>
+            <a:r>
+              <a:rPr lang="en-US" sz="950" dirty="0">
+                <a:solidFill>
+                  <a:srgbClr val="8FB4C9"/>
+                </a:solidFill>
+                <a:latin typeface="맑은 고딕" pitchFamily="34" charset="0"/>
+                <a:ea typeface="맑은 고딕" pitchFamily="34" charset="-122"/>
+                <a:cs typeface="맑은 고딕" pitchFamily="34" charset="-120"/>
+              </a:rPr>
+              <a:t>전부 고정형 — 정해진 지점만 봅니다</a:t>
+            </a:r>
+            <a:endParaRPr lang="en-US" sz="950" dirty="0"/>
+          </a:p>
+        </p:txBody>
+      </p:sp>
+      <p:sp>
+        <p:nvSpPr>
+          <p:cNvPr id="9" name="Text 7"/>
+          <p:cNvSpPr txBox="1"/>
+          <p:nvPr/>
+        </p:nvSpPr>
+        <p:spPr>
+          <a:xfrm>
+            <a:off x="768096" y="2944368"/>
+            <a:ext cx="3474720" cy="256032"/>
+          </a:xfrm>
+          <a:prstGeom prst="rect">
+            <a:avLst/>
+          </a:prstGeom>
+          <a:noFill/>
+          <a:ln/>
+        </p:spPr>
+        <p:txBody>
+          <a:bodyPr wrap="square" lIns="0" tIns="0" rIns="0" bIns="0" rtlCol="0" anchor="ctr"/>
+          <a:lstStyle/>
+          <a:p>
+            <a:pPr indent="0" marL="0">
+              <a:buNone/>
+            </a:pPr>
+            <a:r>
+              <a:rPr lang="en-US" sz="1200" b="1" dirty="0">
+                <a:solidFill>
+                  <a:srgbClr val="CADCFC"/>
+                </a:solidFill>
+                <a:latin typeface="맑은 고딕" pitchFamily="34" charset="0"/>
+                <a:ea typeface="맑은 고딕" pitchFamily="34" charset="-122"/>
+                <a:cs typeface="맑은 고딕" pitchFamily="34" charset="-120"/>
+              </a:rPr>
+              <a:t>산악사고 5년 2,547건</a:t>
+            </a:r>
+            <a:endParaRPr lang="en-US" sz="1200" dirty="0"/>
+          </a:p>
+        </p:txBody>
+      </p:sp>
+      <p:sp>
+        <p:nvSpPr>
+          <p:cNvPr id="10" name="Text 8"/>
+          <p:cNvSpPr txBox="1"/>
+          <p:nvPr/>
+        </p:nvSpPr>
+        <p:spPr>
+          <a:xfrm>
+            <a:off x="768096" y="3191256"/>
+            <a:ext cx="3474720" cy="347472"/>
+          </a:xfrm>
+          <a:prstGeom prst="rect">
+            <a:avLst/>
+          </a:prstGeom>
+          <a:noFill/>
+          <a:ln/>
+        </p:spPr>
+        <p:txBody>
+          <a:bodyPr wrap="square" lIns="0" tIns="0" rIns="0" bIns="0" rtlCol="0" anchor="ctr"/>
+          <a:lstStyle/>
+          <a:p>
+            <a:pPr indent="0" marL="0">
+              <a:lnSpc>
+                <a:spcPct val="115000"/>
+              </a:lnSpc>
+              <a:buNone/>
+            </a:pPr>
+            <a:r>
+              <a:rPr lang="en-US" sz="950" dirty="0">
+                <a:solidFill>
+                  <a:srgbClr val="8FB4C9"/>
+                </a:solidFill>
+                <a:latin typeface="맑은 고딕" pitchFamily="34" charset="0"/>
+                <a:ea typeface="맑은 고딕" pitchFamily="34" charset="-122"/>
+                <a:cs typeface="맑은 고딕" pitchFamily="34" charset="-120"/>
+              </a:rPr>
+              <a:t>올해 실족·추락 107건 = 작년 한 해의 90.7%</a:t>
+            </a:r>
+            <a:endParaRPr lang="en-US" sz="950" dirty="0"/>
+          </a:p>
+        </p:txBody>
+      </p:sp>
+      <p:sp>
+        <p:nvSpPr>
+          <p:cNvPr id="11" name="Text 9"/>
+          <p:cNvSpPr txBox="1"/>
+          <p:nvPr/>
+        </p:nvSpPr>
+        <p:spPr>
+          <a:xfrm>
+            <a:off x="768096" y="3584448"/>
+            <a:ext cx="3474720" cy="256032"/>
+          </a:xfrm>
+          <a:prstGeom prst="rect">
+            <a:avLst/>
+          </a:prstGeom>
+          <a:noFill/>
+          <a:ln/>
+        </p:spPr>
+        <p:txBody>
+          <a:bodyPr wrap="square" lIns="0" tIns="0" rIns="0" bIns="0" rtlCol="0" anchor="ctr"/>
+          <a:lstStyle/>
+          <a:p>
+            <a:pPr indent="0" marL="0">
+              <a:buNone/>
+            </a:pPr>
+            <a:r>
+              <a:rPr lang="en-US" sz="1200" b="1" dirty="0">
+                <a:solidFill>
+                  <a:srgbClr val="CADCFC"/>
+                </a:solidFill>
+                <a:latin typeface="맑은 고딕" pitchFamily="34" charset="0"/>
+                <a:ea typeface="맑은 고딕" pitchFamily="34" charset="-122"/>
+                <a:cs typeface="맑은 고딕" pitchFamily="34" charset="-120"/>
+              </a:rPr>
+              <a:t>수난사고 6월 70건 → 7월 126건</a:t>
+            </a:r>
+            <a:endParaRPr lang="en-US" sz="1200" dirty="0"/>
+          </a:p>
+        </p:txBody>
+      </p:sp>
+      <p:sp>
+        <p:nvSpPr>
+          <p:cNvPr id="12" name="Text 10"/>
+          <p:cNvSpPr txBox="1"/>
+          <p:nvPr/>
+        </p:nvSpPr>
+        <p:spPr>
+          <a:xfrm>
+            <a:off x="768096" y="3831336"/>
+            <a:ext cx="3474720" cy="347472"/>
+          </a:xfrm>
+          <a:prstGeom prst="rect">
+            <a:avLst/>
+          </a:prstGeom>
+          <a:noFill/>
+          <a:ln/>
+        </p:spPr>
+        <p:txBody>
+          <a:bodyPr wrap="square" lIns="0" tIns="0" rIns="0" bIns="0" rtlCol="0" anchor="ctr"/>
+          <a:lstStyle/>
+          <a:p>
+            <a:pPr indent="0" marL="0">
+              <a:lnSpc>
+                <a:spcPct val="115000"/>
+              </a:lnSpc>
+              <a:buNone/>
+            </a:pPr>
+            <a:r>
+              <a:rPr lang="en-US" sz="950" dirty="0">
+                <a:solidFill>
+                  <a:srgbClr val="8FB4C9"/>
+                </a:solidFill>
+                <a:latin typeface="맑은 고딕" pitchFamily="34" charset="0"/>
+                <a:ea typeface="맑은 고딕" pitchFamily="34" charset="-122"/>
+                <a:cs typeface="맑은 고딕" pitchFamily="34" charset="-120"/>
+              </a:rPr>
+              <a:t>오름·곶자왈·해안절벽·올레길에는 카메라가 없습니다</a:t>
+            </a:r>
+            <a:endParaRPr lang="en-US" sz="950" dirty="0"/>
+          </a:p>
+        </p:txBody>
+      </p:sp>
+      <p:sp>
+        <p:nvSpPr>
+          <p:cNvPr id="13" name="Shape 11"/>
           <p:cNvSpPr/>
           <p:nvPr/>
         </p:nvSpPr>
         <p:spPr>
           <a:xfrm>
-            <a:off x="2615184" y="1600200"/>
-            <a:ext cx="1883664" cy="777240"/>
+            <a:off x="4663440" y="1463040"/>
+            <a:ext cx="3931920" cy="2834640"/>
           </a:xfrm>
           <a:prstGeom prst="roundRect">
             <a:avLst>
-              <a:gd name="adj" fmla="val 7059"/>
+              <a:gd name="adj" fmla="val 1935"/>
             </a:avLst>
           </a:prstGeom>
           <a:solidFill>
@@ -5667,7 +7401,7 @@
           </a:solidFill>
           <a:ln w="12700">
             <a:solidFill>
-              <a:srgbClr val="1B3A57"/>
+              <a:srgbClr val="27506F"/>
             </a:solidFill>
             <a:prstDash val="solid"/>
           </a:ln>
@@ -5675,30 +7409,108 @@
       </p:sp>
       <p:sp>
         <p:nvSpPr>
-          <p:cNvPr id="7" name="Text 5"/>
-          <p:cNvSpPr txBox="1"/>
-          <p:nvPr/>
-        </p:nvSpPr>
-        <p:spPr>
-          <a:xfrm>
-            <a:off x="2615184" y="1600200"/>
-            <a:ext cx="1883664" cy="777240"/>
-          </a:xfrm>
-          <a:prstGeom prst="rect">
-            <a:avLst/>
-          </a:prstGeom>
-          <a:noFill/>
-          <a:ln/>
-        </p:spPr>
-        <p:txBody>
-          <a:bodyPr wrap="square" lIns="0" tIns="0" rIns="0" bIns="0" rtlCol="0" anchor="ctr"/>
-          <a:lstStyle/>
-          <a:p>
-            <a:pPr algn="ctr" indent="0" marL="0">
-              <a:buNone/>
-            </a:pPr>
-            <a:r>
-              <a:rPr lang="en-US" sz="1300" dirty="0">
+          <p:cNvPr id="14" name="Text 12"/>
+          <p:cNvSpPr txBox="1"/>
+          <p:nvPr/>
+        </p:nvSpPr>
+        <p:spPr>
+          <a:xfrm>
+            <a:off x="4882896" y="1600200"/>
+            <a:ext cx="3474720" cy="256032"/>
+          </a:xfrm>
+          <a:prstGeom prst="rect">
+            <a:avLst/>
+          </a:prstGeom>
+          <a:noFill/>
+          <a:ln/>
+        </p:spPr>
+        <p:txBody>
+          <a:bodyPr wrap="square" lIns="0" tIns="0" rIns="0" bIns="0" rtlCol="0" anchor="ctr"/>
+          <a:lstStyle/>
+          <a:p>
+            <a:pPr indent="0" marL="0">
+              <a:buNone/>
+            </a:pPr>
+            <a:r>
+              <a:rPr lang="en-US" sz="1100" b="1" dirty="0">
+                <a:solidFill>
+                  <a:srgbClr val="E0523C"/>
+                </a:solidFill>
+                <a:latin typeface="맑은 고딕" pitchFamily="34" charset="0"/>
+                <a:ea typeface="맑은 고딕" pitchFamily="34" charset="-122"/>
+                <a:cs typeface="맑은 고딕" pitchFamily="34" charset="-120"/>
+              </a:rPr>
+              <a:t>공백 ②</a:t>
+            </a:r>
+            <a:endParaRPr lang="en-US" sz="1100" dirty="0"/>
+          </a:p>
+        </p:txBody>
+      </p:sp>
+      <p:sp>
+        <p:nvSpPr>
+          <p:cNvPr id="15" name="Text 13"/>
+          <p:cNvSpPr txBox="1"/>
+          <p:nvPr/>
+        </p:nvSpPr>
+        <p:spPr>
+          <a:xfrm>
+            <a:off x="4882896" y="1856232"/>
+            <a:ext cx="3474720" cy="329184"/>
+          </a:xfrm>
+          <a:prstGeom prst="rect">
+            <a:avLst/>
+          </a:prstGeom>
+          <a:noFill/>
+          <a:ln/>
+        </p:spPr>
+        <p:txBody>
+          <a:bodyPr wrap="square" lIns="0" tIns="0" rIns="0" bIns="0" rtlCol="0" anchor="ctr"/>
+          <a:lstStyle/>
+          <a:p>
+            <a:pPr indent="0" marL="0">
+              <a:buNone/>
+            </a:pPr>
+            <a:r>
+              <a:rPr lang="en-US" sz="1600" b="1" dirty="0">
+                <a:solidFill>
+                  <a:srgbClr val="FFFFFF"/>
+                </a:solidFill>
+                <a:latin typeface="맑은 고딕" pitchFamily="34" charset="0"/>
+                <a:ea typeface="맑은 고딕" pitchFamily="34" charset="-122"/>
+                <a:cs typeface="맑은 고딕" pitchFamily="34" charset="-120"/>
+              </a:rPr>
+              <a:t>자동으로 작동하지 않는 초동 절차</a:t>
+            </a:r>
+            <a:endParaRPr lang="en-US" sz="1600" dirty="0"/>
+          </a:p>
+        </p:txBody>
+      </p:sp>
+      <p:sp>
+        <p:nvSpPr>
+          <p:cNvPr id="16" name="Text 14"/>
+          <p:cNvSpPr txBox="1"/>
+          <p:nvPr/>
+        </p:nvSpPr>
+        <p:spPr>
+          <a:xfrm>
+            <a:off x="4882896" y="2304288"/>
+            <a:ext cx="3474720" cy="256032"/>
+          </a:xfrm>
+          <a:prstGeom prst="rect">
+            <a:avLst/>
+          </a:prstGeom>
+          <a:noFill/>
+          <a:ln/>
+        </p:spPr>
+        <p:txBody>
+          <a:bodyPr wrap="square" lIns="0" tIns="0" rIns="0" bIns="0" rtlCol="0" anchor="ctr"/>
+          <a:lstStyle/>
+          <a:p>
+            <a:pPr indent="0" marL="0">
+              <a:buNone/>
+            </a:pPr>
+            <a:r>
+              <a:rPr lang="en-US" sz="1200" b="1" dirty="0">
                 <a:solidFill>
                   <a:srgbClr val="CADCFC"/>
                 </a:solidFill>
@@ -5706,65 +7518,80 @@
                 <a:ea typeface="맑은 고딕" pitchFamily="34" charset="-122"/>
                 <a:cs typeface="맑은 고딕" pitchFamily="34" charset="-120"/>
               </a:rPr>
-              <a:t>AI 치안드론</a:t>
-            </a:r>
-            <a:endParaRPr lang="en-US" sz="1300" dirty="0"/>
-          </a:p>
-        </p:txBody>
-      </p:sp>
-      <p:sp>
-        <p:nvSpPr>
-          <p:cNvPr id="8" name="Shape 6"/>
-          <p:cNvSpPr/>
-          <p:nvPr/>
-        </p:nvSpPr>
-        <p:spPr>
-          <a:xfrm>
-            <a:off x="4681728" y="1600200"/>
-            <a:ext cx="1883664" cy="777240"/>
-          </a:xfrm>
-          <a:prstGeom prst="roundRect">
-            <a:avLst>
-              <a:gd name="adj" fmla="val 7059"/>
-            </a:avLst>
-          </a:prstGeom>
-          <a:solidFill>
-            <a:srgbClr val="1B3A57"/>
-          </a:solidFill>
-          <a:ln w="12700">
-            <a:solidFill>
-              <a:srgbClr val="1B3A57"/>
-            </a:solidFill>
-            <a:prstDash val="solid"/>
-          </a:ln>
-        </p:spPr>
-      </p:sp>
-      <p:sp>
-        <p:nvSpPr>
-          <p:cNvPr id="9" name="Text 7"/>
-          <p:cNvSpPr txBox="1"/>
-          <p:nvPr/>
-        </p:nvSpPr>
-        <p:spPr>
-          <a:xfrm>
-            <a:off x="4681728" y="1600200"/>
-            <a:ext cx="1883664" cy="777240"/>
-          </a:xfrm>
-          <a:prstGeom prst="rect">
-            <a:avLst/>
-          </a:prstGeom>
-          <a:noFill/>
-          <a:ln/>
-        </p:spPr>
-        <p:txBody>
-          <a:bodyPr wrap="square" lIns="0" tIns="0" rIns="0" bIns="0" rtlCol="0" anchor="ctr"/>
-          <a:lstStyle/>
-          <a:p>
-            <a:pPr algn="ctr" indent="0" marL="0">
-              <a:buNone/>
-            </a:pPr>
-            <a:r>
-              <a:rPr lang="en-US" sz="1300" dirty="0">
+              <a:t>성인 실종신고 70,814건</a:t>
+            </a:r>
+            <a:endParaRPr lang="en-US" sz="1200" dirty="0"/>
+          </a:p>
+        </p:txBody>
+      </p:sp>
+      <p:sp>
+        <p:nvSpPr>
+          <p:cNvPr id="17" name="Text 15"/>
+          <p:cNvSpPr txBox="1"/>
+          <p:nvPr/>
+        </p:nvSpPr>
+        <p:spPr>
+          <a:xfrm>
+            <a:off x="4882896" y="2551176"/>
+            <a:ext cx="3474720" cy="347472"/>
+          </a:xfrm>
+          <a:prstGeom prst="rect">
+            <a:avLst/>
+          </a:prstGeom>
+          <a:noFill/>
+          <a:ln/>
+        </p:spPr>
+        <p:txBody>
+          <a:bodyPr wrap="square" lIns="0" tIns="0" rIns="0" bIns="0" rtlCol="0" anchor="ctr"/>
+          <a:lstStyle/>
+          <a:p>
+            <a:pPr indent="0" marL="0">
+              <a:lnSpc>
+                <a:spcPct val="115000"/>
+              </a:lnSpc>
+              <a:buNone/>
+            </a:pPr>
+            <a:r>
+              <a:rPr lang="en-US" sz="950" dirty="0">
+                <a:solidFill>
+                  <a:srgbClr val="8FB4C9"/>
+                </a:solidFill>
+                <a:latin typeface="맑은 고딕" pitchFamily="34" charset="0"/>
+                <a:ea typeface="맑은 고딕" pitchFamily="34" charset="-122"/>
+                <a:cs typeface="맑은 고딕" pitchFamily="34" charset="-120"/>
+              </a:rPr>
+              <a:t>전국, 지난해 접수 기준</a:t>
+            </a:r>
+            <a:endParaRPr lang="en-US" sz="950" dirty="0"/>
+          </a:p>
+        </p:txBody>
+      </p:sp>
+      <p:sp>
+        <p:nvSpPr>
+          <p:cNvPr id="18" name="Text 16"/>
+          <p:cNvSpPr txBox="1"/>
+          <p:nvPr/>
+        </p:nvSpPr>
+        <p:spPr>
+          <a:xfrm>
+            <a:off x="4882896" y="2944368"/>
+            <a:ext cx="3474720" cy="256032"/>
+          </a:xfrm>
+          <a:prstGeom prst="rect">
+            <a:avLst/>
+          </a:prstGeom>
+          <a:noFill/>
+          <a:ln/>
+        </p:spPr>
+        <p:txBody>
+          <a:bodyPr wrap="square" lIns="0" tIns="0" rIns="0" bIns="0" rtlCol="0" anchor="ctr"/>
+          <a:lstStyle/>
+          <a:p>
+            <a:pPr indent="0" marL="0">
+              <a:buNone/>
+            </a:pPr>
+            <a:r>
+              <a:rPr lang="en-US" sz="1200" b="1" dirty="0">
                 <a:solidFill>
                   <a:srgbClr val="CADCFC"/>
                 </a:solidFill>
@@ -5772,65 +7599,80 @@
                 <a:ea typeface="맑은 고딕" pitchFamily="34" charset="-122"/>
                 <a:cs typeface="맑은 고딕" pitchFamily="34" charset="-120"/>
               </a:rPr>
-              <a:t>드론특구</a:t>
-            </a:r>
-            <a:endParaRPr lang="en-US" sz="1300" dirty="0"/>
-          </a:p>
-        </p:txBody>
-      </p:sp>
-      <p:sp>
-        <p:nvSpPr>
-          <p:cNvPr id="10" name="Shape 8"/>
-          <p:cNvSpPr/>
-          <p:nvPr/>
-        </p:nvSpPr>
-        <p:spPr>
-          <a:xfrm>
-            <a:off x="6748272" y="1600200"/>
-            <a:ext cx="1883664" cy="777240"/>
-          </a:xfrm>
-          <a:prstGeom prst="roundRect">
-            <a:avLst>
-              <a:gd name="adj" fmla="val 7059"/>
-            </a:avLst>
-          </a:prstGeom>
-          <a:solidFill>
-            <a:srgbClr val="1B3A57"/>
-          </a:solidFill>
-          <a:ln w="12700">
-            <a:solidFill>
-              <a:srgbClr val="1B3A57"/>
-            </a:solidFill>
-            <a:prstDash val="solid"/>
-          </a:ln>
-        </p:spPr>
-      </p:sp>
-      <p:sp>
-        <p:nvSpPr>
-          <p:cNvPr id="11" name="Text 9"/>
-          <p:cNvSpPr txBox="1"/>
-          <p:nvPr/>
-        </p:nvSpPr>
-        <p:spPr>
-          <a:xfrm>
-            <a:off x="6748272" y="1600200"/>
-            <a:ext cx="1883664" cy="777240"/>
-          </a:xfrm>
-          <a:prstGeom prst="rect">
-            <a:avLst/>
-          </a:prstGeom>
-          <a:noFill/>
-          <a:ln/>
-        </p:spPr>
-        <p:txBody>
-          <a:bodyPr wrap="square" lIns="0" tIns="0" rIns="0" bIns="0" rtlCol="0" anchor="ctr"/>
-          <a:lstStyle/>
-          <a:p>
-            <a:pPr algn="ctr" indent="0" marL="0">
-              <a:buNone/>
-            </a:pPr>
-            <a:r>
-              <a:rPr lang="en-US" sz="1300" dirty="0">
+              <a:t>99.7% 수색 없이 종결</a:t>
+            </a:r>
+            <a:endParaRPr lang="en-US" sz="1200" dirty="0"/>
+          </a:p>
+        </p:txBody>
+      </p:sp>
+      <p:sp>
+        <p:nvSpPr>
+          <p:cNvPr id="19" name="Text 17"/>
+          <p:cNvSpPr txBox="1"/>
+          <p:nvPr/>
+        </p:nvSpPr>
+        <p:spPr>
+          <a:xfrm>
+            <a:off x="4882896" y="3191256"/>
+            <a:ext cx="3474720" cy="347472"/>
+          </a:xfrm>
+          <a:prstGeom prst="rect">
+            <a:avLst/>
+          </a:prstGeom>
+          <a:noFill/>
+          <a:ln/>
+        </p:spPr>
+        <p:txBody>
+          <a:bodyPr wrap="square" lIns="0" tIns="0" rIns="0" bIns="0" rtlCol="0" anchor="ctr"/>
+          <a:lstStyle/>
+          <a:p>
+            <a:pPr indent="0" marL="0">
+              <a:lnSpc>
+                <a:spcPct val="115000"/>
+              </a:lnSpc>
+              <a:buNone/>
+            </a:pPr>
+            <a:r>
+              <a:rPr lang="en-US" sz="950" dirty="0">
+                <a:solidFill>
+                  <a:srgbClr val="8FB4C9"/>
+                </a:solidFill>
+                <a:latin typeface="맑은 고딕" pitchFamily="34" charset="0"/>
+                <a:ea typeface="맑은 고딕" pitchFamily="34" charset="-122"/>
+                <a:cs typeface="맑은 고딕" pitchFamily="34" charset="-120"/>
+              </a:rPr>
+              <a:t>89.4%는 하루 안에 해제</a:t>
+            </a:r>
+            <a:endParaRPr lang="en-US" sz="950" dirty="0"/>
+          </a:p>
+        </p:txBody>
+      </p:sp>
+      <p:sp>
+        <p:nvSpPr>
+          <p:cNvPr id="20" name="Text 18"/>
+          <p:cNvSpPr txBox="1"/>
+          <p:nvPr/>
+        </p:nvSpPr>
+        <p:spPr>
+          <a:xfrm>
+            <a:off x="4882896" y="3584448"/>
+            <a:ext cx="3474720" cy="256032"/>
+          </a:xfrm>
+          <a:prstGeom prst="rect">
+            <a:avLst/>
+          </a:prstGeom>
+          <a:noFill/>
+          <a:ln/>
+        </p:spPr>
+        <p:txBody>
+          <a:bodyPr wrap="square" lIns="0" tIns="0" rIns="0" bIns="0" rtlCol="0" anchor="ctr"/>
+          <a:lstStyle/>
+          <a:p>
+            <a:pPr indent="0" marL="0">
+              <a:buNone/>
+            </a:pPr>
+            <a:r>
+              <a:rPr lang="en-US" sz="1200" b="1" dirty="0">
                 <a:solidFill>
                   <a:srgbClr val="CADCFC"/>
                 </a:solidFill>
@@ -5838,87 +7680,63 @@
                 <a:ea typeface="맑은 고딕" pitchFamily="34" charset="-122"/>
                 <a:cs typeface="맑은 고딕" pitchFamily="34" charset="-120"/>
               </a:rPr>
-              <a:t>공동체 치안망</a:t>
-            </a:r>
-            <a:endParaRPr lang="en-US" sz="1300" dirty="0"/>
-          </a:p>
-        </p:txBody>
-      </p:sp>
-      <p:sp>
-        <p:nvSpPr>
-          <p:cNvPr id="12" name="Shape 10"/>
-          <p:cNvSpPr/>
-          <p:nvPr/>
-        </p:nvSpPr>
-        <p:spPr>
-          <a:xfrm>
-            <a:off x="548640" y="2743200"/>
-            <a:ext cx="8046720" cy="1051560"/>
-          </a:xfrm>
-          <a:prstGeom prst="roundRect">
-            <a:avLst>
-              <a:gd name="adj" fmla="val 3478"/>
-            </a:avLst>
-          </a:prstGeom>
-          <a:solidFill>
-            <a:srgbClr val="10243A"/>
-          </a:solidFill>
-          <a:ln w="25400">
-            <a:solidFill>
-              <a:srgbClr val="E0523C"/>
-            </a:solidFill>
-            <a:prstDash val="dash"/>
-          </a:ln>
-        </p:spPr>
-      </p:sp>
-      <p:sp>
-        <p:nvSpPr>
-          <p:cNvPr id="13" name="Text 11"/>
-          <p:cNvSpPr txBox="1"/>
-          <p:nvPr/>
-        </p:nvSpPr>
-        <p:spPr>
-          <a:xfrm>
-            <a:off x="640080" y="2743200"/>
-            <a:ext cx="7863840" cy="1051560"/>
-          </a:xfrm>
-          <a:prstGeom prst="rect">
-            <a:avLst/>
-          </a:prstGeom>
-          <a:noFill/>
-          <a:ln/>
-        </p:spPr>
-        <p:txBody>
-          <a:bodyPr wrap="square" lIns="0" tIns="0" rIns="0" bIns="0" rtlCol="0" anchor="ctr"/>
-          <a:lstStyle/>
-          <a:p>
-            <a:pPr algn="ctr" indent="0" marL="0">
-              <a:buNone/>
-            </a:pPr>
-            <a:r>
-              <a:rPr lang="en-US" sz="2200" b="1" dirty="0">
-                <a:solidFill>
-                  <a:srgbClr val="E0523C"/>
-                </a:solidFill>
-                <a:latin typeface="맑은 고딕" pitchFamily="34" charset="0"/>
-                <a:ea typeface="맑은 고딕" pitchFamily="34" charset="-122"/>
-                <a:cs typeface="맑은 고딕" pitchFamily="34" charset="-120"/>
-              </a:rPr>
-              <a:t>비어 있는 것 :  신고 즉시 뜨는 '출동 체계'</a:t>
-            </a:r>
-            <a:endParaRPr lang="en-US" sz="2200" dirty="0"/>
-          </a:p>
-        </p:txBody>
-      </p:sp>
-      <p:sp>
-        <p:nvSpPr>
-          <p:cNvPr id="14" name="Text 12"/>
-          <p:cNvSpPr txBox="1"/>
-          <p:nvPr/>
-        </p:nvSpPr>
-        <p:spPr>
-          <a:xfrm>
-            <a:off x="548640" y="4023360"/>
+              <a:t>판단은 담당자 재량</a:t>
+            </a:r>
+            <a:endParaRPr lang="en-US" sz="1200" dirty="0"/>
+          </a:p>
+        </p:txBody>
+      </p:sp>
+      <p:sp>
+        <p:nvSpPr>
+          <p:cNvPr id="21" name="Text 19"/>
+          <p:cNvSpPr txBox="1"/>
+          <p:nvPr/>
+        </p:nvSpPr>
+        <p:spPr>
+          <a:xfrm>
+            <a:off x="4882896" y="3831336"/>
+            <a:ext cx="3474720" cy="347472"/>
+          </a:xfrm>
+          <a:prstGeom prst="rect">
+            <a:avLst/>
+          </a:prstGeom>
+          <a:noFill/>
+          <a:ln/>
+        </p:spPr>
+        <p:txBody>
+          <a:bodyPr wrap="square" lIns="0" tIns="0" rIns="0" bIns="0" rtlCol="0" anchor="ctr"/>
+          <a:lstStyle/>
+          <a:p>
+            <a:pPr indent="0" marL="0">
+              <a:lnSpc>
+                <a:spcPct val="115000"/>
+              </a:lnSpc>
+              <a:buNone/>
+            </a:pPr>
+            <a:r>
+              <a:rPr lang="en-US" sz="950" dirty="0">
+                <a:solidFill>
+                  <a:srgbClr val="8FB4C9"/>
+                </a:solidFill>
+                <a:latin typeface="맑은 고딕" pitchFamily="34" charset="0"/>
+                <a:ea typeface="맑은 고딕" pitchFamily="34" charset="-122"/>
+                <a:cs typeface="맑은 고딕" pitchFamily="34" charset="-120"/>
+              </a:rPr>
+              <a:t>올해 제주에서 흔들린 것은 범죄율이 아니라 초동대응 신뢰였습니다</a:t>
+            </a:r>
+            <a:endParaRPr lang="en-US" sz="950" dirty="0"/>
+          </a:p>
+        </p:txBody>
+      </p:sp>
+      <p:sp>
+        <p:nvSpPr>
+          <p:cNvPr id="22" name="Text 20"/>
+          <p:cNvSpPr txBox="1"/>
+          <p:nvPr/>
+        </p:nvSpPr>
+        <p:spPr>
+          <a:xfrm>
+            <a:off x="548640" y="4407408"/>
             <a:ext cx="8046720" cy="365760"/>
           </a:xfrm>
           <a:prstGeom prst="rect">
@@ -5931,11 +7749,11 @@
           <a:bodyPr wrap="square" lIns="0" tIns="0" rIns="0" bIns="0" rtlCol="0" anchor="ctr"/>
           <a:lstStyle/>
           <a:p>
-            <a:pPr algn="ctr" indent="0" marL="0">
-              <a:buNone/>
-            </a:pPr>
-            <a:r>
-              <a:rPr lang="en-US" sz="1400" dirty="0">
+            <a:pPr indent="0" marL="0">
+              <a:buNone/>
+            </a:pPr>
+            <a:r>
+              <a:rPr lang="en-US" sz="1200" dirty="0">
                 <a:solidFill>
                   <a:srgbClr val="8FB4C9"/>
                 </a:solidFill>
@@ -5943,915 +7761,48 @@
                 <a:ea typeface="맑은 고딕" pitchFamily="34" charset="-122"/>
                 <a:cs typeface="맑은 고딕" pitchFamily="34" charset="-120"/>
               </a:rPr>
-              <a:t>기체가 없어서가 아니라, 기체를 배치하는 방식이 비어 있습니다.</a:t>
-            </a:r>
-            <a:endParaRPr lang="en-US" sz="1400" dirty="0"/>
-          </a:p>
-        </p:txBody>
-      </p:sp>
-    </p:spTree>
-  </p:cSld>
-  <p:clrMapOvr>
-    <a:masterClrMapping/>
-  </p:clrMapOvr>
-</p:sld>
-</file>
-
-<file path=ppt/slides/slide4.xml><?xml version="1.0" encoding="utf-8"?>
-<p:sld xmlns:a="http://schemas.openxmlformats.org/drawingml/2006/main" xmlns:r="http://schemas.openxmlformats.org/officeDocument/2006/relationships" xmlns:p="http://schemas.openxmlformats.org/presentationml/2006/main">
-  <p:cSld name="Slide 4">
-    <p:spTree>
-      <p:nvGrpSpPr>
-        <p:cNvPr id="1" name=""/>
-        <p:cNvGrpSpPr/>
-        <p:nvPr/>
-      </p:nvGrpSpPr>
-      <p:grpSpPr>
-        <a:xfrm>
-          <a:off x="0" y="0"/>
-          <a:ext cx="0" cy="0"/>
-          <a:chOff x="0" y="0"/>
-          <a:chExt cx="0" cy="0"/>
-        </a:xfrm>
-      </p:grpSpPr>
-      <p:sp>
-        <p:nvSpPr>
-          <p:cNvPr id="2" name="Text 0"/>
-          <p:cNvSpPr txBox="1"/>
-          <p:nvPr/>
-        </p:nvSpPr>
-        <p:spPr>
-          <a:xfrm>
-            <a:off x="548640" y="384048"/>
-            <a:ext cx="8046720" cy="566928"/>
-          </a:xfrm>
-          <a:prstGeom prst="rect">
-            <a:avLst/>
-          </a:prstGeom>
-          <a:noFill/>
-          <a:ln/>
-        </p:spPr>
-        <p:txBody>
-          <a:bodyPr wrap="square" lIns="0" tIns="0" rIns="0" bIns="0" rtlCol="0" anchor="ctr"/>
-          <a:lstStyle/>
-          <a:p>
-            <a:pPr indent="0" marL="0">
-              <a:buNone/>
-            </a:pPr>
-            <a:r>
-              <a:rPr lang="en-US" sz="3200" b="1" dirty="0">
-                <a:solidFill>
-                  <a:srgbClr val="10243A"/>
-                </a:solidFill>
-                <a:latin typeface="맑은 고딕" pitchFamily="34" charset="0"/>
-                <a:ea typeface="맑은 고딕" pitchFamily="34" charset="-122"/>
-                <a:cs typeface="맑은 고딕" pitchFamily="34" charset="-120"/>
-              </a:rPr>
-              <a:t>문제는 '시간'입니다</a:t>
-            </a:r>
-            <a:endParaRPr lang="en-US" sz="3200" dirty="0"/>
-          </a:p>
-        </p:txBody>
-      </p:sp>
-      <p:sp>
-        <p:nvSpPr>
-          <p:cNvPr id="3" name="Text 1"/>
-          <p:cNvSpPr txBox="1"/>
-          <p:nvPr/>
-        </p:nvSpPr>
-        <p:spPr>
-          <a:xfrm>
-            <a:off x="548640" y="941832"/>
-            <a:ext cx="8046720" cy="329184"/>
-          </a:xfrm>
-          <a:prstGeom prst="rect">
-            <a:avLst/>
-          </a:prstGeom>
-          <a:noFill/>
-          <a:ln/>
-        </p:spPr>
-        <p:txBody>
-          <a:bodyPr wrap="square" lIns="0" tIns="0" rIns="0" bIns="0" rtlCol="0" anchor="ctr"/>
-          <a:lstStyle/>
-          <a:p>
-            <a:pPr indent="0" marL="0">
-              <a:buNone/>
-            </a:pPr>
-            <a:r>
-              <a:rPr lang="en-US" sz="1300" dirty="0">
-                <a:solidFill>
-                  <a:srgbClr val="5A6A78"/>
-                </a:solidFill>
-                <a:latin typeface="맑은 고딕" pitchFamily="34" charset="0"/>
-                <a:ea typeface="맑은 고딕" pitchFamily="34" charset="-122"/>
-                <a:cs typeface="맑은 고딕" pitchFamily="34" charset="-120"/>
-              </a:rPr>
-              <a:t>신고가 접수된 시점과, 하늘에서 그곳을 처음 본 시점 사이</a:t>
-            </a:r>
-            <a:endParaRPr lang="en-US" sz="1300" dirty="0"/>
-          </a:p>
-        </p:txBody>
-      </p:sp>
-      <p:sp>
-        <p:nvSpPr>
-          <p:cNvPr id="4" name="Text 2"/>
-          <p:cNvSpPr txBox="1"/>
-          <p:nvPr/>
-        </p:nvSpPr>
-        <p:spPr>
-          <a:xfrm>
-            <a:off x="548640" y="1481328"/>
-            <a:ext cx="2743200" cy="274320"/>
-          </a:xfrm>
-          <a:prstGeom prst="rect">
-            <a:avLst/>
-          </a:prstGeom>
-          <a:noFill/>
-          <a:ln/>
-        </p:spPr>
-        <p:txBody>
-          <a:bodyPr wrap="square" lIns="0" tIns="0" rIns="0" bIns="0" rtlCol="0" anchor="ctr"/>
-          <a:lstStyle/>
-          <a:p>
-            <a:pPr indent="0" marL="0">
-              <a:buNone/>
-            </a:pPr>
-            <a:r>
-              <a:rPr lang="en-US" sz="1100" b="1" dirty="0">
-                <a:solidFill>
-                  <a:srgbClr val="E0523C"/>
-                </a:solidFill>
-                <a:latin typeface="맑은 고딕" pitchFamily="34" charset="0"/>
-                <a:ea typeface="맑은 고딕" pitchFamily="34" charset="-122"/>
-                <a:cs typeface="맑은 고딕" pitchFamily="34" charset="-120"/>
-              </a:rPr>
-              <a:t>현행  ·  동원형</a:t>
-            </a:r>
-            <a:endParaRPr lang="en-US" sz="1100" dirty="0"/>
-          </a:p>
-        </p:txBody>
-      </p:sp>
-      <p:sp>
-        <p:nvSpPr>
-          <p:cNvPr id="5" name="Text 3"/>
-          <p:cNvSpPr txBox="1"/>
-          <p:nvPr/>
-        </p:nvSpPr>
-        <p:spPr>
-          <a:xfrm>
-            <a:off x="548640" y="1892808"/>
-            <a:ext cx="868680" cy="365760"/>
-          </a:xfrm>
-          <a:prstGeom prst="rect">
-            <a:avLst/>
-          </a:prstGeom>
-          <a:noFill/>
-          <a:ln/>
-        </p:spPr>
-        <p:txBody>
-          <a:bodyPr wrap="square" lIns="0" tIns="0" rIns="0" bIns="0" rtlCol="0" anchor="ctr"/>
-          <a:lstStyle/>
-          <a:p>
-            <a:pPr indent="0" marL="0">
-              <a:buNone/>
-            </a:pPr>
-            <a:endParaRPr lang="en-US" sz="1300" dirty="0"/>
-          </a:p>
-        </p:txBody>
-      </p:sp>
-      <p:sp>
-        <p:nvSpPr>
-          <p:cNvPr id="6" name="Shape 4"/>
-          <p:cNvSpPr/>
-          <p:nvPr/>
-        </p:nvSpPr>
-        <p:spPr>
-          <a:xfrm>
-            <a:off x="1481328" y="1783080"/>
-            <a:ext cx="1353312" cy="566928"/>
-          </a:xfrm>
-          <a:prstGeom prst="roundRect">
-            <a:avLst>
-              <a:gd name="adj" fmla="val 9677"/>
-            </a:avLst>
-          </a:prstGeom>
-          <a:solidFill>
-            <a:srgbClr val="FBE7E3"/>
-          </a:solidFill>
-          <a:ln w="12700">
-            <a:solidFill>
-              <a:srgbClr val="FBE7E3"/>
-            </a:solidFill>
-            <a:prstDash val="solid"/>
-          </a:ln>
-        </p:spPr>
-      </p:sp>
-      <p:sp>
-        <p:nvSpPr>
-          <p:cNvPr id="7" name="Text 5"/>
-          <p:cNvSpPr txBox="1"/>
-          <p:nvPr/>
-        </p:nvSpPr>
-        <p:spPr>
-          <a:xfrm>
-            <a:off x="1481328" y="1783080"/>
-            <a:ext cx="1353312" cy="566928"/>
-          </a:xfrm>
-          <a:prstGeom prst="rect">
-            <a:avLst/>
-          </a:prstGeom>
-          <a:noFill/>
-          <a:ln/>
-        </p:spPr>
-        <p:txBody>
-          <a:bodyPr wrap="square" lIns="0" tIns="0" rIns="0" bIns="0" rtlCol="0" anchor="ctr"/>
-          <a:lstStyle/>
-          <a:p>
-            <a:pPr algn="ctr" indent="0" marL="0">
-              <a:buNone/>
-            </a:pPr>
-            <a:r>
-              <a:rPr lang="en-US" sz="1100" dirty="0">
-                <a:solidFill>
-                  <a:srgbClr val="10243A"/>
-                </a:solidFill>
-                <a:latin typeface="맑은 고딕" pitchFamily="34" charset="0"/>
-                <a:ea typeface="맑은 고딕" pitchFamily="34" charset="-122"/>
-                <a:cs typeface="맑은 고딕" pitchFamily="34" charset="-120"/>
-              </a:rPr>
-              <a:t>신고 접수</a:t>
-            </a:r>
-            <a:endParaRPr lang="en-US" sz="1100" dirty="0"/>
-          </a:p>
-        </p:txBody>
-      </p:sp>
-      <p:sp>
-        <p:nvSpPr>
-          <p:cNvPr id="8" name="Text 6"/>
-          <p:cNvSpPr txBox="1"/>
-          <p:nvPr/>
-        </p:nvSpPr>
-        <p:spPr>
-          <a:xfrm>
-            <a:off x="2834640" y="1783080"/>
-            <a:ext cx="137160" cy="566928"/>
-          </a:xfrm>
-          <a:prstGeom prst="rect">
-            <a:avLst/>
-          </a:prstGeom>
-          <a:noFill/>
-          <a:ln/>
-        </p:spPr>
-        <p:txBody>
-          <a:bodyPr wrap="square" lIns="0" tIns="0" rIns="0" bIns="0" rtlCol="0" anchor="ctr"/>
-          <a:lstStyle/>
-          <a:p>
-            <a:pPr algn="ctr" indent="0" marL="0">
-              <a:buNone/>
-            </a:pPr>
-            <a:r>
-              <a:rPr lang="en-US" sz="1600" dirty="0">
-                <a:solidFill>
-                  <a:srgbClr val="5A6A78"/>
-                </a:solidFill>
-                <a:latin typeface="맑은 고딕" pitchFamily="34" charset="0"/>
-                <a:ea typeface="맑은 고딕" pitchFamily="34" charset="-122"/>
-                <a:cs typeface="맑은 고딕" pitchFamily="34" charset="-120"/>
-              </a:rPr>
-              <a:t>›</a:t>
-            </a:r>
-            <a:endParaRPr lang="en-US" sz="1600" dirty="0"/>
-          </a:p>
-        </p:txBody>
-      </p:sp>
-      <p:sp>
-        <p:nvSpPr>
-          <p:cNvPr id="9" name="Shape 7"/>
-          <p:cNvSpPr/>
-          <p:nvPr/>
-        </p:nvSpPr>
-        <p:spPr>
-          <a:xfrm>
-            <a:off x="2971800" y="1783080"/>
-            <a:ext cx="1353312" cy="566928"/>
-          </a:xfrm>
-          <a:prstGeom prst="roundRect">
-            <a:avLst>
-              <a:gd name="adj" fmla="val 9677"/>
-            </a:avLst>
-          </a:prstGeom>
-          <a:solidFill>
-            <a:srgbClr val="FBE7E3"/>
-          </a:solidFill>
-          <a:ln w="12700">
-            <a:solidFill>
-              <a:srgbClr val="FBE7E3"/>
-            </a:solidFill>
-            <a:prstDash val="solid"/>
-          </a:ln>
-        </p:spPr>
-      </p:sp>
-      <p:sp>
-        <p:nvSpPr>
-          <p:cNvPr id="10" name="Text 8"/>
-          <p:cNvSpPr txBox="1"/>
-          <p:nvPr/>
-        </p:nvSpPr>
-        <p:spPr>
-          <a:xfrm>
-            <a:off x="2971800" y="1783080"/>
-            <a:ext cx="1353312" cy="566928"/>
-          </a:xfrm>
-          <a:prstGeom prst="rect">
-            <a:avLst/>
-          </a:prstGeom>
-          <a:noFill/>
-          <a:ln/>
-        </p:spPr>
-        <p:txBody>
-          <a:bodyPr wrap="square" lIns="0" tIns="0" rIns="0" bIns="0" rtlCol="0" anchor="ctr"/>
-          <a:lstStyle/>
-          <a:p>
-            <a:pPr algn="ctr" indent="0" marL="0">
-              <a:buNone/>
-            </a:pPr>
-            <a:r>
-              <a:rPr lang="en-US" sz="1100" dirty="0">
-                <a:solidFill>
-                  <a:srgbClr val="10243A"/>
-                </a:solidFill>
-                <a:latin typeface="맑은 고딕" pitchFamily="34" charset="0"/>
-                <a:ea typeface="맑은 고딕" pitchFamily="34" charset="-122"/>
-                <a:cs typeface="맑은 고딕" pitchFamily="34" charset="-120"/>
-              </a:rPr>
-              <a:t>인력 이동</a:t>
-            </a:r>
-            <a:endParaRPr lang="en-US" sz="1100" dirty="0"/>
-          </a:p>
-        </p:txBody>
-      </p:sp>
-      <p:sp>
-        <p:nvSpPr>
-          <p:cNvPr id="11" name="Text 9"/>
-          <p:cNvSpPr txBox="1"/>
-          <p:nvPr/>
-        </p:nvSpPr>
-        <p:spPr>
-          <a:xfrm>
-            <a:off x="4325112" y="1783080"/>
-            <a:ext cx="137160" cy="566928"/>
-          </a:xfrm>
-          <a:prstGeom prst="rect">
-            <a:avLst/>
-          </a:prstGeom>
-          <a:noFill/>
-          <a:ln/>
-        </p:spPr>
-        <p:txBody>
-          <a:bodyPr wrap="square" lIns="0" tIns="0" rIns="0" bIns="0" rtlCol="0" anchor="ctr"/>
-          <a:lstStyle/>
-          <a:p>
-            <a:pPr algn="ctr" indent="0" marL="0">
-              <a:buNone/>
-            </a:pPr>
-            <a:r>
-              <a:rPr lang="en-US" sz="1600" dirty="0">
-                <a:solidFill>
-                  <a:srgbClr val="5A6A78"/>
-                </a:solidFill>
-                <a:latin typeface="맑은 고딕" pitchFamily="34" charset="0"/>
-                <a:ea typeface="맑은 고딕" pitchFamily="34" charset="-122"/>
-                <a:cs typeface="맑은 고딕" pitchFamily="34" charset="-120"/>
-              </a:rPr>
-              <a:t>›</a:t>
-            </a:r>
-            <a:endParaRPr lang="en-US" sz="1600" dirty="0"/>
-          </a:p>
-        </p:txBody>
-      </p:sp>
-      <p:sp>
-        <p:nvSpPr>
-          <p:cNvPr id="12" name="Shape 10"/>
-          <p:cNvSpPr/>
-          <p:nvPr/>
-        </p:nvSpPr>
-        <p:spPr>
-          <a:xfrm>
-            <a:off x="4462272" y="1783080"/>
-            <a:ext cx="1353312" cy="566928"/>
-          </a:xfrm>
-          <a:prstGeom prst="roundRect">
-            <a:avLst>
-              <a:gd name="adj" fmla="val 9677"/>
-            </a:avLst>
-          </a:prstGeom>
-          <a:solidFill>
-            <a:srgbClr val="FBE7E3"/>
-          </a:solidFill>
-          <a:ln w="12700">
-            <a:solidFill>
-              <a:srgbClr val="FBE7E3"/>
-            </a:solidFill>
-            <a:prstDash val="solid"/>
-          </a:ln>
-        </p:spPr>
-      </p:sp>
-      <p:sp>
-        <p:nvSpPr>
-          <p:cNvPr id="13" name="Text 11"/>
-          <p:cNvSpPr txBox="1"/>
-          <p:nvPr/>
-        </p:nvSpPr>
-        <p:spPr>
-          <a:xfrm>
-            <a:off x="4462272" y="1783080"/>
-            <a:ext cx="1353312" cy="566928"/>
-          </a:xfrm>
-          <a:prstGeom prst="rect">
-            <a:avLst/>
-          </a:prstGeom>
-          <a:noFill/>
-          <a:ln/>
-        </p:spPr>
-        <p:txBody>
-          <a:bodyPr wrap="square" lIns="0" tIns="0" rIns="0" bIns="0" rtlCol="0" anchor="ctr"/>
-          <a:lstStyle/>
-          <a:p>
-            <a:pPr algn="ctr" indent="0" marL="0">
-              <a:buNone/>
-            </a:pPr>
-            <a:r>
-              <a:rPr lang="en-US" sz="1100" dirty="0">
-                <a:solidFill>
-                  <a:srgbClr val="10243A"/>
-                </a:solidFill>
-                <a:latin typeface="맑은 고딕" pitchFamily="34" charset="0"/>
-                <a:ea typeface="맑은 고딕" pitchFamily="34" charset="-122"/>
-                <a:cs typeface="맑은 고딕" pitchFamily="34" charset="-120"/>
-              </a:rPr>
-              <a:t>현장 도착</a:t>
-            </a:r>
-            <a:endParaRPr lang="en-US" sz="1100" dirty="0"/>
-          </a:p>
-        </p:txBody>
-      </p:sp>
-      <p:sp>
-        <p:nvSpPr>
-          <p:cNvPr id="14" name="Text 12"/>
-          <p:cNvSpPr txBox="1"/>
-          <p:nvPr/>
-        </p:nvSpPr>
-        <p:spPr>
-          <a:xfrm>
-            <a:off x="5815584" y="1783080"/>
-            <a:ext cx="137160" cy="566928"/>
-          </a:xfrm>
-          <a:prstGeom prst="rect">
-            <a:avLst/>
-          </a:prstGeom>
-          <a:noFill/>
-          <a:ln/>
-        </p:spPr>
-        <p:txBody>
-          <a:bodyPr wrap="square" lIns="0" tIns="0" rIns="0" bIns="0" rtlCol="0" anchor="ctr"/>
-          <a:lstStyle/>
-          <a:p>
-            <a:pPr algn="ctr" indent="0" marL="0">
-              <a:buNone/>
-            </a:pPr>
-            <a:r>
-              <a:rPr lang="en-US" sz="1600" dirty="0">
-                <a:solidFill>
-                  <a:srgbClr val="5A6A78"/>
-                </a:solidFill>
-                <a:latin typeface="맑은 고딕" pitchFamily="34" charset="0"/>
-                <a:ea typeface="맑은 고딕" pitchFamily="34" charset="-122"/>
-                <a:cs typeface="맑은 고딕" pitchFamily="34" charset="-120"/>
-              </a:rPr>
-              <a:t>›</a:t>
-            </a:r>
-            <a:endParaRPr lang="en-US" sz="1600" dirty="0"/>
-          </a:p>
-        </p:txBody>
-      </p:sp>
-      <p:sp>
-        <p:nvSpPr>
-          <p:cNvPr id="15" name="Shape 13"/>
-          <p:cNvSpPr/>
-          <p:nvPr/>
-        </p:nvSpPr>
-        <p:spPr>
-          <a:xfrm>
-            <a:off x="5952744" y="1783080"/>
-            <a:ext cx="1353312" cy="566928"/>
-          </a:xfrm>
-          <a:prstGeom prst="roundRect">
-            <a:avLst>
-              <a:gd name="adj" fmla="val 9677"/>
-            </a:avLst>
-          </a:prstGeom>
-          <a:solidFill>
-            <a:srgbClr val="FBE7E3"/>
-          </a:solidFill>
-          <a:ln w="12700">
-            <a:solidFill>
-              <a:srgbClr val="FBE7E3"/>
-            </a:solidFill>
-            <a:prstDash val="solid"/>
-          </a:ln>
-        </p:spPr>
-      </p:sp>
-      <p:sp>
-        <p:nvSpPr>
-          <p:cNvPr id="16" name="Text 14"/>
-          <p:cNvSpPr txBox="1"/>
-          <p:nvPr/>
-        </p:nvSpPr>
-        <p:spPr>
-          <a:xfrm>
-            <a:off x="5952744" y="1783080"/>
-            <a:ext cx="1353312" cy="566928"/>
-          </a:xfrm>
-          <a:prstGeom prst="rect">
-            <a:avLst/>
-          </a:prstGeom>
-          <a:noFill/>
-          <a:ln/>
-        </p:spPr>
-        <p:txBody>
-          <a:bodyPr wrap="square" lIns="0" tIns="0" rIns="0" bIns="0" rtlCol="0" anchor="ctr"/>
-          <a:lstStyle/>
-          <a:p>
-            <a:pPr algn="ctr" indent="0" marL="0">
-              <a:buNone/>
-            </a:pPr>
-            <a:r>
-              <a:rPr lang="en-US" sz="1100" dirty="0">
-                <a:solidFill>
-                  <a:srgbClr val="10243A"/>
-                </a:solidFill>
-                <a:latin typeface="맑은 고딕" pitchFamily="34" charset="0"/>
-                <a:ea typeface="맑은 고딕" pitchFamily="34" charset="-122"/>
-                <a:cs typeface="맑은 고딕" pitchFamily="34" charset="-120"/>
-              </a:rPr>
-              <a:t>이륙</a:t>
-            </a:r>
-            <a:endParaRPr lang="en-US" sz="1100" dirty="0"/>
-          </a:p>
-        </p:txBody>
-      </p:sp>
-      <p:sp>
-        <p:nvSpPr>
-          <p:cNvPr id="17" name="Text 15"/>
-          <p:cNvSpPr txBox="1"/>
-          <p:nvPr/>
-        </p:nvSpPr>
-        <p:spPr>
-          <a:xfrm>
-            <a:off x="7315200" y="1783080"/>
-            <a:ext cx="1325880" cy="566928"/>
-          </a:xfrm>
-          <a:prstGeom prst="rect">
-            <a:avLst/>
-          </a:prstGeom>
-          <a:noFill/>
-          <a:ln/>
-        </p:spPr>
-        <p:txBody>
-          <a:bodyPr wrap="square" lIns="0" tIns="0" rIns="0" bIns="0" rtlCol="0" anchor="ctr"/>
-          <a:lstStyle/>
-          <a:p>
-            <a:pPr algn="r" indent="0" marL="0">
-              <a:buNone/>
-            </a:pPr>
-            <a:r>
-              <a:rPr lang="en-US" sz="1900" b="1" dirty="0">
-                <a:solidFill>
-                  <a:srgbClr val="E0523C"/>
-                </a:solidFill>
-                <a:latin typeface="맑은 고딕" pitchFamily="34" charset="0"/>
-                <a:ea typeface="맑은 고딕" pitchFamily="34" charset="-122"/>
-                <a:cs typeface="맑은 고딕" pitchFamily="34" charset="-120"/>
-              </a:rPr>
-              <a:t>수십 분</a:t>
-            </a:r>
-            <a:endParaRPr lang="en-US" sz="1900" dirty="0"/>
-          </a:p>
-        </p:txBody>
-      </p:sp>
-      <p:sp>
-        <p:nvSpPr>
-          <p:cNvPr id="18" name="Text 16"/>
-          <p:cNvSpPr txBox="1"/>
-          <p:nvPr/>
-        </p:nvSpPr>
-        <p:spPr>
-          <a:xfrm>
-            <a:off x="548640" y="2788920"/>
-            <a:ext cx="2743200" cy="274320"/>
-          </a:xfrm>
-          <a:prstGeom prst="rect">
-            <a:avLst/>
-          </a:prstGeom>
-          <a:noFill/>
-          <a:ln/>
-        </p:spPr>
-        <p:txBody>
-          <a:bodyPr wrap="square" lIns="0" tIns="0" rIns="0" bIns="0" rtlCol="0" anchor="ctr"/>
-          <a:lstStyle/>
-          <a:p>
-            <a:pPr indent="0" marL="0">
-              <a:buNone/>
-            </a:pPr>
-            <a:r>
-              <a:rPr lang="en-US" sz="1100" b="1" dirty="0">
-                <a:solidFill>
-                  <a:srgbClr val="065A82"/>
-                </a:solidFill>
-                <a:latin typeface="맑은 고딕" pitchFamily="34" charset="0"/>
-                <a:ea typeface="맑은 고딕" pitchFamily="34" charset="-122"/>
-                <a:cs typeface="맑은 고딕" pitchFamily="34" charset="-120"/>
-              </a:rPr>
-              <a:t>제안  ·  상시 출동형</a:t>
-            </a:r>
-            <a:endParaRPr lang="en-US" sz="1100" dirty="0"/>
-          </a:p>
-        </p:txBody>
-      </p:sp>
-      <p:sp>
-        <p:nvSpPr>
-          <p:cNvPr id="19" name="Text 17"/>
-          <p:cNvSpPr txBox="1"/>
-          <p:nvPr/>
-        </p:nvSpPr>
-        <p:spPr>
-          <a:xfrm>
-            <a:off x="548640" y="3200400"/>
-            <a:ext cx="868680" cy="365760"/>
-          </a:xfrm>
-          <a:prstGeom prst="rect">
-            <a:avLst/>
-          </a:prstGeom>
-          <a:noFill/>
-          <a:ln/>
-        </p:spPr>
-        <p:txBody>
-          <a:bodyPr wrap="square" lIns="0" tIns="0" rIns="0" bIns="0" rtlCol="0" anchor="ctr"/>
-          <a:lstStyle/>
-          <a:p>
-            <a:pPr indent="0" marL="0">
-              <a:buNone/>
-            </a:pPr>
-            <a:endParaRPr lang="en-US" sz="1300" dirty="0"/>
-          </a:p>
-        </p:txBody>
-      </p:sp>
-      <p:sp>
-        <p:nvSpPr>
-          <p:cNvPr id="20" name="Shape 18"/>
-          <p:cNvSpPr/>
-          <p:nvPr/>
-        </p:nvSpPr>
-        <p:spPr>
-          <a:xfrm>
-            <a:off x="1481328" y="3090672"/>
-            <a:ext cx="1353312" cy="566928"/>
-          </a:xfrm>
-          <a:prstGeom prst="roundRect">
-            <a:avLst>
-              <a:gd name="adj" fmla="val 9677"/>
-            </a:avLst>
-          </a:prstGeom>
-          <a:solidFill>
-            <a:srgbClr val="E1EEF4"/>
-          </a:solidFill>
-          <a:ln w="12700">
-            <a:solidFill>
-              <a:srgbClr val="E1EEF4"/>
-            </a:solidFill>
-            <a:prstDash val="solid"/>
-          </a:ln>
-        </p:spPr>
-      </p:sp>
-      <p:sp>
-        <p:nvSpPr>
-          <p:cNvPr id="21" name="Text 19"/>
-          <p:cNvSpPr txBox="1"/>
-          <p:nvPr/>
-        </p:nvSpPr>
-        <p:spPr>
-          <a:xfrm>
-            <a:off x="1481328" y="3090672"/>
-            <a:ext cx="1353312" cy="566928"/>
-          </a:xfrm>
-          <a:prstGeom prst="rect">
-            <a:avLst/>
-          </a:prstGeom>
-          <a:noFill/>
-          <a:ln/>
-        </p:spPr>
-        <p:txBody>
-          <a:bodyPr wrap="square" lIns="0" tIns="0" rIns="0" bIns="0" rtlCol="0" anchor="ctr"/>
-          <a:lstStyle/>
-          <a:p>
-            <a:pPr algn="ctr" indent="0" marL="0">
-              <a:buNone/>
-            </a:pPr>
-            <a:r>
-              <a:rPr lang="en-US" sz="1100" dirty="0">
-                <a:solidFill>
-                  <a:srgbClr val="10243A"/>
-                </a:solidFill>
-                <a:latin typeface="맑은 고딕" pitchFamily="34" charset="0"/>
-                <a:ea typeface="맑은 고딕" pitchFamily="34" charset="-122"/>
-                <a:cs typeface="맑은 고딕" pitchFamily="34" charset="-120"/>
-              </a:rPr>
-              <a:t>신고 접수</a:t>
-            </a:r>
-            <a:endParaRPr lang="en-US" sz="1100" dirty="0"/>
-          </a:p>
-        </p:txBody>
-      </p:sp>
-      <p:sp>
-        <p:nvSpPr>
-          <p:cNvPr id="22" name="Text 20"/>
-          <p:cNvSpPr txBox="1"/>
-          <p:nvPr/>
-        </p:nvSpPr>
-        <p:spPr>
-          <a:xfrm>
-            <a:off x="2834640" y="3090672"/>
-            <a:ext cx="137160" cy="566928"/>
-          </a:xfrm>
-          <a:prstGeom prst="rect">
-            <a:avLst/>
-          </a:prstGeom>
-          <a:noFill/>
-          <a:ln/>
-        </p:spPr>
-        <p:txBody>
-          <a:bodyPr wrap="square" lIns="0" tIns="0" rIns="0" bIns="0" rtlCol="0" anchor="ctr"/>
-          <a:lstStyle/>
-          <a:p>
-            <a:pPr algn="ctr" indent="0" marL="0">
-              <a:buNone/>
-            </a:pPr>
-            <a:r>
-              <a:rPr lang="en-US" sz="1600" dirty="0">
-                <a:solidFill>
-                  <a:srgbClr val="5A6A78"/>
-                </a:solidFill>
-                <a:latin typeface="맑은 고딕" pitchFamily="34" charset="0"/>
-                <a:ea typeface="맑은 고딕" pitchFamily="34" charset="-122"/>
-                <a:cs typeface="맑은 고딕" pitchFamily="34" charset="-120"/>
-              </a:rPr>
-              <a:t>›</a:t>
-            </a:r>
-            <a:endParaRPr lang="en-US" sz="1600" dirty="0"/>
-          </a:p>
-        </p:txBody>
-      </p:sp>
-      <p:sp>
-        <p:nvSpPr>
-          <p:cNvPr id="23" name="Shape 21"/>
-          <p:cNvSpPr/>
-          <p:nvPr/>
-        </p:nvSpPr>
-        <p:spPr>
-          <a:xfrm>
-            <a:off x="2971800" y="3090672"/>
-            <a:ext cx="1353312" cy="566928"/>
-          </a:xfrm>
-          <a:prstGeom prst="roundRect">
-            <a:avLst>
-              <a:gd name="adj" fmla="val 9677"/>
-            </a:avLst>
-          </a:prstGeom>
-          <a:solidFill>
-            <a:srgbClr val="E1EEF4"/>
-          </a:solidFill>
-          <a:ln w="12700">
-            <a:solidFill>
-              <a:srgbClr val="E1EEF4"/>
-            </a:solidFill>
-            <a:prstDash val="solid"/>
-          </a:ln>
-        </p:spPr>
-      </p:sp>
-      <p:sp>
-        <p:nvSpPr>
-          <p:cNvPr id="24" name="Text 22"/>
-          <p:cNvSpPr txBox="1"/>
-          <p:nvPr/>
-        </p:nvSpPr>
-        <p:spPr>
-          <a:xfrm>
-            <a:off x="2971800" y="3090672"/>
-            <a:ext cx="1353312" cy="566928"/>
-          </a:xfrm>
-          <a:prstGeom prst="rect">
-            <a:avLst/>
-          </a:prstGeom>
-          <a:noFill/>
-          <a:ln/>
-        </p:spPr>
-        <p:txBody>
-          <a:bodyPr wrap="square" lIns="0" tIns="0" rIns="0" bIns="0" rtlCol="0" anchor="ctr"/>
-          <a:lstStyle/>
-          <a:p>
-            <a:pPr algn="ctr" indent="0" marL="0">
-              <a:buNone/>
-            </a:pPr>
-            <a:r>
-              <a:rPr lang="en-US" sz="1100" dirty="0">
-                <a:solidFill>
-                  <a:srgbClr val="10243A"/>
-                </a:solidFill>
-                <a:latin typeface="맑은 고딕" pitchFamily="34" charset="0"/>
-                <a:ea typeface="맑은 고딕" pitchFamily="34" charset="-122"/>
-                <a:cs typeface="맑은 고딕" pitchFamily="34" charset="-120"/>
-              </a:rPr>
-              <a:t>자동 이륙</a:t>
-            </a:r>
-            <a:endParaRPr lang="en-US" sz="1100" dirty="0"/>
-          </a:p>
-        </p:txBody>
-      </p:sp>
-      <p:sp>
-        <p:nvSpPr>
-          <p:cNvPr id="25" name="Text 23"/>
-          <p:cNvSpPr txBox="1"/>
-          <p:nvPr/>
-        </p:nvSpPr>
-        <p:spPr>
-          <a:xfrm>
-            <a:off x="7315200" y="3090672"/>
-            <a:ext cx="1325880" cy="566928"/>
-          </a:xfrm>
-          <a:prstGeom prst="rect">
-            <a:avLst/>
-          </a:prstGeom>
-          <a:noFill/>
-          <a:ln/>
-        </p:spPr>
-        <p:txBody>
-          <a:bodyPr wrap="square" lIns="0" tIns="0" rIns="0" bIns="0" rtlCol="0" anchor="ctr"/>
-          <a:lstStyle/>
-          <a:p>
-            <a:pPr algn="r" indent="0" marL="0">
-              <a:buNone/>
-            </a:pPr>
-            <a:r>
-              <a:rPr lang="en-US" sz="1900" b="1" dirty="0">
-                <a:solidFill>
-                  <a:srgbClr val="065A82"/>
-                </a:solidFill>
-                <a:latin typeface="맑은 고딕" pitchFamily="34" charset="0"/>
-                <a:ea typeface="맑은 고딕" pitchFamily="34" charset="-122"/>
-                <a:cs typeface="맑은 고딕" pitchFamily="34" charset="-120"/>
-              </a:rPr>
-              <a:t>3~5분</a:t>
-            </a:r>
-            <a:endParaRPr lang="en-US" sz="1900" dirty="0"/>
-          </a:p>
-        </p:txBody>
-      </p:sp>
-      <p:sp>
-        <p:nvSpPr>
-          <p:cNvPr id="26" name="Text 24"/>
-          <p:cNvSpPr txBox="1"/>
-          <p:nvPr/>
-        </p:nvSpPr>
-        <p:spPr>
-          <a:xfrm>
-            <a:off x="548640" y="4160520"/>
-            <a:ext cx="8046720" cy="365760"/>
-          </a:xfrm>
-          <a:prstGeom prst="rect">
-            <a:avLst/>
-          </a:prstGeom>
-          <a:noFill/>
-          <a:ln/>
-        </p:spPr>
-        <p:txBody>
-          <a:bodyPr wrap="square" lIns="0" tIns="0" rIns="0" bIns="0" rtlCol="0" anchor="ctr"/>
-          <a:lstStyle/>
-          <a:p>
-            <a:pPr indent="0" marL="0">
-              <a:buNone/>
-            </a:pPr>
-            <a:r>
-              <a:rPr lang="en-US" sz="1400" dirty="0">
-                <a:solidFill>
-                  <a:srgbClr val="10243A"/>
-                </a:solidFill>
-                <a:latin typeface="맑은 고딕" pitchFamily="34" charset="0"/>
-                <a:ea typeface="맑은 고딕" pitchFamily="34" charset="-122"/>
-                <a:cs typeface="맑은 고딕" pitchFamily="34" charset="-120"/>
-              </a:rPr>
-              <a:t>실종·조난의 초기 3시간이, 장비를 현장까지 옮기는 데 소모되고 있습니다.</a:t>
-            </a:r>
-            <a:endParaRPr lang="en-US" sz="1400" dirty="0"/>
+              <a:t>하나는 공간의 문제, 하나는 기본 동작의 문제입니다.</a:t>
+            </a:r>
+            <a:endParaRPr lang="en-US" sz="1200" dirty="0"/>
+          </a:p>
+        </p:txBody>
+      </p:sp>
+      <p:sp>
+        <p:nvSpPr>
+          <p:cNvPr id="23" name="Text 21"/>
+          <p:cNvSpPr txBox="1"/>
+          <p:nvPr/>
+        </p:nvSpPr>
+        <p:spPr>
+          <a:xfrm>
+            <a:off x="548640" y="4773168"/>
+            <a:ext cx="8046720" cy="256032"/>
+          </a:xfrm>
+          <a:prstGeom prst="rect">
+            <a:avLst/>
+          </a:prstGeom>
+          <a:noFill/>
+          <a:ln/>
+        </p:spPr>
+        <p:txBody>
+          <a:bodyPr wrap="square" lIns="0" tIns="0" rIns="0" bIns="0" rtlCol="0" anchor="ctr"/>
+          <a:lstStyle/>
+          <a:p>
+            <a:pPr indent="0" marL="0">
+              <a:buNone/>
+            </a:pPr>
+            <a:r>
+              <a:rPr lang="en-US" sz="850" dirty="0">
+                <a:solidFill>
+                  <a:srgbClr val="8895A2"/>
+                </a:solidFill>
+                <a:latin typeface="맑은 고딕" pitchFamily="34" charset="0"/>
+                <a:ea typeface="맑은 고딕" pitchFamily="34" charset="-122"/>
+                <a:cs typeface="맑은 고딕" pitchFamily="34" charset="-120"/>
+              </a:rPr>
+              <a:t>출처: 제주도 CCTV 운영 현황 · 소방 구조활동 통계 · 경찰청 실종신고 처리 현황</a:t>
+            </a:r>
+            <a:endParaRPr lang="en-US" sz="850" dirty="0"/>
           </a:p>
         </p:txBody>
       </p:sp>
@@ -6905,7 +7856,7 @@
               <a:buNone/>
             </a:pPr>
             <a:r>
-              <a:rPr lang="en-US" sz="3200" b="1" dirty="0">
+              <a:rPr lang="en-US" sz="3000" b="1" dirty="0">
                 <a:solidFill>
                   <a:srgbClr val="10243A"/>
                 </a:solidFill>
@@ -6913,9 +7864,9 @@
                 <a:ea typeface="맑은 고딕" pitchFamily="34" charset="-122"/>
                 <a:cs typeface="맑은 고딕" pitchFamily="34" charset="-120"/>
               </a:rPr>
-              <a:t>지상 순찰이 닿지 않는 곳</a:t>
-            </a:r>
-            <a:endParaRPr lang="en-US" sz="3200" dirty="0"/>
+              <a:t>공간의 공백은 '시간'으로 나타납니다</a:t>
+            </a:r>
+            <a:endParaRPr lang="en-US" sz="3000" dirty="0"/>
           </a:p>
         </p:txBody>
       </p:sp>
@@ -6952,7 +7903,7 @@
                 <a:ea typeface="맑은 고딕" pitchFamily="34" charset="-122"/>
                 <a:cs typeface="맑은 고딕" pitchFamily="34" charset="-120"/>
               </a:rPr>
-              <a:t>사고와 실종은 도심이 아니라 이곳에 몰립니다</a:t>
+              <a:t>신고가 접수된 시점과, 하늘에서 그곳을 처음 본 시점 사이</a:t>
             </a:r>
             <a:endParaRPr lang="en-US" sz="1300" dirty="0"/>
           </a:p>
@@ -6960,24 +7911,65 @@
       </p:sp>
       <p:sp>
         <p:nvSpPr>
-          <p:cNvPr id="4" name="Shape 2"/>
+          <p:cNvPr id="4" name="Text 2"/>
+          <p:cNvSpPr txBox="1"/>
+          <p:nvPr/>
+        </p:nvSpPr>
+        <p:spPr>
+          <a:xfrm>
+            <a:off x="548640" y="1481328"/>
+            <a:ext cx="2743200" cy="274320"/>
+          </a:xfrm>
+          <a:prstGeom prst="rect">
+            <a:avLst/>
+          </a:prstGeom>
+          <a:noFill/>
+          <a:ln/>
+        </p:spPr>
+        <p:txBody>
+          <a:bodyPr wrap="square" lIns="0" tIns="0" rIns="0" bIns="0" rtlCol="0" anchor="ctr"/>
+          <a:lstStyle/>
+          <a:p>
+            <a:pPr indent="0" marL="0">
+              <a:buNone/>
+            </a:pPr>
+            <a:r>
+              <a:rPr lang="en-US" sz="1100" b="1" dirty="0">
+                <a:solidFill>
+                  <a:srgbClr val="E0523C"/>
+                </a:solidFill>
+                <a:latin typeface="맑은 고딕" pitchFamily="34" charset="0"/>
+                <a:ea typeface="맑은 고딕" pitchFamily="34" charset="-122"/>
+                <a:cs typeface="맑은 고딕" pitchFamily="34" charset="-120"/>
+              </a:rPr>
+              <a:t>현행  ·  동원형</a:t>
+            </a:r>
+            <a:endParaRPr lang="en-US" sz="1100" dirty="0"/>
+          </a:p>
+        </p:txBody>
+      </p:sp>
+      <p:sp>
+        <p:nvSpPr>
+          <p:cNvPr id="5" name="Shape 3"/>
           <p:cNvSpPr/>
           <p:nvPr/>
         </p:nvSpPr>
         <p:spPr>
           <a:xfrm>
-            <a:off x="566928" y="1673352"/>
-            <a:ext cx="182880" cy="182880"/>
-          </a:xfrm>
-          <a:prstGeom prst="ellipse">
-            <a:avLst/>
+            <a:off x="1481328" y="1783080"/>
+            <a:ext cx="1353312" cy="566928"/>
+          </a:xfrm>
+          <a:prstGeom prst="roundRect">
+            <a:avLst>
+              <a:gd name="adj" fmla="val 9677"/>
+            </a:avLst>
           </a:prstGeom>
           <a:solidFill>
-            <a:srgbClr val="1C7293"/>
+            <a:srgbClr val="FBE7E3"/>
           </a:solidFill>
           <a:ln w="12700">
             <a:solidFill>
-              <a:srgbClr val="1C7293"/>
+              <a:srgbClr val="FBE7E3"/>
             </a:solidFill>
             <a:prstDash val="solid"/>
           </a:ln>
@@ -6985,30 +7977,30 @@
       </p:sp>
       <p:sp>
         <p:nvSpPr>
-          <p:cNvPr id="5" name="Text 3"/>
-          <p:cNvSpPr txBox="1"/>
-          <p:nvPr/>
-        </p:nvSpPr>
-        <p:spPr>
-          <a:xfrm>
-            <a:off x="896112" y="1572768"/>
-            <a:ext cx="3291840" cy="384048"/>
-          </a:xfrm>
-          <a:prstGeom prst="rect">
-            <a:avLst/>
-          </a:prstGeom>
-          <a:noFill/>
-          <a:ln/>
-        </p:spPr>
-        <p:txBody>
-          <a:bodyPr wrap="square" lIns="0" tIns="0" rIns="0" bIns="0" rtlCol="0" anchor="ctr"/>
-          <a:lstStyle/>
-          <a:p>
-            <a:pPr indent="0" marL="0">
-              <a:buNone/>
-            </a:pPr>
-            <a:r>
-              <a:rPr lang="en-US" sz="1500" dirty="0">
+          <p:cNvPr id="6" name="Text 4"/>
+          <p:cNvSpPr txBox="1"/>
+          <p:nvPr/>
+        </p:nvSpPr>
+        <p:spPr>
+          <a:xfrm>
+            <a:off x="1481328" y="1783080"/>
+            <a:ext cx="1353312" cy="566928"/>
+          </a:xfrm>
+          <a:prstGeom prst="rect">
+            <a:avLst/>
+          </a:prstGeom>
+          <a:noFill/>
+          <a:ln/>
+        </p:spPr>
+        <p:txBody>
+          <a:bodyPr wrap="square" lIns="0" tIns="0" rIns="0" bIns="0" rtlCol="0" anchor="ctr"/>
+          <a:lstStyle/>
+          <a:p>
+            <a:pPr algn="ctr" indent="0" marL="0">
+              <a:buNone/>
+            </a:pPr>
+            <a:r>
+              <a:rPr lang="en-US" sz="1100" dirty="0">
                 <a:solidFill>
                   <a:srgbClr val="10243A"/>
                 </a:solidFill>
@@ -7016,32 +8008,73 @@
                 <a:ea typeface="맑은 고딕" pitchFamily="34" charset="-122"/>
                 <a:cs typeface="맑은 고딕" pitchFamily="34" charset="-120"/>
               </a:rPr>
-              <a:t>올레길</a:t>
-            </a:r>
-            <a:endParaRPr lang="en-US" sz="1500" dirty="0"/>
-          </a:p>
-        </p:txBody>
-      </p:sp>
-      <p:sp>
-        <p:nvSpPr>
-          <p:cNvPr id="6" name="Shape 4"/>
+              <a:t>신고 접수</a:t>
+            </a:r>
+            <a:endParaRPr lang="en-US" sz="1100" dirty="0"/>
+          </a:p>
+        </p:txBody>
+      </p:sp>
+      <p:sp>
+        <p:nvSpPr>
+          <p:cNvPr id="7" name="Text 5"/>
+          <p:cNvSpPr txBox="1"/>
+          <p:nvPr/>
+        </p:nvSpPr>
+        <p:spPr>
+          <a:xfrm>
+            <a:off x="2834640" y="1783080"/>
+            <a:ext cx="137160" cy="566928"/>
+          </a:xfrm>
+          <a:prstGeom prst="rect">
+            <a:avLst/>
+          </a:prstGeom>
+          <a:noFill/>
+          <a:ln/>
+        </p:spPr>
+        <p:txBody>
+          <a:bodyPr wrap="square" lIns="0" tIns="0" rIns="0" bIns="0" rtlCol="0" anchor="ctr"/>
+          <a:lstStyle/>
+          <a:p>
+            <a:pPr algn="ctr" indent="0" marL="0">
+              <a:buNone/>
+            </a:pPr>
+            <a:r>
+              <a:rPr lang="en-US" sz="1600" dirty="0">
+                <a:solidFill>
+                  <a:srgbClr val="5A6A78"/>
+                </a:solidFill>
+                <a:latin typeface="맑은 고딕" pitchFamily="34" charset="0"/>
+                <a:ea typeface="맑은 고딕" pitchFamily="34" charset="-122"/>
+                <a:cs typeface="맑은 고딕" pitchFamily="34" charset="-120"/>
+              </a:rPr>
+              <a:t>›</a:t>
+            </a:r>
+            <a:endParaRPr lang="en-US" sz="1600" dirty="0"/>
+          </a:p>
+        </p:txBody>
+      </p:sp>
+      <p:sp>
+        <p:nvSpPr>
+          <p:cNvPr id="8" name="Shape 6"/>
           <p:cNvSpPr/>
           <p:nvPr/>
         </p:nvSpPr>
         <p:spPr>
           <a:xfrm>
-            <a:off x="566928" y="2240280"/>
-            <a:ext cx="182880" cy="182880"/>
-          </a:xfrm>
-          <a:prstGeom prst="ellipse">
-            <a:avLst/>
+            <a:off x="2971800" y="1783080"/>
+            <a:ext cx="1353312" cy="566928"/>
+          </a:xfrm>
+          <a:prstGeom prst="roundRect">
+            <a:avLst>
+              <a:gd name="adj" fmla="val 9677"/>
+            </a:avLst>
           </a:prstGeom>
           <a:solidFill>
-            <a:srgbClr val="1C7293"/>
+            <a:srgbClr val="FBE7E3"/>
           </a:solidFill>
           <a:ln w="12700">
             <a:solidFill>
-              <a:srgbClr val="1C7293"/>
+              <a:srgbClr val="FBE7E3"/>
             </a:solidFill>
             <a:prstDash val="solid"/>
           </a:ln>
@@ -7049,30 +8082,30 @@
       </p:sp>
       <p:sp>
         <p:nvSpPr>
-          <p:cNvPr id="7" name="Text 5"/>
-          <p:cNvSpPr txBox="1"/>
-          <p:nvPr/>
-        </p:nvSpPr>
-        <p:spPr>
-          <a:xfrm>
-            <a:off x="896112" y="2139696"/>
-            <a:ext cx="3291840" cy="384048"/>
-          </a:xfrm>
-          <a:prstGeom prst="rect">
-            <a:avLst/>
-          </a:prstGeom>
-          <a:noFill/>
-          <a:ln/>
-        </p:spPr>
-        <p:txBody>
-          <a:bodyPr wrap="square" lIns="0" tIns="0" rIns="0" bIns="0" rtlCol="0" anchor="ctr"/>
-          <a:lstStyle/>
-          <a:p>
-            <a:pPr indent="0" marL="0">
-              <a:buNone/>
-            </a:pPr>
-            <a:r>
-              <a:rPr lang="en-US" sz="1500" dirty="0">
+          <p:cNvPr id="9" name="Text 7"/>
+          <p:cNvSpPr txBox="1"/>
+          <p:nvPr/>
+        </p:nvSpPr>
+        <p:spPr>
+          <a:xfrm>
+            <a:off x="2971800" y="1783080"/>
+            <a:ext cx="1353312" cy="566928"/>
+          </a:xfrm>
+          <a:prstGeom prst="rect">
+            <a:avLst/>
+          </a:prstGeom>
+          <a:noFill/>
+          <a:ln/>
+        </p:spPr>
+        <p:txBody>
+          <a:bodyPr wrap="square" lIns="0" tIns="0" rIns="0" bIns="0" rtlCol="0" anchor="ctr"/>
+          <a:lstStyle/>
+          <a:p>
+            <a:pPr algn="ctr" indent="0" marL="0">
+              <a:buNone/>
+            </a:pPr>
+            <a:r>
+              <a:rPr lang="en-US" sz="1100" dirty="0">
                 <a:solidFill>
                   <a:srgbClr val="10243A"/>
                 </a:solidFill>
@@ -7080,32 +8113,73 @@
                 <a:ea typeface="맑은 고딕" pitchFamily="34" charset="-122"/>
                 <a:cs typeface="맑은 고딕" pitchFamily="34" charset="-120"/>
               </a:rPr>
-              <a:t>오름 · 곶자왈</a:t>
-            </a:r>
-            <a:endParaRPr lang="en-US" sz="1500" dirty="0"/>
-          </a:p>
-        </p:txBody>
-      </p:sp>
-      <p:sp>
-        <p:nvSpPr>
-          <p:cNvPr id="8" name="Shape 6"/>
+              <a:t>인력 이동</a:t>
+            </a:r>
+            <a:endParaRPr lang="en-US" sz="1100" dirty="0"/>
+          </a:p>
+        </p:txBody>
+      </p:sp>
+      <p:sp>
+        <p:nvSpPr>
+          <p:cNvPr id="10" name="Text 8"/>
+          <p:cNvSpPr txBox="1"/>
+          <p:nvPr/>
+        </p:nvSpPr>
+        <p:spPr>
+          <a:xfrm>
+            <a:off x="4325112" y="1783080"/>
+            <a:ext cx="137160" cy="566928"/>
+          </a:xfrm>
+          <a:prstGeom prst="rect">
+            <a:avLst/>
+          </a:prstGeom>
+          <a:noFill/>
+          <a:ln/>
+        </p:spPr>
+        <p:txBody>
+          <a:bodyPr wrap="square" lIns="0" tIns="0" rIns="0" bIns="0" rtlCol="0" anchor="ctr"/>
+          <a:lstStyle/>
+          <a:p>
+            <a:pPr algn="ctr" indent="0" marL="0">
+              <a:buNone/>
+            </a:pPr>
+            <a:r>
+              <a:rPr lang="en-US" sz="1600" dirty="0">
+                <a:solidFill>
+                  <a:srgbClr val="5A6A78"/>
+                </a:solidFill>
+                <a:latin typeface="맑은 고딕" pitchFamily="34" charset="0"/>
+                <a:ea typeface="맑은 고딕" pitchFamily="34" charset="-122"/>
+                <a:cs typeface="맑은 고딕" pitchFamily="34" charset="-120"/>
+              </a:rPr>
+              <a:t>›</a:t>
+            </a:r>
+            <a:endParaRPr lang="en-US" sz="1600" dirty="0"/>
+          </a:p>
+        </p:txBody>
+      </p:sp>
+      <p:sp>
+        <p:nvSpPr>
+          <p:cNvPr id="11" name="Shape 9"/>
           <p:cNvSpPr/>
           <p:nvPr/>
         </p:nvSpPr>
         <p:spPr>
           <a:xfrm>
-            <a:off x="566928" y="2807208"/>
-            <a:ext cx="182880" cy="182880"/>
-          </a:xfrm>
-          <a:prstGeom prst="ellipse">
-            <a:avLst/>
+            <a:off x="4462272" y="1783080"/>
+            <a:ext cx="1353312" cy="566928"/>
+          </a:xfrm>
+          <a:prstGeom prst="roundRect">
+            <a:avLst>
+              <a:gd name="adj" fmla="val 9677"/>
+            </a:avLst>
           </a:prstGeom>
           <a:solidFill>
-            <a:srgbClr val="1C7293"/>
+            <a:srgbClr val="FBE7E3"/>
           </a:solidFill>
           <a:ln w="12700">
             <a:solidFill>
-              <a:srgbClr val="1C7293"/>
+              <a:srgbClr val="FBE7E3"/>
             </a:solidFill>
             <a:prstDash val="solid"/>
           </a:ln>
@@ -7113,30 +8187,30 @@
       </p:sp>
       <p:sp>
         <p:nvSpPr>
-          <p:cNvPr id="9" name="Text 7"/>
-          <p:cNvSpPr txBox="1"/>
-          <p:nvPr/>
-        </p:nvSpPr>
-        <p:spPr>
-          <a:xfrm>
-            <a:off x="896112" y="2706624"/>
-            <a:ext cx="3291840" cy="384048"/>
-          </a:xfrm>
-          <a:prstGeom prst="rect">
-            <a:avLst/>
-          </a:prstGeom>
-          <a:noFill/>
-          <a:ln/>
-        </p:spPr>
-        <p:txBody>
-          <a:bodyPr wrap="square" lIns="0" tIns="0" rIns="0" bIns="0" rtlCol="0" anchor="ctr"/>
-          <a:lstStyle/>
-          <a:p>
-            <a:pPr indent="0" marL="0">
-              <a:buNone/>
-            </a:pPr>
-            <a:r>
-              <a:rPr lang="en-US" sz="1500" dirty="0">
+          <p:cNvPr id="12" name="Text 10"/>
+          <p:cNvSpPr txBox="1"/>
+          <p:nvPr/>
+        </p:nvSpPr>
+        <p:spPr>
+          <a:xfrm>
+            <a:off x="4462272" y="1783080"/>
+            <a:ext cx="1353312" cy="566928"/>
+          </a:xfrm>
+          <a:prstGeom prst="rect">
+            <a:avLst/>
+          </a:prstGeom>
+          <a:noFill/>
+          <a:ln/>
+        </p:spPr>
+        <p:txBody>
+          <a:bodyPr wrap="square" lIns="0" tIns="0" rIns="0" bIns="0" rtlCol="0" anchor="ctr"/>
+          <a:lstStyle/>
+          <a:p>
+            <a:pPr algn="ctr" indent="0" marL="0">
+              <a:buNone/>
+            </a:pPr>
+            <a:r>
+              <a:rPr lang="en-US" sz="1100" dirty="0">
                 <a:solidFill>
                   <a:srgbClr val="10243A"/>
                 </a:solidFill>
@@ -7144,32 +8218,73 @@
                 <a:ea typeface="맑은 고딕" pitchFamily="34" charset="-122"/>
                 <a:cs typeface="맑은 고딕" pitchFamily="34" charset="-120"/>
               </a:rPr>
-              <a:t>해안 절벽</a:t>
-            </a:r>
-            <a:endParaRPr lang="en-US" sz="1500" dirty="0"/>
-          </a:p>
-        </p:txBody>
-      </p:sp>
-      <p:sp>
-        <p:nvSpPr>
-          <p:cNvPr id="10" name="Shape 8"/>
+              <a:t>현장 도착</a:t>
+            </a:r>
+            <a:endParaRPr lang="en-US" sz="1100" dirty="0"/>
+          </a:p>
+        </p:txBody>
+      </p:sp>
+      <p:sp>
+        <p:nvSpPr>
+          <p:cNvPr id="13" name="Text 11"/>
+          <p:cNvSpPr txBox="1"/>
+          <p:nvPr/>
+        </p:nvSpPr>
+        <p:spPr>
+          <a:xfrm>
+            <a:off x="5815584" y="1783080"/>
+            <a:ext cx="137160" cy="566928"/>
+          </a:xfrm>
+          <a:prstGeom prst="rect">
+            <a:avLst/>
+          </a:prstGeom>
+          <a:noFill/>
+          <a:ln/>
+        </p:spPr>
+        <p:txBody>
+          <a:bodyPr wrap="square" lIns="0" tIns="0" rIns="0" bIns="0" rtlCol="0" anchor="ctr"/>
+          <a:lstStyle/>
+          <a:p>
+            <a:pPr algn="ctr" indent="0" marL="0">
+              <a:buNone/>
+            </a:pPr>
+            <a:r>
+              <a:rPr lang="en-US" sz="1600" dirty="0">
+                <a:solidFill>
+                  <a:srgbClr val="5A6A78"/>
+                </a:solidFill>
+                <a:latin typeface="맑은 고딕" pitchFamily="34" charset="0"/>
+                <a:ea typeface="맑은 고딕" pitchFamily="34" charset="-122"/>
+                <a:cs typeface="맑은 고딕" pitchFamily="34" charset="-120"/>
+              </a:rPr>
+              <a:t>›</a:t>
+            </a:r>
+            <a:endParaRPr lang="en-US" sz="1600" dirty="0"/>
+          </a:p>
+        </p:txBody>
+      </p:sp>
+      <p:sp>
+        <p:nvSpPr>
+          <p:cNvPr id="14" name="Shape 12"/>
           <p:cNvSpPr/>
           <p:nvPr/>
         </p:nvSpPr>
         <p:spPr>
           <a:xfrm>
-            <a:off x="566928" y="3374136"/>
-            <a:ext cx="182880" cy="182880"/>
-          </a:xfrm>
-          <a:prstGeom prst="ellipse">
-            <a:avLst/>
+            <a:off x="5952744" y="1783080"/>
+            <a:ext cx="1353312" cy="566928"/>
+          </a:xfrm>
+          <a:prstGeom prst="roundRect">
+            <a:avLst>
+              <a:gd name="adj" fmla="val 9677"/>
+            </a:avLst>
           </a:prstGeom>
           <a:solidFill>
-            <a:srgbClr val="1C7293"/>
+            <a:srgbClr val="FBE7E3"/>
           </a:solidFill>
           <a:ln w="12700">
             <a:solidFill>
-              <a:srgbClr val="1C7293"/>
+              <a:srgbClr val="FBE7E3"/>
             </a:solidFill>
             <a:prstDash val="solid"/>
           </a:ln>
@@ -7177,30 +8292,30 @@
       </p:sp>
       <p:sp>
         <p:nvSpPr>
-          <p:cNvPr id="11" name="Text 9"/>
-          <p:cNvSpPr txBox="1"/>
-          <p:nvPr/>
-        </p:nvSpPr>
-        <p:spPr>
-          <a:xfrm>
-            <a:off x="896112" y="3273552"/>
-            <a:ext cx="3291840" cy="384048"/>
-          </a:xfrm>
-          <a:prstGeom prst="rect">
-            <a:avLst/>
-          </a:prstGeom>
-          <a:noFill/>
-          <a:ln/>
-        </p:spPr>
-        <p:txBody>
-          <a:bodyPr wrap="square" lIns="0" tIns="0" rIns="0" bIns="0" rtlCol="0" anchor="ctr"/>
-          <a:lstStyle/>
-          <a:p>
-            <a:pPr indent="0" marL="0">
-              <a:buNone/>
-            </a:pPr>
-            <a:r>
-              <a:rPr lang="en-US" sz="1500" dirty="0">
+          <p:cNvPr id="15" name="Text 13"/>
+          <p:cNvSpPr txBox="1"/>
+          <p:nvPr/>
+        </p:nvSpPr>
+        <p:spPr>
+          <a:xfrm>
+            <a:off x="5952744" y="1783080"/>
+            <a:ext cx="1353312" cy="566928"/>
+          </a:xfrm>
+          <a:prstGeom prst="rect">
+            <a:avLst/>
+          </a:prstGeom>
+          <a:noFill/>
+          <a:ln/>
+        </p:spPr>
+        <p:txBody>
+          <a:bodyPr wrap="square" lIns="0" tIns="0" rIns="0" bIns="0" rtlCol="0" anchor="ctr"/>
+          <a:lstStyle/>
+          <a:p>
+            <a:pPr algn="ctr" indent="0" marL="0">
+              <a:buNone/>
+            </a:pPr>
+            <a:r>
+              <a:rPr lang="en-US" sz="1100" dirty="0">
                 <a:solidFill>
                   <a:srgbClr val="10243A"/>
                 </a:solidFill>
@@ -7208,32 +8323,112 @@
                 <a:ea typeface="맑은 고딕" pitchFamily="34" charset="-122"/>
                 <a:cs typeface="맑은 고딕" pitchFamily="34" charset="-120"/>
               </a:rPr>
-              <a:t>야간 해수욕장</a:t>
-            </a:r>
-            <a:endParaRPr lang="en-US" sz="1500" dirty="0"/>
-          </a:p>
-        </p:txBody>
-      </p:sp>
-      <p:sp>
-        <p:nvSpPr>
-          <p:cNvPr id="12" name="Shape 10"/>
+              <a:t>이륙</a:t>
+            </a:r>
+            <a:endParaRPr lang="en-US" sz="1100" dirty="0"/>
+          </a:p>
+        </p:txBody>
+      </p:sp>
+      <p:sp>
+        <p:nvSpPr>
+          <p:cNvPr id="16" name="Text 14"/>
+          <p:cNvSpPr txBox="1"/>
+          <p:nvPr/>
+        </p:nvSpPr>
+        <p:spPr>
+          <a:xfrm>
+            <a:off x="7315200" y="1783080"/>
+            <a:ext cx="1325880" cy="566928"/>
+          </a:xfrm>
+          <a:prstGeom prst="rect">
+            <a:avLst/>
+          </a:prstGeom>
+          <a:noFill/>
+          <a:ln/>
+        </p:spPr>
+        <p:txBody>
+          <a:bodyPr wrap="square" lIns="0" tIns="0" rIns="0" bIns="0" rtlCol="0" anchor="ctr"/>
+          <a:lstStyle/>
+          <a:p>
+            <a:pPr algn="r" indent="0" marL="0">
+              <a:buNone/>
+            </a:pPr>
+            <a:r>
+              <a:rPr lang="en-US" sz="1900" b="1" dirty="0">
+                <a:solidFill>
+                  <a:srgbClr val="E0523C"/>
+                </a:solidFill>
+                <a:latin typeface="맑은 고딕" pitchFamily="34" charset="0"/>
+                <a:ea typeface="맑은 고딕" pitchFamily="34" charset="-122"/>
+                <a:cs typeface="맑은 고딕" pitchFamily="34" charset="-120"/>
+              </a:rPr>
+              <a:t>수십 분</a:t>
+            </a:r>
+            <a:endParaRPr lang="en-US" sz="1900" dirty="0"/>
+          </a:p>
+        </p:txBody>
+      </p:sp>
+      <p:sp>
+        <p:nvSpPr>
+          <p:cNvPr id="17" name="Text 15"/>
+          <p:cNvSpPr txBox="1"/>
+          <p:nvPr/>
+        </p:nvSpPr>
+        <p:spPr>
+          <a:xfrm>
+            <a:off x="548640" y="2788920"/>
+            <a:ext cx="2743200" cy="274320"/>
+          </a:xfrm>
+          <a:prstGeom prst="rect">
+            <a:avLst/>
+          </a:prstGeom>
+          <a:noFill/>
+          <a:ln/>
+        </p:spPr>
+        <p:txBody>
+          <a:bodyPr wrap="square" lIns="0" tIns="0" rIns="0" bIns="0" rtlCol="0" anchor="ctr"/>
+          <a:lstStyle/>
+          <a:p>
+            <a:pPr indent="0" marL="0">
+              <a:buNone/>
+            </a:pPr>
+            <a:r>
+              <a:rPr lang="en-US" sz="1100" b="1" dirty="0">
+                <a:solidFill>
+                  <a:srgbClr val="065A82"/>
+                </a:solidFill>
+                <a:latin typeface="맑은 고딕" pitchFamily="34" charset="0"/>
+                <a:ea typeface="맑은 고딕" pitchFamily="34" charset="-122"/>
+                <a:cs typeface="맑은 고딕" pitchFamily="34" charset="-120"/>
+              </a:rPr>
+              <a:t>제안  ·  상시 출동형</a:t>
+            </a:r>
+            <a:endParaRPr lang="en-US" sz="1100" dirty="0"/>
+          </a:p>
+        </p:txBody>
+      </p:sp>
+      <p:sp>
+        <p:nvSpPr>
+          <p:cNvPr id="18" name="Shape 16"/>
           <p:cNvSpPr/>
           <p:nvPr/>
         </p:nvSpPr>
         <p:spPr>
           <a:xfrm>
-            <a:off x="566928" y="3941064"/>
-            <a:ext cx="182880" cy="182880"/>
-          </a:xfrm>
-          <a:prstGeom prst="ellipse">
-            <a:avLst/>
+            <a:off x="1481328" y="3090672"/>
+            <a:ext cx="1353312" cy="566928"/>
+          </a:xfrm>
+          <a:prstGeom prst="roundRect">
+            <a:avLst>
+              <a:gd name="adj" fmla="val 9677"/>
+            </a:avLst>
           </a:prstGeom>
           <a:solidFill>
-            <a:srgbClr val="1C7293"/>
+            <a:srgbClr val="E1EEF4"/>
           </a:solidFill>
           <a:ln w="12700">
             <a:solidFill>
-              <a:srgbClr val="1C7293"/>
+              <a:srgbClr val="E1EEF4"/>
             </a:solidFill>
             <a:prstDash val="solid"/>
           </a:ln>
@@ -7241,30 +8436,30 @@
       </p:sp>
       <p:sp>
         <p:nvSpPr>
-          <p:cNvPr id="13" name="Text 11"/>
-          <p:cNvSpPr txBox="1"/>
-          <p:nvPr/>
-        </p:nvSpPr>
-        <p:spPr>
-          <a:xfrm>
-            <a:off x="896112" y="3840480"/>
-            <a:ext cx="3291840" cy="384048"/>
-          </a:xfrm>
-          <a:prstGeom prst="rect">
-            <a:avLst/>
-          </a:prstGeom>
-          <a:noFill/>
-          <a:ln/>
-        </p:spPr>
-        <p:txBody>
-          <a:bodyPr wrap="square" lIns="0" tIns="0" rIns="0" bIns="0" rtlCol="0" anchor="ctr"/>
-          <a:lstStyle/>
-          <a:p>
-            <a:pPr indent="0" marL="0">
-              <a:buNone/>
-            </a:pPr>
-            <a:r>
-              <a:rPr lang="en-US" sz="1500" dirty="0">
+          <p:cNvPr id="19" name="Text 17"/>
+          <p:cNvSpPr txBox="1"/>
+          <p:nvPr/>
+        </p:nvSpPr>
+        <p:spPr>
+          <a:xfrm>
+            <a:off x="1481328" y="3090672"/>
+            <a:ext cx="1353312" cy="566928"/>
+          </a:xfrm>
+          <a:prstGeom prst="rect">
+            <a:avLst/>
+          </a:prstGeom>
+          <a:noFill/>
+          <a:ln/>
+        </p:spPr>
+        <p:txBody>
+          <a:bodyPr wrap="square" lIns="0" tIns="0" rIns="0" bIns="0" rtlCol="0" anchor="ctr"/>
+          <a:lstStyle/>
+          <a:p>
+            <a:pPr algn="ctr" indent="0" marL="0">
+              <a:buNone/>
+            </a:pPr>
+            <a:r>
+              <a:rPr lang="en-US" sz="1100" dirty="0">
                 <a:solidFill>
                   <a:srgbClr val="10243A"/>
                 </a:solidFill>
@@ -7272,252 +8467,231 @@
                 <a:ea typeface="맑은 고딕" pitchFamily="34" charset="-122"/>
                 <a:cs typeface="맑은 고딕" pitchFamily="34" charset="-120"/>
               </a:rPr>
-              <a:t>한라산 주요 탐방로</a:t>
-            </a:r>
-            <a:endParaRPr lang="en-US" sz="1500" dirty="0"/>
-          </a:p>
-        </p:txBody>
-      </p:sp>
-      <p:sp>
-        <p:nvSpPr>
-          <p:cNvPr id="14" name="Shape 12"/>
+              <a:t>신고 접수</a:t>
+            </a:r>
+            <a:endParaRPr lang="en-US" sz="1100" dirty="0"/>
+          </a:p>
+        </p:txBody>
+      </p:sp>
+      <p:sp>
+        <p:nvSpPr>
+          <p:cNvPr id="20" name="Text 18"/>
+          <p:cNvSpPr txBox="1"/>
+          <p:nvPr/>
+        </p:nvSpPr>
+        <p:spPr>
+          <a:xfrm>
+            <a:off x="2834640" y="3090672"/>
+            <a:ext cx="137160" cy="566928"/>
+          </a:xfrm>
+          <a:prstGeom prst="rect">
+            <a:avLst/>
+          </a:prstGeom>
+          <a:noFill/>
+          <a:ln/>
+        </p:spPr>
+        <p:txBody>
+          <a:bodyPr wrap="square" lIns="0" tIns="0" rIns="0" bIns="0" rtlCol="0" anchor="ctr"/>
+          <a:lstStyle/>
+          <a:p>
+            <a:pPr algn="ctr" indent="0" marL="0">
+              <a:buNone/>
+            </a:pPr>
+            <a:r>
+              <a:rPr lang="en-US" sz="1600" dirty="0">
+                <a:solidFill>
+                  <a:srgbClr val="5A6A78"/>
+                </a:solidFill>
+                <a:latin typeface="맑은 고딕" pitchFamily="34" charset="0"/>
+                <a:ea typeface="맑은 고딕" pitchFamily="34" charset="-122"/>
+                <a:cs typeface="맑은 고딕" pitchFamily="34" charset="-120"/>
+              </a:rPr>
+              <a:t>›</a:t>
+            </a:r>
+            <a:endParaRPr lang="en-US" sz="1600" dirty="0"/>
+          </a:p>
+        </p:txBody>
+      </p:sp>
+      <p:sp>
+        <p:nvSpPr>
+          <p:cNvPr id="21" name="Shape 19"/>
           <p:cNvSpPr/>
           <p:nvPr/>
         </p:nvSpPr>
         <p:spPr>
           <a:xfrm>
-            <a:off x="4663440" y="1536192"/>
-            <a:ext cx="3931920" cy="2377440"/>
+            <a:off x="2971800" y="3090672"/>
+            <a:ext cx="1353312" cy="566928"/>
           </a:xfrm>
           <a:prstGeom prst="roundRect">
             <a:avLst>
-              <a:gd name="adj" fmla="val 2308"/>
+              <a:gd name="adj" fmla="val 9677"/>
             </a:avLst>
           </a:prstGeom>
           <a:solidFill>
-            <a:srgbClr val="10243A"/>
+            <a:srgbClr val="E1EEF4"/>
           </a:solidFill>
           <a:ln w="12700">
             <a:solidFill>
-              <a:srgbClr val="10243A"/>
+              <a:srgbClr val="E1EEF4"/>
             </a:solidFill>
             <a:prstDash val="solid"/>
           </a:ln>
-          <a:effectLst>
-            <a:outerShdw sx="100000" sy="100000" kx="0" ky="0" algn="bl" rotWithShape="0" blurRad="101600" dist="25400" dir="5400000">
-              <a:srgbClr val="0B1B2B">
-                <a:alpha val="12000"/>
-              </a:srgbClr>
-            </a:outerShdw>
-          </a:effectLst>
-        </p:spPr>
-      </p:sp>
-      <p:sp>
-        <p:nvSpPr>
-          <p:cNvPr id="15" name="Text 13"/>
-          <p:cNvSpPr txBox="1"/>
-          <p:nvPr/>
-        </p:nvSpPr>
-        <p:spPr>
-          <a:xfrm>
-            <a:off x="4937760" y="1828800"/>
-            <a:ext cx="3383280" cy="548640"/>
-          </a:xfrm>
-          <a:prstGeom prst="rect">
-            <a:avLst/>
-          </a:prstGeom>
-          <a:noFill/>
-          <a:ln/>
-        </p:spPr>
-        <p:txBody>
-          <a:bodyPr wrap="square" lIns="0" tIns="0" rIns="0" bIns="0" rtlCol="0" anchor="ctr"/>
-          <a:lstStyle/>
-          <a:p>
-            <a:pPr indent="0" marL="0">
-              <a:buNone/>
-            </a:pPr>
-            <a:r>
-              <a:rPr lang="en-US" sz="2000" b="1" dirty="0">
-                <a:solidFill>
-                  <a:srgbClr val="FFFFFF"/>
-                </a:solidFill>
-                <a:latin typeface="맑은 고딕" pitchFamily="34" charset="0"/>
-                <a:ea typeface="맑은 고딕" pitchFamily="34" charset="-122"/>
-                <a:cs typeface="맑은 고딕" pitchFamily="34" charset="-120"/>
-              </a:rPr>
-              <a:t>순찰차가 들어갈 수 없는 곳</a:t>
-            </a:r>
-            <a:endParaRPr lang="en-US" sz="2000" dirty="0"/>
-          </a:p>
-        </p:txBody>
-      </p:sp>
-      <p:sp>
-        <p:nvSpPr>
-          <p:cNvPr id="16" name="Text 14"/>
-          <p:cNvSpPr txBox="1"/>
-          <p:nvPr/>
-        </p:nvSpPr>
-        <p:spPr>
-          <a:xfrm>
-            <a:off x="4937760" y="2395728"/>
-            <a:ext cx="3383280" cy="1371600"/>
-          </a:xfrm>
-          <a:prstGeom prst="rect">
-            <a:avLst/>
-          </a:prstGeom>
-          <a:noFill/>
-          <a:ln/>
-        </p:spPr>
-        <p:txBody>
-          <a:bodyPr wrap="square" lIns="0" tIns="0" rIns="0" bIns="0" rtlCol="0" anchor="ctr"/>
-          <a:lstStyle/>
-          <a:p>
-            <a:pPr indent="0" marL="0">
-              <a:lnSpc>
-                <a:spcPct val="120000"/>
-              </a:lnSpc>
+        </p:spPr>
+      </p:sp>
+      <p:sp>
+        <p:nvSpPr>
+          <p:cNvPr id="22" name="Text 20"/>
+          <p:cNvSpPr txBox="1"/>
+          <p:nvPr/>
+        </p:nvSpPr>
+        <p:spPr>
+          <a:xfrm>
+            <a:off x="2971800" y="3090672"/>
+            <a:ext cx="1353312" cy="566928"/>
+          </a:xfrm>
+          <a:prstGeom prst="rect">
+            <a:avLst/>
+          </a:prstGeom>
+          <a:noFill/>
+          <a:ln/>
+        </p:spPr>
+        <p:txBody>
+          <a:bodyPr wrap="square" lIns="0" tIns="0" rIns="0" bIns="0" rtlCol="0" anchor="ctr"/>
+          <a:lstStyle/>
+          <a:p>
+            <a:pPr algn="ctr" indent="0" marL="0">
+              <a:buNone/>
+            </a:pPr>
+            <a:r>
+              <a:rPr lang="en-US" sz="1100" dirty="0">
+                <a:solidFill>
+                  <a:srgbClr val="10243A"/>
+                </a:solidFill>
+                <a:latin typeface="맑은 고딕" pitchFamily="34" charset="0"/>
+                <a:ea typeface="맑은 고딕" pitchFamily="34" charset="-122"/>
+                <a:cs typeface="맑은 고딕" pitchFamily="34" charset="-120"/>
+              </a:rPr>
+              <a:t>자동 이륙</a:t>
+            </a:r>
+            <a:endParaRPr lang="en-US" sz="1100" dirty="0"/>
+          </a:p>
+        </p:txBody>
+      </p:sp>
+      <p:sp>
+        <p:nvSpPr>
+          <p:cNvPr id="23" name="Text 21"/>
+          <p:cNvSpPr txBox="1"/>
+          <p:nvPr/>
+        </p:nvSpPr>
+        <p:spPr>
+          <a:xfrm>
+            <a:off x="7315200" y="3090672"/>
+            <a:ext cx="1325880" cy="566928"/>
+          </a:xfrm>
+          <a:prstGeom prst="rect">
+            <a:avLst/>
+          </a:prstGeom>
+          <a:noFill/>
+          <a:ln/>
+        </p:spPr>
+        <p:txBody>
+          <a:bodyPr wrap="square" lIns="0" tIns="0" rIns="0" bIns="0" rtlCol="0" anchor="ctr"/>
+          <a:lstStyle/>
+          <a:p>
+            <a:pPr algn="r" indent="0" marL="0">
+              <a:buNone/>
+            </a:pPr>
+            <a:r>
+              <a:rPr lang="en-US" sz="1900" b="1" dirty="0">
+                <a:solidFill>
+                  <a:srgbClr val="065A82"/>
+                </a:solidFill>
+                <a:latin typeface="맑은 고딕" pitchFamily="34" charset="0"/>
+                <a:ea typeface="맑은 고딕" pitchFamily="34" charset="-122"/>
+                <a:cs typeface="맑은 고딕" pitchFamily="34" charset="-120"/>
+              </a:rPr>
+              <a:t>3~5분</a:t>
+            </a:r>
+            <a:endParaRPr lang="en-US" sz="1900" dirty="0"/>
+          </a:p>
+        </p:txBody>
+      </p:sp>
+      <p:sp>
+        <p:nvSpPr>
+          <p:cNvPr id="24" name="Text 22"/>
+          <p:cNvSpPr txBox="1"/>
+          <p:nvPr/>
+        </p:nvSpPr>
+        <p:spPr>
+          <a:xfrm>
+            <a:off x="548640" y="4407408"/>
+            <a:ext cx="8046720" cy="365760"/>
+          </a:xfrm>
+          <a:prstGeom prst="rect">
+            <a:avLst/>
+          </a:prstGeom>
+          <a:noFill/>
+          <a:ln/>
+        </p:spPr>
+        <p:txBody>
+          <a:bodyPr wrap="square" lIns="0" tIns="0" rIns="0" bIns="0" rtlCol="0" anchor="ctr"/>
+          <a:lstStyle/>
+          <a:p>
+            <a:pPr indent="0" marL="0">
               <a:buNone/>
             </a:pPr>
             <a:r>
               <a:rPr lang="en-US" sz="1200" dirty="0">
                 <a:solidFill>
-                  <a:srgbClr val="CADCFC"/>
-                </a:solidFill>
-                <a:latin typeface="맑은 고딕" pitchFamily="34" charset="0"/>
-                <a:ea typeface="맑은 고딕" pitchFamily="34" charset="-122"/>
-                <a:cs typeface="맑은 고딕" pitchFamily="34" charset="-120"/>
-              </a:rPr>
-              <a:t>지상 인력을 아무리 늘려도</a:t>
+                  <a:srgbClr val="10243A"/>
+                </a:solidFill>
+                <a:latin typeface="맑은 고딕" pitchFamily="34" charset="0"/>
+                <a:ea typeface="맑은 고딕" pitchFamily="34" charset="-122"/>
+                <a:cs typeface="맑은 고딕" pitchFamily="34" charset="-120"/>
+              </a:rPr>
+              <a:t>실종·조난의 초기 시간이, 장비를 현장까지 옮기는 데 소모됩니다.</a:t>
             </a:r>
             <a:endParaRPr lang="en-US" sz="1200" dirty="0"/>
           </a:p>
-          <a:p>
-            <a:pPr indent="0" marL="0">
-              <a:lnSpc>
-                <a:spcPct val="120000"/>
-              </a:lnSpc>
-              <a:buNone/>
-            </a:pPr>
-            <a:r>
-              <a:rPr lang="en-US" sz="1200" dirty="0">
-                <a:solidFill>
-                  <a:srgbClr val="CADCFC"/>
-                </a:solidFill>
-                <a:latin typeface="맑은 고딕" pitchFamily="34" charset="0"/>
-                <a:ea typeface="맑은 고딕" pitchFamily="34" charset="-122"/>
-                <a:cs typeface="맑은 고딕" pitchFamily="34" charset="-120"/>
-              </a:rPr>
-              <a:t>도달 시간은 줄지 않는 구조입니다.</a:t>
-            </a:r>
-            <a:endParaRPr lang="en-US" sz="1200" dirty="0"/>
-          </a:p>
-          <a:p>
-            <a:pPr indent="0" marL="0">
-              <a:lnSpc>
-                <a:spcPct val="120000"/>
-              </a:lnSpc>
-              <a:buNone/>
-            </a:pPr>
-            <a:endParaRPr lang="en-US" sz="1200" dirty="0"/>
-          </a:p>
-          <a:p>
-            <a:pPr indent="0" marL="0">
-              <a:lnSpc>
-                <a:spcPct val="120000"/>
-              </a:lnSpc>
-              <a:buNone/>
-            </a:pPr>
-            <a:r>
-              <a:rPr lang="en-US" sz="1200" dirty="0">
-                <a:solidFill>
-                  <a:srgbClr val="CADCFC"/>
-                </a:solidFill>
-                <a:latin typeface="맑은 고딕" pitchFamily="34" charset="0"/>
-                <a:ea typeface="맑은 고딕" pitchFamily="34" charset="-122"/>
-                <a:cs typeface="맑은 고딕" pitchFamily="34" charset="-120"/>
-              </a:rPr>
-              <a:t>하늘에서 접근하는 수단이</a:t>
-            </a:r>
-            <a:endParaRPr lang="en-US" sz="1200" dirty="0"/>
-          </a:p>
-          <a:p>
-            <a:pPr indent="0" marL="0">
-              <a:lnSpc>
-                <a:spcPct val="120000"/>
-              </a:lnSpc>
-              <a:buNone/>
-            </a:pPr>
-            <a:r>
-              <a:rPr lang="en-US" sz="1200" dirty="0">
-                <a:solidFill>
-                  <a:srgbClr val="CADCFC"/>
-                </a:solidFill>
-                <a:latin typeface="맑은 고딕" pitchFamily="34" charset="0"/>
-                <a:ea typeface="맑은 고딕" pitchFamily="34" charset="-122"/>
-                <a:cs typeface="맑은 고딕" pitchFamily="34" charset="-120"/>
-              </a:rPr>
-              <a:t>인력을 대신하는 것이 아니라,</a:t>
-            </a:r>
-            <a:endParaRPr lang="en-US" sz="1200" dirty="0"/>
-          </a:p>
-          <a:p>
-            <a:pPr indent="0" marL="0">
-              <a:lnSpc>
-                <a:spcPct val="120000"/>
-              </a:lnSpc>
-              <a:buNone/>
-            </a:pPr>
-            <a:r>
-              <a:rPr lang="en-US" sz="1200" dirty="0">
-                <a:solidFill>
-                  <a:srgbClr val="CADCFC"/>
-                </a:solidFill>
-                <a:latin typeface="맑은 고딕" pitchFamily="34" charset="0"/>
-                <a:ea typeface="맑은 고딕" pitchFamily="34" charset="-122"/>
-                <a:cs typeface="맑은 고딕" pitchFamily="34" charset="-120"/>
-              </a:rPr>
-              <a:t>인력이 갈 곳을 정해 줍니다.</a:t>
-            </a:r>
-            <a:endParaRPr lang="en-US" sz="1200" dirty="0"/>
-          </a:p>
-        </p:txBody>
-      </p:sp>
-      <p:sp>
-        <p:nvSpPr>
-          <p:cNvPr id="17" name="Text 15"/>
-          <p:cNvSpPr txBox="1"/>
-          <p:nvPr/>
-        </p:nvSpPr>
-        <p:spPr>
-          <a:xfrm>
-            <a:off x="548640" y="4434840"/>
-            <a:ext cx="8046720" cy="320040"/>
-          </a:xfrm>
-          <a:prstGeom prst="rect">
-            <a:avLst/>
-          </a:prstGeom>
-          <a:noFill/>
-          <a:ln/>
-        </p:spPr>
-        <p:txBody>
-          <a:bodyPr wrap="square" lIns="0" tIns="0" rIns="0" bIns="0" rtlCol="0" anchor="ctr"/>
-          <a:lstStyle/>
-          <a:p>
-            <a:pPr indent="0" marL="0">
-              <a:buNone/>
-            </a:pPr>
-            <a:r>
-              <a:rPr lang="en-US" sz="1100" dirty="0">
-                <a:solidFill>
-                  <a:srgbClr val="5A6A78"/>
-                </a:solidFill>
-                <a:latin typeface="맑은 고딕" pitchFamily="34" charset="0"/>
-                <a:ea typeface="맑은 고딕" pitchFamily="34" charset="-122"/>
-                <a:cs typeface="맑은 고딕" pitchFamily="34" charset="-120"/>
-              </a:rPr>
-              <a:t>면적 1,850㎢, 해안선과 중산간이 함께 있는 제주의 지형 조건</a:t>
-            </a:r>
-            <a:endParaRPr lang="en-US" sz="1100" dirty="0"/>
+        </p:txBody>
+      </p:sp>
+      <p:sp>
+        <p:nvSpPr>
+          <p:cNvPr id="25" name="Text 23"/>
+          <p:cNvSpPr txBox="1"/>
+          <p:nvPr/>
+        </p:nvSpPr>
+        <p:spPr>
+          <a:xfrm>
+            <a:off x="548640" y="4773168"/>
+            <a:ext cx="8046720" cy="256032"/>
+          </a:xfrm>
+          <a:prstGeom prst="rect">
+            <a:avLst/>
+          </a:prstGeom>
+          <a:noFill/>
+          <a:ln/>
+        </p:spPr>
+        <p:txBody>
+          <a:bodyPr wrap="square" lIns="0" tIns="0" rIns="0" bIns="0" rtlCol="0" anchor="ctr"/>
+          <a:lstStyle/>
+          <a:p>
+            <a:pPr indent="0" marL="0">
+              <a:buNone/>
+            </a:pPr>
+            <a:r>
+              <a:rPr lang="en-US" sz="850" dirty="0">
+                <a:solidFill>
+                  <a:srgbClr val="8895A2"/>
+                </a:solidFill>
+                <a:latin typeface="맑은 고딕" pitchFamily="34" charset="0"/>
+                <a:ea typeface="맑은 고딕" pitchFamily="34" charset="-122"/>
+                <a:cs typeface="맑은 고딕" pitchFamily="34" charset="-120"/>
+              </a:rPr>
+              <a:t>※ 제주의 112·119 현장 도착 소요시간 실측치는 미공개. '수십 분'은 현행 운용 방식에서 도출한 추정치 — 도가 보유한 실측치 공개를 제언에 포함</a:t>
+            </a:r>
+            <a:endParaRPr lang="en-US" sz="850" dirty="0"/>
           </a:p>
         </p:txBody>
       </p:sp>
@@ -7571,7 +8745,7 @@
               <a:buNone/>
             </a:pPr>
             <a:r>
-              <a:rPr lang="en-US" sz="3200" b="1" dirty="0">
+              <a:rPr lang="en-US" sz="3000" b="1" dirty="0">
                 <a:solidFill>
                   <a:srgbClr val="10243A"/>
                 </a:solidFill>
@@ -7581,7 +8755,7 @@
               </a:rPr>
               <a:t>DFR — 사람보다 먼저 도착하는 눈</a:t>
             </a:r>
-            <a:endParaRPr lang="en-US" sz="3200" dirty="0"/>
+            <a:endParaRPr lang="en-US" sz="3000" dirty="0"/>
           </a:p>
         </p:txBody>
       </p:sp>
@@ -7747,7 +8921,7 @@
               <a:buNone/>
             </a:pPr>
             <a:r>
-              <a:rPr lang="en-US" sz="1400" b="1" dirty="0">
+              <a:rPr lang="en-US" sz="1300" b="1" dirty="0">
                 <a:solidFill>
                   <a:srgbClr val="10243A"/>
                 </a:solidFill>
@@ -7757,7 +8931,7 @@
               </a:rPr>
               <a:t>112 · 119 신고 접수</a:t>
             </a:r>
-            <a:endParaRPr lang="en-US" sz="1400" dirty="0"/>
+            <a:endParaRPr lang="en-US" sz="1300" dirty="0"/>
           </a:p>
         </p:txBody>
       </p:sp>
@@ -7789,7 +8963,7 @@
               <a:buNone/>
             </a:pPr>
             <a:r>
-              <a:rPr lang="en-US" sz="1100" dirty="0">
+              <a:rPr lang="en-US" sz="1050" dirty="0">
                 <a:solidFill>
                   <a:srgbClr val="5A6A78"/>
                 </a:solidFill>
@@ -7799,7 +8973,7 @@
               </a:rPr>
               <a:t>신고 정보가 관제센터로</a:t>
             </a:r>
-            <a:endParaRPr lang="en-US" sz="1100" dirty="0"/>
+            <a:endParaRPr lang="en-US" sz="1050" dirty="0"/>
           </a:p>
           <a:p>
             <a:pPr indent="0" marL="0">
@@ -7809,7 +8983,7 @@
               <a:buNone/>
             </a:pPr>
             <a:r>
-              <a:rPr lang="en-US" sz="1100" dirty="0">
+              <a:rPr lang="en-US" sz="1050" dirty="0">
                 <a:solidFill>
                   <a:srgbClr val="5A6A78"/>
                 </a:solidFill>
@@ -7819,7 +8993,7 @@
               </a:rPr>
               <a:t>즉시 연동됩니다.</a:t>
             </a:r>
-            <a:endParaRPr lang="en-US" sz="1100" dirty="0"/>
+            <a:endParaRPr lang="en-US" sz="1050" dirty="0"/>
           </a:p>
         </p:txBody>
       </p:sp>
@@ -7946,7 +9120,7 @@
               <a:buNone/>
             </a:pPr>
             <a:r>
-              <a:rPr lang="en-US" sz="1400" b="1" dirty="0">
+              <a:rPr lang="en-US" sz="1300" b="1" dirty="0">
                 <a:solidFill>
                   <a:srgbClr val="10243A"/>
                 </a:solidFill>
@@ -7956,7 +9130,7 @@
               </a:rPr>
               <a:t>무인 격납고 자동 이륙</a:t>
             </a:r>
-            <a:endParaRPr lang="en-US" sz="1400" dirty="0"/>
+            <a:endParaRPr lang="en-US" sz="1300" dirty="0"/>
           </a:p>
         </p:txBody>
       </p:sp>
@@ -7988,7 +9162,7 @@
               <a:buNone/>
             </a:pPr>
             <a:r>
-              <a:rPr lang="en-US" sz="1100" dirty="0">
+              <a:rPr lang="en-US" sz="1050" dirty="0">
                 <a:solidFill>
                   <a:srgbClr val="5A6A78"/>
                 </a:solidFill>
@@ -7998,7 +9172,7 @@
               </a:rPr>
               <a:t>사람이 출발하기 전에</a:t>
             </a:r>
-            <a:endParaRPr lang="en-US" sz="1100" dirty="0"/>
+            <a:endParaRPr lang="en-US" sz="1050" dirty="0"/>
           </a:p>
           <a:p>
             <a:pPr indent="0" marL="0">
@@ -8008,7 +9182,7 @@
               <a:buNone/>
             </a:pPr>
             <a:r>
-              <a:rPr lang="en-US" sz="1100" dirty="0">
+              <a:rPr lang="en-US" sz="1050" dirty="0">
                 <a:solidFill>
                   <a:srgbClr val="5A6A78"/>
                 </a:solidFill>
@@ -8018,7 +9192,7 @@
               </a:rPr>
               <a:t>기체가 먼저 뜹니다.</a:t>
             </a:r>
-            <a:endParaRPr lang="en-US" sz="1100" dirty="0"/>
+            <a:endParaRPr lang="en-US" sz="1050" dirty="0"/>
           </a:p>
         </p:txBody>
       </p:sp>
@@ -8145,7 +9319,7 @@
               <a:buNone/>
             </a:pPr>
             <a:r>
-              <a:rPr lang="en-US" sz="1400" b="1" dirty="0">
+              <a:rPr lang="en-US" sz="1300" b="1" dirty="0">
                 <a:solidFill>
                   <a:srgbClr val="10243A"/>
                 </a:solidFill>
@@ -8153,9 +9327,9 @@
                 <a:ea typeface="맑은 고딕" pitchFamily="34" charset="-122"/>
                 <a:cs typeface="맑은 고딕" pitchFamily="34" charset="-120"/>
               </a:rPr>
-              <a:t>실시간 영상 공유</a:t>
-            </a:r>
-            <a:endParaRPr lang="en-US" sz="1400" dirty="0"/>
+              <a:t>실시간 영상 공유 · 자동 기록</a:t>
+            </a:r>
+            <a:endParaRPr lang="en-US" sz="1300" dirty="0"/>
           </a:p>
         </p:txBody>
       </p:sp>
@@ -8187,7 +9361,7 @@
               <a:buNone/>
             </a:pPr>
             <a:r>
-              <a:rPr lang="en-US" sz="1100" dirty="0">
+              <a:rPr lang="en-US" sz="1050" dirty="0">
                 <a:solidFill>
                   <a:srgbClr val="5A6A78"/>
                 </a:solidFill>
@@ -8197,7 +9371,7 @@
               </a:rPr>
               <a:t>관제센터와 출동 인력이</a:t>
             </a:r>
-            <a:endParaRPr lang="en-US" sz="1100" dirty="0"/>
+            <a:endParaRPr lang="en-US" sz="1050" dirty="0"/>
           </a:p>
           <a:p>
             <a:pPr indent="0" marL="0">
@@ -8207,7 +9381,7 @@
               <a:buNone/>
             </a:pPr>
             <a:r>
-              <a:rPr lang="en-US" sz="1100" dirty="0">
+              <a:rPr lang="en-US" sz="1050" dirty="0">
                 <a:solidFill>
                   <a:srgbClr val="5A6A78"/>
                 </a:solidFill>
@@ -8215,9 +9389,9 @@
                 <a:ea typeface="맑은 고딕" pitchFamily="34" charset="-122"/>
                 <a:cs typeface="맑은 고딕" pitchFamily="34" charset="-120"/>
               </a:rPr>
-              <a:t>동시에 현장을 봅니다.</a:t>
-            </a:r>
-            <a:endParaRPr lang="en-US" sz="1100" dirty="0"/>
+              <a:t>동시에 봅니다. 로그가 남습니다.</a:t>
+            </a:r>
+            <a:endParaRPr lang="en-US" sz="1050" dirty="0"/>
           </a:p>
         </p:txBody>
       </p:sp>
@@ -8229,7 +9403,7 @@
         </p:nvSpPr>
         <p:spPr>
           <a:xfrm>
-            <a:off x="548640" y="4114800"/>
+            <a:off x="548640" y="4407408"/>
             <a:ext cx="8046720" cy="365760"/>
           </a:xfrm>
           <a:prstGeom prst="rect">
@@ -8246,7 +9420,7 @@
               <a:buNone/>
             </a:pPr>
             <a:r>
-              <a:rPr lang="en-US" sz="1300" dirty="0">
+              <a:rPr lang="en-US" sz="1200" dirty="0">
                 <a:solidFill>
                   <a:srgbClr val="10243A"/>
                 </a:solidFill>
@@ -8254,9 +9428,9 @@
                 <a:ea typeface="맑은 고딕" pitchFamily="34" charset="-122"/>
                 <a:cs typeface="맑은 고딕" pitchFamily="34" charset="-120"/>
               </a:rPr>
-              <a:t>AI가 아무리 좋아도 기체가 30분 뒤에 뜨면 소용이 없습니다. 그 AI를 태울 출동 체계가 필요합니다.</a:t>
-            </a:r>
-            <a:endParaRPr lang="en-US" sz="1300" dirty="0"/>
+              <a:t>기술 제안이라기보다, 행정 절차 설계에 가까운 제안입니다.</a:t>
+            </a:r>
+            <a:endParaRPr lang="en-US" sz="1200" dirty="0"/>
           </a:p>
         </p:txBody>
       </p:sp>
@@ -8310,7 +9484,7 @@
               <a:buNone/>
             </a:pPr>
             <a:r>
-              <a:rPr lang="en-US" sz="3200" b="1" dirty="0">
+              <a:rPr lang="en-US" sz="3000" b="1" dirty="0">
                 <a:solidFill>
                   <a:srgbClr val="10243A"/>
                 </a:solidFill>
@@ -8318,9 +9492,9 @@
                 <a:ea typeface="맑은 고딕" pitchFamily="34" charset="-122"/>
                 <a:cs typeface="맑은 고딕" pitchFamily="34" charset="-120"/>
               </a:rPr>
-              <a:t>무엇이 달라지는가</a:t>
-            </a:r>
-            <a:endParaRPr lang="en-US" sz="3200" dirty="0"/>
+              <a:t>하나의 장치가 두 공백을 메웁니다</a:t>
+            </a:r>
+            <a:endParaRPr lang="en-US" sz="3000" dirty="0"/>
           </a:p>
         </p:txBody>
       </p:sp>
@@ -8357,9 +9531,357 @@
                 <a:ea typeface="맑은 고딕" pitchFamily="34" charset="-122"/>
                 <a:cs typeface="맑은 고딕" pitchFamily="34" charset="-120"/>
               </a:rPr>
-              <a:t>같은 기체라도 배치를 바꾸면 역할이 달라집니다</a:t>
+              <a:t>새 감시망을 만들자는 제안이 아닙니다</a:t>
             </a:r>
             <a:endParaRPr lang="en-US" sz="1300" dirty="0"/>
+          </a:p>
+        </p:txBody>
+      </p:sp>
+      <p:sp>
+        <p:nvSpPr>
+          <p:cNvPr id="4" name="Shape 2"/>
+          <p:cNvSpPr/>
+          <p:nvPr/>
+        </p:nvSpPr>
+        <p:spPr>
+          <a:xfrm>
+            <a:off x="548640" y="1554480"/>
+            <a:ext cx="3931920" cy="1417320"/>
+          </a:xfrm>
+          <a:prstGeom prst="roundRect">
+            <a:avLst>
+              <a:gd name="adj" fmla="val 3871"/>
+            </a:avLst>
+          </a:prstGeom>
+          <a:solidFill>
+            <a:srgbClr val="F2F6F9"/>
+          </a:solidFill>
+          <a:ln w="12700">
+            <a:solidFill>
+              <a:srgbClr val="E3EAF0"/>
+            </a:solidFill>
+            <a:prstDash val="solid"/>
+          </a:ln>
+          <a:effectLst>
+            <a:outerShdw sx="100000" sy="100000" kx="0" ky="0" algn="bl" rotWithShape="0" blurRad="101600" dist="25400" dir="5400000">
+              <a:srgbClr val="0B1B2B">
+                <a:alpha val="12000"/>
+              </a:srgbClr>
+            </a:outerShdw>
+          </a:effectLst>
+        </p:spPr>
+      </p:sp>
+      <p:sp>
+        <p:nvSpPr>
+          <p:cNvPr id="5" name="Text 3"/>
+          <p:cNvSpPr txBox="1"/>
+          <p:nvPr/>
+        </p:nvSpPr>
+        <p:spPr>
+          <a:xfrm>
+            <a:off x="777240" y="1691640"/>
+            <a:ext cx="3474720" cy="274320"/>
+          </a:xfrm>
+          <a:prstGeom prst="rect">
+            <a:avLst/>
+          </a:prstGeom>
+          <a:noFill/>
+          <a:ln/>
+        </p:spPr>
+        <p:txBody>
+          <a:bodyPr wrap="square" lIns="0" tIns="0" rIns="0" bIns="0" rtlCol="0" anchor="ctr"/>
+          <a:lstStyle/>
+          <a:p>
+            <a:pPr indent="0" marL="0">
+              <a:buNone/>
+            </a:pPr>
+            <a:r>
+              <a:rPr lang="en-US" sz="1100" b="1" dirty="0">
+                <a:solidFill>
+                  <a:srgbClr val="E0523C"/>
+                </a:solidFill>
+                <a:latin typeface="맑은 고딕" pitchFamily="34" charset="0"/>
+                <a:ea typeface="맑은 고딕" pitchFamily="34" charset="-122"/>
+                <a:cs typeface="맑은 고딕" pitchFamily="34" charset="-120"/>
+              </a:rPr>
+              <a:t>공백 ①  공간</a:t>
+            </a:r>
+            <a:endParaRPr lang="en-US" sz="1100" dirty="0"/>
+          </a:p>
+        </p:txBody>
+      </p:sp>
+      <p:sp>
+        <p:nvSpPr>
+          <p:cNvPr id="6" name="Text 4"/>
+          <p:cNvSpPr txBox="1"/>
+          <p:nvPr/>
+        </p:nvSpPr>
+        <p:spPr>
+          <a:xfrm>
+            <a:off x="777240" y="1975104"/>
+            <a:ext cx="3474720" cy="329184"/>
+          </a:xfrm>
+          <a:prstGeom prst="rect">
+            <a:avLst/>
+          </a:prstGeom>
+          <a:noFill/>
+          <a:ln/>
+        </p:spPr>
+        <p:txBody>
+          <a:bodyPr wrap="square" lIns="0" tIns="0" rIns="0" bIns="0" rtlCol="0" anchor="ctr"/>
+          <a:lstStyle/>
+          <a:p>
+            <a:pPr indent="0" marL="0">
+              <a:buNone/>
+            </a:pPr>
+            <a:r>
+              <a:rPr lang="en-US" sz="1500" b="1" dirty="0">
+                <a:solidFill>
+                  <a:srgbClr val="10243A"/>
+                </a:solidFill>
+                <a:latin typeface="맑은 고딕" pitchFamily="34" charset="0"/>
+                <a:ea typeface="맑은 고딕" pitchFamily="34" charset="-122"/>
+                <a:cs typeface="맑은 고딕" pitchFamily="34" charset="-120"/>
+              </a:rPr>
+              <a:t>고정형 관제망의 이동형 확장</a:t>
+            </a:r>
+            <a:endParaRPr lang="en-US" sz="1500" dirty="0"/>
+          </a:p>
+        </p:txBody>
+      </p:sp>
+      <p:sp>
+        <p:nvSpPr>
+          <p:cNvPr id="7" name="Text 5"/>
+          <p:cNvSpPr txBox="1"/>
+          <p:nvPr/>
+        </p:nvSpPr>
+        <p:spPr>
+          <a:xfrm>
+            <a:off x="777240" y="2331720"/>
+            <a:ext cx="3474720" cy="548640"/>
+          </a:xfrm>
+          <a:prstGeom prst="rect">
+            <a:avLst/>
+          </a:prstGeom>
+          <a:noFill/>
+          <a:ln/>
+        </p:spPr>
+        <p:txBody>
+          <a:bodyPr wrap="square" lIns="0" tIns="0" rIns="0" bIns="0" rtlCol="0" anchor="ctr"/>
+          <a:lstStyle/>
+          <a:p>
+            <a:pPr indent="0" marL="0">
+              <a:lnSpc>
+                <a:spcPct val="120000"/>
+              </a:lnSpc>
+              <a:buNone/>
+            </a:pPr>
+            <a:r>
+              <a:rPr lang="en-US" sz="1050" dirty="0">
+                <a:solidFill>
+                  <a:srgbClr val="5A6A78"/>
+                </a:solidFill>
+                <a:latin typeface="맑은 고딕" pitchFamily="34" charset="0"/>
+                <a:ea typeface="맑은 고딕" pitchFamily="34" charset="-122"/>
+                <a:cs typeface="맑은 고딕" pitchFamily="34" charset="-120"/>
+              </a:rPr>
+              <a:t>이미 19,096대의 카메라와 85명의 관제 인력이</a:t>
+            </a:r>
+            <a:endParaRPr lang="en-US" sz="1050" dirty="0"/>
+          </a:p>
+          <a:p>
+            <a:pPr indent="0" marL="0">
+              <a:lnSpc>
+                <a:spcPct val="120000"/>
+              </a:lnSpc>
+              <a:buNone/>
+            </a:pPr>
+            <a:r>
+              <a:rPr lang="en-US" sz="1050" dirty="0">
+                <a:solidFill>
+                  <a:srgbClr val="5A6A78"/>
+                </a:solidFill>
+                <a:latin typeface="맑은 고딕" pitchFamily="34" charset="0"/>
+                <a:ea typeface="맑은 고딕" pitchFamily="34" charset="-122"/>
+                <a:cs typeface="맑은 고딕" pitchFamily="34" charset="-120"/>
+              </a:rPr>
+              <a:t>돌아갑니다. 여기에 날아가는 카메라를 붙입니다.</a:t>
+            </a:r>
+            <a:endParaRPr lang="en-US" sz="1050" dirty="0"/>
+          </a:p>
+        </p:txBody>
+      </p:sp>
+      <p:sp>
+        <p:nvSpPr>
+          <p:cNvPr id="8" name="Shape 6"/>
+          <p:cNvSpPr/>
+          <p:nvPr/>
+        </p:nvSpPr>
+        <p:spPr>
+          <a:xfrm>
+            <a:off x="4663440" y="1554480"/>
+            <a:ext cx="3931920" cy="1417320"/>
+          </a:xfrm>
+          <a:prstGeom prst="roundRect">
+            <a:avLst>
+              <a:gd name="adj" fmla="val 3871"/>
+            </a:avLst>
+          </a:prstGeom>
+          <a:solidFill>
+            <a:srgbClr val="10243A"/>
+          </a:solidFill>
+          <a:ln w="12700">
+            <a:solidFill>
+              <a:srgbClr val="10243A"/>
+            </a:solidFill>
+            <a:prstDash val="solid"/>
+          </a:ln>
+          <a:effectLst>
+            <a:outerShdw sx="100000" sy="100000" kx="0" ky="0" algn="bl" rotWithShape="0" blurRad="101600" dist="25400" dir="5400000">
+              <a:srgbClr val="0B1B2B">
+                <a:alpha val="12000"/>
+              </a:srgbClr>
+            </a:outerShdw>
+          </a:effectLst>
+        </p:spPr>
+      </p:sp>
+      <p:sp>
+        <p:nvSpPr>
+          <p:cNvPr id="9" name="Text 7"/>
+          <p:cNvSpPr txBox="1"/>
+          <p:nvPr/>
+        </p:nvSpPr>
+        <p:spPr>
+          <a:xfrm>
+            <a:off x="4892040" y="1691640"/>
+            <a:ext cx="3474720" cy="274320"/>
+          </a:xfrm>
+          <a:prstGeom prst="rect">
+            <a:avLst/>
+          </a:prstGeom>
+          <a:noFill/>
+          <a:ln/>
+        </p:spPr>
+        <p:txBody>
+          <a:bodyPr wrap="square" lIns="0" tIns="0" rIns="0" bIns="0" rtlCol="0" anchor="ctr"/>
+          <a:lstStyle/>
+          <a:p>
+            <a:pPr indent="0" marL="0">
+              <a:buNone/>
+            </a:pPr>
+            <a:r>
+              <a:rPr lang="en-US" sz="1100" b="1" dirty="0">
+                <a:solidFill>
+                  <a:srgbClr val="F2A65A"/>
+                </a:solidFill>
+                <a:latin typeface="맑은 고딕" pitchFamily="34" charset="0"/>
+                <a:ea typeface="맑은 고딕" pitchFamily="34" charset="-122"/>
+                <a:cs typeface="맑은 고딕" pitchFamily="34" charset="-120"/>
+              </a:rPr>
+              <a:t>공백 ②  절차</a:t>
+            </a:r>
+            <a:endParaRPr lang="en-US" sz="1100" dirty="0"/>
+          </a:p>
+        </p:txBody>
+      </p:sp>
+      <p:sp>
+        <p:nvSpPr>
+          <p:cNvPr id="10" name="Text 8"/>
+          <p:cNvSpPr txBox="1"/>
+          <p:nvPr/>
+        </p:nvSpPr>
+        <p:spPr>
+          <a:xfrm>
+            <a:off x="4892040" y="1975104"/>
+            <a:ext cx="3474720" cy="329184"/>
+          </a:xfrm>
+          <a:prstGeom prst="rect">
+            <a:avLst/>
+          </a:prstGeom>
+          <a:noFill/>
+          <a:ln/>
+        </p:spPr>
+        <p:txBody>
+          <a:bodyPr wrap="square" lIns="0" tIns="0" rIns="0" bIns="0" rtlCol="0" anchor="ctr"/>
+          <a:lstStyle/>
+          <a:p>
+            <a:pPr indent="0" marL="0">
+              <a:buNone/>
+            </a:pPr>
+            <a:r>
+              <a:rPr lang="en-US" sz="1500" b="1" dirty="0">
+                <a:solidFill>
+                  <a:srgbClr val="FFFFFF"/>
+                </a:solidFill>
+                <a:latin typeface="맑은 고딕" pitchFamily="34" charset="0"/>
+                <a:ea typeface="맑은 고딕" pitchFamily="34" charset="-122"/>
+                <a:cs typeface="맑은 고딕" pitchFamily="34" charset="-120"/>
+              </a:rPr>
+              <a:t>재량을 기본 동작으로</a:t>
+            </a:r>
+            <a:endParaRPr lang="en-US" sz="1500" dirty="0"/>
+          </a:p>
+        </p:txBody>
+      </p:sp>
+      <p:sp>
+        <p:nvSpPr>
+          <p:cNvPr id="11" name="Text 9"/>
+          <p:cNvSpPr txBox="1"/>
+          <p:nvPr/>
+        </p:nvSpPr>
+        <p:spPr>
+          <a:xfrm>
+            <a:off x="4892040" y="2331720"/>
+            <a:ext cx="3474720" cy="548640"/>
+          </a:xfrm>
+          <a:prstGeom prst="rect">
+            <a:avLst/>
+          </a:prstGeom>
+          <a:noFill/>
+          <a:ln/>
+        </p:spPr>
+        <p:txBody>
+          <a:bodyPr wrap="square" lIns="0" tIns="0" rIns="0" bIns="0" rtlCol="0" anchor="ctr"/>
+          <a:lstStyle/>
+          <a:p>
+            <a:pPr indent="0" marL="0">
+              <a:lnSpc>
+                <a:spcPct val="120000"/>
+              </a:lnSpc>
+              <a:buNone/>
+            </a:pPr>
+            <a:r>
+              <a:rPr lang="en-US" sz="1050" dirty="0">
+                <a:solidFill>
+                  <a:srgbClr val="CADCFC"/>
+                </a:solidFill>
+                <a:latin typeface="맑은 고딕" pitchFamily="34" charset="0"/>
+                <a:ea typeface="맑은 고딕" pitchFamily="34" charset="-122"/>
+                <a:cs typeface="맑은 고딕" pitchFamily="34" charset="-120"/>
+              </a:rPr>
+              <a:t>판단과 무관하게 최소한의 공중 확인이 수행되고,</a:t>
+            </a:r>
+            <a:endParaRPr lang="en-US" sz="1050" dirty="0"/>
+          </a:p>
+          <a:p>
+            <a:pPr indent="0" marL="0">
+              <a:lnSpc>
+                <a:spcPct val="120000"/>
+              </a:lnSpc>
+              <a:buNone/>
+            </a:pPr>
+            <a:r>
+              <a:rPr lang="en-US" sz="1050" dirty="0">
+                <a:solidFill>
+                  <a:srgbClr val="CADCFC"/>
+                </a:solidFill>
+                <a:latin typeface="맑은 고딕" pitchFamily="34" charset="0"/>
+                <a:ea typeface="맑은 고딕" pitchFamily="34" charset="-122"/>
+                <a:cs typeface="맑은 고딕" pitchFamily="34" charset="-120"/>
+              </a:rPr>
+              <a:t>그 절차가 로그로 남습니다.</a:t>
+            </a:r>
+            <a:endParaRPr lang="en-US" sz="1050" dirty="0"/>
           </a:p>
         </p:txBody>
       </p:sp>
@@ -8378,7 +9900,7 @@
           </p:nvPr>
         </p:nvGraphicFramePr>
         <p:xfrm>
-          <a:off x="548640" y="1600200"/>
+          <a:off x="548640" y="3154680"/>
           <a:ext cx="8046720" cy="914400"/>
         </p:xfrm>
         <a:graphic>
@@ -8390,7 +9912,7 @@
                 <a:gridCol w="3108960"/>
                 <a:gridCol w="3108960"/>
               </a:tblGrid>
-              <a:tr h="402336">
+              <a:tr h="301752">
                 <a:tc>
                   <a:txBody>
                     <a:bodyPr/>
@@ -8400,7 +9922,7 @@
                         <a:buNone/>
                       </a:pPr>
                       <a:r>
-                        <a:rPr lang="en-US" sz="1200" b="1" dirty="0">
+                        <a:rPr lang="en-US" sz="1100" b="1" dirty="0">
                           <a:solidFill>
                             <a:srgbClr val="FFFFFF"/>
                           </a:solidFill>
@@ -8410,7 +9932,7 @@
                         </a:rPr>
                         <a:t>구분</a:t>
                       </a:r>
-                      <a:endParaRPr lang="en-US" sz="1200" dirty="0">
+                      <a:endParaRPr lang="en-US" sz="1100" dirty="0">
                         <a:latin typeface="맑은 고딕" charset="0"/>
                         <a:ea typeface="맑은 고딕" charset="0"/>
                         <a:cs typeface="맑은 고딕" charset="0"/>
@@ -8468,7 +9990,7 @@
                         <a:buNone/>
                       </a:pPr>
                       <a:r>
-                        <a:rPr lang="en-US" sz="1200" b="1" dirty="0">
+                        <a:rPr lang="en-US" sz="1100" b="1" dirty="0">
                           <a:solidFill>
                             <a:srgbClr val="FFFFFF"/>
                           </a:solidFill>
@@ -8478,7 +10000,7 @@
                         </a:rPr>
                         <a:t>현행  ·  동원형</a:t>
                       </a:r>
-                      <a:endParaRPr lang="en-US" sz="1200" dirty="0">
+                      <a:endParaRPr lang="en-US" sz="1100" dirty="0">
                         <a:latin typeface="맑은 고딕" charset="0"/>
                         <a:ea typeface="맑은 고딕" charset="0"/>
                         <a:cs typeface="맑은 고딕" charset="0"/>
@@ -8536,7 +10058,7 @@
                         <a:buNone/>
                       </a:pPr>
                       <a:r>
-                        <a:rPr lang="en-US" sz="1200" b="1" dirty="0">
+                        <a:rPr lang="en-US" sz="1100" b="1" dirty="0">
                           <a:solidFill>
                             <a:srgbClr val="FFFFFF"/>
                           </a:solidFill>
@@ -8546,7 +10068,7 @@
                         </a:rPr>
                         <a:t>제안  ·  상시 출동형</a:t>
                       </a:r>
-                      <a:endParaRPr lang="en-US" sz="1200" dirty="0">
+                      <a:endParaRPr lang="en-US" sz="1100" dirty="0">
                         <a:latin typeface="맑은 고딕" charset="0"/>
                         <a:ea typeface="맑은 고딕" charset="0"/>
                         <a:cs typeface="맑은 고딕" charset="0"/>
@@ -8596,7 +10118,7 @@
                   </a:tcPr>
                 </a:tc>
               </a:tr>
-              <a:tr h="402336">
+              <a:tr h="301752">
                 <a:tc>
                   <a:txBody>
                     <a:bodyPr/>
@@ -8606,7 +10128,7 @@
                         <a:buNone/>
                       </a:pPr>
                       <a:r>
-                        <a:rPr lang="en-US" sz="1200" dirty="0">
+                        <a:rPr lang="en-US" sz="1100" dirty="0">
                           <a:solidFill>
                             <a:srgbClr val="10243A"/>
                           </a:solidFill>
@@ -8614,9 +10136,9 @@
                           <a:ea typeface="맑은 고딕" pitchFamily="34" charset="-122"/>
                           <a:cs typeface="맑은 고딕" pitchFamily="34" charset="-120"/>
                         </a:rPr>
-                        <a:t>이륙 주체</a:t>
+                        <a:t>상공 확보</a:t>
                       </a:r>
-                      <a:endParaRPr lang="en-US" sz="1200" dirty="0">
+                      <a:endParaRPr lang="en-US" sz="1100" dirty="0">
                         <a:latin typeface="맑은 고딕" charset="0"/>
                         <a:ea typeface="맑은 고딕" charset="0"/>
                         <a:cs typeface="맑은 고딕" charset="0"/>
@@ -8674,7 +10196,7 @@
                         <a:buNone/>
                       </a:pPr>
                       <a:r>
-                        <a:rPr lang="en-US" sz="1200" dirty="0">
+                        <a:rPr lang="en-US" sz="1100" dirty="0">
                           <a:solidFill>
                             <a:srgbClr val="10243A"/>
                           </a:solidFill>
@@ -8682,9 +10204,9 @@
                           <a:ea typeface="맑은 고딕" pitchFamily="34" charset="-122"/>
                           <a:cs typeface="맑은 고딕" pitchFamily="34" charset="-120"/>
                         </a:rPr>
-                        <a:t>현장에 도착한 조종 인력</a:t>
+                        <a:t>수십 분</a:t>
                       </a:r>
-                      <a:endParaRPr lang="en-US" sz="1200" dirty="0">
+                      <a:endParaRPr lang="en-US" sz="1100" dirty="0">
                         <a:latin typeface="맑은 고딕" charset="0"/>
                         <a:ea typeface="맑은 고딕" charset="0"/>
                         <a:cs typeface="맑은 고딕" charset="0"/>
@@ -8742,7 +10264,7 @@
                         <a:buNone/>
                       </a:pPr>
                       <a:r>
-                        <a:rPr lang="en-US" sz="1200" dirty="0">
+                        <a:rPr lang="en-US" sz="1100" dirty="0">
                           <a:solidFill>
                             <a:srgbClr val="10243A"/>
                           </a:solidFill>
@@ -8750,9 +10272,9 @@
                           <a:ea typeface="맑은 고딕" pitchFamily="34" charset="-122"/>
                           <a:cs typeface="맑은 고딕" pitchFamily="34" charset="-120"/>
                         </a:rPr>
-                        <a:t>관제센터 원격 · 자동</a:t>
+                        <a:t>3 ~ 5분</a:t>
                       </a:r>
-                      <a:endParaRPr lang="en-US" sz="1200" dirty="0">
+                      <a:endParaRPr lang="en-US" sz="1100" dirty="0">
                         <a:latin typeface="맑은 고딕" charset="0"/>
                         <a:ea typeface="맑은 고딕" charset="0"/>
                         <a:cs typeface="맑은 고딕" charset="0"/>
@@ -8802,7 +10324,7 @@
                   </a:tcPr>
                 </a:tc>
               </a:tr>
-              <a:tr h="402336">
+              <a:tr h="301752">
                 <a:tc>
                   <a:txBody>
                     <a:bodyPr/>
@@ -8812,7 +10334,7 @@
                         <a:buNone/>
                       </a:pPr>
                       <a:r>
-                        <a:rPr lang="en-US" sz="1200" dirty="0">
+                        <a:rPr lang="en-US" sz="1100" dirty="0">
                           <a:solidFill>
                             <a:srgbClr val="10243A"/>
                           </a:solidFill>
@@ -8820,9 +10342,9 @@
                           <a:ea typeface="맑은 고딕" pitchFamily="34" charset="-122"/>
                           <a:cs typeface="맑은 고딕" pitchFamily="34" charset="-120"/>
                         </a:rPr>
-                        <a:t>상공 확보</a:t>
+                        <a:t>야간 · 저시정</a:t>
                       </a:r>
-                      <a:endParaRPr lang="en-US" sz="1200" dirty="0">
+                      <a:endParaRPr lang="en-US" sz="1100" dirty="0">
                         <a:latin typeface="맑은 고딕" charset="0"/>
                         <a:ea typeface="맑은 고딕" charset="0"/>
                         <a:cs typeface="맑은 고딕" charset="0"/>
@@ -8880,7 +10402,7 @@
                         <a:buNone/>
                       </a:pPr>
                       <a:r>
-                        <a:rPr lang="en-US" sz="1200" dirty="0">
+                        <a:rPr lang="en-US" sz="1100" dirty="0">
                           <a:solidFill>
                             <a:srgbClr val="10243A"/>
                           </a:solidFill>
@@ -8888,9 +10410,9 @@
                           <a:ea typeface="맑은 고딕" pitchFamily="34" charset="-122"/>
                           <a:cs typeface="맑은 고딕" pitchFamily="34" charset="-120"/>
                         </a:rPr>
-                        <a:t>수십 분</a:t>
+                        <a:t>사실상 제한</a:t>
                       </a:r>
-                      <a:endParaRPr lang="en-US" sz="1200" dirty="0">
+                      <a:endParaRPr lang="en-US" sz="1100" dirty="0">
                         <a:latin typeface="맑은 고딕" charset="0"/>
                         <a:ea typeface="맑은 고딕" charset="0"/>
                         <a:cs typeface="맑은 고딕" charset="0"/>
@@ -8948,7 +10470,7 @@
                         <a:buNone/>
                       </a:pPr>
                       <a:r>
-                        <a:rPr lang="en-US" sz="1200" dirty="0">
+                        <a:rPr lang="en-US" sz="1100" dirty="0">
                           <a:solidFill>
                             <a:srgbClr val="10243A"/>
                           </a:solidFill>
@@ -8956,9 +10478,9 @@
                           <a:ea typeface="맑은 고딕" pitchFamily="34" charset="-122"/>
                           <a:cs typeface="맑은 고딕" pitchFamily="34" charset="-120"/>
                         </a:rPr>
-                        <a:t>3 ~ 5분</a:t>
+                        <a:t>열화상 + 자동비행으로 상시</a:t>
                       </a:r>
-                      <a:endParaRPr lang="en-US" sz="1200" dirty="0">
+                      <a:endParaRPr lang="en-US" sz="1100" dirty="0">
                         <a:latin typeface="맑은 고딕" charset="0"/>
                         <a:ea typeface="맑은 고딕" charset="0"/>
                         <a:cs typeface="맑은 고딕" charset="0"/>
@@ -9008,7 +10530,7 @@
                   </a:tcPr>
                 </a:tc>
               </a:tr>
-              <a:tr h="402336">
+              <a:tr h="301752">
                 <a:tc>
                   <a:txBody>
                     <a:bodyPr/>
@@ -9018,7 +10540,7 @@
                         <a:buNone/>
                       </a:pPr>
                       <a:r>
-                        <a:rPr lang="en-US" sz="1200" dirty="0">
+                        <a:rPr lang="en-US" sz="1100" dirty="0">
                           <a:solidFill>
                             <a:srgbClr val="10243A"/>
                           </a:solidFill>
@@ -9026,9 +10548,9 @@
                           <a:ea typeface="맑은 고딕" pitchFamily="34" charset="-122"/>
                           <a:cs typeface="맑은 고딕" pitchFamily="34" charset="-120"/>
                         </a:rPr>
-                        <a:t>야간 · 저시정</a:t>
+                        <a:t>역할</a:t>
                       </a:r>
-                      <a:endParaRPr lang="en-US" sz="1200" dirty="0">
+                      <a:endParaRPr lang="en-US" sz="1100" dirty="0">
                         <a:latin typeface="맑은 고딕" charset="0"/>
                         <a:ea typeface="맑은 고딕" charset="0"/>
                         <a:cs typeface="맑은 고딕" charset="0"/>
@@ -9086,7 +10608,7 @@
                         <a:buNone/>
                       </a:pPr>
                       <a:r>
-                        <a:rPr lang="en-US" sz="1200" dirty="0">
+                        <a:rPr lang="en-US" sz="1100" dirty="0">
                           <a:solidFill>
                             <a:srgbClr val="10243A"/>
                           </a:solidFill>
@@ -9094,9 +10616,9 @@
                           <a:ea typeface="맑은 고딕" pitchFamily="34" charset="-122"/>
                           <a:cs typeface="맑은 고딕" pitchFamily="34" charset="-120"/>
                         </a:rPr>
-                        <a:t>사실상 제한</a:t>
+                        <a:t>사후 수색</a:t>
                       </a:r>
-                      <a:endParaRPr lang="en-US" sz="1200" dirty="0">
+                      <a:endParaRPr lang="en-US" sz="1100" dirty="0">
                         <a:latin typeface="맑은 고딕" charset="0"/>
                         <a:ea typeface="맑은 고딕" charset="0"/>
                         <a:cs typeface="맑은 고딕" charset="0"/>
@@ -9154,7 +10676,7 @@
                         <a:buNone/>
                       </a:pPr>
                       <a:r>
-                        <a:rPr lang="en-US" sz="1200" dirty="0">
+                        <a:rPr lang="en-US" sz="1100" dirty="0">
                           <a:solidFill>
                             <a:srgbClr val="10243A"/>
                           </a:solidFill>
@@ -9162,9 +10684,9 @@
                           <a:ea typeface="맑은 고딕" pitchFamily="34" charset="-122"/>
                           <a:cs typeface="맑은 고딕" pitchFamily="34" charset="-120"/>
                         </a:rPr>
-                        <a:t>열화상 + 자동비행으로 상시</a:t>
+                        <a:t>선제 인지 + 출동 유도</a:t>
                       </a:r>
-                      <a:endParaRPr lang="en-US" sz="1200" dirty="0">
+                      <a:endParaRPr lang="en-US" sz="1100" dirty="0">
                         <a:latin typeface="맑은 고딕" charset="0"/>
                         <a:ea typeface="맑은 고딕" charset="0"/>
                         <a:cs typeface="맑은 고딕" charset="0"/>
@@ -9214,7 +10736,7 @@
                   </a:tcPr>
                 </a:tc>
               </a:tr>
-              <a:tr h="402336">
+              <a:tr h="301752">
                 <a:tc>
                   <a:txBody>
                     <a:bodyPr/>
@@ -9224,7 +10746,7 @@
                         <a:buNone/>
                       </a:pPr>
                       <a:r>
-                        <a:rPr lang="en-US" sz="1200" dirty="0">
+                        <a:rPr lang="en-US" sz="1100" dirty="0">
                           <a:solidFill>
                             <a:srgbClr val="10243A"/>
                           </a:solidFill>
@@ -9232,9 +10754,9 @@
                           <a:ea typeface="맑은 고딕" pitchFamily="34" charset="-122"/>
                           <a:cs typeface="맑은 고딕" pitchFamily="34" charset="-120"/>
                         </a:rPr>
-                        <a:t>역할</a:t>
+                        <a:t>기록</a:t>
                       </a:r>
-                      <a:endParaRPr lang="en-US" sz="1200" dirty="0">
+                      <a:endParaRPr lang="en-US" sz="1100" dirty="0">
                         <a:latin typeface="맑은 고딕" charset="0"/>
                         <a:ea typeface="맑은 고딕" charset="0"/>
                         <a:cs typeface="맑은 고딕" charset="0"/>
@@ -9292,7 +10814,7 @@
                         <a:buNone/>
                       </a:pPr>
                       <a:r>
-                        <a:rPr lang="en-US" sz="1200" dirty="0">
+                        <a:rPr lang="en-US" sz="1100" dirty="0">
                           <a:solidFill>
                             <a:srgbClr val="10243A"/>
                           </a:solidFill>
@@ -9300,9 +10822,9 @@
                           <a:ea typeface="맑은 고딕" pitchFamily="34" charset="-122"/>
                           <a:cs typeface="맑은 고딕" pitchFamily="34" charset="-120"/>
                         </a:rPr>
-                        <a:t>사후 수색</a:t>
+                        <a:t>담당자 보고에 의존</a:t>
                       </a:r>
-                      <a:endParaRPr lang="en-US" sz="1200" dirty="0">
+                      <a:endParaRPr lang="en-US" sz="1100" dirty="0">
                         <a:latin typeface="맑은 고딕" charset="0"/>
                         <a:ea typeface="맑은 고딕" charset="0"/>
                         <a:cs typeface="맑은 고딕" charset="0"/>
@@ -9360,7 +10882,7 @@
                         <a:buNone/>
                       </a:pPr>
                       <a:r>
-                        <a:rPr lang="en-US" sz="1200" dirty="0">
+                        <a:rPr lang="en-US" sz="1100" dirty="0">
                           <a:solidFill>
                             <a:srgbClr val="10243A"/>
                           </a:solidFill>
@@ -9368,215 +10890,9 @@
                           <a:ea typeface="맑은 고딕" pitchFamily="34" charset="-122"/>
                           <a:cs typeface="맑은 고딕" pitchFamily="34" charset="-120"/>
                         </a:rPr>
-                        <a:t>선제 인지 + 출동 유도</a:t>
+                        <a:t>출동 · 확인 자동 로그</a:t>
                       </a:r>
-                      <a:endParaRPr lang="en-US" sz="1200" dirty="0">
-                        <a:latin typeface="맑은 고딕" charset="0"/>
-                        <a:ea typeface="맑은 고딕" charset="0"/>
-                        <a:cs typeface="맑은 고딕" charset="0"/>
-                      </a:endParaRPr>
-                    </a:p>
-                  </a:txBody>
-                  <a:tcPr marL="73152" marR="73152" marT="73152" marB="73152" anchor="ctr">
-                    <a:lnL w="12700" cap="flat" cmpd="sng" algn="ctr">
-                      <a:solidFill>
-                        <a:srgbClr val="DCE5EC"/>
-                      </a:solidFill>
-                      <a:prstDash val="solid"/>
-                      <a:round/>
-                      <a:headEnd type="none" w="med" len="med"/>
-                      <a:tailEnd type="none" w="med" len="med"/>
-                    </a:lnL>
-                    <a:lnR w="12700" cap="flat" cmpd="sng" algn="ctr">
-                      <a:solidFill>
-                        <a:srgbClr val="DCE5EC"/>
-                      </a:solidFill>
-                      <a:prstDash val="solid"/>
-                      <a:round/>
-                      <a:headEnd type="none" w="med" len="med"/>
-                      <a:tailEnd type="none" w="med" len="med"/>
-                    </a:lnR>
-                    <a:lnT w="12700" cap="flat" cmpd="sng" algn="ctr">
-                      <a:solidFill>
-                        <a:srgbClr val="DCE5EC"/>
-                      </a:solidFill>
-                      <a:prstDash val="solid"/>
-                      <a:round/>
-                      <a:headEnd type="none" w="med" len="med"/>
-                      <a:tailEnd type="none" w="med" len="med"/>
-                    </a:lnT>
-                    <a:lnB w="12700" cap="flat" cmpd="sng" algn="ctr">
-                      <a:solidFill>
-                        <a:srgbClr val="DCE5EC"/>
-                      </a:solidFill>
-                      <a:prstDash val="solid"/>
-                      <a:round/>
-                      <a:headEnd type="none" w="med" len="med"/>
-                      <a:tailEnd type="none" w="med" len="med"/>
-                    </a:lnB>
-                    <a:solidFill>
-                      <a:srgbClr val="FFFFFF"/>
-                    </a:solidFill>
-                  </a:tcPr>
-                </a:tc>
-              </a:tr>
-              <a:tr h="402336">
-                <a:tc>
-                  <a:txBody>
-                    <a:bodyPr/>
-                    <a:lstStyle/>
-                    <a:p>
-                      <a:pPr indent="0" marL="0">
-                        <a:buNone/>
-                      </a:pPr>
-                      <a:r>
-                        <a:rPr lang="en-US" sz="1200" dirty="0">
-                          <a:solidFill>
-                            <a:srgbClr val="10243A"/>
-                          </a:solidFill>
-                          <a:latin typeface="맑은 고딕" pitchFamily="34" charset="0"/>
-                          <a:ea typeface="맑은 고딕" pitchFamily="34" charset="-122"/>
-                          <a:cs typeface="맑은 고딕" pitchFamily="34" charset="-120"/>
-                        </a:rPr>
-                        <a:t>인력 소모</a:t>
-                      </a:r>
-                      <a:endParaRPr lang="en-US" sz="1200" dirty="0">
-                        <a:latin typeface="맑은 고딕" charset="0"/>
-                        <a:ea typeface="맑은 고딕" charset="0"/>
-                        <a:cs typeface="맑은 고딕" charset="0"/>
-                      </a:endParaRPr>
-                    </a:p>
-                  </a:txBody>
-                  <a:tcPr marL="73152" marR="73152" marT="73152" marB="73152" anchor="ctr">
-                    <a:lnL w="12700" cap="flat" cmpd="sng" algn="ctr">
-                      <a:solidFill>
-                        <a:srgbClr val="DCE5EC"/>
-                      </a:solidFill>
-                      <a:prstDash val="solid"/>
-                      <a:round/>
-                      <a:headEnd type="none" w="med" len="med"/>
-                      <a:tailEnd type="none" w="med" len="med"/>
-                    </a:lnL>
-                    <a:lnR w="12700" cap="flat" cmpd="sng" algn="ctr">
-                      <a:solidFill>
-                        <a:srgbClr val="DCE5EC"/>
-                      </a:solidFill>
-                      <a:prstDash val="solid"/>
-                      <a:round/>
-                      <a:headEnd type="none" w="med" len="med"/>
-                      <a:tailEnd type="none" w="med" len="med"/>
-                    </a:lnR>
-                    <a:lnT w="12700" cap="flat" cmpd="sng" algn="ctr">
-                      <a:solidFill>
-                        <a:srgbClr val="DCE5EC"/>
-                      </a:solidFill>
-                      <a:prstDash val="solid"/>
-                      <a:round/>
-                      <a:headEnd type="none" w="med" len="med"/>
-                      <a:tailEnd type="none" w="med" len="med"/>
-                    </a:lnT>
-                    <a:lnB w="12700" cap="flat" cmpd="sng" algn="ctr">
-                      <a:solidFill>
-                        <a:srgbClr val="DCE5EC"/>
-                      </a:solidFill>
-                      <a:prstDash val="solid"/>
-                      <a:round/>
-                      <a:headEnd type="none" w="med" len="med"/>
-                      <a:tailEnd type="none" w="med" len="med"/>
-                    </a:lnB>
-                    <a:solidFill>
-                      <a:srgbClr val="FFFFFF"/>
-                    </a:solidFill>
-                  </a:tcPr>
-                </a:tc>
-                <a:tc>
-                  <a:txBody>
-                    <a:bodyPr/>
-                    <a:lstStyle/>
-                    <a:p>
-                      <a:pPr indent="0" marL="0">
-                        <a:buNone/>
-                      </a:pPr>
-                      <a:r>
-                        <a:rPr lang="en-US" sz="1200" dirty="0">
-                          <a:solidFill>
-                            <a:srgbClr val="10243A"/>
-                          </a:solidFill>
-                          <a:latin typeface="맑은 고딕" pitchFamily="34" charset="0"/>
-                          <a:ea typeface="맑은 고딕" pitchFamily="34" charset="-122"/>
-                          <a:cs typeface="맑은 고딕" pitchFamily="34" charset="-120"/>
-                        </a:rPr>
-                        <a:t>건당 다수 투입</a:t>
-                      </a:r>
-                      <a:endParaRPr lang="en-US" sz="1200" dirty="0">
-                        <a:latin typeface="맑은 고딕" charset="0"/>
-                        <a:ea typeface="맑은 고딕" charset="0"/>
-                        <a:cs typeface="맑은 고딕" charset="0"/>
-                      </a:endParaRPr>
-                    </a:p>
-                  </a:txBody>
-                  <a:tcPr marL="73152" marR="73152" marT="73152" marB="73152" anchor="ctr">
-                    <a:lnL w="12700" cap="flat" cmpd="sng" algn="ctr">
-                      <a:solidFill>
-                        <a:srgbClr val="DCE5EC"/>
-                      </a:solidFill>
-                      <a:prstDash val="solid"/>
-                      <a:round/>
-                      <a:headEnd type="none" w="med" len="med"/>
-                      <a:tailEnd type="none" w="med" len="med"/>
-                    </a:lnL>
-                    <a:lnR w="12700" cap="flat" cmpd="sng" algn="ctr">
-                      <a:solidFill>
-                        <a:srgbClr val="DCE5EC"/>
-                      </a:solidFill>
-                      <a:prstDash val="solid"/>
-                      <a:round/>
-                      <a:headEnd type="none" w="med" len="med"/>
-                      <a:tailEnd type="none" w="med" len="med"/>
-                    </a:lnR>
-                    <a:lnT w="12700" cap="flat" cmpd="sng" algn="ctr">
-                      <a:solidFill>
-                        <a:srgbClr val="DCE5EC"/>
-                      </a:solidFill>
-                      <a:prstDash val="solid"/>
-                      <a:round/>
-                      <a:headEnd type="none" w="med" len="med"/>
-                      <a:tailEnd type="none" w="med" len="med"/>
-                    </a:lnT>
-                    <a:lnB w="12700" cap="flat" cmpd="sng" algn="ctr">
-                      <a:solidFill>
-                        <a:srgbClr val="DCE5EC"/>
-                      </a:solidFill>
-                      <a:prstDash val="solid"/>
-                      <a:round/>
-                      <a:headEnd type="none" w="med" len="med"/>
-                      <a:tailEnd type="none" w="med" len="med"/>
-                    </a:lnB>
-                    <a:solidFill>
-                      <a:srgbClr val="FFFFFF"/>
-                    </a:solidFill>
-                  </a:tcPr>
-                </a:tc>
-                <a:tc>
-                  <a:txBody>
-                    <a:bodyPr/>
-                    <a:lstStyle/>
-                    <a:p>
-                      <a:pPr indent="0" marL="0">
-                        <a:buNone/>
-                      </a:pPr>
-                      <a:r>
-                        <a:rPr lang="en-US" sz="1200" dirty="0">
-                          <a:solidFill>
-                            <a:srgbClr val="10243A"/>
-                          </a:solidFill>
-                          <a:latin typeface="맑은 고딕" pitchFamily="34" charset="0"/>
-                          <a:ea typeface="맑은 고딕" pitchFamily="34" charset="-122"/>
-                          <a:cs typeface="맑은 고딕" pitchFamily="34" charset="-120"/>
-                        </a:rPr>
-                        <a:t>관제 1명이 다수 거점 운용</a:t>
-                      </a:r>
-                      <a:endParaRPr lang="en-US" sz="1200" dirty="0">
+                      <a:endParaRPr lang="en-US" sz="1100" dirty="0">
                         <a:latin typeface="맑은 고딕" charset="0"/>
                         <a:ea typeface="맑은 고딕" charset="0"/>
                         <a:cs typeface="맑은 고딕" charset="0"/>
@@ -9630,45 +10946,6 @@
           </a:graphicData>
         </a:graphic>
       </p:graphicFrame>
-      <p:sp>
-        <p:nvSpPr>
-          <p:cNvPr id="5" name="Text 2"/>
-          <p:cNvSpPr txBox="1"/>
-          <p:nvPr/>
-        </p:nvSpPr>
-        <p:spPr>
-          <a:xfrm>
-            <a:off x="548640" y="4251960"/>
-            <a:ext cx="8046720" cy="365760"/>
-          </a:xfrm>
-          <a:prstGeom prst="rect">
-            <a:avLst/>
-          </a:prstGeom>
-          <a:noFill/>
-          <a:ln/>
-        </p:spPr>
-        <p:txBody>
-          <a:bodyPr wrap="square" lIns="0" tIns="0" rIns="0" bIns="0" rtlCol="0" anchor="ctr"/>
-          <a:lstStyle/>
-          <a:p>
-            <a:pPr indent="0" marL="0">
-              <a:buNone/>
-            </a:pPr>
-            <a:r>
-              <a:rPr lang="en-US" sz="1300" dirty="0">
-                <a:solidFill>
-                  <a:srgbClr val="10243A"/>
-                </a:solidFill>
-                <a:latin typeface="맑은 고딕" pitchFamily="34" charset="0"/>
-                <a:ea typeface="맑은 고딕" pitchFamily="34" charset="-122"/>
-                <a:cs typeface="맑은 고딕" pitchFamily="34" charset="-120"/>
-              </a:rPr>
-              <a:t>출동 인력이 '가기 전에' 현장을 봅니다. 한정된 인력을 꼭 필요한 곳에 쓰게 됩니다.</a:t>
-            </a:r>
-            <a:endParaRPr lang="en-US" sz="1300" dirty="0"/>
-          </a:p>
-        </p:txBody>
-      </p:sp>
     </p:spTree>
   </p:cSld>
   <p:clrMapOvr>
@@ -9719,7 +10996,7 @@
               <a:buNone/>
             </a:pPr>
             <a:r>
-              <a:rPr lang="en-US" sz="2800" b="1" dirty="0">
+              <a:rPr lang="en-US" sz="3000" b="1" dirty="0">
                 <a:solidFill>
                   <a:srgbClr val="10243A"/>
                 </a:solidFill>
@@ -9727,9 +11004,9 @@
                 <a:ea typeface="맑은 고딕" pitchFamily="34" charset="-122"/>
                 <a:cs typeface="맑은 고딕" pitchFamily="34" charset="-120"/>
               </a:rPr>
-              <a:t>제언 ①   거점 — '3분 도달' 네트워크</a:t>
-            </a:r>
-            <a:endParaRPr lang="en-US" sz="2800" dirty="0"/>
+              <a:t>왜 제주에서 가능한가</a:t>
+            </a:r>
+            <a:endParaRPr lang="en-US" sz="3000" dirty="0"/>
           </a:p>
         </p:txBody>
       </p:sp>
@@ -9766,7 +11043,7 @@
                 <a:ea typeface="맑은 고딕" pitchFamily="34" charset="-122"/>
                 <a:cs typeface="맑은 고딕" pitchFamily="34" charset="-120"/>
               </a:rPr>
-              <a:t>새 부지가 아니라, 있는 시설 위에 얹는 방식입니다</a:t>
+              <a:t>이 네 가지가 동시에 갖춰진 곳은 제주뿐입니다</a:t>
             </a:r>
             <a:endParaRPr lang="en-US" sz="1300" dirty="0"/>
           </a:p>
@@ -9780,124 +11057,12 @@
         </p:nvSpPr>
         <p:spPr>
           <a:xfrm>
-            <a:off x="548640" y="1554480"/>
-            <a:ext cx="2743200" cy="1325880"/>
+            <a:off x="548640" y="1572768"/>
+            <a:ext cx="1883664" cy="2331720"/>
           </a:xfrm>
           <a:prstGeom prst="roundRect">
             <a:avLst>
-              <a:gd name="adj" fmla="val 4138"/>
-            </a:avLst>
-          </a:prstGeom>
-          <a:solidFill>
-            <a:srgbClr val="10243A"/>
-          </a:solidFill>
-          <a:ln w="12700">
-            <a:solidFill>
-              <a:srgbClr val="10243A"/>
-            </a:solidFill>
-            <a:prstDash val="solid"/>
-          </a:ln>
-          <a:effectLst>
-            <a:outerShdw sx="100000" sy="100000" kx="0" ky="0" algn="bl" rotWithShape="0" blurRad="101600" dist="25400" dir="5400000">
-              <a:srgbClr val="0B1B2B">
-                <a:alpha val="12000"/>
-              </a:srgbClr>
-            </a:outerShdw>
-          </a:effectLst>
-        </p:spPr>
-      </p:sp>
-      <p:sp>
-        <p:nvSpPr>
-          <p:cNvPr id="5" name="Text 3"/>
-          <p:cNvSpPr txBox="1"/>
-          <p:nvPr/>
-        </p:nvSpPr>
-        <p:spPr>
-          <a:xfrm>
-            <a:off x="685800" y="1609344"/>
-            <a:ext cx="2468880" cy="749808"/>
-          </a:xfrm>
-          <a:prstGeom prst="rect">
-            <a:avLst/>
-          </a:prstGeom>
-          <a:noFill/>
-          <a:ln/>
-        </p:spPr>
-        <p:txBody>
-          <a:bodyPr wrap="square" lIns="0" tIns="0" rIns="0" bIns="0" rtlCol="0" anchor="ctr"/>
-          <a:lstStyle/>
-          <a:p>
-            <a:pPr indent="0" marL="0">
-              <a:buNone/>
-            </a:pPr>
-            <a:r>
-              <a:rPr lang="en-US" sz="4000" b="1" dirty="0">
-                <a:solidFill>
-                  <a:srgbClr val="FFFFFF"/>
-                </a:solidFill>
-                <a:latin typeface="맑은 고딕" pitchFamily="34" charset="0"/>
-                <a:ea typeface="맑은 고딕" pitchFamily="34" charset="-122"/>
-                <a:cs typeface="맑은 고딕" pitchFamily="34" charset="-120"/>
-              </a:rPr>
-              <a:t>3분</a:t>
-            </a:r>
-            <a:endParaRPr lang="en-US" sz="4000" dirty="0"/>
-          </a:p>
-        </p:txBody>
-      </p:sp>
-      <p:sp>
-        <p:nvSpPr>
-          <p:cNvPr id="6" name="Text 4"/>
-          <p:cNvSpPr txBox="1"/>
-          <p:nvPr/>
-        </p:nvSpPr>
-        <p:spPr>
-          <a:xfrm>
-            <a:off x="713232" y="2395728"/>
-            <a:ext cx="2468880" cy="365760"/>
-          </a:xfrm>
-          <a:prstGeom prst="rect">
-            <a:avLst/>
-          </a:prstGeom>
-          <a:noFill/>
-          <a:ln/>
-        </p:spPr>
-        <p:txBody>
-          <a:bodyPr wrap="square" lIns="0" tIns="0" rIns="0" bIns="0" rtlCol="0" anchor="ctr"/>
-          <a:lstStyle/>
-          <a:p>
-            <a:pPr indent="0" marL="0">
-              <a:buNone/>
-            </a:pPr>
-            <a:r>
-              <a:rPr lang="en-US" sz="1300" dirty="0">
-                <a:solidFill>
-                  <a:srgbClr val="CADCFC"/>
-                </a:solidFill>
-                <a:latin typeface="맑은 고딕" pitchFamily="34" charset="0"/>
-                <a:ea typeface="맑은 고딕" pitchFamily="34" charset="-122"/>
-                <a:cs typeface="맑은 고딕" pitchFamily="34" charset="-120"/>
-              </a:rPr>
-              <a:t>이내 현장 상공 도달</a:t>
-            </a:r>
-            <a:endParaRPr lang="en-US" sz="1300" dirty="0"/>
-          </a:p>
-        </p:txBody>
-      </p:sp>
-      <p:sp>
-        <p:nvSpPr>
-          <p:cNvPr id="7" name="Shape 5"/>
-          <p:cNvSpPr/>
-          <p:nvPr/>
-        </p:nvSpPr>
-        <p:spPr>
-          <a:xfrm>
-            <a:off x="548640" y="3017520"/>
-            <a:ext cx="2743200" cy="1234440"/>
-          </a:xfrm>
-          <a:prstGeom prst="roundRect">
-            <a:avLst>
-              <a:gd name="adj" fmla="val 4444"/>
+              <a:gd name="adj" fmla="val 2913"/>
             </a:avLst>
           </a:prstGeom>
           <a:solidFill>
@@ -9920,30 +11085,30 @@
       </p:sp>
       <p:sp>
         <p:nvSpPr>
-          <p:cNvPr id="8" name="Text 6"/>
-          <p:cNvSpPr txBox="1"/>
-          <p:nvPr/>
-        </p:nvSpPr>
-        <p:spPr>
-          <a:xfrm>
-            <a:off x="713232" y="3154680"/>
-            <a:ext cx="2468880" cy="320040"/>
-          </a:xfrm>
-          <a:prstGeom prst="rect">
-            <a:avLst/>
-          </a:prstGeom>
-          <a:noFill/>
-          <a:ln/>
-        </p:spPr>
-        <p:txBody>
-          <a:bodyPr wrap="square" lIns="0" tIns="0" rIns="0" bIns="0" rtlCol="0" anchor="ctr"/>
-          <a:lstStyle/>
-          <a:p>
-            <a:pPr indent="0" marL="0">
-              <a:buNone/>
-            </a:pPr>
-            <a:r>
-              <a:rPr lang="en-US" sz="1400" b="1" dirty="0">
+          <p:cNvPr id="5" name="Text 3"/>
+          <p:cNvSpPr txBox="1"/>
+          <p:nvPr/>
+        </p:nvSpPr>
+        <p:spPr>
+          <a:xfrm>
+            <a:off x="694944" y="1783080"/>
+            <a:ext cx="1591056" cy="365760"/>
+          </a:xfrm>
+          <a:prstGeom prst="rect">
+            <a:avLst/>
+          </a:prstGeom>
+          <a:noFill/>
+          <a:ln/>
+        </p:spPr>
+        <p:txBody>
+          <a:bodyPr wrap="square" lIns="0" tIns="0" rIns="0" bIns="0" rtlCol="0" anchor="ctr"/>
+          <a:lstStyle/>
+          <a:p>
+            <a:pPr indent="0" marL="0">
+              <a:buNone/>
+            </a:pPr>
+            <a:r>
+              <a:rPr lang="en-US" sz="1700" b="1" dirty="0">
                 <a:solidFill>
                   <a:srgbClr val="065A82"/>
                 </a:solidFill>
@@ -9951,22 +11116,61 @@
                 <a:ea typeface="맑은 고딕" pitchFamily="34" charset="-122"/>
                 <a:cs typeface="맑은 고딕" pitchFamily="34" charset="-120"/>
               </a:rPr>
-              <a:t>신규 부지 불필요</a:t>
-            </a:r>
-            <a:endParaRPr lang="en-US" sz="1400" dirty="0"/>
-          </a:p>
-        </p:txBody>
-      </p:sp>
-      <p:sp>
-        <p:nvSpPr>
-          <p:cNvPr id="9" name="Text 7"/>
-          <p:cNvSpPr txBox="1"/>
-          <p:nvPr/>
-        </p:nvSpPr>
-        <p:spPr>
-          <a:xfrm>
-            <a:off x="713232" y="3474720"/>
-            <a:ext cx="2468880" cy="731520"/>
+              <a:t>전국 유일</a:t>
+            </a:r>
+            <a:endParaRPr lang="en-US" sz="1700" dirty="0"/>
+          </a:p>
+        </p:txBody>
+      </p:sp>
+      <p:sp>
+        <p:nvSpPr>
+          <p:cNvPr id="6" name="Text 4"/>
+          <p:cNvSpPr txBox="1"/>
+          <p:nvPr/>
+        </p:nvSpPr>
+        <p:spPr>
+          <a:xfrm>
+            <a:off x="694944" y="2212848"/>
+            <a:ext cx="1591056" cy="548640"/>
+          </a:xfrm>
+          <a:prstGeom prst="rect">
+            <a:avLst/>
+          </a:prstGeom>
+          <a:noFill/>
+          <a:ln/>
+        </p:spPr>
+        <p:txBody>
+          <a:bodyPr wrap="square" lIns="0" tIns="0" rIns="0" bIns="0" rtlCol="0" anchor="ctr"/>
+          <a:lstStyle/>
+          <a:p>
+            <a:pPr indent="0" marL="0">
+              <a:buNone/>
+            </a:pPr>
+            <a:r>
+              <a:rPr lang="en-US" sz="1300" b="1" dirty="0">
+                <a:solidFill>
+                  <a:srgbClr val="10243A"/>
+                </a:solidFill>
+                <a:latin typeface="맑은 고딕" pitchFamily="34" charset="0"/>
+                <a:ea typeface="맑은 고딕" pitchFamily="34" charset="-122"/>
+                <a:cs typeface="맑은 고딕" pitchFamily="34" charset="-120"/>
+              </a:rPr>
+              <a:t>자치경찰단 169명</a:t>
+            </a:r>
+            <a:endParaRPr lang="en-US" sz="1300" dirty="0"/>
+          </a:p>
+        </p:txBody>
+      </p:sp>
+      <p:sp>
+        <p:nvSpPr>
+          <p:cNvPr id="7" name="Text 5"/>
+          <p:cNvSpPr txBox="1"/>
+          <p:nvPr/>
+        </p:nvSpPr>
+        <p:spPr>
+          <a:xfrm>
+            <a:off x="694944" y="2834640"/>
+            <a:ext cx="1591056" cy="868680"/>
           </a:xfrm>
           <a:prstGeom prst="rect">
             <a:avLst/>
@@ -9980,12 +11184,12 @@
           <a:p>
             <a:pPr indent="0" marL="0">
               <a:lnSpc>
-                <a:spcPct val="120000"/>
+                <a:spcPct val="115000"/>
               </a:lnSpc>
               <a:buNone/>
             </a:pPr>
             <a:r>
-              <a:rPr lang="en-US" sz="1100" dirty="0">
+              <a:rPr lang="en-US" sz="1000" dirty="0">
                 <a:solidFill>
                   <a:srgbClr val="5A6A78"/>
                 </a:solidFill>
@@ -9993,19 +11197,19 @@
                 <a:ea typeface="맑은 고딕" pitchFamily="34" charset="-122"/>
                 <a:cs typeface="맑은 고딕" pitchFamily="34" charset="-120"/>
               </a:rPr>
-              <a:t>자치경찰 지구대 · CCTV</a:t>
-            </a:r>
-            <a:endParaRPr lang="en-US" sz="1100" dirty="0"/>
+              <a:t>제주특별법 제88조</a:t>
+            </a:r>
+            <a:endParaRPr lang="en-US" sz="1000" dirty="0"/>
           </a:p>
           <a:p>
             <a:pPr indent="0" marL="0">
               <a:lnSpc>
-                <a:spcPct val="120000"/>
+                <a:spcPct val="115000"/>
               </a:lnSpc>
               <a:buNone/>
             </a:pPr>
             <a:r>
-              <a:rPr lang="en-US" sz="1100" dirty="0">
+              <a:rPr lang="en-US" sz="1000" dirty="0">
                 <a:solidFill>
                   <a:srgbClr val="5A6A78"/>
                 </a:solidFill>
@@ -10013,85 +11217,26 @@
                 <a:ea typeface="맑은 고딕" pitchFamily="34" charset="-122"/>
                 <a:cs typeface="맑은 고딕" pitchFamily="34" charset="-120"/>
               </a:rPr>
-              <a:t>통합관제센터에 무인 격납고를</a:t>
-            </a:r>
-            <a:endParaRPr lang="en-US" sz="1100" dirty="0"/>
-          </a:p>
-          <a:p>
-            <a:pPr indent="0" marL="0">
-              <a:lnSpc>
-                <a:spcPct val="120000"/>
-              </a:lnSpc>
-              <a:buNone/>
-            </a:pPr>
-            <a:r>
-              <a:rPr lang="en-US" sz="1100" dirty="0">
-                <a:solidFill>
-                  <a:srgbClr val="5A6A78"/>
-                </a:solidFill>
-                <a:latin typeface="맑은 고딕" pitchFamily="34" charset="0"/>
-                <a:ea typeface="맑은 고딕" pitchFamily="34" charset="-122"/>
-                <a:cs typeface="맑은 고딕" pitchFamily="34" charset="-120"/>
-              </a:rPr>
-              <a:t>병설하는 구조</a:t>
-            </a:r>
-            <a:endParaRPr lang="en-US" sz="1100" dirty="0"/>
-          </a:p>
-        </p:txBody>
-      </p:sp>
-      <p:sp>
-        <p:nvSpPr>
-          <p:cNvPr id="10" name="Text 8"/>
-          <p:cNvSpPr txBox="1"/>
-          <p:nvPr/>
-        </p:nvSpPr>
-        <p:spPr>
-          <a:xfrm>
-            <a:off x="3611880" y="1572768"/>
-            <a:ext cx="4983480" cy="320040"/>
-          </a:xfrm>
-          <a:prstGeom prst="rect">
-            <a:avLst/>
-          </a:prstGeom>
-          <a:noFill/>
-          <a:ln/>
-        </p:spPr>
-        <p:txBody>
-          <a:bodyPr wrap="square" lIns="0" tIns="0" rIns="0" bIns="0" rtlCol="0" anchor="ctr"/>
-          <a:lstStyle/>
-          <a:p>
-            <a:pPr indent="0" marL="0">
-              <a:buNone/>
-            </a:pPr>
-            <a:r>
-              <a:rPr lang="en-US" sz="1300" b="1" dirty="0">
-                <a:solidFill>
-                  <a:srgbClr val="10243A"/>
-                </a:solidFill>
-                <a:latin typeface="맑은 고딕" pitchFamily="34" charset="0"/>
-                <a:ea typeface="맑은 고딕" pitchFamily="34" charset="-122"/>
-                <a:cs typeface="맑은 고딕" pitchFamily="34" charset="-120"/>
-              </a:rPr>
-              <a:t>1단계 시범 대상지(안)   ·   8개소</a:t>
-            </a:r>
-            <a:endParaRPr lang="en-US" sz="1300" dirty="0"/>
-          </a:p>
-        </p:txBody>
-      </p:sp>
-      <p:sp>
-        <p:nvSpPr>
-          <p:cNvPr id="11" name="Shape 9"/>
+              <a:t>도지사 소속</a:t>
+            </a:r>
+            <a:endParaRPr lang="en-US" sz="1000" dirty="0"/>
+          </a:p>
+        </p:txBody>
+      </p:sp>
+      <p:sp>
+        <p:nvSpPr>
+          <p:cNvPr id="8" name="Shape 6"/>
           <p:cNvSpPr/>
           <p:nvPr/>
         </p:nvSpPr>
         <p:spPr>
           <a:xfrm>
-            <a:off x="3611880" y="2011680"/>
-            <a:ext cx="2395728" cy="457200"/>
+            <a:off x="2615184" y="1572768"/>
+            <a:ext cx="1883664" cy="2331720"/>
           </a:xfrm>
           <a:prstGeom prst="roundRect">
             <a:avLst>
-              <a:gd name="adj" fmla="val 12000"/>
+              <a:gd name="adj" fmla="val 2913"/>
             </a:avLst>
           </a:prstGeom>
           <a:solidFill>
@@ -10103,34 +11248,80 @@
             </a:solidFill>
             <a:prstDash val="solid"/>
           </a:ln>
-        </p:spPr>
-      </p:sp>
-      <p:sp>
-        <p:nvSpPr>
-          <p:cNvPr id="12" name="Text 10"/>
-          <p:cNvSpPr txBox="1"/>
-          <p:nvPr/>
-        </p:nvSpPr>
-        <p:spPr>
-          <a:xfrm>
-            <a:off x="3739896" y="2011680"/>
-            <a:ext cx="2194560" cy="457200"/>
-          </a:xfrm>
-          <a:prstGeom prst="rect">
-            <a:avLst/>
-          </a:prstGeom>
-          <a:noFill/>
-          <a:ln/>
-        </p:spPr>
-        <p:txBody>
-          <a:bodyPr wrap="square" lIns="0" tIns="0" rIns="0" bIns="0" rtlCol="0" anchor="ctr"/>
-          <a:lstStyle/>
-          <a:p>
-            <a:pPr indent="0" marL="0">
-              <a:buNone/>
-            </a:pPr>
-            <a:r>
-              <a:rPr lang="en-US" sz="1100" dirty="0">
+          <a:effectLst>
+            <a:outerShdw sx="100000" sy="100000" kx="0" ky="0" algn="bl" rotWithShape="0" blurRad="101600" dist="25400" dir="5400000">
+              <a:srgbClr val="0B1B2B">
+                <a:alpha val="12000"/>
+              </a:srgbClr>
+            </a:outerShdw>
+          </a:effectLst>
+        </p:spPr>
+      </p:sp>
+      <p:sp>
+        <p:nvSpPr>
+          <p:cNvPr id="9" name="Text 7"/>
+          <p:cNvSpPr txBox="1"/>
+          <p:nvPr/>
+        </p:nvSpPr>
+        <p:spPr>
+          <a:xfrm>
+            <a:off x="2761488" y="1783080"/>
+            <a:ext cx="1591056" cy="365760"/>
+          </a:xfrm>
+          <a:prstGeom prst="rect">
+            <a:avLst/>
+          </a:prstGeom>
+          <a:noFill/>
+          <a:ln/>
+        </p:spPr>
+        <p:txBody>
+          <a:bodyPr wrap="square" lIns="0" tIns="0" rIns="0" bIns="0" rtlCol="0" anchor="ctr"/>
+          <a:lstStyle/>
+          <a:p>
+            <a:pPr indent="0" marL="0">
+              <a:buNone/>
+            </a:pPr>
+            <a:r>
+              <a:rPr lang="en-US" sz="1700" b="1" dirty="0">
+                <a:solidFill>
+                  <a:srgbClr val="065A82"/>
+                </a:solidFill>
+                <a:latin typeface="맑은 고딕" pitchFamily="34" charset="0"/>
+                <a:ea typeface="맑은 고딕" pitchFamily="34" charset="-122"/>
+                <a:cs typeface="맑은 고딕" pitchFamily="34" charset="-120"/>
+              </a:rPr>
+              <a:t>전국 최초</a:t>
+            </a:r>
+            <a:endParaRPr lang="en-US" sz="1700" dirty="0"/>
+          </a:p>
+        </p:txBody>
+      </p:sp>
+      <p:sp>
+        <p:nvSpPr>
+          <p:cNvPr id="10" name="Text 8"/>
+          <p:cNvSpPr txBox="1"/>
+          <p:nvPr/>
+        </p:nvSpPr>
+        <p:spPr>
+          <a:xfrm>
+            <a:off x="2761488" y="2212848"/>
+            <a:ext cx="1591056" cy="548640"/>
+          </a:xfrm>
+          <a:prstGeom prst="rect">
+            <a:avLst/>
+          </a:prstGeom>
+          <a:noFill/>
+          <a:ln/>
+        </p:spPr>
+        <p:txBody>
+          <a:bodyPr wrap="square" lIns="0" tIns="0" rIns="0" bIns="0" rtlCol="0" anchor="ctr"/>
+          <a:lstStyle/>
+          <a:p>
+            <a:pPr indent="0" marL="0">
+              <a:buNone/>
+            </a:pPr>
+            <a:r>
+              <a:rPr lang="en-US" sz="1300" b="1" dirty="0">
                 <a:solidFill>
                   <a:srgbClr val="10243A"/>
                 </a:solidFill>
@@ -10138,26 +11329,88 @@
                 <a:ea typeface="맑은 고딕" pitchFamily="34" charset="-122"/>
                 <a:cs typeface="맑은 고딕" pitchFamily="34" charset="-120"/>
               </a:rPr>
-              <a:t>제주시 동부 권역</a:t>
-            </a:r>
-            <a:endParaRPr lang="en-US" sz="1100" dirty="0"/>
-          </a:p>
-        </p:txBody>
-      </p:sp>
-      <p:sp>
-        <p:nvSpPr>
-          <p:cNvPr id="13" name="Shape 11"/>
+              <a:t>AI 치안드론</a:t>
+            </a:r>
+            <a:endParaRPr lang="en-US" sz="1300" dirty="0"/>
+          </a:p>
+        </p:txBody>
+      </p:sp>
+      <p:sp>
+        <p:nvSpPr>
+          <p:cNvPr id="11" name="Text 9"/>
+          <p:cNvSpPr txBox="1"/>
+          <p:nvPr/>
+        </p:nvSpPr>
+        <p:spPr>
+          <a:xfrm>
+            <a:off x="2761488" y="2834640"/>
+            <a:ext cx="1591056" cy="868680"/>
+          </a:xfrm>
+          <a:prstGeom prst="rect">
+            <a:avLst/>
+          </a:prstGeom>
+          <a:noFill/>
+          <a:ln/>
+        </p:spPr>
+        <p:txBody>
+          <a:bodyPr wrap="square" lIns="0" tIns="0" rIns="0" bIns="0" rtlCol="0" anchor="ctr"/>
+          <a:lstStyle/>
+          <a:p>
+            <a:pPr indent="0" marL="0">
+              <a:lnSpc>
+                <a:spcPct val="115000"/>
+              </a:lnSpc>
+              <a:buNone/>
+            </a:pPr>
+            <a:r>
+              <a:rPr lang="en-US" sz="1000" dirty="0">
+                <a:solidFill>
+                  <a:srgbClr val="5A6A78"/>
+                </a:solidFill>
+                <a:latin typeface="맑은 고딕" pitchFamily="34" charset="0"/>
+                <a:ea typeface="맑은 고딕" pitchFamily="34" charset="-122"/>
+                <a:cs typeface="맑은 고딕" pitchFamily="34" charset="-120"/>
+              </a:rPr>
+              <a:t>국비 8억 · 도비 2억</a:t>
+            </a:r>
+            <a:endParaRPr lang="en-US" sz="1000" dirty="0"/>
+          </a:p>
+          <a:p>
+            <a:pPr indent="0" marL="0">
+              <a:lnSpc>
+                <a:spcPct val="115000"/>
+              </a:lnSpc>
+              <a:buNone/>
+            </a:pPr>
+            <a:r>
+              <a:rPr lang="en-US" sz="1000" dirty="0">
+                <a:solidFill>
+                  <a:srgbClr val="5A6A78"/>
+                </a:solidFill>
+                <a:latin typeface="맑은 고딕" pitchFamily="34" charset="0"/>
+                <a:ea typeface="맑은 고딕" pitchFamily="34" charset="-122"/>
+                <a:cs typeface="맑은 고딕" pitchFamily="34" charset="-120"/>
+              </a:rPr>
+              <a:t>2027년 현장 투입</a:t>
+            </a:r>
+            <a:endParaRPr lang="en-US" sz="1000" dirty="0"/>
+          </a:p>
+        </p:txBody>
+      </p:sp>
+      <p:sp>
+        <p:nvSpPr>
+          <p:cNvPr id="12" name="Shape 10"/>
           <p:cNvSpPr/>
           <p:nvPr/>
         </p:nvSpPr>
         <p:spPr>
           <a:xfrm>
-            <a:off x="6153912" y="2011680"/>
-            <a:ext cx="2395728" cy="457200"/>
+            <a:off x="4681728" y="1572768"/>
+            <a:ext cx="1883664" cy="2331720"/>
           </a:xfrm>
           <a:prstGeom prst="roundRect">
             <a:avLst>
-              <a:gd name="adj" fmla="val 12000"/>
+              <a:gd name="adj" fmla="val 2913"/>
             </a:avLst>
           </a:prstGeom>
           <a:solidFill>
@@ -10169,7 +11422,53 @@
             </a:solidFill>
             <a:prstDash val="solid"/>
           </a:ln>
-        </p:spPr>
+          <a:effectLst>
+            <a:outerShdw sx="100000" sy="100000" kx="0" ky="0" algn="bl" rotWithShape="0" blurRad="101600" dist="25400" dir="5400000">
+              <a:srgbClr val="0B1B2B">
+                <a:alpha val="12000"/>
+              </a:srgbClr>
+            </a:outerShdw>
+          </a:effectLst>
+        </p:spPr>
+      </p:sp>
+      <p:sp>
+        <p:nvSpPr>
+          <p:cNvPr id="13" name="Text 11"/>
+          <p:cNvSpPr txBox="1"/>
+          <p:nvPr/>
+        </p:nvSpPr>
+        <p:spPr>
+          <a:xfrm>
+            <a:off x="4828032" y="1783080"/>
+            <a:ext cx="1591056" cy="365760"/>
+          </a:xfrm>
+          <a:prstGeom prst="rect">
+            <a:avLst/>
+          </a:prstGeom>
+          <a:noFill/>
+          <a:ln/>
+        </p:spPr>
+        <p:txBody>
+          <a:bodyPr wrap="square" lIns="0" tIns="0" rIns="0" bIns="0" rtlCol="0" anchor="ctr"/>
+          <a:lstStyle/>
+          <a:p>
+            <a:pPr indent="0" marL="0">
+              <a:buNone/>
+            </a:pPr>
+            <a:r>
+              <a:rPr lang="en-US" sz="1700" b="1" dirty="0">
+                <a:solidFill>
+                  <a:srgbClr val="065A82"/>
+                </a:solidFill>
+                <a:latin typeface="맑은 고딕" pitchFamily="34" charset="0"/>
+                <a:ea typeface="맑은 고딕" pitchFamily="34" charset="-122"/>
+                <a:cs typeface="맑은 고딕" pitchFamily="34" charset="-120"/>
+              </a:rPr>
+              <a:t>전국 최대</a:t>
+            </a:r>
+            <a:endParaRPr lang="en-US" sz="1700" dirty="0"/>
+          </a:p>
+        </p:txBody>
       </p:sp>
       <p:sp>
         <p:nvSpPr>
@@ -10179,24 +11478,24 @@
         </p:nvSpPr>
         <p:spPr>
           <a:xfrm>
-            <a:off x="6281928" y="2011680"/>
-            <a:ext cx="2194560" cy="457200"/>
-          </a:xfrm>
-          <a:prstGeom prst="rect">
-            <a:avLst/>
-          </a:prstGeom>
-          <a:noFill/>
-          <a:ln/>
-        </p:spPr>
-        <p:txBody>
-          <a:bodyPr wrap="square" lIns="0" tIns="0" rIns="0" bIns="0" rtlCol="0" anchor="ctr"/>
-          <a:lstStyle/>
-          <a:p>
-            <a:pPr indent="0" marL="0">
-              <a:buNone/>
-            </a:pPr>
-            <a:r>
-              <a:rPr lang="en-US" sz="1100" dirty="0">
+            <a:off x="4828032" y="2212848"/>
+            <a:ext cx="1591056" cy="548640"/>
+          </a:xfrm>
+          <a:prstGeom prst="rect">
+            <a:avLst/>
+          </a:prstGeom>
+          <a:noFill/>
+          <a:ln/>
+        </p:spPr>
+        <p:txBody>
+          <a:bodyPr wrap="square" lIns="0" tIns="0" rIns="0" bIns="0" rtlCol="0" anchor="ctr"/>
+          <a:lstStyle/>
+          <a:p>
+            <a:pPr indent="0" marL="0">
+              <a:buNone/>
+            </a:pPr>
+            <a:r>
+              <a:rPr lang="en-US" sz="1300" b="1" dirty="0">
                 <a:solidFill>
                   <a:srgbClr val="10243A"/>
                 </a:solidFill>
@@ -10204,26 +11503,88 @@
                 <a:ea typeface="맑은 고딕" pitchFamily="34" charset="-122"/>
                 <a:cs typeface="맑은 고딕" pitchFamily="34" charset="-120"/>
               </a:rPr>
-              <a:t>제주시 서부 권역</a:t>
-            </a:r>
-            <a:endParaRPr lang="en-US" sz="1100" dirty="0"/>
-          </a:p>
-        </p:txBody>
-      </p:sp>
-      <p:sp>
-        <p:nvSpPr>
-          <p:cNvPr id="15" name="Shape 13"/>
+              <a:t>드론특별자유화구역</a:t>
+            </a:r>
+            <a:endParaRPr lang="en-US" sz="1300" dirty="0"/>
+          </a:p>
+        </p:txBody>
+      </p:sp>
+      <p:sp>
+        <p:nvSpPr>
+          <p:cNvPr id="15" name="Text 13"/>
+          <p:cNvSpPr txBox="1"/>
+          <p:nvPr/>
+        </p:nvSpPr>
+        <p:spPr>
+          <a:xfrm>
+            <a:off x="4828032" y="2834640"/>
+            <a:ext cx="1591056" cy="868680"/>
+          </a:xfrm>
+          <a:prstGeom prst="rect">
+            <a:avLst/>
+          </a:prstGeom>
+          <a:noFill/>
+          <a:ln/>
+        </p:spPr>
+        <p:txBody>
+          <a:bodyPr wrap="square" lIns="0" tIns="0" rIns="0" bIns="0" rtlCol="0" anchor="ctr"/>
+          <a:lstStyle/>
+          <a:p>
+            <a:pPr indent="0" marL="0">
+              <a:lnSpc>
+                <a:spcPct val="115000"/>
+              </a:lnSpc>
+              <a:buNone/>
+            </a:pPr>
+            <a:r>
+              <a:rPr lang="en-US" sz="1000" dirty="0">
+                <a:solidFill>
+                  <a:srgbClr val="5A6A78"/>
+                </a:solidFill>
+                <a:latin typeface="맑은 고딕" pitchFamily="34" charset="0"/>
+                <a:ea typeface="맑은 고딕" pitchFamily="34" charset="-122"/>
+                <a:cs typeface="맑은 고딕" pitchFamily="34" charset="-120"/>
+              </a:rPr>
+              <a:t>1,283㎢</a:t>
+            </a:r>
+            <a:endParaRPr lang="en-US" sz="1000" dirty="0"/>
+          </a:p>
+          <a:p>
+            <a:pPr indent="0" marL="0">
+              <a:lnSpc>
+                <a:spcPct val="115000"/>
+              </a:lnSpc>
+              <a:buNone/>
+            </a:pPr>
+            <a:r>
+              <a:rPr lang="en-US" sz="1000" dirty="0">
+                <a:solidFill>
+                  <a:srgbClr val="5A6A78"/>
+                </a:solidFill>
+                <a:latin typeface="맑은 고딕" pitchFamily="34" charset="0"/>
+                <a:ea typeface="맑은 고딕" pitchFamily="34" charset="-122"/>
+                <a:cs typeface="맑은 고딕" pitchFamily="34" charset="-120"/>
+              </a:rPr>
+              <a:t>3차 연장(2027.6) 신청</a:t>
+            </a:r>
+            <a:endParaRPr lang="en-US" sz="1000" dirty="0"/>
+          </a:p>
+        </p:txBody>
+      </p:sp>
+      <p:sp>
+        <p:nvSpPr>
+          <p:cNvPr id="16" name="Shape 14"/>
           <p:cNvSpPr/>
           <p:nvPr/>
         </p:nvSpPr>
         <p:spPr>
           <a:xfrm>
-            <a:off x="3611880" y="2578608"/>
-            <a:ext cx="2395728" cy="457200"/>
+            <a:off x="6748272" y="1572768"/>
+            <a:ext cx="1883664" cy="2331720"/>
           </a:xfrm>
           <a:prstGeom prst="roundRect">
             <a:avLst>
-              <a:gd name="adj" fmla="val 12000"/>
+              <a:gd name="adj" fmla="val 2913"/>
             </a:avLst>
           </a:prstGeom>
           <a:solidFill>
@@ -10235,34 +11596,80 @@
             </a:solidFill>
             <a:prstDash val="solid"/>
           </a:ln>
-        </p:spPr>
-      </p:sp>
-      <p:sp>
-        <p:nvSpPr>
-          <p:cNvPr id="16" name="Text 14"/>
-          <p:cNvSpPr txBox="1"/>
-          <p:nvPr/>
-        </p:nvSpPr>
-        <p:spPr>
-          <a:xfrm>
-            <a:off x="3739896" y="2578608"/>
-            <a:ext cx="2194560" cy="457200"/>
-          </a:xfrm>
-          <a:prstGeom prst="rect">
-            <a:avLst/>
-          </a:prstGeom>
-          <a:noFill/>
-          <a:ln/>
-        </p:spPr>
-        <p:txBody>
-          <a:bodyPr wrap="square" lIns="0" tIns="0" rIns="0" bIns="0" rtlCol="0" anchor="ctr"/>
-          <a:lstStyle/>
-          <a:p>
-            <a:pPr indent="0" marL="0">
-              <a:buNone/>
-            </a:pPr>
-            <a:r>
-              <a:rPr lang="en-US" sz="1100" dirty="0">
+          <a:effectLst>
+            <a:outerShdw sx="100000" sy="100000" kx="0" ky="0" algn="bl" rotWithShape="0" blurRad="101600" dist="25400" dir="5400000">
+              <a:srgbClr val="0B1B2B">
+                <a:alpha val="12000"/>
+              </a:srgbClr>
+            </a:outerShdw>
+          </a:effectLst>
+        </p:spPr>
+      </p:sp>
+      <p:sp>
+        <p:nvSpPr>
+          <p:cNvPr id="17" name="Text 15"/>
+          <p:cNvSpPr txBox="1"/>
+          <p:nvPr/>
+        </p:nvSpPr>
+        <p:spPr>
+          <a:xfrm>
+            <a:off x="6894576" y="1783080"/>
+            <a:ext cx="1591056" cy="365760"/>
+          </a:xfrm>
+          <a:prstGeom prst="rect">
+            <a:avLst/>
+          </a:prstGeom>
+          <a:noFill/>
+          <a:ln/>
+        </p:spPr>
+        <p:txBody>
+          <a:bodyPr wrap="square" lIns="0" tIns="0" rIns="0" bIns="0" rtlCol="0" anchor="ctr"/>
+          <a:lstStyle/>
+          <a:p>
+            <a:pPr indent="0" marL="0">
+              <a:buNone/>
+            </a:pPr>
+            <a:r>
+              <a:rPr lang="en-US" sz="1700" b="1" dirty="0">
+                <a:solidFill>
+                  <a:srgbClr val="065A82"/>
+                </a:solidFill>
+                <a:latin typeface="맑은 고딕" pitchFamily="34" charset="0"/>
+                <a:ea typeface="맑은 고딕" pitchFamily="34" charset="-122"/>
+                <a:cs typeface="맑은 고딕" pitchFamily="34" charset="-120"/>
+              </a:rPr>
+              <a:t>1,543명</a:t>
+            </a:r>
+            <a:endParaRPr lang="en-US" sz="1700" dirty="0"/>
+          </a:p>
+        </p:txBody>
+      </p:sp>
+      <p:sp>
+        <p:nvSpPr>
+          <p:cNvPr id="18" name="Text 16"/>
+          <p:cNvSpPr txBox="1"/>
+          <p:nvPr/>
+        </p:nvSpPr>
+        <p:spPr>
+          <a:xfrm>
+            <a:off x="6894576" y="2212848"/>
+            <a:ext cx="1591056" cy="548640"/>
+          </a:xfrm>
+          <a:prstGeom prst="rect">
+            <a:avLst/>
+          </a:prstGeom>
+          <a:noFill/>
+          <a:ln/>
+        </p:spPr>
+        <p:txBody>
+          <a:bodyPr wrap="square" lIns="0" tIns="0" rIns="0" bIns="0" rtlCol="0" anchor="ctr"/>
+          <a:lstStyle/>
+          <a:p>
+            <a:pPr indent="0" marL="0">
+              <a:buNone/>
+            </a:pPr>
+            <a:r>
+              <a:rPr lang="en-US" sz="1300" b="1" dirty="0">
                 <a:solidFill>
                   <a:srgbClr val="10243A"/>
                 </a:solidFill>
@@ -10270,65 +11677,100 @@
                 <a:ea typeface="맑은 고딕" pitchFamily="34" charset="-122"/>
                 <a:cs typeface="맑은 고딕" pitchFamily="34" charset="-120"/>
               </a:rPr>
-              <a:t>서귀포 시가지</a:t>
-            </a:r>
-            <a:endParaRPr lang="en-US" sz="1100" dirty="0"/>
-          </a:p>
-        </p:txBody>
-      </p:sp>
-      <p:sp>
-        <p:nvSpPr>
-          <p:cNvPr id="17" name="Shape 15"/>
-          <p:cNvSpPr/>
-          <p:nvPr/>
-        </p:nvSpPr>
-        <p:spPr>
-          <a:xfrm>
-            <a:off x="6153912" y="2578608"/>
-            <a:ext cx="2395728" cy="457200"/>
-          </a:xfrm>
-          <a:prstGeom prst="roundRect">
-            <a:avLst>
-              <a:gd name="adj" fmla="val 12000"/>
-            </a:avLst>
-          </a:prstGeom>
-          <a:solidFill>
-            <a:srgbClr val="F2F6F9"/>
-          </a:solidFill>
-          <a:ln w="12700">
-            <a:solidFill>
-              <a:srgbClr val="E3EAF0"/>
-            </a:solidFill>
-            <a:prstDash val="solid"/>
-          </a:ln>
-        </p:spPr>
-      </p:sp>
-      <p:sp>
-        <p:nvSpPr>
-          <p:cNvPr id="18" name="Text 16"/>
-          <p:cNvSpPr txBox="1"/>
-          <p:nvPr/>
-        </p:nvSpPr>
-        <p:spPr>
-          <a:xfrm>
-            <a:off x="6281928" y="2578608"/>
-            <a:ext cx="2194560" cy="457200"/>
-          </a:xfrm>
-          <a:prstGeom prst="rect">
-            <a:avLst/>
-          </a:prstGeom>
-          <a:noFill/>
-          <a:ln/>
-        </p:spPr>
-        <p:txBody>
-          <a:bodyPr wrap="square" lIns="0" tIns="0" rIns="0" bIns="0" rtlCol="0" anchor="ctr"/>
-          <a:lstStyle/>
-          <a:p>
-            <a:pPr indent="0" marL="0">
-              <a:buNone/>
-            </a:pPr>
-            <a:r>
-              <a:rPr lang="en-US" sz="1100" dirty="0">
+              <a:t>민관 공동체 치안망</a:t>
+            </a:r>
+            <a:endParaRPr lang="en-US" sz="1300" dirty="0"/>
+          </a:p>
+        </p:txBody>
+      </p:sp>
+      <p:sp>
+        <p:nvSpPr>
+          <p:cNvPr id="19" name="Text 17"/>
+          <p:cNvSpPr txBox="1"/>
+          <p:nvPr/>
+        </p:nvSpPr>
+        <p:spPr>
+          <a:xfrm>
+            <a:off x="6894576" y="2834640"/>
+            <a:ext cx="1591056" cy="868680"/>
+          </a:xfrm>
+          <a:prstGeom prst="rect">
+            <a:avLst/>
+          </a:prstGeom>
+          <a:noFill/>
+          <a:ln/>
+        </p:spPr>
+        <p:txBody>
+          <a:bodyPr wrap="square" lIns="0" tIns="0" rIns="0" bIns="0" rtlCol="0" anchor="ctr"/>
+          <a:lstStyle/>
+          <a:p>
+            <a:pPr indent="0" marL="0">
+              <a:lnSpc>
+                <a:spcPct val="115000"/>
+              </a:lnSpc>
+              <a:buNone/>
+            </a:pPr>
+            <a:r>
+              <a:rPr lang="en-US" sz="1000" dirty="0">
+                <a:solidFill>
+                  <a:srgbClr val="5A6A78"/>
+                </a:solidFill>
+                <a:latin typeface="맑은 고딕" pitchFamily="34" charset="0"/>
+                <a:ea typeface="맑은 고딕" pitchFamily="34" charset="-122"/>
+                <a:cs typeface="맑은 고딕" pitchFamily="34" charset="-120"/>
+              </a:rPr>
+              <a:t>주민자치경찰대 · 시니어</a:t>
+            </a:r>
+            <a:endParaRPr lang="en-US" sz="1000" dirty="0"/>
+          </a:p>
+          <a:p>
+            <a:pPr indent="0" marL="0">
+              <a:lnSpc>
+                <a:spcPct val="115000"/>
+              </a:lnSpc>
+              <a:buNone/>
+            </a:pPr>
+            <a:r>
+              <a:rPr lang="en-US" sz="1000" dirty="0">
+                <a:solidFill>
+                  <a:srgbClr val="5A6A78"/>
+                </a:solidFill>
+                <a:latin typeface="맑은 고딕" pitchFamily="34" charset="0"/>
+                <a:ea typeface="맑은 고딕" pitchFamily="34" charset="-122"/>
+                <a:cs typeface="맑은 고딕" pitchFamily="34" charset="-120"/>
+              </a:rPr>
+              <a:t>민간경비 · 민간드론</a:t>
+            </a:r>
+            <a:endParaRPr lang="en-US" sz="1000" dirty="0"/>
+          </a:p>
+        </p:txBody>
+      </p:sp>
+      <p:sp>
+        <p:nvSpPr>
+          <p:cNvPr id="20" name="Text 18"/>
+          <p:cNvSpPr txBox="1"/>
+          <p:nvPr/>
+        </p:nvSpPr>
+        <p:spPr>
+          <a:xfrm>
+            <a:off x="548640" y="4407408"/>
+            <a:ext cx="8046720" cy="365760"/>
+          </a:xfrm>
+          <a:prstGeom prst="rect">
+            <a:avLst/>
+          </a:prstGeom>
+          <a:noFill/>
+          <a:ln/>
+        </p:spPr>
+        <p:txBody>
+          <a:bodyPr wrap="square" lIns="0" tIns="0" rIns="0" bIns="0" rtlCol="0" anchor="ctr"/>
+          <a:lstStyle/>
+          <a:p>
+            <a:pPr indent="0" marL="0">
+              <a:buNone/>
+            </a:pPr>
+            <a:r>
+              <a:rPr lang="en-US" sz="1200" dirty="0">
                 <a:solidFill>
                   <a:srgbClr val="10243A"/>
                 </a:solidFill>
@@ -10336,312 +11778,9 @@
                 <a:ea typeface="맑은 고딕" pitchFamily="34" charset="-122"/>
                 <a:cs typeface="맑은 고딕" pitchFamily="34" charset="-120"/>
               </a:rPr>
-              <a:t>애월 해안</a:t>
-            </a:r>
-            <a:endParaRPr lang="en-US" sz="1100" dirty="0"/>
-          </a:p>
-        </p:txBody>
-      </p:sp>
-      <p:sp>
-        <p:nvSpPr>
-          <p:cNvPr id="19" name="Shape 17"/>
-          <p:cNvSpPr/>
-          <p:nvPr/>
-        </p:nvSpPr>
-        <p:spPr>
-          <a:xfrm>
-            <a:off x="3611880" y="3145536"/>
-            <a:ext cx="2395728" cy="457200"/>
-          </a:xfrm>
-          <a:prstGeom prst="roundRect">
-            <a:avLst>
-              <a:gd name="adj" fmla="val 12000"/>
-            </a:avLst>
-          </a:prstGeom>
-          <a:solidFill>
-            <a:srgbClr val="F2F6F9"/>
-          </a:solidFill>
-          <a:ln w="12700">
-            <a:solidFill>
-              <a:srgbClr val="E3EAF0"/>
-            </a:solidFill>
-            <a:prstDash val="solid"/>
-          </a:ln>
-        </p:spPr>
-      </p:sp>
-      <p:sp>
-        <p:nvSpPr>
-          <p:cNvPr id="20" name="Text 18"/>
-          <p:cNvSpPr txBox="1"/>
-          <p:nvPr/>
-        </p:nvSpPr>
-        <p:spPr>
-          <a:xfrm>
-            <a:off x="3739896" y="3145536"/>
-            <a:ext cx="2194560" cy="457200"/>
-          </a:xfrm>
-          <a:prstGeom prst="rect">
-            <a:avLst/>
-          </a:prstGeom>
-          <a:noFill/>
-          <a:ln/>
-        </p:spPr>
-        <p:txBody>
-          <a:bodyPr wrap="square" lIns="0" tIns="0" rIns="0" bIns="0" rtlCol="0" anchor="ctr"/>
-          <a:lstStyle/>
-          <a:p>
-            <a:pPr indent="0" marL="0">
-              <a:buNone/>
-            </a:pPr>
-            <a:r>
-              <a:rPr lang="en-US" sz="1100" dirty="0">
-                <a:solidFill>
-                  <a:srgbClr val="10243A"/>
-                </a:solidFill>
-                <a:latin typeface="맑은 고딕" pitchFamily="34" charset="0"/>
-                <a:ea typeface="맑은 고딕" pitchFamily="34" charset="-122"/>
-                <a:cs typeface="맑은 고딕" pitchFamily="34" charset="-120"/>
-              </a:rPr>
-              <a:t>성산</a:t>
-            </a:r>
-            <a:endParaRPr lang="en-US" sz="1100" dirty="0"/>
-          </a:p>
-        </p:txBody>
-      </p:sp>
-      <p:sp>
-        <p:nvSpPr>
-          <p:cNvPr id="21" name="Shape 19"/>
-          <p:cNvSpPr/>
-          <p:nvPr/>
-        </p:nvSpPr>
-        <p:spPr>
-          <a:xfrm>
-            <a:off x="6153912" y="3145536"/>
-            <a:ext cx="2395728" cy="457200"/>
-          </a:xfrm>
-          <a:prstGeom prst="roundRect">
-            <a:avLst>
-              <a:gd name="adj" fmla="val 12000"/>
-            </a:avLst>
-          </a:prstGeom>
-          <a:solidFill>
-            <a:srgbClr val="F2F6F9"/>
-          </a:solidFill>
-          <a:ln w="12700">
-            <a:solidFill>
-              <a:srgbClr val="E3EAF0"/>
-            </a:solidFill>
-            <a:prstDash val="solid"/>
-          </a:ln>
-        </p:spPr>
-      </p:sp>
-      <p:sp>
-        <p:nvSpPr>
-          <p:cNvPr id="22" name="Text 20"/>
-          <p:cNvSpPr txBox="1"/>
-          <p:nvPr/>
-        </p:nvSpPr>
-        <p:spPr>
-          <a:xfrm>
-            <a:off x="6281928" y="3145536"/>
-            <a:ext cx="2194560" cy="457200"/>
-          </a:xfrm>
-          <a:prstGeom prst="rect">
-            <a:avLst/>
-          </a:prstGeom>
-          <a:noFill/>
-          <a:ln/>
-        </p:spPr>
-        <p:txBody>
-          <a:bodyPr wrap="square" lIns="0" tIns="0" rIns="0" bIns="0" rtlCol="0" anchor="ctr"/>
-          <a:lstStyle/>
-          <a:p>
-            <a:pPr indent="0" marL="0">
-              <a:buNone/>
-            </a:pPr>
-            <a:r>
-              <a:rPr lang="en-US" sz="1100" dirty="0">
-                <a:solidFill>
-                  <a:srgbClr val="10243A"/>
-                </a:solidFill>
-                <a:latin typeface="맑은 고딕" pitchFamily="34" charset="0"/>
-                <a:ea typeface="맑은 고딕" pitchFamily="34" charset="-122"/>
-                <a:cs typeface="맑은 고딕" pitchFamily="34" charset="-120"/>
-              </a:rPr>
-              <a:t>중문</a:t>
-            </a:r>
-            <a:endParaRPr lang="en-US" sz="1100" dirty="0"/>
-          </a:p>
-        </p:txBody>
-      </p:sp>
-      <p:sp>
-        <p:nvSpPr>
-          <p:cNvPr id="23" name="Shape 21"/>
-          <p:cNvSpPr/>
-          <p:nvPr/>
-        </p:nvSpPr>
-        <p:spPr>
-          <a:xfrm>
-            <a:off x="3611880" y="3712464"/>
-            <a:ext cx="2395728" cy="457200"/>
-          </a:xfrm>
-          <a:prstGeom prst="roundRect">
-            <a:avLst>
-              <a:gd name="adj" fmla="val 12000"/>
-            </a:avLst>
-          </a:prstGeom>
-          <a:solidFill>
-            <a:srgbClr val="F2F6F9"/>
-          </a:solidFill>
-          <a:ln w="12700">
-            <a:solidFill>
-              <a:srgbClr val="E3EAF0"/>
-            </a:solidFill>
-            <a:prstDash val="solid"/>
-          </a:ln>
-        </p:spPr>
-      </p:sp>
-      <p:sp>
-        <p:nvSpPr>
-          <p:cNvPr id="24" name="Text 22"/>
-          <p:cNvSpPr txBox="1"/>
-          <p:nvPr/>
-        </p:nvSpPr>
-        <p:spPr>
-          <a:xfrm>
-            <a:off x="3739896" y="3712464"/>
-            <a:ext cx="2194560" cy="457200"/>
-          </a:xfrm>
-          <a:prstGeom prst="rect">
-            <a:avLst/>
-          </a:prstGeom>
-          <a:noFill/>
-          <a:ln/>
-        </p:spPr>
-        <p:txBody>
-          <a:bodyPr wrap="square" lIns="0" tIns="0" rIns="0" bIns="0" rtlCol="0" anchor="ctr"/>
-          <a:lstStyle/>
-          <a:p>
-            <a:pPr indent="0" marL="0">
-              <a:buNone/>
-            </a:pPr>
-            <a:r>
-              <a:rPr lang="en-US" sz="1100" dirty="0">
-                <a:solidFill>
-                  <a:srgbClr val="10243A"/>
-                </a:solidFill>
-                <a:latin typeface="맑은 고딕" pitchFamily="34" charset="0"/>
-                <a:ea typeface="맑은 고딕" pitchFamily="34" charset="-122"/>
-                <a:cs typeface="맑은 고딕" pitchFamily="34" charset="-120"/>
-              </a:rPr>
-              <a:t>한라산 주요 탐방로 진입부</a:t>
-            </a:r>
-            <a:endParaRPr lang="en-US" sz="1100" dirty="0"/>
-          </a:p>
-        </p:txBody>
-      </p:sp>
-      <p:sp>
-        <p:nvSpPr>
-          <p:cNvPr id="25" name="Shape 23"/>
-          <p:cNvSpPr/>
-          <p:nvPr/>
-        </p:nvSpPr>
-        <p:spPr>
-          <a:xfrm>
-            <a:off x="6153912" y="3712464"/>
-            <a:ext cx="2395728" cy="457200"/>
-          </a:xfrm>
-          <a:prstGeom prst="roundRect">
-            <a:avLst>
-              <a:gd name="adj" fmla="val 12000"/>
-            </a:avLst>
-          </a:prstGeom>
-          <a:solidFill>
-            <a:srgbClr val="F2F6F9"/>
-          </a:solidFill>
-          <a:ln w="12700">
-            <a:solidFill>
-              <a:srgbClr val="E3EAF0"/>
-            </a:solidFill>
-            <a:prstDash val="solid"/>
-          </a:ln>
-        </p:spPr>
-      </p:sp>
-      <p:sp>
-        <p:nvSpPr>
-          <p:cNvPr id="26" name="Text 24"/>
-          <p:cNvSpPr txBox="1"/>
-          <p:nvPr/>
-        </p:nvSpPr>
-        <p:spPr>
-          <a:xfrm>
-            <a:off x="6281928" y="3712464"/>
-            <a:ext cx="2194560" cy="457200"/>
-          </a:xfrm>
-          <a:prstGeom prst="rect">
-            <a:avLst/>
-          </a:prstGeom>
-          <a:noFill/>
-          <a:ln/>
-        </p:spPr>
-        <p:txBody>
-          <a:bodyPr wrap="square" lIns="0" tIns="0" rIns="0" bIns="0" rtlCol="0" anchor="ctr"/>
-          <a:lstStyle/>
-          <a:p>
-            <a:pPr indent="0" marL="0">
-              <a:buNone/>
-            </a:pPr>
-            <a:r>
-              <a:rPr lang="en-US" sz="1100" dirty="0">
-                <a:solidFill>
-                  <a:srgbClr val="10243A"/>
-                </a:solidFill>
-                <a:latin typeface="맑은 고딕" pitchFamily="34" charset="0"/>
-                <a:ea typeface="맑은 고딕" pitchFamily="34" charset="-122"/>
-                <a:cs typeface="맑은 고딕" pitchFamily="34" charset="-120"/>
-              </a:rPr>
-              <a:t>올레길 위험 구간</a:t>
-            </a:r>
-            <a:endParaRPr lang="en-US" sz="1100" dirty="0"/>
-          </a:p>
-        </p:txBody>
-      </p:sp>
-      <p:sp>
-        <p:nvSpPr>
-          <p:cNvPr id="27" name="Text 25"/>
-          <p:cNvSpPr txBox="1"/>
-          <p:nvPr/>
-        </p:nvSpPr>
-        <p:spPr>
-          <a:xfrm>
-            <a:off x="3611880" y="4370832"/>
-            <a:ext cx="4983480" cy="320040"/>
-          </a:xfrm>
-          <a:prstGeom prst="rect">
-            <a:avLst/>
-          </a:prstGeom>
-          <a:noFill/>
-          <a:ln/>
-        </p:spPr>
-        <p:txBody>
-          <a:bodyPr wrap="square" lIns="0" tIns="0" rIns="0" bIns="0" rtlCol="0" anchor="ctr"/>
-          <a:lstStyle/>
-          <a:p>
-            <a:pPr indent="0" marL="0">
-              <a:buNone/>
-            </a:pPr>
-            <a:r>
-              <a:rPr lang="en-US" sz="1100" dirty="0">
-                <a:solidFill>
-                  <a:srgbClr val="5A6A78"/>
-                </a:solidFill>
-                <a:latin typeface="맑은 고딕" pitchFamily="34" charset="0"/>
-                <a:ea typeface="맑은 고딕" pitchFamily="34" charset="-122"/>
-                <a:cs typeface="맑은 고딕" pitchFamily="34" charset="-120"/>
-              </a:rPr>
-              <a:t>도달 시간과 발견율 데이터를 확보한 뒤 도 전역으로 확대</a:t>
-            </a:r>
-            <a:endParaRPr lang="en-US" sz="1100" dirty="0"/>
+              <a:t>새 사업을 만들자는 제안이 아닙니다. 있는 자산을 하나의 출동 체계로 잇자는 제안입니다.</a:t>
+            </a:r>
+            <a:endParaRPr lang="en-US" sz="1200" dirty="0"/>
           </a:p>
         </p:txBody>
       </p:sp>
@@ -10703,7 +11842,7 @@
                 <a:ea typeface="맑은 고딕" pitchFamily="34" charset="-122"/>
                 <a:cs typeface="맑은 고딕" pitchFamily="34" charset="-120"/>
               </a:rPr>
-              <a:t>제언 ②   규제 — 특구 연장에 한 줄</a:t>
+              <a:t>제언 ①   거점 — '3분 도달' 네트워크</a:t>
             </a:r>
             <a:endParaRPr lang="en-US" sz="2800" dirty="0"/>
           </a:p>
@@ -10742,7 +11881,7 @@
                 <a:ea typeface="맑은 고딕" pitchFamily="34" charset="-122"/>
                 <a:cs typeface="맑은 고딕" pitchFamily="34" charset="-120"/>
               </a:rPr>
-              <a:t>세 가지 제언 중 가장 빠르고, 가장 적은 비용으로 가능합니다</a:t>
+              <a:t>새 부지가 아니라, 있는 시설 위에 얹는 방식입니다</a:t>
             </a:r>
             <a:endParaRPr lang="en-US" sz="1300" dirty="0"/>
           </a:p>
@@ -10750,181 +11889,18 @@
       </p:sp>
       <p:sp>
         <p:nvSpPr>
-          <p:cNvPr id="4" name="Text 2"/>
-          <p:cNvSpPr txBox="1"/>
-          <p:nvPr/>
-        </p:nvSpPr>
-        <p:spPr>
-          <a:xfrm>
-            <a:off x="548640" y="1600200"/>
-            <a:ext cx="3749040" cy="777240"/>
-          </a:xfrm>
-          <a:prstGeom prst="rect">
-            <a:avLst/>
-          </a:prstGeom>
-          <a:noFill/>
-          <a:ln/>
-        </p:spPr>
-        <p:txBody>
-          <a:bodyPr wrap="square" lIns="0" tIns="0" rIns="0" bIns="0" rtlCol="0" anchor="ctr"/>
-          <a:lstStyle/>
-          <a:p>
-            <a:pPr indent="0" marL="0">
-              <a:buNone/>
-            </a:pPr>
-            <a:r>
-              <a:rPr lang="en-US" sz="4200" b="1" dirty="0">
-                <a:solidFill>
-                  <a:srgbClr val="065A82"/>
-                </a:solidFill>
-                <a:latin typeface="맑은 고딕" pitchFamily="34" charset="0"/>
-                <a:ea typeface="맑은 고딕" pitchFamily="34" charset="-122"/>
-                <a:cs typeface="맑은 고딕" pitchFamily="34" charset="-120"/>
-              </a:rPr>
-              <a:t>1,283㎢</a:t>
-            </a:r>
-            <a:endParaRPr lang="en-US" sz="4200" dirty="0"/>
-          </a:p>
-        </p:txBody>
-      </p:sp>
-      <p:sp>
-        <p:nvSpPr>
-          <p:cNvPr id="5" name="Text 3"/>
-          <p:cNvSpPr txBox="1"/>
-          <p:nvPr/>
-        </p:nvSpPr>
-        <p:spPr>
-          <a:xfrm>
-            <a:off x="594360" y="2395728"/>
-            <a:ext cx="3749040" cy="640080"/>
-          </a:xfrm>
-          <a:prstGeom prst="rect">
-            <a:avLst/>
-          </a:prstGeom>
-          <a:noFill/>
-          <a:ln/>
-        </p:spPr>
-        <p:txBody>
-          <a:bodyPr wrap="square" lIns="0" tIns="0" rIns="0" bIns="0" rtlCol="0" anchor="ctr"/>
-          <a:lstStyle/>
-          <a:p>
-            <a:pPr indent="0" marL="0">
-              <a:lnSpc>
-                <a:spcPct val="115000"/>
-              </a:lnSpc>
-              <a:buNone/>
-            </a:pPr>
-            <a:r>
-              <a:rPr lang="en-US" sz="1500" b="1" dirty="0">
-                <a:solidFill>
-                  <a:srgbClr val="10243A"/>
-                </a:solidFill>
-                <a:latin typeface="맑은 고딕" pitchFamily="34" charset="0"/>
-                <a:ea typeface="맑은 고딕" pitchFamily="34" charset="-122"/>
-                <a:cs typeface="맑은 고딕" pitchFamily="34" charset="-120"/>
-              </a:rPr>
-              <a:t>전국 최대 규모</a:t>
-            </a:r>
-            <a:endParaRPr lang="en-US" sz="1500" dirty="0"/>
-          </a:p>
-          <a:p>
-            <a:pPr indent="0" marL="0">
-              <a:lnSpc>
-                <a:spcPct val="115000"/>
-              </a:lnSpc>
-              <a:buNone/>
-            </a:pPr>
-            <a:r>
-              <a:rPr lang="en-US" sz="1500" b="1" dirty="0">
-                <a:solidFill>
-                  <a:srgbClr val="10243A"/>
-                </a:solidFill>
-                <a:latin typeface="맑은 고딕" pitchFamily="34" charset="0"/>
-                <a:ea typeface="맑은 고딕" pitchFamily="34" charset="-122"/>
-                <a:cs typeface="맑은 고딕" pitchFamily="34" charset="-120"/>
-              </a:rPr>
-              <a:t>드론특별자유화구역</a:t>
-            </a:r>
-            <a:endParaRPr lang="en-US" sz="1500" dirty="0"/>
-          </a:p>
-        </p:txBody>
-      </p:sp>
-      <p:sp>
-        <p:nvSpPr>
-          <p:cNvPr id="6" name="Text 4"/>
-          <p:cNvSpPr txBox="1"/>
-          <p:nvPr/>
-        </p:nvSpPr>
-        <p:spPr>
-          <a:xfrm>
-            <a:off x="594360" y="3090672"/>
-            <a:ext cx="3749040" cy="640080"/>
-          </a:xfrm>
-          <a:prstGeom prst="rect">
-            <a:avLst/>
-          </a:prstGeom>
-          <a:noFill/>
-          <a:ln/>
-        </p:spPr>
-        <p:txBody>
-          <a:bodyPr wrap="square" lIns="0" tIns="0" rIns="0" bIns="0" rtlCol="0" anchor="ctr"/>
-          <a:lstStyle/>
-          <a:p>
-            <a:pPr indent="0" marL="0">
-              <a:lnSpc>
-                <a:spcPct val="120000"/>
-              </a:lnSpc>
-              <a:buNone/>
-            </a:pPr>
-            <a:r>
-              <a:rPr lang="en-US" sz="1100" dirty="0">
-                <a:solidFill>
-                  <a:srgbClr val="5A6A78"/>
-                </a:solidFill>
-                <a:latin typeface="맑은 고딕" pitchFamily="34" charset="0"/>
-                <a:ea typeface="맑은 고딕" pitchFamily="34" charset="-122"/>
-                <a:cs typeface="맑은 고딕" pitchFamily="34" charset="-120"/>
-              </a:rPr>
-              <a:t>2021년 1차 지정 이후 운영 중이며,</a:t>
-            </a:r>
-            <a:endParaRPr lang="en-US" sz="1100" dirty="0"/>
-          </a:p>
-          <a:p>
-            <a:pPr indent="0" marL="0">
-              <a:lnSpc>
-                <a:spcPct val="120000"/>
-              </a:lnSpc>
-              <a:buNone/>
-            </a:pPr>
-            <a:r>
-              <a:rPr lang="en-US" sz="1100" dirty="0">
-                <a:solidFill>
-                  <a:srgbClr val="5A6A78"/>
-                </a:solidFill>
-                <a:latin typeface="맑은 고딕" pitchFamily="34" charset="0"/>
-                <a:ea typeface="맑은 고딕" pitchFamily="34" charset="-122"/>
-                <a:cs typeface="맑은 고딕" pitchFamily="34" charset="-120"/>
-              </a:rPr>
-              <a:t>3차 연장(2027. 6.)을 신청한 상태입니다.</a:t>
-            </a:r>
-            <a:endParaRPr lang="en-US" sz="1100" dirty="0"/>
-          </a:p>
-        </p:txBody>
-      </p:sp>
-      <p:sp>
-        <p:nvSpPr>
-          <p:cNvPr id="7" name="Shape 5"/>
+          <p:cNvPr id="4" name="Shape 2"/>
           <p:cNvSpPr/>
           <p:nvPr/>
         </p:nvSpPr>
         <p:spPr>
           <a:xfrm>
-            <a:off x="4663440" y="1572768"/>
-            <a:ext cx="3931920" cy="2194560"/>
+            <a:off x="548640" y="1554480"/>
+            <a:ext cx="2743200" cy="1325880"/>
           </a:xfrm>
           <a:prstGeom prst="roundRect">
             <a:avLst>
-              <a:gd name="adj" fmla="val 2500"/>
+              <a:gd name="adj" fmla="val 4138"/>
             </a:avLst>
           </a:prstGeom>
           <a:solidFill>
@@ -10947,40 +11923,152 @@
       </p:sp>
       <p:sp>
         <p:nvSpPr>
+          <p:cNvPr id="5" name="Text 3"/>
+          <p:cNvSpPr txBox="1"/>
+          <p:nvPr/>
+        </p:nvSpPr>
+        <p:spPr>
+          <a:xfrm>
+            <a:off x="685800" y="1609344"/>
+            <a:ext cx="2468880" cy="749808"/>
+          </a:xfrm>
+          <a:prstGeom prst="rect">
+            <a:avLst/>
+          </a:prstGeom>
+          <a:noFill/>
+          <a:ln/>
+        </p:spPr>
+        <p:txBody>
+          <a:bodyPr wrap="square" lIns="0" tIns="0" rIns="0" bIns="0" rtlCol="0" anchor="ctr"/>
+          <a:lstStyle/>
+          <a:p>
+            <a:pPr indent="0" marL="0">
+              <a:buNone/>
+            </a:pPr>
+            <a:r>
+              <a:rPr lang="en-US" sz="4000" b="1" dirty="0">
+                <a:solidFill>
+                  <a:srgbClr val="FFFFFF"/>
+                </a:solidFill>
+                <a:latin typeface="맑은 고딕" pitchFamily="34" charset="0"/>
+                <a:ea typeface="맑은 고딕" pitchFamily="34" charset="-122"/>
+                <a:cs typeface="맑은 고딕" pitchFamily="34" charset="-120"/>
+              </a:rPr>
+              <a:t>3분</a:t>
+            </a:r>
+            <a:endParaRPr lang="en-US" sz="4000" dirty="0"/>
+          </a:p>
+        </p:txBody>
+      </p:sp>
+      <p:sp>
+        <p:nvSpPr>
+          <p:cNvPr id="6" name="Text 4"/>
+          <p:cNvSpPr txBox="1"/>
+          <p:nvPr/>
+        </p:nvSpPr>
+        <p:spPr>
+          <a:xfrm>
+            <a:off x="713232" y="2395728"/>
+            <a:ext cx="2468880" cy="365760"/>
+          </a:xfrm>
+          <a:prstGeom prst="rect">
+            <a:avLst/>
+          </a:prstGeom>
+          <a:noFill/>
+          <a:ln/>
+        </p:spPr>
+        <p:txBody>
+          <a:bodyPr wrap="square" lIns="0" tIns="0" rIns="0" bIns="0" rtlCol="0" anchor="ctr"/>
+          <a:lstStyle/>
+          <a:p>
+            <a:pPr indent="0" marL="0">
+              <a:buNone/>
+            </a:pPr>
+            <a:r>
+              <a:rPr lang="en-US" sz="1300" dirty="0">
+                <a:solidFill>
+                  <a:srgbClr val="CADCFC"/>
+                </a:solidFill>
+                <a:latin typeface="맑은 고딕" pitchFamily="34" charset="0"/>
+                <a:ea typeface="맑은 고딕" pitchFamily="34" charset="-122"/>
+                <a:cs typeface="맑은 고딕" pitchFamily="34" charset="-120"/>
+              </a:rPr>
+              <a:t>이내 현장 상공 도달</a:t>
+            </a:r>
+            <a:endParaRPr lang="en-US" sz="1300" dirty="0"/>
+          </a:p>
+        </p:txBody>
+      </p:sp>
+      <p:sp>
+        <p:nvSpPr>
+          <p:cNvPr id="7" name="Shape 5"/>
+          <p:cNvSpPr/>
+          <p:nvPr/>
+        </p:nvSpPr>
+        <p:spPr>
+          <a:xfrm>
+            <a:off x="548640" y="3017520"/>
+            <a:ext cx="2743200" cy="1234440"/>
+          </a:xfrm>
+          <a:prstGeom prst="roundRect">
+            <a:avLst>
+              <a:gd name="adj" fmla="val 4444"/>
+            </a:avLst>
+          </a:prstGeom>
+          <a:solidFill>
+            <a:srgbClr val="F2F6F9"/>
+          </a:solidFill>
+          <a:ln w="12700">
+            <a:solidFill>
+              <a:srgbClr val="E3EAF0"/>
+            </a:solidFill>
+            <a:prstDash val="solid"/>
+          </a:ln>
+          <a:effectLst>
+            <a:outerShdw sx="100000" sy="100000" kx="0" ky="0" algn="bl" rotWithShape="0" blurRad="101600" dist="25400" dir="5400000">
+              <a:srgbClr val="0B1B2B">
+                <a:alpha val="12000"/>
+              </a:srgbClr>
+            </a:outerShdw>
+          </a:effectLst>
+        </p:spPr>
+      </p:sp>
+      <p:sp>
+        <p:nvSpPr>
           <p:cNvPr id="8" name="Text 6"/>
           <p:cNvSpPr txBox="1"/>
           <p:nvPr/>
         </p:nvSpPr>
         <p:spPr>
           <a:xfrm>
-            <a:off x="4937760" y="1783080"/>
-            <a:ext cx="3383280" cy="365760"/>
-          </a:xfrm>
-          <a:prstGeom prst="rect">
-            <a:avLst/>
-          </a:prstGeom>
-          <a:noFill/>
-          <a:ln/>
-        </p:spPr>
-        <p:txBody>
-          <a:bodyPr wrap="square" lIns="0" tIns="0" rIns="0" bIns="0" rtlCol="0" anchor="ctr"/>
-          <a:lstStyle/>
-          <a:p>
-            <a:pPr indent="0" marL="0">
-              <a:buNone/>
-            </a:pPr>
-            <a:r>
-              <a:rPr lang="en-US" sz="1300" dirty="0">
-                <a:solidFill>
-                  <a:srgbClr val="8FB4C9"/>
-                </a:solidFill>
-                <a:latin typeface="맑은 고딕" pitchFamily="34" charset="0"/>
-                <a:ea typeface="맑은 고딕" pitchFamily="34" charset="-122"/>
-                <a:cs typeface="맑은 고딕" pitchFamily="34" charset="-120"/>
-              </a:rPr>
-              <a:t>연장 신청서에 담아 주십시오</a:t>
-            </a:r>
-            <a:endParaRPr lang="en-US" sz="1300" dirty="0"/>
+            <a:off x="713232" y="3154680"/>
+            <a:ext cx="2468880" cy="320040"/>
+          </a:xfrm>
+          <a:prstGeom prst="rect">
+            <a:avLst/>
+          </a:prstGeom>
+          <a:noFill/>
+          <a:ln/>
+        </p:spPr>
+        <p:txBody>
+          <a:bodyPr wrap="square" lIns="0" tIns="0" rIns="0" bIns="0" rtlCol="0" anchor="ctr"/>
+          <a:lstStyle/>
+          <a:p>
+            <a:pPr indent="0" marL="0">
+              <a:buNone/>
+            </a:pPr>
+            <a:r>
+              <a:rPr lang="en-US" sz="1400" b="1" dirty="0">
+                <a:solidFill>
+                  <a:srgbClr val="065A82"/>
+                </a:solidFill>
+                <a:latin typeface="맑은 고딕" pitchFamily="34" charset="0"/>
+                <a:ea typeface="맑은 고딕" pitchFamily="34" charset="-122"/>
+                <a:cs typeface="맑은 고딕" pitchFamily="34" charset="-120"/>
+              </a:rPr>
+              <a:t>신규 부지 불필요</a:t>
+            </a:r>
+            <a:endParaRPr lang="en-US" sz="1400" dirty="0"/>
           </a:p>
         </p:txBody>
       </p:sp>
@@ -10992,8 +12080,8 @@
         </p:nvSpPr>
         <p:spPr>
           <a:xfrm>
-            <a:off x="4937760" y="2194560"/>
-            <a:ext cx="3383280" cy="1005840"/>
+            <a:off x="713232" y="3474720"/>
+            <a:ext cx="2468880" cy="731520"/>
           </a:xfrm>
           <a:prstGeom prst="rect">
             <a:avLst/>
@@ -11012,17 +12100,17 @@
               <a:buNone/>
             </a:pPr>
             <a:r>
-              <a:rPr lang="en-US" sz="1800" b="1" dirty="0">
-                <a:solidFill>
-                  <a:srgbClr val="FFFFFF"/>
-                </a:solidFill>
-                <a:latin typeface="맑은 고딕" pitchFamily="34" charset="0"/>
-                <a:ea typeface="맑은 고딕" pitchFamily="34" charset="-122"/>
-                <a:cs typeface="맑은 고딕" pitchFamily="34" charset="-120"/>
-              </a:rPr>
-              <a:t>치안 · 구조 목적</a:t>
-            </a:r>
-            <a:endParaRPr lang="en-US" sz="1800" dirty="0"/>
+              <a:rPr lang="en-US" sz="1100" dirty="0">
+                <a:solidFill>
+                  <a:srgbClr val="5A6A78"/>
+                </a:solidFill>
+                <a:latin typeface="맑은 고딕" pitchFamily="34" charset="0"/>
+                <a:ea typeface="맑은 고딕" pitchFamily="34" charset="-122"/>
+                <a:cs typeface="맑은 고딕" pitchFamily="34" charset="-120"/>
+              </a:rPr>
+              <a:t>자치경찰 지구대 · CCTV</a:t>
+            </a:r>
+            <a:endParaRPr lang="en-US" sz="1100" dirty="0"/>
           </a:p>
           <a:p>
             <a:pPr indent="0" marL="0">
@@ -11032,17 +12120,17 @@
               <a:buNone/>
             </a:pPr>
             <a:r>
-              <a:rPr lang="en-US" sz="1800" b="1" dirty="0">
-                <a:solidFill>
-                  <a:srgbClr val="FFFFFF"/>
-                </a:solidFill>
-                <a:latin typeface="맑은 고딕" pitchFamily="34" charset="0"/>
-                <a:ea typeface="맑은 고딕" pitchFamily="34" charset="-122"/>
-                <a:cs typeface="맑은 고딕" pitchFamily="34" charset="-120"/>
-              </a:rPr>
-              <a:t>비가시권(BVLOS) · 야간비행</a:t>
-            </a:r>
-            <a:endParaRPr lang="en-US" sz="1800" dirty="0"/>
+              <a:rPr lang="en-US" sz="1100" dirty="0">
+                <a:solidFill>
+                  <a:srgbClr val="5A6A78"/>
+                </a:solidFill>
+                <a:latin typeface="맑은 고딕" pitchFamily="34" charset="0"/>
+                <a:ea typeface="맑은 고딕" pitchFamily="34" charset="-122"/>
+                <a:cs typeface="맑은 고딕" pitchFamily="34" charset="-120"/>
+              </a:rPr>
+              <a:t>통합관제센터에 무인 격납고를</a:t>
+            </a:r>
+            <a:endParaRPr lang="en-US" sz="1100" dirty="0"/>
           </a:p>
           <a:p>
             <a:pPr indent="0" marL="0">
@@ -11052,17 +12140,17 @@
               <a:buNone/>
             </a:pPr>
             <a:r>
-              <a:rPr lang="en-US" sz="1800" b="1" dirty="0">
-                <a:solidFill>
-                  <a:srgbClr val="FFFFFF"/>
-                </a:solidFill>
-                <a:latin typeface="맑은 고딕" pitchFamily="34" charset="0"/>
-                <a:ea typeface="맑은 고딕" pitchFamily="34" charset="-122"/>
-                <a:cs typeface="맑은 고딕" pitchFamily="34" charset="-120"/>
-              </a:rPr>
-              <a:t>상시 승인 트랙</a:t>
-            </a:r>
-            <a:endParaRPr lang="en-US" sz="1800" dirty="0"/>
+              <a:rPr lang="en-US" sz="1100" dirty="0">
+                <a:solidFill>
+                  <a:srgbClr val="5A6A78"/>
+                </a:solidFill>
+                <a:latin typeface="맑은 고딕" pitchFamily="34" charset="0"/>
+                <a:ea typeface="맑은 고딕" pitchFamily="34" charset="-122"/>
+                <a:cs typeface="맑은 고딕" pitchFamily="34" charset="-120"/>
+              </a:rPr>
+              <a:t>병설하는 구조</a:t>
+            </a:r>
+            <a:endParaRPr lang="en-US" sz="1100" dirty="0"/>
           </a:p>
         </p:txBody>
       </p:sp>
@@ -11074,34 +12162,34 @@
         </p:nvSpPr>
         <p:spPr>
           <a:xfrm>
-            <a:off x="4937760" y="3291840"/>
-            <a:ext cx="3383280" cy="365760"/>
-          </a:xfrm>
-          <a:prstGeom prst="rect">
-            <a:avLst/>
-          </a:prstGeom>
-          <a:noFill/>
-          <a:ln/>
-        </p:spPr>
-        <p:txBody>
-          <a:bodyPr wrap="square" lIns="0" tIns="0" rIns="0" bIns="0" rtlCol="0" anchor="ctr"/>
-          <a:lstStyle/>
-          <a:p>
-            <a:pPr indent="0" marL="0">
-              <a:buNone/>
-            </a:pPr>
-            <a:r>
-              <a:rPr lang="en-US" sz="1100" dirty="0">
-                <a:solidFill>
-                  <a:srgbClr val="CADCFC"/>
-                </a:solidFill>
-                <a:latin typeface="맑은 고딕" pitchFamily="34" charset="0"/>
-                <a:ea typeface="맑은 고딕" pitchFamily="34" charset="-122"/>
-                <a:cs typeface="맑은 고딕" pitchFamily="34" charset="-120"/>
-              </a:rPr>
-              <a:t>DFR 체계의 기술적 전제가 바로 이 두 가지입니다.</a:t>
-            </a:r>
-            <a:endParaRPr lang="en-US" sz="1100" dirty="0"/>
+            <a:off x="3611880" y="1572768"/>
+            <a:ext cx="4983480" cy="320040"/>
+          </a:xfrm>
+          <a:prstGeom prst="rect">
+            <a:avLst/>
+          </a:prstGeom>
+          <a:noFill/>
+          <a:ln/>
+        </p:spPr>
+        <p:txBody>
+          <a:bodyPr wrap="square" lIns="0" tIns="0" rIns="0" bIns="0" rtlCol="0" anchor="ctr"/>
+          <a:lstStyle/>
+          <a:p>
+            <a:pPr indent="0" marL="0">
+              <a:buNone/>
+            </a:pPr>
+            <a:r>
+              <a:rPr lang="en-US" sz="1300" b="1" dirty="0">
+                <a:solidFill>
+                  <a:srgbClr val="10243A"/>
+                </a:solidFill>
+                <a:latin typeface="맑은 고딕" pitchFamily="34" charset="0"/>
+                <a:ea typeface="맑은 고딕" pitchFamily="34" charset="-122"/>
+                <a:cs typeface="맑은 고딕" pitchFamily="34" charset="-120"/>
+              </a:rPr>
+              <a:t>1단계 시범 대상지(안)   ·   8개소</a:t>
+            </a:r>
+            <a:endParaRPr lang="en-US" sz="1300" dirty="0"/>
           </a:p>
         </p:txBody>
       </p:sp>
@@ -11113,20 +12201,20 @@
         </p:nvSpPr>
         <p:spPr>
           <a:xfrm>
-            <a:off x="548640" y="4023360"/>
-            <a:ext cx="8046720" cy="566928"/>
+            <a:off x="3611880" y="2011680"/>
+            <a:ext cx="2395728" cy="457200"/>
           </a:xfrm>
           <a:prstGeom prst="roundRect">
             <a:avLst>
-              <a:gd name="adj" fmla="val 12903"/>
+              <a:gd name="adj" fmla="val 12000"/>
             </a:avLst>
           </a:prstGeom>
           <a:solidFill>
-            <a:srgbClr val="E0523C"/>
+            <a:srgbClr val="F2F6F9"/>
           </a:solidFill>
           <a:ln w="12700">
             <a:solidFill>
-              <a:srgbClr val="E0523C"/>
+              <a:srgbClr val="E3EAF0"/>
             </a:solidFill>
             <a:prstDash val="solid"/>
           </a:ln>
@@ -11140,34 +12228,535 @@
         </p:nvSpPr>
         <p:spPr>
           <a:xfrm>
-            <a:off x="548640" y="4023360"/>
-            <a:ext cx="8046720" cy="566928"/>
-          </a:xfrm>
-          <a:prstGeom prst="rect">
-            <a:avLst/>
-          </a:prstGeom>
-          <a:noFill/>
-          <a:ln/>
-        </p:spPr>
-        <p:txBody>
-          <a:bodyPr wrap="square" lIns="0" tIns="0" rIns="0" bIns="0" rtlCol="0" anchor="ctr"/>
-          <a:lstStyle/>
-          <a:p>
-            <a:pPr algn="ctr" indent="0" marL="0">
-              <a:buNone/>
-            </a:pPr>
-            <a:r>
-              <a:rPr lang="en-US" sz="1400" b="1" dirty="0">
-                <a:solidFill>
-                  <a:srgbClr val="FFFFFF"/>
-                </a:solidFill>
-                <a:latin typeface="맑은 고딕" pitchFamily="34" charset="0"/>
-                <a:ea typeface="맑은 고딕" pitchFamily="34" charset="-122"/>
-                <a:cs typeface="맑은 고딕" pitchFamily="34" charset="-120"/>
-              </a:rPr>
-              <a:t>국회 입법을 기다릴 필요가 없습니다 — 제주도 권한 안에서, 신청서 한 줄로 열리는 문입니다</a:t>
-            </a:r>
-            <a:endParaRPr lang="en-US" sz="1400" dirty="0"/>
+            <a:off x="3739896" y="2011680"/>
+            <a:ext cx="2194560" cy="457200"/>
+          </a:xfrm>
+          <a:prstGeom prst="rect">
+            <a:avLst/>
+          </a:prstGeom>
+          <a:noFill/>
+          <a:ln/>
+        </p:spPr>
+        <p:txBody>
+          <a:bodyPr wrap="square" lIns="0" tIns="0" rIns="0" bIns="0" rtlCol="0" anchor="ctr"/>
+          <a:lstStyle/>
+          <a:p>
+            <a:pPr indent="0" marL="0">
+              <a:buNone/>
+            </a:pPr>
+            <a:r>
+              <a:rPr lang="en-US" sz="1100" dirty="0">
+                <a:solidFill>
+                  <a:srgbClr val="10243A"/>
+                </a:solidFill>
+                <a:latin typeface="맑은 고딕" pitchFamily="34" charset="0"/>
+                <a:ea typeface="맑은 고딕" pitchFamily="34" charset="-122"/>
+                <a:cs typeface="맑은 고딕" pitchFamily="34" charset="-120"/>
+              </a:rPr>
+              <a:t>제주시 동부 권역</a:t>
+            </a:r>
+            <a:endParaRPr lang="en-US" sz="1100" dirty="0"/>
+          </a:p>
+        </p:txBody>
+      </p:sp>
+      <p:sp>
+        <p:nvSpPr>
+          <p:cNvPr id="13" name="Shape 11"/>
+          <p:cNvSpPr/>
+          <p:nvPr/>
+        </p:nvSpPr>
+        <p:spPr>
+          <a:xfrm>
+            <a:off x="6153912" y="2011680"/>
+            <a:ext cx="2395728" cy="457200"/>
+          </a:xfrm>
+          <a:prstGeom prst="roundRect">
+            <a:avLst>
+              <a:gd name="adj" fmla="val 12000"/>
+            </a:avLst>
+          </a:prstGeom>
+          <a:solidFill>
+            <a:srgbClr val="F2F6F9"/>
+          </a:solidFill>
+          <a:ln w="12700">
+            <a:solidFill>
+              <a:srgbClr val="E3EAF0"/>
+            </a:solidFill>
+            <a:prstDash val="solid"/>
+          </a:ln>
+        </p:spPr>
+      </p:sp>
+      <p:sp>
+        <p:nvSpPr>
+          <p:cNvPr id="14" name="Text 12"/>
+          <p:cNvSpPr txBox="1"/>
+          <p:nvPr/>
+        </p:nvSpPr>
+        <p:spPr>
+          <a:xfrm>
+            <a:off x="6281928" y="2011680"/>
+            <a:ext cx="2194560" cy="457200"/>
+          </a:xfrm>
+          <a:prstGeom prst="rect">
+            <a:avLst/>
+          </a:prstGeom>
+          <a:noFill/>
+          <a:ln/>
+        </p:spPr>
+        <p:txBody>
+          <a:bodyPr wrap="square" lIns="0" tIns="0" rIns="0" bIns="0" rtlCol="0" anchor="ctr"/>
+          <a:lstStyle/>
+          <a:p>
+            <a:pPr indent="0" marL="0">
+              <a:buNone/>
+            </a:pPr>
+            <a:r>
+              <a:rPr lang="en-US" sz="1100" dirty="0">
+                <a:solidFill>
+                  <a:srgbClr val="10243A"/>
+                </a:solidFill>
+                <a:latin typeface="맑은 고딕" pitchFamily="34" charset="0"/>
+                <a:ea typeface="맑은 고딕" pitchFamily="34" charset="-122"/>
+                <a:cs typeface="맑은 고딕" pitchFamily="34" charset="-120"/>
+              </a:rPr>
+              <a:t>제주시 서부 권역</a:t>
+            </a:r>
+            <a:endParaRPr lang="en-US" sz="1100" dirty="0"/>
+          </a:p>
+        </p:txBody>
+      </p:sp>
+      <p:sp>
+        <p:nvSpPr>
+          <p:cNvPr id="15" name="Shape 13"/>
+          <p:cNvSpPr/>
+          <p:nvPr/>
+        </p:nvSpPr>
+        <p:spPr>
+          <a:xfrm>
+            <a:off x="3611880" y="2578608"/>
+            <a:ext cx="2395728" cy="457200"/>
+          </a:xfrm>
+          <a:prstGeom prst="roundRect">
+            <a:avLst>
+              <a:gd name="adj" fmla="val 12000"/>
+            </a:avLst>
+          </a:prstGeom>
+          <a:solidFill>
+            <a:srgbClr val="F2F6F9"/>
+          </a:solidFill>
+          <a:ln w="12700">
+            <a:solidFill>
+              <a:srgbClr val="E3EAF0"/>
+            </a:solidFill>
+            <a:prstDash val="solid"/>
+          </a:ln>
+        </p:spPr>
+      </p:sp>
+      <p:sp>
+        <p:nvSpPr>
+          <p:cNvPr id="16" name="Text 14"/>
+          <p:cNvSpPr txBox="1"/>
+          <p:nvPr/>
+        </p:nvSpPr>
+        <p:spPr>
+          <a:xfrm>
+            <a:off x="3739896" y="2578608"/>
+            <a:ext cx="2194560" cy="457200"/>
+          </a:xfrm>
+          <a:prstGeom prst="rect">
+            <a:avLst/>
+          </a:prstGeom>
+          <a:noFill/>
+          <a:ln/>
+        </p:spPr>
+        <p:txBody>
+          <a:bodyPr wrap="square" lIns="0" tIns="0" rIns="0" bIns="0" rtlCol="0" anchor="ctr"/>
+          <a:lstStyle/>
+          <a:p>
+            <a:pPr indent="0" marL="0">
+              <a:buNone/>
+            </a:pPr>
+            <a:r>
+              <a:rPr lang="en-US" sz="1100" dirty="0">
+                <a:solidFill>
+                  <a:srgbClr val="10243A"/>
+                </a:solidFill>
+                <a:latin typeface="맑은 고딕" pitchFamily="34" charset="0"/>
+                <a:ea typeface="맑은 고딕" pitchFamily="34" charset="-122"/>
+                <a:cs typeface="맑은 고딕" pitchFamily="34" charset="-120"/>
+              </a:rPr>
+              <a:t>서귀포 시가지</a:t>
+            </a:r>
+            <a:endParaRPr lang="en-US" sz="1100" dirty="0"/>
+          </a:p>
+        </p:txBody>
+      </p:sp>
+      <p:sp>
+        <p:nvSpPr>
+          <p:cNvPr id="17" name="Shape 15"/>
+          <p:cNvSpPr/>
+          <p:nvPr/>
+        </p:nvSpPr>
+        <p:spPr>
+          <a:xfrm>
+            <a:off x="6153912" y="2578608"/>
+            <a:ext cx="2395728" cy="457200"/>
+          </a:xfrm>
+          <a:prstGeom prst="roundRect">
+            <a:avLst>
+              <a:gd name="adj" fmla="val 12000"/>
+            </a:avLst>
+          </a:prstGeom>
+          <a:solidFill>
+            <a:srgbClr val="F2F6F9"/>
+          </a:solidFill>
+          <a:ln w="12700">
+            <a:solidFill>
+              <a:srgbClr val="E3EAF0"/>
+            </a:solidFill>
+            <a:prstDash val="solid"/>
+          </a:ln>
+        </p:spPr>
+      </p:sp>
+      <p:sp>
+        <p:nvSpPr>
+          <p:cNvPr id="18" name="Text 16"/>
+          <p:cNvSpPr txBox="1"/>
+          <p:nvPr/>
+        </p:nvSpPr>
+        <p:spPr>
+          <a:xfrm>
+            <a:off x="6281928" y="2578608"/>
+            <a:ext cx="2194560" cy="457200"/>
+          </a:xfrm>
+          <a:prstGeom prst="rect">
+            <a:avLst/>
+          </a:prstGeom>
+          <a:noFill/>
+          <a:ln/>
+        </p:spPr>
+        <p:txBody>
+          <a:bodyPr wrap="square" lIns="0" tIns="0" rIns="0" bIns="0" rtlCol="0" anchor="ctr"/>
+          <a:lstStyle/>
+          <a:p>
+            <a:pPr indent="0" marL="0">
+              <a:buNone/>
+            </a:pPr>
+            <a:r>
+              <a:rPr lang="en-US" sz="1100" dirty="0">
+                <a:solidFill>
+                  <a:srgbClr val="10243A"/>
+                </a:solidFill>
+                <a:latin typeface="맑은 고딕" pitchFamily="34" charset="0"/>
+                <a:ea typeface="맑은 고딕" pitchFamily="34" charset="-122"/>
+                <a:cs typeface="맑은 고딕" pitchFamily="34" charset="-120"/>
+              </a:rPr>
+              <a:t>애월 해안</a:t>
+            </a:r>
+            <a:endParaRPr lang="en-US" sz="1100" dirty="0"/>
+          </a:p>
+        </p:txBody>
+      </p:sp>
+      <p:sp>
+        <p:nvSpPr>
+          <p:cNvPr id="19" name="Shape 17"/>
+          <p:cNvSpPr/>
+          <p:nvPr/>
+        </p:nvSpPr>
+        <p:spPr>
+          <a:xfrm>
+            <a:off x="3611880" y="3145536"/>
+            <a:ext cx="2395728" cy="457200"/>
+          </a:xfrm>
+          <a:prstGeom prst="roundRect">
+            <a:avLst>
+              <a:gd name="adj" fmla="val 12000"/>
+            </a:avLst>
+          </a:prstGeom>
+          <a:solidFill>
+            <a:srgbClr val="F2F6F9"/>
+          </a:solidFill>
+          <a:ln w="12700">
+            <a:solidFill>
+              <a:srgbClr val="E3EAF0"/>
+            </a:solidFill>
+            <a:prstDash val="solid"/>
+          </a:ln>
+        </p:spPr>
+      </p:sp>
+      <p:sp>
+        <p:nvSpPr>
+          <p:cNvPr id="20" name="Text 18"/>
+          <p:cNvSpPr txBox="1"/>
+          <p:nvPr/>
+        </p:nvSpPr>
+        <p:spPr>
+          <a:xfrm>
+            <a:off x="3739896" y="3145536"/>
+            <a:ext cx="2194560" cy="457200"/>
+          </a:xfrm>
+          <a:prstGeom prst="rect">
+            <a:avLst/>
+          </a:prstGeom>
+          <a:noFill/>
+          <a:ln/>
+        </p:spPr>
+        <p:txBody>
+          <a:bodyPr wrap="square" lIns="0" tIns="0" rIns="0" bIns="0" rtlCol="0" anchor="ctr"/>
+          <a:lstStyle/>
+          <a:p>
+            <a:pPr indent="0" marL="0">
+              <a:buNone/>
+            </a:pPr>
+            <a:r>
+              <a:rPr lang="en-US" sz="1100" dirty="0">
+                <a:solidFill>
+                  <a:srgbClr val="10243A"/>
+                </a:solidFill>
+                <a:latin typeface="맑은 고딕" pitchFamily="34" charset="0"/>
+                <a:ea typeface="맑은 고딕" pitchFamily="34" charset="-122"/>
+                <a:cs typeface="맑은 고딕" pitchFamily="34" charset="-120"/>
+              </a:rPr>
+              <a:t>성산</a:t>
+            </a:r>
+            <a:endParaRPr lang="en-US" sz="1100" dirty="0"/>
+          </a:p>
+        </p:txBody>
+      </p:sp>
+      <p:sp>
+        <p:nvSpPr>
+          <p:cNvPr id="21" name="Shape 19"/>
+          <p:cNvSpPr/>
+          <p:nvPr/>
+        </p:nvSpPr>
+        <p:spPr>
+          <a:xfrm>
+            <a:off x="6153912" y="3145536"/>
+            <a:ext cx="2395728" cy="457200"/>
+          </a:xfrm>
+          <a:prstGeom prst="roundRect">
+            <a:avLst>
+              <a:gd name="adj" fmla="val 12000"/>
+            </a:avLst>
+          </a:prstGeom>
+          <a:solidFill>
+            <a:srgbClr val="F2F6F9"/>
+          </a:solidFill>
+          <a:ln w="12700">
+            <a:solidFill>
+              <a:srgbClr val="E3EAF0"/>
+            </a:solidFill>
+            <a:prstDash val="solid"/>
+          </a:ln>
+        </p:spPr>
+      </p:sp>
+      <p:sp>
+        <p:nvSpPr>
+          <p:cNvPr id="22" name="Text 20"/>
+          <p:cNvSpPr txBox="1"/>
+          <p:nvPr/>
+        </p:nvSpPr>
+        <p:spPr>
+          <a:xfrm>
+            <a:off x="6281928" y="3145536"/>
+            <a:ext cx="2194560" cy="457200"/>
+          </a:xfrm>
+          <a:prstGeom prst="rect">
+            <a:avLst/>
+          </a:prstGeom>
+          <a:noFill/>
+          <a:ln/>
+        </p:spPr>
+        <p:txBody>
+          <a:bodyPr wrap="square" lIns="0" tIns="0" rIns="0" bIns="0" rtlCol="0" anchor="ctr"/>
+          <a:lstStyle/>
+          <a:p>
+            <a:pPr indent="0" marL="0">
+              <a:buNone/>
+            </a:pPr>
+            <a:r>
+              <a:rPr lang="en-US" sz="1100" dirty="0">
+                <a:solidFill>
+                  <a:srgbClr val="10243A"/>
+                </a:solidFill>
+                <a:latin typeface="맑은 고딕" pitchFamily="34" charset="0"/>
+                <a:ea typeface="맑은 고딕" pitchFamily="34" charset="-122"/>
+                <a:cs typeface="맑은 고딕" pitchFamily="34" charset="-120"/>
+              </a:rPr>
+              <a:t>중문</a:t>
+            </a:r>
+            <a:endParaRPr lang="en-US" sz="1100" dirty="0"/>
+          </a:p>
+        </p:txBody>
+      </p:sp>
+      <p:sp>
+        <p:nvSpPr>
+          <p:cNvPr id="23" name="Shape 21"/>
+          <p:cNvSpPr/>
+          <p:nvPr/>
+        </p:nvSpPr>
+        <p:spPr>
+          <a:xfrm>
+            <a:off x="3611880" y="3712464"/>
+            <a:ext cx="2395728" cy="457200"/>
+          </a:xfrm>
+          <a:prstGeom prst="roundRect">
+            <a:avLst>
+              <a:gd name="adj" fmla="val 12000"/>
+            </a:avLst>
+          </a:prstGeom>
+          <a:solidFill>
+            <a:srgbClr val="F2F6F9"/>
+          </a:solidFill>
+          <a:ln w="12700">
+            <a:solidFill>
+              <a:srgbClr val="E3EAF0"/>
+            </a:solidFill>
+            <a:prstDash val="solid"/>
+          </a:ln>
+        </p:spPr>
+      </p:sp>
+      <p:sp>
+        <p:nvSpPr>
+          <p:cNvPr id="24" name="Text 22"/>
+          <p:cNvSpPr txBox="1"/>
+          <p:nvPr/>
+        </p:nvSpPr>
+        <p:spPr>
+          <a:xfrm>
+            <a:off x="3739896" y="3712464"/>
+            <a:ext cx="2194560" cy="457200"/>
+          </a:xfrm>
+          <a:prstGeom prst="rect">
+            <a:avLst/>
+          </a:prstGeom>
+          <a:noFill/>
+          <a:ln/>
+        </p:spPr>
+        <p:txBody>
+          <a:bodyPr wrap="square" lIns="0" tIns="0" rIns="0" bIns="0" rtlCol="0" anchor="ctr"/>
+          <a:lstStyle/>
+          <a:p>
+            <a:pPr indent="0" marL="0">
+              <a:buNone/>
+            </a:pPr>
+            <a:r>
+              <a:rPr lang="en-US" sz="1100" dirty="0">
+                <a:solidFill>
+                  <a:srgbClr val="10243A"/>
+                </a:solidFill>
+                <a:latin typeface="맑은 고딕" pitchFamily="34" charset="0"/>
+                <a:ea typeface="맑은 고딕" pitchFamily="34" charset="-122"/>
+                <a:cs typeface="맑은 고딕" pitchFamily="34" charset="-120"/>
+              </a:rPr>
+              <a:t>한라산 주요 탐방로 진입부</a:t>
+            </a:r>
+            <a:endParaRPr lang="en-US" sz="1100" dirty="0"/>
+          </a:p>
+        </p:txBody>
+      </p:sp>
+      <p:sp>
+        <p:nvSpPr>
+          <p:cNvPr id="25" name="Shape 23"/>
+          <p:cNvSpPr/>
+          <p:nvPr/>
+        </p:nvSpPr>
+        <p:spPr>
+          <a:xfrm>
+            <a:off x="6153912" y="3712464"/>
+            <a:ext cx="2395728" cy="457200"/>
+          </a:xfrm>
+          <a:prstGeom prst="roundRect">
+            <a:avLst>
+              <a:gd name="adj" fmla="val 12000"/>
+            </a:avLst>
+          </a:prstGeom>
+          <a:solidFill>
+            <a:srgbClr val="F2F6F9"/>
+          </a:solidFill>
+          <a:ln w="12700">
+            <a:solidFill>
+              <a:srgbClr val="E3EAF0"/>
+            </a:solidFill>
+            <a:prstDash val="solid"/>
+          </a:ln>
+        </p:spPr>
+      </p:sp>
+      <p:sp>
+        <p:nvSpPr>
+          <p:cNvPr id="26" name="Text 24"/>
+          <p:cNvSpPr txBox="1"/>
+          <p:nvPr/>
+        </p:nvSpPr>
+        <p:spPr>
+          <a:xfrm>
+            <a:off x="6281928" y="3712464"/>
+            <a:ext cx="2194560" cy="457200"/>
+          </a:xfrm>
+          <a:prstGeom prst="rect">
+            <a:avLst/>
+          </a:prstGeom>
+          <a:noFill/>
+          <a:ln/>
+        </p:spPr>
+        <p:txBody>
+          <a:bodyPr wrap="square" lIns="0" tIns="0" rIns="0" bIns="0" rtlCol="0" anchor="ctr"/>
+          <a:lstStyle/>
+          <a:p>
+            <a:pPr indent="0" marL="0">
+              <a:buNone/>
+            </a:pPr>
+            <a:r>
+              <a:rPr lang="en-US" sz="1100" dirty="0">
+                <a:solidFill>
+                  <a:srgbClr val="10243A"/>
+                </a:solidFill>
+                <a:latin typeface="맑은 고딕" pitchFamily="34" charset="0"/>
+                <a:ea typeface="맑은 고딕" pitchFamily="34" charset="-122"/>
+                <a:cs typeface="맑은 고딕" pitchFamily="34" charset="-120"/>
+              </a:rPr>
+              <a:t>올레길 위험 구간</a:t>
+            </a:r>
+            <a:endParaRPr lang="en-US" sz="1100" dirty="0"/>
+          </a:p>
+        </p:txBody>
+      </p:sp>
+      <p:sp>
+        <p:nvSpPr>
+          <p:cNvPr id="27" name="Text 25"/>
+          <p:cNvSpPr txBox="1"/>
+          <p:nvPr/>
+        </p:nvSpPr>
+        <p:spPr>
+          <a:xfrm>
+            <a:off x="3611880" y="4370832"/>
+            <a:ext cx="4983480" cy="320040"/>
+          </a:xfrm>
+          <a:prstGeom prst="rect">
+            <a:avLst/>
+          </a:prstGeom>
+          <a:noFill/>
+          <a:ln/>
+        </p:spPr>
+        <p:txBody>
+          <a:bodyPr wrap="square" lIns="0" tIns="0" rIns="0" bIns="0" rtlCol="0" anchor="ctr"/>
+          <a:lstStyle/>
+          <a:p>
+            <a:pPr indent="0" marL="0">
+              <a:buNone/>
+            </a:pPr>
+            <a:r>
+              <a:rPr lang="en-US" sz="1050" dirty="0">
+                <a:solidFill>
+                  <a:srgbClr val="5A6A78"/>
+                </a:solidFill>
+                <a:latin typeface="맑은 고딕" pitchFamily="34" charset="0"/>
+                <a:ea typeface="맑은 고딕" pitchFamily="34" charset="-122"/>
+                <a:cs typeface="맑은 고딕" pitchFamily="34" charset="-120"/>
+              </a:rPr>
+              <a:t>배치 우선순위는 도가 이미 운영 중인 인구빅데이터(생활인구·입도객)로 결정</a:t>
+            </a:r>
+            <a:endParaRPr lang="en-US" sz="1050" dirty="0"/>
           </a:p>
         </p:txBody>
       </p:sp>

--- a/docs/jeju-safety/제주드론치안_발제초안.pptx
+++ b/docs/jeju-safety/제주드론치안_발제초안.pptx
@@ -3315,24 +3315,24 @@
         </p:nvSpPr>
         <p:spPr>
           <a:xfrm>
-            <a:off x="548640" y="4407408"/>
-            <a:ext cx="8046720" cy="365760"/>
-          </a:xfrm>
-          <a:prstGeom prst="rect">
-            <a:avLst/>
-          </a:prstGeom>
-          <a:noFill/>
-          <a:ln/>
-        </p:spPr>
-        <p:txBody>
-          <a:bodyPr wrap="square" lIns="0" tIns="0" rIns="0" bIns="0" rtlCol="0" anchor="ctr"/>
-          <a:lstStyle/>
-          <a:p>
-            <a:pPr indent="0" marL="0">
-              <a:buNone/>
-            </a:pPr>
-            <a:r>
-              <a:rPr lang="en-US" sz="1200" dirty="0">
+            <a:off x="548640" y="4160520"/>
+            <a:ext cx="8046720" cy="292608"/>
+          </a:xfrm>
+          <a:prstGeom prst="rect">
+            <a:avLst/>
+          </a:prstGeom>
+          <a:noFill/>
+          <a:ln/>
+        </p:spPr>
+        <p:txBody>
+          <a:bodyPr wrap="square" lIns="0" tIns="0" rIns="0" bIns="0" rtlCol="0" anchor="ctr"/>
+          <a:lstStyle/>
+          <a:p>
+            <a:pPr indent="0" marL="0">
+              <a:buNone/>
+            </a:pPr>
+            <a:r>
+              <a:rPr lang="en-US" sz="1250" b="1" dirty="0">
                 <a:solidFill>
                   <a:srgbClr val="10243A"/>
                 </a:solidFill>
@@ -3342,7 +3342,46 @@
               </a:rPr>
               <a:t>＋  민간 드론 인력 등록제 · 출동 계약제 — 자원봉사가 아니라 산업으로</a:t>
             </a:r>
-            <a:endParaRPr lang="en-US" sz="1200" dirty="0"/>
+            <a:endParaRPr lang="en-US" sz="1250" dirty="0"/>
+          </a:p>
+        </p:txBody>
+      </p:sp>
+      <p:sp>
+        <p:nvSpPr>
+          <p:cNvPr id="17" name="Text 15"/>
+          <p:cNvSpPr txBox="1"/>
+          <p:nvPr/>
+        </p:nvSpPr>
+        <p:spPr>
+          <a:xfrm>
+            <a:off x="548640" y="4480560"/>
+            <a:ext cx="8046720" cy="292608"/>
+          </a:xfrm>
+          <a:prstGeom prst="rect">
+            <a:avLst/>
+          </a:prstGeom>
+          <a:noFill/>
+          <a:ln/>
+        </p:spPr>
+        <p:txBody>
+          <a:bodyPr wrap="square" lIns="0" tIns="0" rIns="0" bIns="0" rtlCol="0" anchor="ctr"/>
+          <a:lstStyle/>
+          <a:p>
+            <a:pPr indent="0" marL="0">
+              <a:buNone/>
+            </a:pPr>
+            <a:r>
+              <a:rPr lang="en-US" sz="1250" b="1" dirty="0">
+                <a:solidFill>
+                  <a:srgbClr val="065A82"/>
+                </a:solidFill>
+                <a:latin typeface="맑은 고딕" pitchFamily="34" charset="0"/>
+                <a:ea typeface="맑은 고딕" pitchFamily="34" charset="-122"/>
+                <a:cs typeface="맑은 고딕" pitchFamily="34" charset="-120"/>
+              </a:rPr>
+              <a:t>＋  도착 소요시간 · 초동 확인 수행률을 정기 공개 — 괴담은 확인할 방법이 없을 때 자랍니다</a:t>
+            </a:r>
+            <a:endParaRPr lang="en-US" sz="1250" dirty="0"/>
           </a:p>
         </p:txBody>
       </p:sp>
@@ -9817,7 +9856,7 @@
                 <a:ea typeface="맑은 고딕" pitchFamily="34" charset="-122"/>
                 <a:cs typeface="맑은 고딕" pitchFamily="34" charset="-120"/>
               </a:rPr>
-              <a:t>재량을 기본 동작으로</a:t>
+              <a:t>재량을 기본 동작으로 · 제3의 기록</a:t>
             </a:r>
             <a:endParaRPr lang="en-US" sz="1500" dirty="0"/>
           </a:p>
@@ -9859,7 +9898,7 @@
                 <a:ea typeface="맑은 고딕" pitchFamily="34" charset="-122"/>
                 <a:cs typeface="맑은 고딕" pitchFamily="34" charset="-120"/>
               </a:rPr>
-              <a:t>판단과 무관하게 최소한의 공중 확인이 수행되고,</a:t>
+              <a:t>판단과 무관하게 공중 확인이 수행되고, 비행·촬영</a:t>
             </a:r>
             <a:endParaRPr lang="en-US" sz="1050" dirty="0"/>
           </a:p>
@@ -9879,7 +9918,7 @@
                 <a:ea typeface="맑은 고딕" pitchFamily="34" charset="-122"/>
                 <a:cs typeface="맑은 고딕" pitchFamily="34" charset="-120"/>
               </a:rPr>
-              <a:t>그 절차가 로그로 남습니다.</a:t>
+              <a:t>기록이 담당자 보고와 다른 계통에 남습니다.</a:t>
             </a:r>
             <a:endParaRPr lang="en-US" sz="1050" dirty="0"/>
           </a:p>
@@ -10890,7 +10929,7 @@
                           <a:ea typeface="맑은 고딕" pitchFamily="34" charset="-122"/>
                           <a:cs typeface="맑은 고딕" pitchFamily="34" charset="-120"/>
                         </a:rPr>
-                        <a:t>출동 · 확인 자동 로그</a:t>
+                        <a:t>출동 · 확인 자동 로그 (별도 계통)</a:t>
                       </a:r>
                       <a:endParaRPr lang="en-US" sz="1100" dirty="0">
                         <a:latin typeface="맑은 고딕" charset="0"/>

--- a/docs/jeju-safety/제주드론치안_발제초안.pptx
+++ b/docs/jeju-safety/제주드론치안_발제초안.pptx
@@ -3011,7 +3011,7 @@
                 <a:ea typeface="맑은 고딕" pitchFamily="34" charset="-122"/>
                 <a:cs typeface="맑은 고딕" pitchFamily="34" charset="-120"/>
               </a:rPr>
-              <a:t>신고 기반 출동 원칙,</a:t>
+              <a:t>신고 기반 출동 원칙.</a:t>
             </a:r>
             <a:endParaRPr lang="en-US" sz="1100" dirty="0"/>
           </a:p>
@@ -3031,7 +3031,7 @@
                 <a:ea typeface="맑은 고딕" pitchFamily="34" charset="-122"/>
                 <a:cs typeface="맑은 고딕" pitchFamily="34" charset="-120"/>
               </a:rPr>
-              <a:t>상시 배회 감시가 아니다</a:t>
+              <a:t>특정 집단 감시 수단이 아니다</a:t>
             </a:r>
             <a:endParaRPr lang="en-US" sz="1100" dirty="0"/>
           </a:p>
@@ -3379,7 +3379,7 @@
                 <a:ea typeface="맑은 고딕" pitchFamily="34" charset="-122"/>
                 <a:cs typeface="맑은 고딕" pitchFamily="34" charset="-120"/>
               </a:rPr>
-              <a:t>＋  도착 소요시간 · 초동 확인 수행률을 정기 공개 — 괴담은 확인할 방법이 없을 때 자랍니다</a:t>
+              <a:t>＋  '제주 안전 대시보드' — 신고와 해제 건수, 초동 확인 시간을 도가 직접 공개</a:t>
             </a:r>
             <a:endParaRPr lang="en-US" sz="1250" dirty="0"/>
           </a:p>

--- a/docs/jeju-safety/제주드론치안_발제초안.pptx
+++ b/docs/jeju-safety/제주드론치안_발제초안.pptx
@@ -18,9 +18,10 @@
     <p:sldId id="266" r:id="rId12"/>
     <p:sldId id="267" r:id="rId13"/>
     <p:sldId id="268" r:id="rId14"/>
+    <p:sldId id="269" r:id="rId15"/>
   </p:sldIdLst>
   <p:notesMasterIdLst>
-    <p:notesMasterId r:id="rId15"/>
+    <p:notesMasterId r:id="rId16"/>
   </p:notesMasterIdLst>
   <p:sldSz cx="9144000" cy="5143500"/>
   <p:notesSz cx="5143500" cy="9144000"/>
@@ -866,7 +867,7 @@
           <a:p>
             <a:r>
               <a:rPr lang="en-US" dirty="0"/>
-              <a:t>마무리: 제주가 먼저 하면 전국이 따라 쓰는 제주형 표준 모델이자, 제주가 수출하는 산업이 된다.</a:t>
+              <a:t/>
             </a:r>
             <a:endParaRPr lang="en-US" dirty="0"/>
           </a:p>
@@ -890,6 +891,94 @@
             <a:fld id="{F7021451-1387-4CA6-816F-3879F97B5CBC}" type="slidenum">
               <a:rPr lang="en-US"/>
               <a:t>13</a:t>
+            </a:fld>
+            <a:endParaRPr lang="en-US"/>
+          </a:p>
+        </p:txBody>
+      </p:sp>
+    </p:spTree>
+    <p:extLst>
+      <p:ext uri="{BB962C8B-B14F-4D97-AF65-F5344CB8AC3E}">
+        <p14:creationId xmlns:p14="http://schemas.microsoft.com/office/powerpoint/2010/main" val="1024086991"/>
+      </p:ext>
+    </p:extLst>
+  </p:cSld>
+  <p:clrMapOvr>
+    <a:masterClrMapping/>
+  </p:clrMapOvr>
+</p:notes>
+</file>
+
+<file path=ppt/notesSlides/notesSlide14.xml><?xml version="1.0" encoding="utf-8"?>
+<p:notes xmlns:a="http://schemas.openxmlformats.org/drawingml/2006/main" xmlns:r="http://schemas.openxmlformats.org/officeDocument/2006/relationships" xmlns:p="http://schemas.openxmlformats.org/presentationml/2006/main">
+  <p:cSld>
+    <p:spTree>
+      <p:nvGrpSpPr>
+        <p:cNvPr id="1" name=""/>
+        <p:cNvGrpSpPr/>
+        <p:nvPr/>
+      </p:nvGrpSpPr>
+      <p:grpSpPr>
+        <a:xfrm>
+          <a:off x="0" y="0"/>
+          <a:ext cx="0" cy="0"/>
+          <a:chOff x="0" y="0"/>
+          <a:chExt cx="0" cy="0"/>
+        </a:xfrm>
+      </p:grpSpPr>
+      <p:sp>
+        <p:nvSpPr>
+          <p:cNvPr id="2" name="Slide Image Placeholder 1"/>
+          <p:cNvSpPr>
+            <a:spLocks noGrp="1" noRot="1" noChangeAspect="1"/>
+          </p:cNvSpPr>
+          <p:nvPr>
+            <p:ph type="sldImg"/>
+          </p:nvPr>
+        </p:nvSpPr>
+        <p:spPr/>
+      </p:sp>
+      <p:sp>
+        <p:nvSpPr>
+          <p:cNvPr id="3" name="Notes Placeholder 2"/>
+          <p:cNvSpPr>
+            <a:spLocks noGrp="1"/>
+          </p:cNvSpPr>
+          <p:nvPr>
+            <p:ph type="body" idx="1"/>
+          </p:nvPr>
+        </p:nvSpPr>
+        <p:spPr/>
+        <p:txBody>
+          <a:bodyPr/>
+          <a:lstStyle/>
+          <a:p>
+            <a:r>
+              <a:rPr lang="en-US" dirty="0"/>
+              <a:t>마무리: 제주가 먼저 하면 전국이 따라 쓰는 제주형 표준 모델이자, 제주가 수출하는 산업이 된다.</a:t>
+            </a:r>
+            <a:endParaRPr lang="en-US" dirty="0"/>
+          </a:p>
+        </p:txBody>
+      </p:sp>
+      <p:sp>
+        <p:nvSpPr>
+          <p:cNvPr id="4" name="Slide Number Placeholder 3"/>
+          <p:cNvSpPr>
+            <a:spLocks noGrp="1"/>
+          </p:cNvSpPr>
+          <p:nvPr>
+            <p:ph type="sldNum" sz="quarter" idx="10"/>
+          </p:nvPr>
+        </p:nvSpPr>
+        <p:spPr/>
+        <p:txBody>
+          <a:bodyPr/>
+          <a:lstStyle/>
+          <a:p>
+            <a:fld id="{F7021451-1387-4CA6-816F-3879F97B5CBC}" type="slidenum">
+              <a:rPr lang="en-US"/>
+              <a:t>14</a:t>
             </a:fld>
             <a:endParaRPr lang="en-US"/>
           </a:p>
@@ -2196,7 +2285,7 @@
                 <a:ea typeface="맑은 고딕" pitchFamily="34" charset="-122"/>
                 <a:cs typeface="맑은 고딕" pitchFamily="34" charset="-120"/>
               </a:rPr>
-              <a:t>제언 ②   규제 — 특구 연장에 한 줄</a:t>
+              <a:t>제언 ①   거점 — '3분 도달' 네트워크</a:t>
             </a:r>
             <a:endParaRPr lang="en-US" sz="2800" dirty="0"/>
           </a:p>
@@ -2235,7 +2324,7 @@
                 <a:ea typeface="맑은 고딕" pitchFamily="34" charset="-122"/>
                 <a:cs typeface="맑은 고딕" pitchFamily="34" charset="-120"/>
               </a:rPr>
-              <a:t>세 가지 제언 중 가장 빠르고, 가장 적은 비용으로 가능합니다</a:t>
+              <a:t>새 부지가 아니라, 있는 시설 위에 얹는 방식입니다</a:t>
             </a:r>
             <a:endParaRPr lang="en-US" sz="1300" dirty="0"/>
           </a:p>
@@ -2243,181 +2332,18 @@
       </p:sp>
       <p:sp>
         <p:nvSpPr>
-          <p:cNvPr id="4" name="Text 2"/>
-          <p:cNvSpPr txBox="1"/>
-          <p:nvPr/>
-        </p:nvSpPr>
-        <p:spPr>
-          <a:xfrm>
-            <a:off x="548640" y="1600200"/>
-            <a:ext cx="3749040" cy="777240"/>
-          </a:xfrm>
-          <a:prstGeom prst="rect">
-            <a:avLst/>
-          </a:prstGeom>
-          <a:noFill/>
-          <a:ln/>
-        </p:spPr>
-        <p:txBody>
-          <a:bodyPr wrap="square" lIns="0" tIns="0" rIns="0" bIns="0" rtlCol="0" anchor="ctr"/>
-          <a:lstStyle/>
-          <a:p>
-            <a:pPr indent="0" marL="0">
-              <a:buNone/>
-            </a:pPr>
-            <a:r>
-              <a:rPr lang="en-US" sz="4200" b="1" dirty="0">
-                <a:solidFill>
-                  <a:srgbClr val="065A82"/>
-                </a:solidFill>
-                <a:latin typeface="맑은 고딕" pitchFamily="34" charset="0"/>
-                <a:ea typeface="맑은 고딕" pitchFamily="34" charset="-122"/>
-                <a:cs typeface="맑은 고딕" pitchFamily="34" charset="-120"/>
-              </a:rPr>
-              <a:t>1,283㎢</a:t>
-            </a:r>
-            <a:endParaRPr lang="en-US" sz="4200" dirty="0"/>
-          </a:p>
-        </p:txBody>
-      </p:sp>
-      <p:sp>
-        <p:nvSpPr>
-          <p:cNvPr id="5" name="Text 3"/>
-          <p:cNvSpPr txBox="1"/>
-          <p:nvPr/>
-        </p:nvSpPr>
-        <p:spPr>
-          <a:xfrm>
-            <a:off x="594360" y="2395728"/>
-            <a:ext cx="3749040" cy="640080"/>
-          </a:xfrm>
-          <a:prstGeom prst="rect">
-            <a:avLst/>
-          </a:prstGeom>
-          <a:noFill/>
-          <a:ln/>
-        </p:spPr>
-        <p:txBody>
-          <a:bodyPr wrap="square" lIns="0" tIns="0" rIns="0" bIns="0" rtlCol="0" anchor="ctr"/>
-          <a:lstStyle/>
-          <a:p>
-            <a:pPr indent="0" marL="0">
-              <a:lnSpc>
-                <a:spcPct val="115000"/>
-              </a:lnSpc>
-              <a:buNone/>
-            </a:pPr>
-            <a:r>
-              <a:rPr lang="en-US" sz="1500" b="1" dirty="0">
-                <a:solidFill>
-                  <a:srgbClr val="10243A"/>
-                </a:solidFill>
-                <a:latin typeface="맑은 고딕" pitchFamily="34" charset="0"/>
-                <a:ea typeface="맑은 고딕" pitchFamily="34" charset="-122"/>
-                <a:cs typeface="맑은 고딕" pitchFamily="34" charset="-120"/>
-              </a:rPr>
-              <a:t>전국 최대 규모</a:t>
-            </a:r>
-            <a:endParaRPr lang="en-US" sz="1500" dirty="0"/>
-          </a:p>
-          <a:p>
-            <a:pPr indent="0" marL="0">
-              <a:lnSpc>
-                <a:spcPct val="115000"/>
-              </a:lnSpc>
-              <a:buNone/>
-            </a:pPr>
-            <a:r>
-              <a:rPr lang="en-US" sz="1500" b="1" dirty="0">
-                <a:solidFill>
-                  <a:srgbClr val="10243A"/>
-                </a:solidFill>
-                <a:latin typeface="맑은 고딕" pitchFamily="34" charset="0"/>
-                <a:ea typeface="맑은 고딕" pitchFamily="34" charset="-122"/>
-                <a:cs typeface="맑은 고딕" pitchFamily="34" charset="-120"/>
-              </a:rPr>
-              <a:t>드론특별자유화구역</a:t>
-            </a:r>
-            <a:endParaRPr lang="en-US" sz="1500" dirty="0"/>
-          </a:p>
-        </p:txBody>
-      </p:sp>
-      <p:sp>
-        <p:nvSpPr>
-          <p:cNvPr id="6" name="Text 4"/>
-          <p:cNvSpPr txBox="1"/>
-          <p:nvPr/>
-        </p:nvSpPr>
-        <p:spPr>
-          <a:xfrm>
-            <a:off x="594360" y="3090672"/>
-            <a:ext cx="3749040" cy="640080"/>
-          </a:xfrm>
-          <a:prstGeom prst="rect">
-            <a:avLst/>
-          </a:prstGeom>
-          <a:noFill/>
-          <a:ln/>
-        </p:spPr>
-        <p:txBody>
-          <a:bodyPr wrap="square" lIns="0" tIns="0" rIns="0" bIns="0" rtlCol="0" anchor="ctr"/>
-          <a:lstStyle/>
-          <a:p>
-            <a:pPr indent="0" marL="0">
-              <a:lnSpc>
-                <a:spcPct val="120000"/>
-              </a:lnSpc>
-              <a:buNone/>
-            </a:pPr>
-            <a:r>
-              <a:rPr lang="en-US" sz="1100" dirty="0">
-                <a:solidFill>
-                  <a:srgbClr val="5A6A78"/>
-                </a:solidFill>
-                <a:latin typeface="맑은 고딕" pitchFamily="34" charset="0"/>
-                <a:ea typeface="맑은 고딕" pitchFamily="34" charset="-122"/>
-                <a:cs typeface="맑은 고딕" pitchFamily="34" charset="-120"/>
-              </a:rPr>
-              <a:t>2021년 1차 지정 이후 운영 중이며,</a:t>
-            </a:r>
-            <a:endParaRPr lang="en-US" sz="1100" dirty="0"/>
-          </a:p>
-          <a:p>
-            <a:pPr indent="0" marL="0">
-              <a:lnSpc>
-                <a:spcPct val="120000"/>
-              </a:lnSpc>
-              <a:buNone/>
-            </a:pPr>
-            <a:r>
-              <a:rPr lang="en-US" sz="1100" dirty="0">
-                <a:solidFill>
-                  <a:srgbClr val="5A6A78"/>
-                </a:solidFill>
-                <a:latin typeface="맑은 고딕" pitchFamily="34" charset="0"/>
-                <a:ea typeface="맑은 고딕" pitchFamily="34" charset="-122"/>
-                <a:cs typeface="맑은 고딕" pitchFamily="34" charset="-120"/>
-              </a:rPr>
-              <a:t>3차 연장(2027. 6.)을 신청한 상태입니다.</a:t>
-            </a:r>
-            <a:endParaRPr lang="en-US" sz="1100" dirty="0"/>
-          </a:p>
-        </p:txBody>
-      </p:sp>
-      <p:sp>
-        <p:nvSpPr>
-          <p:cNvPr id="7" name="Shape 5"/>
+          <p:cNvPr id="4" name="Shape 2"/>
           <p:cNvSpPr/>
           <p:nvPr/>
         </p:nvSpPr>
         <p:spPr>
           <a:xfrm>
-            <a:off x="4663440" y="1572768"/>
-            <a:ext cx="3931920" cy="2194560"/>
+            <a:off x="548640" y="1554480"/>
+            <a:ext cx="2743200" cy="1325880"/>
           </a:xfrm>
           <a:prstGeom prst="roundRect">
             <a:avLst>
-              <a:gd name="adj" fmla="val 2500"/>
+              <a:gd name="adj" fmla="val 4138"/>
             </a:avLst>
           </a:prstGeom>
           <a:solidFill>
@@ -2440,40 +2366,152 @@
       </p:sp>
       <p:sp>
         <p:nvSpPr>
+          <p:cNvPr id="5" name="Text 3"/>
+          <p:cNvSpPr txBox="1"/>
+          <p:nvPr/>
+        </p:nvSpPr>
+        <p:spPr>
+          <a:xfrm>
+            <a:off x="685800" y="1609344"/>
+            <a:ext cx="2468880" cy="749808"/>
+          </a:xfrm>
+          <a:prstGeom prst="rect">
+            <a:avLst/>
+          </a:prstGeom>
+          <a:noFill/>
+          <a:ln/>
+        </p:spPr>
+        <p:txBody>
+          <a:bodyPr wrap="square" lIns="0" tIns="0" rIns="0" bIns="0" rtlCol="0" anchor="ctr"/>
+          <a:lstStyle/>
+          <a:p>
+            <a:pPr indent="0" marL="0">
+              <a:buNone/>
+            </a:pPr>
+            <a:r>
+              <a:rPr lang="en-US" sz="4000" b="1" dirty="0">
+                <a:solidFill>
+                  <a:srgbClr val="FFFFFF"/>
+                </a:solidFill>
+                <a:latin typeface="맑은 고딕" pitchFamily="34" charset="0"/>
+                <a:ea typeface="맑은 고딕" pitchFamily="34" charset="-122"/>
+                <a:cs typeface="맑은 고딕" pitchFamily="34" charset="-120"/>
+              </a:rPr>
+              <a:t>3분</a:t>
+            </a:r>
+            <a:endParaRPr lang="en-US" sz="4000" dirty="0"/>
+          </a:p>
+        </p:txBody>
+      </p:sp>
+      <p:sp>
+        <p:nvSpPr>
+          <p:cNvPr id="6" name="Text 4"/>
+          <p:cNvSpPr txBox="1"/>
+          <p:nvPr/>
+        </p:nvSpPr>
+        <p:spPr>
+          <a:xfrm>
+            <a:off x="713232" y="2395728"/>
+            <a:ext cx="2468880" cy="365760"/>
+          </a:xfrm>
+          <a:prstGeom prst="rect">
+            <a:avLst/>
+          </a:prstGeom>
+          <a:noFill/>
+          <a:ln/>
+        </p:spPr>
+        <p:txBody>
+          <a:bodyPr wrap="square" lIns="0" tIns="0" rIns="0" bIns="0" rtlCol="0" anchor="ctr"/>
+          <a:lstStyle/>
+          <a:p>
+            <a:pPr indent="0" marL="0">
+              <a:buNone/>
+            </a:pPr>
+            <a:r>
+              <a:rPr lang="en-US" sz="1300" dirty="0">
+                <a:solidFill>
+                  <a:srgbClr val="CADCFC"/>
+                </a:solidFill>
+                <a:latin typeface="맑은 고딕" pitchFamily="34" charset="0"/>
+                <a:ea typeface="맑은 고딕" pitchFamily="34" charset="-122"/>
+                <a:cs typeface="맑은 고딕" pitchFamily="34" charset="-120"/>
+              </a:rPr>
+              <a:t>이내 현장 상공 도달</a:t>
+            </a:r>
+            <a:endParaRPr lang="en-US" sz="1300" dirty="0"/>
+          </a:p>
+        </p:txBody>
+      </p:sp>
+      <p:sp>
+        <p:nvSpPr>
+          <p:cNvPr id="7" name="Shape 5"/>
+          <p:cNvSpPr/>
+          <p:nvPr/>
+        </p:nvSpPr>
+        <p:spPr>
+          <a:xfrm>
+            <a:off x="548640" y="3017520"/>
+            <a:ext cx="2743200" cy="1234440"/>
+          </a:xfrm>
+          <a:prstGeom prst="roundRect">
+            <a:avLst>
+              <a:gd name="adj" fmla="val 4444"/>
+            </a:avLst>
+          </a:prstGeom>
+          <a:solidFill>
+            <a:srgbClr val="F2F6F9"/>
+          </a:solidFill>
+          <a:ln w="12700">
+            <a:solidFill>
+              <a:srgbClr val="E3EAF0"/>
+            </a:solidFill>
+            <a:prstDash val="solid"/>
+          </a:ln>
+          <a:effectLst>
+            <a:outerShdw sx="100000" sy="100000" kx="0" ky="0" algn="bl" rotWithShape="0" blurRad="101600" dist="25400" dir="5400000">
+              <a:srgbClr val="0B1B2B">
+                <a:alpha val="12000"/>
+              </a:srgbClr>
+            </a:outerShdw>
+          </a:effectLst>
+        </p:spPr>
+      </p:sp>
+      <p:sp>
+        <p:nvSpPr>
           <p:cNvPr id="8" name="Text 6"/>
           <p:cNvSpPr txBox="1"/>
           <p:nvPr/>
         </p:nvSpPr>
         <p:spPr>
           <a:xfrm>
-            <a:off x="4937760" y="1783080"/>
-            <a:ext cx="3383280" cy="365760"/>
-          </a:xfrm>
-          <a:prstGeom prst="rect">
-            <a:avLst/>
-          </a:prstGeom>
-          <a:noFill/>
-          <a:ln/>
-        </p:spPr>
-        <p:txBody>
-          <a:bodyPr wrap="square" lIns="0" tIns="0" rIns="0" bIns="0" rtlCol="0" anchor="ctr"/>
-          <a:lstStyle/>
-          <a:p>
-            <a:pPr indent="0" marL="0">
-              <a:buNone/>
-            </a:pPr>
-            <a:r>
-              <a:rPr lang="en-US" sz="1300" dirty="0">
-                <a:solidFill>
-                  <a:srgbClr val="8FB4C9"/>
-                </a:solidFill>
-                <a:latin typeface="맑은 고딕" pitchFamily="34" charset="0"/>
-                <a:ea typeface="맑은 고딕" pitchFamily="34" charset="-122"/>
-                <a:cs typeface="맑은 고딕" pitchFamily="34" charset="-120"/>
-              </a:rPr>
-              <a:t>연장 신청서에 담아 주십시오</a:t>
-            </a:r>
-            <a:endParaRPr lang="en-US" sz="1300" dirty="0"/>
+            <a:off x="713232" y="3154680"/>
+            <a:ext cx="2468880" cy="320040"/>
+          </a:xfrm>
+          <a:prstGeom prst="rect">
+            <a:avLst/>
+          </a:prstGeom>
+          <a:noFill/>
+          <a:ln/>
+        </p:spPr>
+        <p:txBody>
+          <a:bodyPr wrap="square" lIns="0" tIns="0" rIns="0" bIns="0" rtlCol="0" anchor="ctr"/>
+          <a:lstStyle/>
+          <a:p>
+            <a:pPr indent="0" marL="0">
+              <a:buNone/>
+            </a:pPr>
+            <a:r>
+              <a:rPr lang="en-US" sz="1400" b="1" dirty="0">
+                <a:solidFill>
+                  <a:srgbClr val="065A82"/>
+                </a:solidFill>
+                <a:latin typeface="맑은 고딕" pitchFamily="34" charset="0"/>
+                <a:ea typeface="맑은 고딕" pitchFamily="34" charset="-122"/>
+                <a:cs typeface="맑은 고딕" pitchFamily="34" charset="-120"/>
+              </a:rPr>
+              <a:t>신규 부지 불필요</a:t>
+            </a:r>
+            <a:endParaRPr lang="en-US" sz="1400" dirty="0"/>
           </a:p>
         </p:txBody>
       </p:sp>
@@ -2485,8 +2523,8 @@
         </p:nvSpPr>
         <p:spPr>
           <a:xfrm>
-            <a:off x="4937760" y="2194560"/>
-            <a:ext cx="3383280" cy="1005840"/>
+            <a:off x="713232" y="3474720"/>
+            <a:ext cx="2468880" cy="731520"/>
           </a:xfrm>
           <a:prstGeom prst="rect">
             <a:avLst/>
@@ -2505,17 +2543,17 @@
               <a:buNone/>
             </a:pPr>
             <a:r>
-              <a:rPr lang="en-US" sz="1800" b="1" dirty="0">
-                <a:solidFill>
-                  <a:srgbClr val="FFFFFF"/>
-                </a:solidFill>
-                <a:latin typeface="맑은 고딕" pitchFamily="34" charset="0"/>
-                <a:ea typeface="맑은 고딕" pitchFamily="34" charset="-122"/>
-                <a:cs typeface="맑은 고딕" pitchFamily="34" charset="-120"/>
-              </a:rPr>
-              <a:t>치안 · 구조 목적</a:t>
-            </a:r>
-            <a:endParaRPr lang="en-US" sz="1800" dirty="0"/>
+              <a:rPr lang="en-US" sz="1100" dirty="0">
+                <a:solidFill>
+                  <a:srgbClr val="5A6A78"/>
+                </a:solidFill>
+                <a:latin typeface="맑은 고딕" pitchFamily="34" charset="0"/>
+                <a:ea typeface="맑은 고딕" pitchFamily="34" charset="-122"/>
+                <a:cs typeface="맑은 고딕" pitchFamily="34" charset="-120"/>
+              </a:rPr>
+              <a:t>자치경찰 지구대 · CCTV</a:t>
+            </a:r>
+            <a:endParaRPr lang="en-US" sz="1100" dirty="0"/>
           </a:p>
           <a:p>
             <a:pPr indent="0" marL="0">
@@ -2525,17 +2563,17 @@
               <a:buNone/>
             </a:pPr>
             <a:r>
-              <a:rPr lang="en-US" sz="1800" b="1" dirty="0">
-                <a:solidFill>
-                  <a:srgbClr val="FFFFFF"/>
-                </a:solidFill>
-                <a:latin typeface="맑은 고딕" pitchFamily="34" charset="0"/>
-                <a:ea typeface="맑은 고딕" pitchFamily="34" charset="-122"/>
-                <a:cs typeface="맑은 고딕" pitchFamily="34" charset="-120"/>
-              </a:rPr>
-              <a:t>비가시권(BVLOS) · 야간비행</a:t>
-            </a:r>
-            <a:endParaRPr lang="en-US" sz="1800" dirty="0"/>
+              <a:rPr lang="en-US" sz="1100" dirty="0">
+                <a:solidFill>
+                  <a:srgbClr val="5A6A78"/>
+                </a:solidFill>
+                <a:latin typeface="맑은 고딕" pitchFamily="34" charset="0"/>
+                <a:ea typeface="맑은 고딕" pitchFamily="34" charset="-122"/>
+                <a:cs typeface="맑은 고딕" pitchFamily="34" charset="-120"/>
+              </a:rPr>
+              <a:t>통합관제센터에 무인 격납고를</a:t>
+            </a:r>
+            <a:endParaRPr lang="en-US" sz="1100" dirty="0"/>
           </a:p>
           <a:p>
             <a:pPr indent="0" marL="0">
@@ -2545,17 +2583,17 @@
               <a:buNone/>
             </a:pPr>
             <a:r>
-              <a:rPr lang="en-US" sz="1800" b="1" dirty="0">
-                <a:solidFill>
-                  <a:srgbClr val="FFFFFF"/>
-                </a:solidFill>
-                <a:latin typeface="맑은 고딕" pitchFamily="34" charset="0"/>
-                <a:ea typeface="맑은 고딕" pitchFamily="34" charset="-122"/>
-                <a:cs typeface="맑은 고딕" pitchFamily="34" charset="-120"/>
-              </a:rPr>
-              <a:t>상시 승인 트랙</a:t>
-            </a:r>
-            <a:endParaRPr lang="en-US" sz="1800" dirty="0"/>
+              <a:rPr lang="en-US" sz="1100" dirty="0">
+                <a:solidFill>
+                  <a:srgbClr val="5A6A78"/>
+                </a:solidFill>
+                <a:latin typeface="맑은 고딕" pitchFamily="34" charset="0"/>
+                <a:ea typeface="맑은 고딕" pitchFamily="34" charset="-122"/>
+                <a:cs typeface="맑은 고딕" pitchFamily="34" charset="-120"/>
+              </a:rPr>
+              <a:t>병설하는 구조</a:t>
+            </a:r>
+            <a:endParaRPr lang="en-US" sz="1100" dirty="0"/>
           </a:p>
         </p:txBody>
       </p:sp>
@@ -2567,34 +2605,34 @@
         </p:nvSpPr>
         <p:spPr>
           <a:xfrm>
-            <a:off x="4937760" y="3291840"/>
-            <a:ext cx="3383280" cy="365760"/>
-          </a:xfrm>
-          <a:prstGeom prst="rect">
-            <a:avLst/>
-          </a:prstGeom>
-          <a:noFill/>
-          <a:ln/>
-        </p:spPr>
-        <p:txBody>
-          <a:bodyPr wrap="square" lIns="0" tIns="0" rIns="0" bIns="0" rtlCol="0" anchor="ctr"/>
-          <a:lstStyle/>
-          <a:p>
-            <a:pPr indent="0" marL="0">
-              <a:buNone/>
-            </a:pPr>
-            <a:r>
-              <a:rPr lang="en-US" sz="1100" dirty="0">
-                <a:solidFill>
-                  <a:srgbClr val="CADCFC"/>
-                </a:solidFill>
-                <a:latin typeface="맑은 고딕" pitchFamily="34" charset="0"/>
-                <a:ea typeface="맑은 고딕" pitchFamily="34" charset="-122"/>
-                <a:cs typeface="맑은 고딕" pitchFamily="34" charset="-120"/>
-              </a:rPr>
-              <a:t>DFR 체계의 기술적 전제가 바로 이 두 가지입니다.</a:t>
-            </a:r>
-            <a:endParaRPr lang="en-US" sz="1100" dirty="0"/>
+            <a:off x="3611880" y="1572768"/>
+            <a:ext cx="4983480" cy="320040"/>
+          </a:xfrm>
+          <a:prstGeom prst="rect">
+            <a:avLst/>
+          </a:prstGeom>
+          <a:noFill/>
+          <a:ln/>
+        </p:spPr>
+        <p:txBody>
+          <a:bodyPr wrap="square" lIns="0" tIns="0" rIns="0" bIns="0" rtlCol="0" anchor="ctr"/>
+          <a:lstStyle/>
+          <a:p>
+            <a:pPr indent="0" marL="0">
+              <a:buNone/>
+            </a:pPr>
+            <a:r>
+              <a:rPr lang="en-US" sz="1300" b="1" dirty="0">
+                <a:solidFill>
+                  <a:srgbClr val="10243A"/>
+                </a:solidFill>
+                <a:latin typeface="맑은 고딕" pitchFamily="34" charset="0"/>
+                <a:ea typeface="맑은 고딕" pitchFamily="34" charset="-122"/>
+                <a:cs typeface="맑은 고딕" pitchFamily="34" charset="-120"/>
+              </a:rPr>
+              <a:t>1단계 시범 대상지(안)   ·   8개소</a:t>
+            </a:r>
+            <a:endParaRPr lang="en-US" sz="1300" dirty="0"/>
           </a:p>
         </p:txBody>
       </p:sp>
@@ -2606,20 +2644,20 @@
         </p:nvSpPr>
         <p:spPr>
           <a:xfrm>
-            <a:off x="548640" y="4023360"/>
-            <a:ext cx="8046720" cy="566928"/>
+            <a:off x="3611880" y="2011680"/>
+            <a:ext cx="2395728" cy="457200"/>
           </a:xfrm>
           <a:prstGeom prst="roundRect">
             <a:avLst>
-              <a:gd name="adj" fmla="val 12903"/>
+              <a:gd name="adj" fmla="val 12000"/>
             </a:avLst>
           </a:prstGeom>
           <a:solidFill>
-            <a:srgbClr val="E0523C"/>
+            <a:srgbClr val="F2F6F9"/>
           </a:solidFill>
           <a:ln w="12700">
             <a:solidFill>
-              <a:srgbClr val="E0523C"/>
+              <a:srgbClr val="E3EAF0"/>
             </a:solidFill>
             <a:prstDash val="solid"/>
           </a:ln>
@@ -2633,34 +2671,535 @@
         </p:nvSpPr>
         <p:spPr>
           <a:xfrm>
-            <a:off x="548640" y="4023360"/>
-            <a:ext cx="8046720" cy="566928"/>
-          </a:xfrm>
-          <a:prstGeom prst="rect">
-            <a:avLst/>
-          </a:prstGeom>
-          <a:noFill/>
-          <a:ln/>
-        </p:spPr>
-        <p:txBody>
-          <a:bodyPr wrap="square" lIns="0" tIns="0" rIns="0" bIns="0" rtlCol="0" anchor="ctr"/>
-          <a:lstStyle/>
-          <a:p>
-            <a:pPr algn="ctr" indent="0" marL="0">
-              <a:buNone/>
-            </a:pPr>
-            <a:r>
-              <a:rPr lang="en-US" sz="1400" b="1" dirty="0">
-                <a:solidFill>
-                  <a:srgbClr val="FFFFFF"/>
-                </a:solidFill>
-                <a:latin typeface="맑은 고딕" pitchFamily="34" charset="0"/>
-                <a:ea typeface="맑은 고딕" pitchFamily="34" charset="-122"/>
-                <a:cs typeface="맑은 고딕" pitchFamily="34" charset="-120"/>
-              </a:rPr>
-              <a:t>국회 입법을 기다릴 필요가 없습니다 — 제주도 권한 안에서, 신청서 한 줄로 열리는 문입니다</a:t>
-            </a:r>
-            <a:endParaRPr lang="en-US" sz="1400" dirty="0"/>
+            <a:off x="3739896" y="2011680"/>
+            <a:ext cx="2194560" cy="457200"/>
+          </a:xfrm>
+          <a:prstGeom prst="rect">
+            <a:avLst/>
+          </a:prstGeom>
+          <a:noFill/>
+          <a:ln/>
+        </p:spPr>
+        <p:txBody>
+          <a:bodyPr wrap="square" lIns="0" tIns="0" rIns="0" bIns="0" rtlCol="0" anchor="ctr"/>
+          <a:lstStyle/>
+          <a:p>
+            <a:pPr indent="0" marL="0">
+              <a:buNone/>
+            </a:pPr>
+            <a:r>
+              <a:rPr lang="en-US" sz="1100" dirty="0">
+                <a:solidFill>
+                  <a:srgbClr val="10243A"/>
+                </a:solidFill>
+                <a:latin typeface="맑은 고딕" pitchFamily="34" charset="0"/>
+                <a:ea typeface="맑은 고딕" pitchFamily="34" charset="-122"/>
+                <a:cs typeface="맑은 고딕" pitchFamily="34" charset="-120"/>
+              </a:rPr>
+              <a:t>제주시 동부 권역</a:t>
+            </a:r>
+            <a:endParaRPr lang="en-US" sz="1100" dirty="0"/>
+          </a:p>
+        </p:txBody>
+      </p:sp>
+      <p:sp>
+        <p:nvSpPr>
+          <p:cNvPr id="13" name="Shape 11"/>
+          <p:cNvSpPr/>
+          <p:nvPr/>
+        </p:nvSpPr>
+        <p:spPr>
+          <a:xfrm>
+            <a:off x="6153912" y="2011680"/>
+            <a:ext cx="2395728" cy="457200"/>
+          </a:xfrm>
+          <a:prstGeom prst="roundRect">
+            <a:avLst>
+              <a:gd name="adj" fmla="val 12000"/>
+            </a:avLst>
+          </a:prstGeom>
+          <a:solidFill>
+            <a:srgbClr val="F2F6F9"/>
+          </a:solidFill>
+          <a:ln w="12700">
+            <a:solidFill>
+              <a:srgbClr val="E3EAF0"/>
+            </a:solidFill>
+            <a:prstDash val="solid"/>
+          </a:ln>
+        </p:spPr>
+      </p:sp>
+      <p:sp>
+        <p:nvSpPr>
+          <p:cNvPr id="14" name="Text 12"/>
+          <p:cNvSpPr txBox="1"/>
+          <p:nvPr/>
+        </p:nvSpPr>
+        <p:spPr>
+          <a:xfrm>
+            <a:off x="6281928" y="2011680"/>
+            <a:ext cx="2194560" cy="457200"/>
+          </a:xfrm>
+          <a:prstGeom prst="rect">
+            <a:avLst/>
+          </a:prstGeom>
+          <a:noFill/>
+          <a:ln/>
+        </p:spPr>
+        <p:txBody>
+          <a:bodyPr wrap="square" lIns="0" tIns="0" rIns="0" bIns="0" rtlCol="0" anchor="ctr"/>
+          <a:lstStyle/>
+          <a:p>
+            <a:pPr indent="0" marL="0">
+              <a:buNone/>
+            </a:pPr>
+            <a:r>
+              <a:rPr lang="en-US" sz="1100" dirty="0">
+                <a:solidFill>
+                  <a:srgbClr val="10243A"/>
+                </a:solidFill>
+                <a:latin typeface="맑은 고딕" pitchFamily="34" charset="0"/>
+                <a:ea typeface="맑은 고딕" pitchFamily="34" charset="-122"/>
+                <a:cs typeface="맑은 고딕" pitchFamily="34" charset="-120"/>
+              </a:rPr>
+              <a:t>제주시 서부 권역</a:t>
+            </a:r>
+            <a:endParaRPr lang="en-US" sz="1100" dirty="0"/>
+          </a:p>
+        </p:txBody>
+      </p:sp>
+      <p:sp>
+        <p:nvSpPr>
+          <p:cNvPr id="15" name="Shape 13"/>
+          <p:cNvSpPr/>
+          <p:nvPr/>
+        </p:nvSpPr>
+        <p:spPr>
+          <a:xfrm>
+            <a:off x="3611880" y="2578608"/>
+            <a:ext cx="2395728" cy="457200"/>
+          </a:xfrm>
+          <a:prstGeom prst="roundRect">
+            <a:avLst>
+              <a:gd name="adj" fmla="val 12000"/>
+            </a:avLst>
+          </a:prstGeom>
+          <a:solidFill>
+            <a:srgbClr val="F2F6F9"/>
+          </a:solidFill>
+          <a:ln w="12700">
+            <a:solidFill>
+              <a:srgbClr val="E3EAF0"/>
+            </a:solidFill>
+            <a:prstDash val="solid"/>
+          </a:ln>
+        </p:spPr>
+      </p:sp>
+      <p:sp>
+        <p:nvSpPr>
+          <p:cNvPr id="16" name="Text 14"/>
+          <p:cNvSpPr txBox="1"/>
+          <p:nvPr/>
+        </p:nvSpPr>
+        <p:spPr>
+          <a:xfrm>
+            <a:off x="3739896" y="2578608"/>
+            <a:ext cx="2194560" cy="457200"/>
+          </a:xfrm>
+          <a:prstGeom prst="rect">
+            <a:avLst/>
+          </a:prstGeom>
+          <a:noFill/>
+          <a:ln/>
+        </p:spPr>
+        <p:txBody>
+          <a:bodyPr wrap="square" lIns="0" tIns="0" rIns="0" bIns="0" rtlCol="0" anchor="ctr"/>
+          <a:lstStyle/>
+          <a:p>
+            <a:pPr indent="0" marL="0">
+              <a:buNone/>
+            </a:pPr>
+            <a:r>
+              <a:rPr lang="en-US" sz="1100" dirty="0">
+                <a:solidFill>
+                  <a:srgbClr val="10243A"/>
+                </a:solidFill>
+                <a:latin typeface="맑은 고딕" pitchFamily="34" charset="0"/>
+                <a:ea typeface="맑은 고딕" pitchFamily="34" charset="-122"/>
+                <a:cs typeface="맑은 고딕" pitchFamily="34" charset="-120"/>
+              </a:rPr>
+              <a:t>서귀포 시가지</a:t>
+            </a:r>
+            <a:endParaRPr lang="en-US" sz="1100" dirty="0"/>
+          </a:p>
+        </p:txBody>
+      </p:sp>
+      <p:sp>
+        <p:nvSpPr>
+          <p:cNvPr id="17" name="Shape 15"/>
+          <p:cNvSpPr/>
+          <p:nvPr/>
+        </p:nvSpPr>
+        <p:spPr>
+          <a:xfrm>
+            <a:off x="6153912" y="2578608"/>
+            <a:ext cx="2395728" cy="457200"/>
+          </a:xfrm>
+          <a:prstGeom prst="roundRect">
+            <a:avLst>
+              <a:gd name="adj" fmla="val 12000"/>
+            </a:avLst>
+          </a:prstGeom>
+          <a:solidFill>
+            <a:srgbClr val="F2F6F9"/>
+          </a:solidFill>
+          <a:ln w="12700">
+            <a:solidFill>
+              <a:srgbClr val="E3EAF0"/>
+            </a:solidFill>
+            <a:prstDash val="solid"/>
+          </a:ln>
+        </p:spPr>
+      </p:sp>
+      <p:sp>
+        <p:nvSpPr>
+          <p:cNvPr id="18" name="Text 16"/>
+          <p:cNvSpPr txBox="1"/>
+          <p:nvPr/>
+        </p:nvSpPr>
+        <p:spPr>
+          <a:xfrm>
+            <a:off x="6281928" y="2578608"/>
+            <a:ext cx="2194560" cy="457200"/>
+          </a:xfrm>
+          <a:prstGeom prst="rect">
+            <a:avLst/>
+          </a:prstGeom>
+          <a:noFill/>
+          <a:ln/>
+        </p:spPr>
+        <p:txBody>
+          <a:bodyPr wrap="square" lIns="0" tIns="0" rIns="0" bIns="0" rtlCol="0" anchor="ctr"/>
+          <a:lstStyle/>
+          <a:p>
+            <a:pPr indent="0" marL="0">
+              <a:buNone/>
+            </a:pPr>
+            <a:r>
+              <a:rPr lang="en-US" sz="1100" dirty="0">
+                <a:solidFill>
+                  <a:srgbClr val="10243A"/>
+                </a:solidFill>
+                <a:latin typeface="맑은 고딕" pitchFamily="34" charset="0"/>
+                <a:ea typeface="맑은 고딕" pitchFamily="34" charset="-122"/>
+                <a:cs typeface="맑은 고딕" pitchFamily="34" charset="-120"/>
+              </a:rPr>
+              <a:t>애월 해안</a:t>
+            </a:r>
+            <a:endParaRPr lang="en-US" sz="1100" dirty="0"/>
+          </a:p>
+        </p:txBody>
+      </p:sp>
+      <p:sp>
+        <p:nvSpPr>
+          <p:cNvPr id="19" name="Shape 17"/>
+          <p:cNvSpPr/>
+          <p:nvPr/>
+        </p:nvSpPr>
+        <p:spPr>
+          <a:xfrm>
+            <a:off x="3611880" y="3145536"/>
+            <a:ext cx="2395728" cy="457200"/>
+          </a:xfrm>
+          <a:prstGeom prst="roundRect">
+            <a:avLst>
+              <a:gd name="adj" fmla="val 12000"/>
+            </a:avLst>
+          </a:prstGeom>
+          <a:solidFill>
+            <a:srgbClr val="F2F6F9"/>
+          </a:solidFill>
+          <a:ln w="12700">
+            <a:solidFill>
+              <a:srgbClr val="E3EAF0"/>
+            </a:solidFill>
+            <a:prstDash val="solid"/>
+          </a:ln>
+        </p:spPr>
+      </p:sp>
+      <p:sp>
+        <p:nvSpPr>
+          <p:cNvPr id="20" name="Text 18"/>
+          <p:cNvSpPr txBox="1"/>
+          <p:nvPr/>
+        </p:nvSpPr>
+        <p:spPr>
+          <a:xfrm>
+            <a:off x="3739896" y="3145536"/>
+            <a:ext cx="2194560" cy="457200"/>
+          </a:xfrm>
+          <a:prstGeom prst="rect">
+            <a:avLst/>
+          </a:prstGeom>
+          <a:noFill/>
+          <a:ln/>
+        </p:spPr>
+        <p:txBody>
+          <a:bodyPr wrap="square" lIns="0" tIns="0" rIns="0" bIns="0" rtlCol="0" anchor="ctr"/>
+          <a:lstStyle/>
+          <a:p>
+            <a:pPr indent="0" marL="0">
+              <a:buNone/>
+            </a:pPr>
+            <a:r>
+              <a:rPr lang="en-US" sz="1100" dirty="0">
+                <a:solidFill>
+                  <a:srgbClr val="10243A"/>
+                </a:solidFill>
+                <a:latin typeface="맑은 고딕" pitchFamily="34" charset="0"/>
+                <a:ea typeface="맑은 고딕" pitchFamily="34" charset="-122"/>
+                <a:cs typeface="맑은 고딕" pitchFamily="34" charset="-120"/>
+              </a:rPr>
+              <a:t>성산</a:t>
+            </a:r>
+            <a:endParaRPr lang="en-US" sz="1100" dirty="0"/>
+          </a:p>
+        </p:txBody>
+      </p:sp>
+      <p:sp>
+        <p:nvSpPr>
+          <p:cNvPr id="21" name="Shape 19"/>
+          <p:cNvSpPr/>
+          <p:nvPr/>
+        </p:nvSpPr>
+        <p:spPr>
+          <a:xfrm>
+            <a:off x="6153912" y="3145536"/>
+            <a:ext cx="2395728" cy="457200"/>
+          </a:xfrm>
+          <a:prstGeom prst="roundRect">
+            <a:avLst>
+              <a:gd name="adj" fmla="val 12000"/>
+            </a:avLst>
+          </a:prstGeom>
+          <a:solidFill>
+            <a:srgbClr val="F2F6F9"/>
+          </a:solidFill>
+          <a:ln w="12700">
+            <a:solidFill>
+              <a:srgbClr val="E3EAF0"/>
+            </a:solidFill>
+            <a:prstDash val="solid"/>
+          </a:ln>
+        </p:spPr>
+      </p:sp>
+      <p:sp>
+        <p:nvSpPr>
+          <p:cNvPr id="22" name="Text 20"/>
+          <p:cNvSpPr txBox="1"/>
+          <p:nvPr/>
+        </p:nvSpPr>
+        <p:spPr>
+          <a:xfrm>
+            <a:off x="6281928" y="3145536"/>
+            <a:ext cx="2194560" cy="457200"/>
+          </a:xfrm>
+          <a:prstGeom prst="rect">
+            <a:avLst/>
+          </a:prstGeom>
+          <a:noFill/>
+          <a:ln/>
+        </p:spPr>
+        <p:txBody>
+          <a:bodyPr wrap="square" lIns="0" tIns="0" rIns="0" bIns="0" rtlCol="0" anchor="ctr"/>
+          <a:lstStyle/>
+          <a:p>
+            <a:pPr indent="0" marL="0">
+              <a:buNone/>
+            </a:pPr>
+            <a:r>
+              <a:rPr lang="en-US" sz="1100" dirty="0">
+                <a:solidFill>
+                  <a:srgbClr val="10243A"/>
+                </a:solidFill>
+                <a:latin typeface="맑은 고딕" pitchFamily="34" charset="0"/>
+                <a:ea typeface="맑은 고딕" pitchFamily="34" charset="-122"/>
+                <a:cs typeface="맑은 고딕" pitchFamily="34" charset="-120"/>
+              </a:rPr>
+              <a:t>중문</a:t>
+            </a:r>
+            <a:endParaRPr lang="en-US" sz="1100" dirty="0"/>
+          </a:p>
+        </p:txBody>
+      </p:sp>
+      <p:sp>
+        <p:nvSpPr>
+          <p:cNvPr id="23" name="Shape 21"/>
+          <p:cNvSpPr/>
+          <p:nvPr/>
+        </p:nvSpPr>
+        <p:spPr>
+          <a:xfrm>
+            <a:off x="3611880" y="3712464"/>
+            <a:ext cx="2395728" cy="457200"/>
+          </a:xfrm>
+          <a:prstGeom prst="roundRect">
+            <a:avLst>
+              <a:gd name="adj" fmla="val 12000"/>
+            </a:avLst>
+          </a:prstGeom>
+          <a:solidFill>
+            <a:srgbClr val="F2F6F9"/>
+          </a:solidFill>
+          <a:ln w="12700">
+            <a:solidFill>
+              <a:srgbClr val="E3EAF0"/>
+            </a:solidFill>
+            <a:prstDash val="solid"/>
+          </a:ln>
+        </p:spPr>
+      </p:sp>
+      <p:sp>
+        <p:nvSpPr>
+          <p:cNvPr id="24" name="Text 22"/>
+          <p:cNvSpPr txBox="1"/>
+          <p:nvPr/>
+        </p:nvSpPr>
+        <p:spPr>
+          <a:xfrm>
+            <a:off x="3739896" y="3712464"/>
+            <a:ext cx="2194560" cy="457200"/>
+          </a:xfrm>
+          <a:prstGeom prst="rect">
+            <a:avLst/>
+          </a:prstGeom>
+          <a:noFill/>
+          <a:ln/>
+        </p:spPr>
+        <p:txBody>
+          <a:bodyPr wrap="square" lIns="0" tIns="0" rIns="0" bIns="0" rtlCol="0" anchor="ctr"/>
+          <a:lstStyle/>
+          <a:p>
+            <a:pPr indent="0" marL="0">
+              <a:buNone/>
+            </a:pPr>
+            <a:r>
+              <a:rPr lang="en-US" sz="1100" dirty="0">
+                <a:solidFill>
+                  <a:srgbClr val="10243A"/>
+                </a:solidFill>
+                <a:latin typeface="맑은 고딕" pitchFamily="34" charset="0"/>
+                <a:ea typeface="맑은 고딕" pitchFamily="34" charset="-122"/>
+                <a:cs typeface="맑은 고딕" pitchFamily="34" charset="-120"/>
+              </a:rPr>
+              <a:t>한라산 주요 탐방로 진입부</a:t>
+            </a:r>
+            <a:endParaRPr lang="en-US" sz="1100" dirty="0"/>
+          </a:p>
+        </p:txBody>
+      </p:sp>
+      <p:sp>
+        <p:nvSpPr>
+          <p:cNvPr id="25" name="Shape 23"/>
+          <p:cNvSpPr/>
+          <p:nvPr/>
+        </p:nvSpPr>
+        <p:spPr>
+          <a:xfrm>
+            <a:off x="6153912" y="3712464"/>
+            <a:ext cx="2395728" cy="457200"/>
+          </a:xfrm>
+          <a:prstGeom prst="roundRect">
+            <a:avLst>
+              <a:gd name="adj" fmla="val 12000"/>
+            </a:avLst>
+          </a:prstGeom>
+          <a:solidFill>
+            <a:srgbClr val="F2F6F9"/>
+          </a:solidFill>
+          <a:ln w="12700">
+            <a:solidFill>
+              <a:srgbClr val="E3EAF0"/>
+            </a:solidFill>
+            <a:prstDash val="solid"/>
+          </a:ln>
+        </p:spPr>
+      </p:sp>
+      <p:sp>
+        <p:nvSpPr>
+          <p:cNvPr id="26" name="Text 24"/>
+          <p:cNvSpPr txBox="1"/>
+          <p:nvPr/>
+        </p:nvSpPr>
+        <p:spPr>
+          <a:xfrm>
+            <a:off x="6281928" y="3712464"/>
+            <a:ext cx="2194560" cy="457200"/>
+          </a:xfrm>
+          <a:prstGeom prst="rect">
+            <a:avLst/>
+          </a:prstGeom>
+          <a:noFill/>
+          <a:ln/>
+        </p:spPr>
+        <p:txBody>
+          <a:bodyPr wrap="square" lIns="0" tIns="0" rIns="0" bIns="0" rtlCol="0" anchor="ctr"/>
+          <a:lstStyle/>
+          <a:p>
+            <a:pPr indent="0" marL="0">
+              <a:buNone/>
+            </a:pPr>
+            <a:r>
+              <a:rPr lang="en-US" sz="1100" dirty="0">
+                <a:solidFill>
+                  <a:srgbClr val="10243A"/>
+                </a:solidFill>
+                <a:latin typeface="맑은 고딕" pitchFamily="34" charset="0"/>
+                <a:ea typeface="맑은 고딕" pitchFamily="34" charset="-122"/>
+                <a:cs typeface="맑은 고딕" pitchFamily="34" charset="-120"/>
+              </a:rPr>
+              <a:t>올레길 위험 구간</a:t>
+            </a:r>
+            <a:endParaRPr lang="en-US" sz="1100" dirty="0"/>
+          </a:p>
+        </p:txBody>
+      </p:sp>
+      <p:sp>
+        <p:nvSpPr>
+          <p:cNvPr id="27" name="Text 25"/>
+          <p:cNvSpPr txBox="1"/>
+          <p:nvPr/>
+        </p:nvSpPr>
+        <p:spPr>
+          <a:xfrm>
+            <a:off x="3611880" y="4370832"/>
+            <a:ext cx="4983480" cy="320040"/>
+          </a:xfrm>
+          <a:prstGeom prst="rect">
+            <a:avLst/>
+          </a:prstGeom>
+          <a:noFill/>
+          <a:ln/>
+        </p:spPr>
+        <p:txBody>
+          <a:bodyPr wrap="square" lIns="0" tIns="0" rIns="0" bIns="0" rtlCol="0" anchor="ctr"/>
+          <a:lstStyle/>
+          <a:p>
+            <a:pPr indent="0" marL="0">
+              <a:buNone/>
+            </a:pPr>
+            <a:r>
+              <a:rPr lang="en-US" sz="1050" dirty="0">
+                <a:solidFill>
+                  <a:srgbClr val="5A6A78"/>
+                </a:solidFill>
+                <a:latin typeface="맑은 고딕" pitchFamily="34" charset="0"/>
+                <a:ea typeface="맑은 고딕" pitchFamily="34" charset="-122"/>
+                <a:cs typeface="맑은 고딕" pitchFamily="34" charset="-120"/>
+              </a:rPr>
+              <a:t>배치 우선순위는 도가 이미 운영 중인 인구빅데이터(생활인구·입도객)로 결정</a:t>
+            </a:r>
+            <a:endParaRPr lang="en-US" sz="1050" dirty="0"/>
           </a:p>
         </p:txBody>
       </p:sp>
@@ -2722,7 +3261,7 @@
                 <a:ea typeface="맑은 고딕" pitchFamily="34" charset="-122"/>
                 <a:cs typeface="맑은 고딕" pitchFamily="34" charset="-120"/>
               </a:rPr>
-              <a:t>제언 ③   거버넌스 — 조례가 곧 면허증</a:t>
+              <a:t>제언 ②   규제 — 특구 연장에 한 줄</a:t>
             </a:r>
             <a:endParaRPr lang="en-US" sz="2800" dirty="0"/>
           </a:p>
@@ -2761,7 +3300,7 @@
                 <a:ea typeface="맑은 고딕" pitchFamily="34" charset="-122"/>
                 <a:cs typeface="맑은 고딕" pitchFamily="34" charset="-120"/>
               </a:rPr>
-              <a:t>기체를 띄우기 전에 원칙을 먼저 세웁니다</a:t>
+              <a:t>세 가지 제언 중 가장 빠르고, 가장 적은 비용으로 가능합니다</a:t>
             </a:r>
             <a:endParaRPr lang="en-US" sz="1300" dirty="0"/>
           </a:p>
@@ -2769,26 +3308,189 @@
       </p:sp>
       <p:sp>
         <p:nvSpPr>
-          <p:cNvPr id="4" name="Shape 2"/>
+          <p:cNvPr id="4" name="Text 2"/>
+          <p:cNvSpPr txBox="1"/>
+          <p:nvPr/>
+        </p:nvSpPr>
+        <p:spPr>
+          <a:xfrm>
+            <a:off x="548640" y="1600200"/>
+            <a:ext cx="3749040" cy="777240"/>
+          </a:xfrm>
+          <a:prstGeom prst="rect">
+            <a:avLst/>
+          </a:prstGeom>
+          <a:noFill/>
+          <a:ln/>
+        </p:spPr>
+        <p:txBody>
+          <a:bodyPr wrap="square" lIns="0" tIns="0" rIns="0" bIns="0" rtlCol="0" anchor="ctr"/>
+          <a:lstStyle/>
+          <a:p>
+            <a:pPr indent="0" marL="0">
+              <a:buNone/>
+            </a:pPr>
+            <a:r>
+              <a:rPr lang="en-US" sz="4200" b="1" dirty="0">
+                <a:solidFill>
+                  <a:srgbClr val="065A82"/>
+                </a:solidFill>
+                <a:latin typeface="맑은 고딕" pitchFamily="34" charset="0"/>
+                <a:ea typeface="맑은 고딕" pitchFamily="34" charset="-122"/>
+                <a:cs typeface="맑은 고딕" pitchFamily="34" charset="-120"/>
+              </a:rPr>
+              <a:t>1,283㎢</a:t>
+            </a:r>
+            <a:endParaRPr lang="en-US" sz="4200" dirty="0"/>
+          </a:p>
+        </p:txBody>
+      </p:sp>
+      <p:sp>
+        <p:nvSpPr>
+          <p:cNvPr id="5" name="Text 3"/>
+          <p:cNvSpPr txBox="1"/>
+          <p:nvPr/>
+        </p:nvSpPr>
+        <p:spPr>
+          <a:xfrm>
+            <a:off x="594360" y="2395728"/>
+            <a:ext cx="3749040" cy="640080"/>
+          </a:xfrm>
+          <a:prstGeom prst="rect">
+            <a:avLst/>
+          </a:prstGeom>
+          <a:noFill/>
+          <a:ln/>
+        </p:spPr>
+        <p:txBody>
+          <a:bodyPr wrap="square" lIns="0" tIns="0" rIns="0" bIns="0" rtlCol="0" anchor="ctr"/>
+          <a:lstStyle/>
+          <a:p>
+            <a:pPr indent="0" marL="0">
+              <a:lnSpc>
+                <a:spcPct val="115000"/>
+              </a:lnSpc>
+              <a:buNone/>
+            </a:pPr>
+            <a:r>
+              <a:rPr lang="en-US" sz="1500" b="1" dirty="0">
+                <a:solidFill>
+                  <a:srgbClr val="10243A"/>
+                </a:solidFill>
+                <a:latin typeface="맑은 고딕" pitchFamily="34" charset="0"/>
+                <a:ea typeface="맑은 고딕" pitchFamily="34" charset="-122"/>
+                <a:cs typeface="맑은 고딕" pitchFamily="34" charset="-120"/>
+              </a:rPr>
+              <a:t>전국 최대 규모</a:t>
+            </a:r>
+            <a:endParaRPr lang="en-US" sz="1500" dirty="0"/>
+          </a:p>
+          <a:p>
+            <a:pPr indent="0" marL="0">
+              <a:lnSpc>
+                <a:spcPct val="115000"/>
+              </a:lnSpc>
+              <a:buNone/>
+            </a:pPr>
+            <a:r>
+              <a:rPr lang="en-US" sz="1500" b="1" dirty="0">
+                <a:solidFill>
+                  <a:srgbClr val="10243A"/>
+                </a:solidFill>
+                <a:latin typeface="맑은 고딕" pitchFamily="34" charset="0"/>
+                <a:ea typeface="맑은 고딕" pitchFamily="34" charset="-122"/>
+                <a:cs typeface="맑은 고딕" pitchFamily="34" charset="-120"/>
+              </a:rPr>
+              <a:t>드론특별자유화구역</a:t>
+            </a:r>
+            <a:endParaRPr lang="en-US" sz="1500" dirty="0"/>
+          </a:p>
+        </p:txBody>
+      </p:sp>
+      <p:sp>
+        <p:nvSpPr>
+          <p:cNvPr id="6" name="Text 4"/>
+          <p:cNvSpPr txBox="1"/>
+          <p:nvPr/>
+        </p:nvSpPr>
+        <p:spPr>
+          <a:xfrm>
+            <a:off x="594360" y="3090672"/>
+            <a:ext cx="3749040" cy="640080"/>
+          </a:xfrm>
+          <a:prstGeom prst="rect">
+            <a:avLst/>
+          </a:prstGeom>
+          <a:noFill/>
+          <a:ln/>
+        </p:spPr>
+        <p:txBody>
+          <a:bodyPr wrap="square" lIns="0" tIns="0" rIns="0" bIns="0" rtlCol="0" anchor="ctr"/>
+          <a:lstStyle/>
+          <a:p>
+            <a:pPr indent="0" marL="0">
+              <a:lnSpc>
+                <a:spcPct val="120000"/>
+              </a:lnSpc>
+              <a:buNone/>
+            </a:pPr>
+            <a:r>
+              <a:rPr lang="en-US" sz="1100" dirty="0">
+                <a:solidFill>
+                  <a:srgbClr val="5A6A78"/>
+                </a:solidFill>
+                <a:latin typeface="맑은 고딕" pitchFamily="34" charset="0"/>
+                <a:ea typeface="맑은 고딕" pitchFamily="34" charset="-122"/>
+                <a:cs typeface="맑은 고딕" pitchFamily="34" charset="-120"/>
+              </a:rPr>
+              <a:t>2021년 1차 지정 이후 운영 중이며,</a:t>
+            </a:r>
+            <a:endParaRPr lang="en-US" sz="1100" dirty="0"/>
+          </a:p>
+          <a:p>
+            <a:pPr indent="0" marL="0">
+              <a:lnSpc>
+                <a:spcPct val="120000"/>
+              </a:lnSpc>
+              <a:buNone/>
+            </a:pPr>
+            <a:r>
+              <a:rPr lang="en-US" sz="1100" dirty="0">
+                <a:solidFill>
+                  <a:srgbClr val="5A6A78"/>
+                </a:solidFill>
+                <a:latin typeface="맑은 고딕" pitchFamily="34" charset="0"/>
+                <a:ea typeface="맑은 고딕" pitchFamily="34" charset="-122"/>
+                <a:cs typeface="맑은 고딕" pitchFamily="34" charset="-120"/>
+              </a:rPr>
+              <a:t>3차 연장(2027. 6.)을 신청한 상태입니다.</a:t>
+            </a:r>
+            <a:endParaRPr lang="en-US" sz="1100" dirty="0"/>
+          </a:p>
+        </p:txBody>
+      </p:sp>
+      <p:sp>
+        <p:nvSpPr>
+          <p:cNvPr id="7" name="Shape 5"/>
           <p:cNvSpPr/>
           <p:nvPr/>
         </p:nvSpPr>
         <p:spPr>
           <a:xfrm>
-            <a:off x="548640" y="1572768"/>
-            <a:ext cx="3931920" cy="1115568"/>
+            <a:off x="4663440" y="1572768"/>
+            <a:ext cx="3931920" cy="2194560"/>
           </a:xfrm>
           <a:prstGeom prst="roundRect">
             <a:avLst>
-              <a:gd name="adj" fmla="val 4918"/>
+              <a:gd name="adj" fmla="val 2500"/>
             </a:avLst>
           </a:prstGeom>
           <a:solidFill>
-            <a:srgbClr val="F2F6F9"/>
+            <a:srgbClr val="10243A"/>
           </a:solidFill>
           <a:ln w="12700">
             <a:solidFill>
-              <a:srgbClr val="E3EAF0"/>
+              <a:srgbClr val="10243A"/>
             </a:solidFill>
             <a:prstDash val="solid"/>
           </a:ln>
@@ -2803,53 +3505,53 @@
       </p:sp>
       <p:sp>
         <p:nvSpPr>
-          <p:cNvPr id="5" name="Text 3"/>
-          <p:cNvSpPr txBox="1"/>
-          <p:nvPr/>
-        </p:nvSpPr>
-        <p:spPr>
-          <a:xfrm>
-            <a:off x="749808" y="1700784"/>
-            <a:ext cx="3566160" cy="329184"/>
-          </a:xfrm>
-          <a:prstGeom prst="rect">
-            <a:avLst/>
-          </a:prstGeom>
-          <a:noFill/>
-          <a:ln/>
-        </p:spPr>
-        <p:txBody>
-          <a:bodyPr wrap="square" lIns="0" tIns="0" rIns="0" bIns="0" rtlCol="0" anchor="ctr"/>
-          <a:lstStyle/>
-          <a:p>
-            <a:pPr indent="0" marL="0">
-              <a:buNone/>
-            </a:pPr>
-            <a:r>
-              <a:rPr lang="en-US" sz="1500" b="1" dirty="0">
-                <a:solidFill>
-                  <a:srgbClr val="065A82"/>
-                </a:solidFill>
-                <a:latin typeface="맑은 고딕" pitchFamily="34" charset="0"/>
-                <a:ea typeface="맑은 고딕" pitchFamily="34" charset="-122"/>
-                <a:cs typeface="맑은 고딕" pitchFamily="34" charset="-120"/>
-              </a:rPr>
-              <a:t>촬영 사실 표시</a:t>
-            </a:r>
-            <a:endParaRPr lang="en-US" sz="1500" dirty="0"/>
-          </a:p>
-        </p:txBody>
-      </p:sp>
-      <p:sp>
-        <p:nvSpPr>
-          <p:cNvPr id="6" name="Text 4"/>
-          <p:cNvSpPr txBox="1"/>
-          <p:nvPr/>
-        </p:nvSpPr>
-        <p:spPr>
-          <a:xfrm>
-            <a:off x="749808" y="2048256"/>
-            <a:ext cx="3566160" cy="548640"/>
+          <p:cNvPr id="8" name="Text 6"/>
+          <p:cNvSpPr txBox="1"/>
+          <p:nvPr/>
+        </p:nvSpPr>
+        <p:spPr>
+          <a:xfrm>
+            <a:off x="4937760" y="1783080"/>
+            <a:ext cx="3383280" cy="365760"/>
+          </a:xfrm>
+          <a:prstGeom prst="rect">
+            <a:avLst/>
+          </a:prstGeom>
+          <a:noFill/>
+          <a:ln/>
+        </p:spPr>
+        <p:txBody>
+          <a:bodyPr wrap="square" lIns="0" tIns="0" rIns="0" bIns="0" rtlCol="0" anchor="ctr"/>
+          <a:lstStyle/>
+          <a:p>
+            <a:pPr indent="0" marL="0">
+              <a:buNone/>
+            </a:pPr>
+            <a:r>
+              <a:rPr lang="en-US" sz="1300" dirty="0">
+                <a:solidFill>
+                  <a:srgbClr val="8FB4C9"/>
+                </a:solidFill>
+                <a:latin typeface="맑은 고딕" pitchFamily="34" charset="0"/>
+                <a:ea typeface="맑은 고딕" pitchFamily="34" charset="-122"/>
+                <a:cs typeface="맑은 고딕" pitchFamily="34" charset="-120"/>
+              </a:rPr>
+              <a:t>연장 신청서에 담아 주십시오</a:t>
+            </a:r>
+            <a:endParaRPr lang="en-US" sz="1300" dirty="0"/>
+          </a:p>
+        </p:txBody>
+      </p:sp>
+      <p:sp>
+        <p:nvSpPr>
+          <p:cNvPr id="9" name="Text 7"/>
+          <p:cNvSpPr txBox="1"/>
+          <p:nvPr/>
+        </p:nvSpPr>
+        <p:spPr>
+          <a:xfrm>
+            <a:off x="4937760" y="2194560"/>
+            <a:ext cx="3383280" cy="1005840"/>
           </a:xfrm>
           <a:prstGeom prst="rect">
             <a:avLst/>
@@ -2868,17 +3570,17 @@
               <a:buNone/>
             </a:pPr>
             <a:r>
-              <a:rPr lang="en-US" sz="1100" dirty="0">
-                <a:solidFill>
-                  <a:srgbClr val="5A6A78"/>
-                </a:solidFill>
-                <a:latin typeface="맑은 고딕" pitchFamily="34" charset="0"/>
-                <a:ea typeface="맑은 고딕" pitchFamily="34" charset="-122"/>
-                <a:cs typeface="맑은 고딕" pitchFamily="34" charset="-120"/>
-              </a:rPr>
-              <a:t>언제 어디서 촬영되는지</a:t>
-            </a:r>
-            <a:endParaRPr lang="en-US" sz="1100" dirty="0"/>
+              <a:rPr lang="en-US" sz="1800" b="1" dirty="0">
+                <a:solidFill>
+                  <a:srgbClr val="FFFFFF"/>
+                </a:solidFill>
+                <a:latin typeface="맑은 고딕" pitchFamily="34" charset="0"/>
+                <a:ea typeface="맑은 고딕" pitchFamily="34" charset="-122"/>
+                <a:cs typeface="맑은 고딕" pitchFamily="34" charset="-120"/>
+              </a:rPr>
+              <a:t>치안 · 구조 목적</a:t>
+            </a:r>
+            <a:endParaRPr lang="en-US" sz="1800" dirty="0"/>
           </a:p>
           <a:p>
             <a:pPr indent="0" marL="0">
@@ -2888,15 +3590,74 @@
               <a:buNone/>
             </a:pPr>
             <a:r>
+              <a:rPr lang="en-US" sz="1800" b="1" dirty="0">
+                <a:solidFill>
+                  <a:srgbClr val="FFFFFF"/>
+                </a:solidFill>
+                <a:latin typeface="맑은 고딕" pitchFamily="34" charset="0"/>
+                <a:ea typeface="맑은 고딕" pitchFamily="34" charset="-122"/>
+                <a:cs typeface="맑은 고딕" pitchFamily="34" charset="-120"/>
+              </a:rPr>
+              <a:t>비가시권(BVLOS) · 야간비행</a:t>
+            </a:r>
+            <a:endParaRPr lang="en-US" sz="1800" dirty="0"/>
+          </a:p>
+          <a:p>
+            <a:pPr indent="0" marL="0">
+              <a:lnSpc>
+                <a:spcPct val="120000"/>
+              </a:lnSpc>
+              <a:buNone/>
+            </a:pPr>
+            <a:r>
+              <a:rPr lang="en-US" sz="1800" b="1" dirty="0">
+                <a:solidFill>
+                  <a:srgbClr val="FFFFFF"/>
+                </a:solidFill>
+                <a:latin typeface="맑은 고딕" pitchFamily="34" charset="0"/>
+                <a:ea typeface="맑은 고딕" pitchFamily="34" charset="-122"/>
+                <a:cs typeface="맑은 고딕" pitchFamily="34" charset="-120"/>
+              </a:rPr>
+              <a:t>상시 승인 트랙</a:t>
+            </a:r>
+            <a:endParaRPr lang="en-US" sz="1800" dirty="0"/>
+          </a:p>
+        </p:txBody>
+      </p:sp>
+      <p:sp>
+        <p:nvSpPr>
+          <p:cNvPr id="10" name="Text 8"/>
+          <p:cNvSpPr txBox="1"/>
+          <p:nvPr/>
+        </p:nvSpPr>
+        <p:spPr>
+          <a:xfrm>
+            <a:off x="4937760" y="3291840"/>
+            <a:ext cx="3383280" cy="365760"/>
+          </a:xfrm>
+          <a:prstGeom prst="rect">
+            <a:avLst/>
+          </a:prstGeom>
+          <a:noFill/>
+          <a:ln/>
+        </p:spPr>
+        <p:txBody>
+          <a:bodyPr wrap="square" lIns="0" tIns="0" rIns="0" bIns="0" rtlCol="0" anchor="ctr"/>
+          <a:lstStyle/>
+          <a:p>
+            <a:pPr indent="0" marL="0">
+              <a:buNone/>
+            </a:pPr>
+            <a:r>
               <a:rPr lang="en-US" sz="1100" dirty="0">
                 <a:solidFill>
-                  <a:srgbClr val="5A6A78"/>
-                </a:solidFill>
-                <a:latin typeface="맑은 고딕" pitchFamily="34" charset="0"/>
-                <a:ea typeface="맑은 고딕" pitchFamily="34" charset="-122"/>
-                <a:cs typeface="맑은 고딕" pitchFamily="34" charset="-120"/>
-              </a:rPr>
-              <a:t>도민이 알 수 있게 한다</a:t>
+                  <a:srgbClr val="CADCFC"/>
+                </a:solidFill>
+                <a:latin typeface="맑은 고딕" pitchFamily="34" charset="0"/>
+                <a:ea typeface="맑은 고딕" pitchFamily="34" charset="-122"/>
+                <a:cs typeface="맑은 고딕" pitchFamily="34" charset="-120"/>
+              </a:rPr>
+              <a:t>DFR 체계의 기술적 전제가 바로 이 두 가지입니다.</a:t>
             </a:r>
             <a:endParaRPr lang="en-US" sz="1100" dirty="0"/>
           </a:p>
@@ -2904,211 +3665,30 @@
       </p:sp>
       <p:sp>
         <p:nvSpPr>
-          <p:cNvPr id="7" name="Shape 5"/>
+          <p:cNvPr id="11" name="Shape 9"/>
           <p:cNvSpPr/>
           <p:nvPr/>
         </p:nvSpPr>
         <p:spPr>
           <a:xfrm>
-            <a:off x="4663440" y="1572768"/>
-            <a:ext cx="3931920" cy="1115568"/>
+            <a:off x="548640" y="4023360"/>
+            <a:ext cx="8046720" cy="566928"/>
           </a:xfrm>
           <a:prstGeom prst="roundRect">
             <a:avLst>
-              <a:gd name="adj" fmla="val 4918"/>
+              <a:gd name="adj" fmla="val 12903"/>
             </a:avLst>
           </a:prstGeom>
           <a:solidFill>
-            <a:srgbClr val="F2F6F9"/>
+            <a:srgbClr val="E0523C"/>
           </a:solidFill>
           <a:ln w="12700">
             <a:solidFill>
-              <a:srgbClr val="E3EAF0"/>
+              <a:srgbClr val="E0523C"/>
             </a:solidFill>
             <a:prstDash val="solid"/>
           </a:ln>
-          <a:effectLst>
-            <a:outerShdw sx="100000" sy="100000" kx="0" ky="0" algn="bl" rotWithShape="0" blurRad="101600" dist="25400" dir="5400000">
-              <a:srgbClr val="0B1B2B">
-                <a:alpha val="12000"/>
-              </a:srgbClr>
-            </a:outerShdw>
-          </a:effectLst>
-        </p:spPr>
-      </p:sp>
-      <p:sp>
-        <p:nvSpPr>
-          <p:cNvPr id="8" name="Text 6"/>
-          <p:cNvSpPr txBox="1"/>
-          <p:nvPr/>
-        </p:nvSpPr>
-        <p:spPr>
-          <a:xfrm>
-            <a:off x="4864608" y="1700784"/>
-            <a:ext cx="3566160" cy="329184"/>
-          </a:xfrm>
-          <a:prstGeom prst="rect">
-            <a:avLst/>
-          </a:prstGeom>
-          <a:noFill/>
-          <a:ln/>
-        </p:spPr>
-        <p:txBody>
-          <a:bodyPr wrap="square" lIns="0" tIns="0" rIns="0" bIns="0" rtlCol="0" anchor="ctr"/>
-          <a:lstStyle/>
-          <a:p>
-            <a:pPr indent="0" marL="0">
-              <a:buNone/>
-            </a:pPr>
-            <a:r>
-              <a:rPr lang="en-US" sz="1500" b="1" dirty="0">
-                <a:solidFill>
-                  <a:srgbClr val="065A82"/>
-                </a:solidFill>
-                <a:latin typeface="맑은 고딕" pitchFamily="34" charset="0"/>
-                <a:ea typeface="맑은 고딕" pitchFamily="34" charset="-122"/>
-                <a:cs typeface="맑은 고딕" pitchFamily="34" charset="-120"/>
-              </a:rPr>
-              <a:t>목적 외 이용 금지</a:t>
-            </a:r>
-            <a:endParaRPr lang="en-US" sz="1500" dirty="0"/>
-          </a:p>
-        </p:txBody>
-      </p:sp>
-      <p:sp>
-        <p:nvSpPr>
-          <p:cNvPr id="9" name="Text 7"/>
-          <p:cNvSpPr txBox="1"/>
-          <p:nvPr/>
-        </p:nvSpPr>
-        <p:spPr>
-          <a:xfrm>
-            <a:off x="4864608" y="2048256"/>
-            <a:ext cx="3566160" cy="548640"/>
-          </a:xfrm>
-          <a:prstGeom prst="rect">
-            <a:avLst/>
-          </a:prstGeom>
-          <a:noFill/>
-          <a:ln/>
-        </p:spPr>
-        <p:txBody>
-          <a:bodyPr wrap="square" lIns="0" tIns="0" rIns="0" bIns="0" rtlCol="0" anchor="ctr"/>
-          <a:lstStyle/>
-          <a:p>
-            <a:pPr indent="0" marL="0">
-              <a:lnSpc>
-                <a:spcPct val="120000"/>
-              </a:lnSpc>
-              <a:buNone/>
-            </a:pPr>
-            <a:r>
-              <a:rPr lang="en-US" sz="1100" dirty="0">
-                <a:solidFill>
-                  <a:srgbClr val="5A6A78"/>
-                </a:solidFill>
-                <a:latin typeface="맑은 고딕" pitchFamily="34" charset="0"/>
-                <a:ea typeface="맑은 고딕" pitchFamily="34" charset="-122"/>
-                <a:cs typeface="맑은 고딕" pitchFamily="34" charset="-120"/>
-              </a:rPr>
-              <a:t>신고 기반 출동 원칙.</a:t>
-            </a:r>
-            <a:endParaRPr lang="en-US" sz="1100" dirty="0"/>
-          </a:p>
-          <a:p>
-            <a:pPr indent="0" marL="0">
-              <a:lnSpc>
-                <a:spcPct val="120000"/>
-              </a:lnSpc>
-              <a:buNone/>
-            </a:pPr>
-            <a:r>
-              <a:rPr lang="en-US" sz="1100" dirty="0">
-                <a:solidFill>
-                  <a:srgbClr val="5A6A78"/>
-                </a:solidFill>
-                <a:latin typeface="맑은 고딕" pitchFamily="34" charset="0"/>
-                <a:ea typeface="맑은 고딕" pitchFamily="34" charset="-122"/>
-                <a:cs typeface="맑은 고딕" pitchFamily="34" charset="-120"/>
-              </a:rPr>
-              <a:t>특정 집단 감시 수단이 아니다</a:t>
-            </a:r>
-            <a:endParaRPr lang="en-US" sz="1100" dirty="0"/>
-          </a:p>
-        </p:txBody>
-      </p:sp>
-      <p:sp>
-        <p:nvSpPr>
-          <p:cNvPr id="10" name="Shape 8"/>
-          <p:cNvSpPr/>
-          <p:nvPr/>
-        </p:nvSpPr>
-        <p:spPr>
-          <a:xfrm>
-            <a:off x="548640" y="2834640"/>
-            <a:ext cx="3931920" cy="1115568"/>
-          </a:xfrm>
-          <a:prstGeom prst="roundRect">
-            <a:avLst>
-              <a:gd name="adj" fmla="val 4918"/>
-            </a:avLst>
-          </a:prstGeom>
-          <a:solidFill>
-            <a:srgbClr val="F2F6F9"/>
-          </a:solidFill>
-          <a:ln w="12700">
-            <a:solidFill>
-              <a:srgbClr val="E3EAF0"/>
-            </a:solidFill>
-            <a:prstDash val="solid"/>
-          </a:ln>
-          <a:effectLst>
-            <a:outerShdw sx="100000" sy="100000" kx="0" ky="0" algn="bl" rotWithShape="0" blurRad="101600" dist="25400" dir="5400000">
-              <a:srgbClr val="0B1B2B">
-                <a:alpha val="12000"/>
-              </a:srgbClr>
-            </a:outerShdw>
-          </a:effectLst>
-        </p:spPr>
-      </p:sp>
-      <p:sp>
-        <p:nvSpPr>
-          <p:cNvPr id="11" name="Text 9"/>
-          <p:cNvSpPr txBox="1"/>
-          <p:nvPr/>
-        </p:nvSpPr>
-        <p:spPr>
-          <a:xfrm>
-            <a:off x="749808" y="2962656"/>
-            <a:ext cx="3566160" cy="329184"/>
-          </a:xfrm>
-          <a:prstGeom prst="rect">
-            <a:avLst/>
-          </a:prstGeom>
-          <a:noFill/>
-          <a:ln/>
-        </p:spPr>
-        <p:txBody>
-          <a:bodyPr wrap="square" lIns="0" tIns="0" rIns="0" bIns="0" rtlCol="0" anchor="ctr"/>
-          <a:lstStyle/>
-          <a:p>
-            <a:pPr indent="0" marL="0">
-              <a:buNone/>
-            </a:pPr>
-            <a:r>
-              <a:rPr lang="en-US" sz="1500" b="1" dirty="0">
-                <a:solidFill>
-                  <a:srgbClr val="065A82"/>
-                </a:solidFill>
-                <a:latin typeface="맑은 고딕" pitchFamily="34" charset="0"/>
-                <a:ea typeface="맑은 고딕" pitchFamily="34" charset="-122"/>
-                <a:cs typeface="맑은 고딕" pitchFamily="34" charset="-120"/>
-              </a:rPr>
-              <a:t>보관기간 · 접근 로그</a:t>
-            </a:r>
-            <a:endParaRPr lang="en-US" sz="1500" dirty="0"/>
-          </a:p>
-        </p:txBody>
+        </p:spPr>
       </p:sp>
       <p:sp>
         <p:nvSpPr>
@@ -3118,270 +3698,34 @@
         </p:nvSpPr>
         <p:spPr>
           <a:xfrm>
-            <a:off x="749808" y="3310128"/>
-            <a:ext cx="3566160" cy="548640"/>
-          </a:xfrm>
-          <a:prstGeom prst="rect">
-            <a:avLst/>
-          </a:prstGeom>
-          <a:noFill/>
-          <a:ln/>
-        </p:spPr>
-        <p:txBody>
-          <a:bodyPr wrap="square" lIns="0" tIns="0" rIns="0" bIns="0" rtlCol="0" anchor="ctr"/>
-          <a:lstStyle/>
-          <a:p>
-            <a:pPr indent="0" marL="0">
-              <a:lnSpc>
-                <a:spcPct val="120000"/>
-              </a:lnSpc>
-              <a:buNone/>
-            </a:pPr>
-            <a:r>
-              <a:rPr lang="en-US" sz="1100" dirty="0">
-                <a:solidFill>
-                  <a:srgbClr val="5A6A78"/>
-                </a:solidFill>
-                <a:latin typeface="맑은 고딕" pitchFamily="34" charset="0"/>
-                <a:ea typeface="맑은 고딕" pitchFamily="34" charset="-122"/>
-                <a:cs typeface="맑은 고딕" pitchFamily="34" charset="-120"/>
-              </a:rPr>
-              <a:t>누가 언제 어떤 영상을</a:t>
-            </a:r>
-            <a:endParaRPr lang="en-US" sz="1100" dirty="0"/>
-          </a:p>
-          <a:p>
-            <a:pPr indent="0" marL="0">
-              <a:lnSpc>
-                <a:spcPct val="120000"/>
-              </a:lnSpc>
-              <a:buNone/>
-            </a:pPr>
-            <a:r>
-              <a:rPr lang="en-US" sz="1100" dirty="0">
-                <a:solidFill>
-                  <a:srgbClr val="5A6A78"/>
-                </a:solidFill>
-                <a:latin typeface="맑은 고딕" pitchFamily="34" charset="0"/>
-                <a:ea typeface="맑은 고딕" pitchFamily="34" charset="-122"/>
-                <a:cs typeface="맑은 고딕" pitchFamily="34" charset="-120"/>
-              </a:rPr>
-              <a:t>열람했는지 자동 기록</a:t>
-            </a:r>
-            <a:endParaRPr lang="en-US" sz="1100" dirty="0"/>
-          </a:p>
-        </p:txBody>
-      </p:sp>
-      <p:sp>
-        <p:nvSpPr>
-          <p:cNvPr id="13" name="Shape 11"/>
-          <p:cNvSpPr/>
-          <p:nvPr/>
-        </p:nvSpPr>
-        <p:spPr>
-          <a:xfrm>
-            <a:off x="4663440" y="2834640"/>
-            <a:ext cx="3931920" cy="1115568"/>
-          </a:xfrm>
-          <a:prstGeom prst="roundRect">
-            <a:avLst>
-              <a:gd name="adj" fmla="val 4918"/>
-            </a:avLst>
-          </a:prstGeom>
-          <a:solidFill>
-            <a:srgbClr val="F2F6F9"/>
-          </a:solidFill>
-          <a:ln w="12700">
-            <a:solidFill>
-              <a:srgbClr val="E3EAF0"/>
-            </a:solidFill>
-            <a:prstDash val="solid"/>
-          </a:ln>
-          <a:effectLst>
-            <a:outerShdw sx="100000" sy="100000" kx="0" ky="0" algn="bl" rotWithShape="0" blurRad="101600" dist="25400" dir="5400000">
-              <a:srgbClr val="0B1B2B">
-                <a:alpha val="12000"/>
-              </a:srgbClr>
-            </a:outerShdw>
-          </a:effectLst>
-        </p:spPr>
-      </p:sp>
-      <p:sp>
-        <p:nvSpPr>
-          <p:cNvPr id="14" name="Text 12"/>
-          <p:cNvSpPr txBox="1"/>
-          <p:nvPr/>
-        </p:nvSpPr>
-        <p:spPr>
-          <a:xfrm>
-            <a:off x="4864608" y="2962656"/>
-            <a:ext cx="3566160" cy="329184"/>
-          </a:xfrm>
-          <a:prstGeom prst="rect">
-            <a:avLst/>
-          </a:prstGeom>
-          <a:noFill/>
-          <a:ln/>
-        </p:spPr>
-        <p:txBody>
-          <a:bodyPr wrap="square" lIns="0" tIns="0" rIns="0" bIns="0" rtlCol="0" anchor="ctr"/>
-          <a:lstStyle/>
-          <a:p>
-            <a:pPr indent="0" marL="0">
-              <a:buNone/>
-            </a:pPr>
-            <a:r>
-              <a:rPr lang="en-US" sz="1500" b="1" dirty="0">
-                <a:solidFill>
-                  <a:srgbClr val="065A82"/>
-                </a:solidFill>
-                <a:latin typeface="맑은 고딕" pitchFamily="34" charset="0"/>
-                <a:ea typeface="맑은 고딕" pitchFamily="34" charset="-122"/>
-                <a:cs typeface="맑은 고딕" pitchFamily="34" charset="-120"/>
-              </a:rPr>
-              <a:t>도민 감시기구</a:t>
-            </a:r>
-            <a:endParaRPr lang="en-US" sz="1500" dirty="0"/>
-          </a:p>
-        </p:txBody>
-      </p:sp>
-      <p:sp>
-        <p:nvSpPr>
-          <p:cNvPr id="15" name="Text 13"/>
-          <p:cNvSpPr txBox="1"/>
-          <p:nvPr/>
-        </p:nvSpPr>
-        <p:spPr>
-          <a:xfrm>
-            <a:off x="4864608" y="3310128"/>
-            <a:ext cx="3566160" cy="548640"/>
-          </a:xfrm>
-          <a:prstGeom prst="rect">
-            <a:avLst/>
-          </a:prstGeom>
-          <a:noFill/>
-          <a:ln/>
-        </p:spPr>
-        <p:txBody>
-          <a:bodyPr wrap="square" lIns="0" tIns="0" rIns="0" bIns="0" rtlCol="0" anchor="ctr"/>
-          <a:lstStyle/>
-          <a:p>
-            <a:pPr indent="0" marL="0">
-              <a:lnSpc>
-                <a:spcPct val="120000"/>
-              </a:lnSpc>
-              <a:buNone/>
-            </a:pPr>
-            <a:r>
-              <a:rPr lang="en-US" sz="1100" dirty="0">
-                <a:solidFill>
-                  <a:srgbClr val="5A6A78"/>
-                </a:solidFill>
-                <a:latin typeface="맑은 고딕" pitchFamily="34" charset="0"/>
-                <a:ea typeface="맑은 고딕" pitchFamily="34" charset="-122"/>
-                <a:cs typeface="맑은 고딕" pitchFamily="34" charset="-120"/>
-              </a:rPr>
-              <a:t>운영 실태를 도민이</a:t>
-            </a:r>
-            <a:endParaRPr lang="en-US" sz="1100" dirty="0"/>
-          </a:p>
-          <a:p>
-            <a:pPr indent="0" marL="0">
-              <a:lnSpc>
-                <a:spcPct val="120000"/>
-              </a:lnSpc>
-              <a:buNone/>
-            </a:pPr>
-            <a:r>
-              <a:rPr lang="en-US" sz="1100" dirty="0">
-                <a:solidFill>
-                  <a:srgbClr val="5A6A78"/>
-                </a:solidFill>
-                <a:latin typeface="맑은 고딕" pitchFamily="34" charset="0"/>
-                <a:ea typeface="맑은 고딕" pitchFamily="34" charset="-122"/>
-                <a:cs typeface="맑은 고딕" pitchFamily="34" charset="-120"/>
-              </a:rPr>
-              <a:t>직접 점검한다</a:t>
-            </a:r>
-            <a:endParaRPr lang="en-US" sz="1100" dirty="0"/>
-          </a:p>
-        </p:txBody>
-      </p:sp>
-      <p:sp>
-        <p:nvSpPr>
-          <p:cNvPr id="16" name="Text 14"/>
-          <p:cNvSpPr txBox="1"/>
-          <p:nvPr/>
-        </p:nvSpPr>
-        <p:spPr>
-          <a:xfrm>
-            <a:off x="548640" y="4160520"/>
-            <a:ext cx="8046720" cy="292608"/>
-          </a:xfrm>
-          <a:prstGeom prst="rect">
-            <a:avLst/>
-          </a:prstGeom>
-          <a:noFill/>
-          <a:ln/>
-        </p:spPr>
-        <p:txBody>
-          <a:bodyPr wrap="square" lIns="0" tIns="0" rIns="0" bIns="0" rtlCol="0" anchor="ctr"/>
-          <a:lstStyle/>
-          <a:p>
-            <a:pPr indent="0" marL="0">
-              <a:buNone/>
-            </a:pPr>
-            <a:r>
-              <a:rPr lang="en-US" sz="1250" b="1" dirty="0">
-                <a:solidFill>
-                  <a:srgbClr val="10243A"/>
-                </a:solidFill>
-                <a:latin typeface="맑은 고딕" pitchFamily="34" charset="0"/>
-                <a:ea typeface="맑은 고딕" pitchFamily="34" charset="-122"/>
-                <a:cs typeface="맑은 고딕" pitchFamily="34" charset="-120"/>
-              </a:rPr>
-              <a:t>＋  민간 드론 인력 등록제 · 출동 계약제 — 자원봉사가 아니라 산업으로</a:t>
-            </a:r>
-            <a:endParaRPr lang="en-US" sz="1250" dirty="0"/>
-          </a:p>
-        </p:txBody>
-      </p:sp>
-      <p:sp>
-        <p:nvSpPr>
-          <p:cNvPr id="17" name="Text 15"/>
-          <p:cNvSpPr txBox="1"/>
-          <p:nvPr/>
-        </p:nvSpPr>
-        <p:spPr>
-          <a:xfrm>
-            <a:off x="548640" y="4480560"/>
-            <a:ext cx="8046720" cy="292608"/>
-          </a:xfrm>
-          <a:prstGeom prst="rect">
-            <a:avLst/>
-          </a:prstGeom>
-          <a:noFill/>
-          <a:ln/>
-        </p:spPr>
-        <p:txBody>
-          <a:bodyPr wrap="square" lIns="0" tIns="0" rIns="0" bIns="0" rtlCol="0" anchor="ctr"/>
-          <a:lstStyle/>
-          <a:p>
-            <a:pPr indent="0" marL="0">
-              <a:buNone/>
-            </a:pPr>
-            <a:r>
-              <a:rPr lang="en-US" sz="1250" b="1" dirty="0">
-                <a:solidFill>
-                  <a:srgbClr val="065A82"/>
-                </a:solidFill>
-                <a:latin typeface="맑은 고딕" pitchFamily="34" charset="0"/>
-                <a:ea typeface="맑은 고딕" pitchFamily="34" charset="-122"/>
-                <a:cs typeface="맑은 고딕" pitchFamily="34" charset="-120"/>
-              </a:rPr>
-              <a:t>＋  '제주 안전 대시보드' — 신고와 해제 건수, 초동 확인 시간을 도가 직접 공개</a:t>
-            </a:r>
-            <a:endParaRPr lang="en-US" sz="1250" dirty="0"/>
+            <a:off x="548640" y="4023360"/>
+            <a:ext cx="8046720" cy="566928"/>
+          </a:xfrm>
+          <a:prstGeom prst="rect">
+            <a:avLst/>
+          </a:prstGeom>
+          <a:noFill/>
+          <a:ln/>
+        </p:spPr>
+        <p:txBody>
+          <a:bodyPr wrap="square" lIns="0" tIns="0" rIns="0" bIns="0" rtlCol="0" anchor="ctr"/>
+          <a:lstStyle/>
+          <a:p>
+            <a:pPr algn="ctr" indent="0" marL="0">
+              <a:buNone/>
+            </a:pPr>
+            <a:r>
+              <a:rPr lang="en-US" sz="1400" b="1" dirty="0">
+                <a:solidFill>
+                  <a:srgbClr val="FFFFFF"/>
+                </a:solidFill>
+                <a:latin typeface="맑은 고딕" pitchFamily="34" charset="0"/>
+                <a:ea typeface="맑은 고딕" pitchFamily="34" charset="-122"/>
+                <a:cs typeface="맑은 고딕" pitchFamily="34" charset="-120"/>
+              </a:rPr>
+              <a:t>국회 입법을 기다릴 필요가 없습니다 — 제주도 권한 안에서, 신청서 한 줄로 열리는 문입니다</a:t>
+            </a:r>
+            <a:endParaRPr lang="en-US" sz="1400" dirty="0"/>
           </a:p>
         </p:txBody>
       </p:sp>
@@ -3435,6 +3779,727 @@
               <a:buNone/>
             </a:pPr>
             <a:r>
+              <a:rPr lang="en-US" sz="2800" b="1" dirty="0">
+                <a:solidFill>
+                  <a:srgbClr val="10243A"/>
+                </a:solidFill>
+                <a:latin typeface="맑은 고딕" pitchFamily="34" charset="0"/>
+                <a:ea typeface="맑은 고딕" pitchFamily="34" charset="-122"/>
+                <a:cs typeface="맑은 고딕" pitchFamily="34" charset="-120"/>
+              </a:rPr>
+              <a:t>제언 ③   거버넌스 — 조례가 곧 면허증</a:t>
+            </a:r>
+            <a:endParaRPr lang="en-US" sz="2800" dirty="0"/>
+          </a:p>
+        </p:txBody>
+      </p:sp>
+      <p:sp>
+        <p:nvSpPr>
+          <p:cNvPr id="3" name="Text 1"/>
+          <p:cNvSpPr txBox="1"/>
+          <p:nvPr/>
+        </p:nvSpPr>
+        <p:spPr>
+          <a:xfrm>
+            <a:off x="548640" y="941832"/>
+            <a:ext cx="8046720" cy="329184"/>
+          </a:xfrm>
+          <a:prstGeom prst="rect">
+            <a:avLst/>
+          </a:prstGeom>
+          <a:noFill/>
+          <a:ln/>
+        </p:spPr>
+        <p:txBody>
+          <a:bodyPr wrap="square" lIns="0" tIns="0" rIns="0" bIns="0" rtlCol="0" anchor="ctr"/>
+          <a:lstStyle/>
+          <a:p>
+            <a:pPr indent="0" marL="0">
+              <a:buNone/>
+            </a:pPr>
+            <a:r>
+              <a:rPr lang="en-US" sz="1300" dirty="0">
+                <a:solidFill>
+                  <a:srgbClr val="5A6A78"/>
+                </a:solidFill>
+                <a:latin typeface="맑은 고딕" pitchFamily="34" charset="0"/>
+                <a:ea typeface="맑은 고딕" pitchFamily="34" charset="-122"/>
+                <a:cs typeface="맑은 고딕" pitchFamily="34" charset="-120"/>
+              </a:rPr>
+              <a:t>기체를 띄우기 전에 원칙을 먼저 세웁니다</a:t>
+            </a:r>
+            <a:endParaRPr lang="en-US" sz="1300" dirty="0"/>
+          </a:p>
+        </p:txBody>
+      </p:sp>
+      <p:sp>
+        <p:nvSpPr>
+          <p:cNvPr id="4" name="Shape 2"/>
+          <p:cNvSpPr/>
+          <p:nvPr/>
+        </p:nvSpPr>
+        <p:spPr>
+          <a:xfrm>
+            <a:off x="548640" y="1572768"/>
+            <a:ext cx="3931920" cy="1115568"/>
+          </a:xfrm>
+          <a:prstGeom prst="roundRect">
+            <a:avLst>
+              <a:gd name="adj" fmla="val 4918"/>
+            </a:avLst>
+          </a:prstGeom>
+          <a:solidFill>
+            <a:srgbClr val="F2F6F9"/>
+          </a:solidFill>
+          <a:ln w="12700">
+            <a:solidFill>
+              <a:srgbClr val="E3EAF0"/>
+            </a:solidFill>
+            <a:prstDash val="solid"/>
+          </a:ln>
+          <a:effectLst>
+            <a:outerShdw sx="100000" sy="100000" kx="0" ky="0" algn="bl" rotWithShape="0" blurRad="101600" dist="25400" dir="5400000">
+              <a:srgbClr val="0B1B2B">
+                <a:alpha val="12000"/>
+              </a:srgbClr>
+            </a:outerShdw>
+          </a:effectLst>
+        </p:spPr>
+      </p:sp>
+      <p:sp>
+        <p:nvSpPr>
+          <p:cNvPr id="5" name="Text 3"/>
+          <p:cNvSpPr txBox="1"/>
+          <p:nvPr/>
+        </p:nvSpPr>
+        <p:spPr>
+          <a:xfrm>
+            <a:off x="749808" y="1700784"/>
+            <a:ext cx="3566160" cy="329184"/>
+          </a:xfrm>
+          <a:prstGeom prst="rect">
+            <a:avLst/>
+          </a:prstGeom>
+          <a:noFill/>
+          <a:ln/>
+        </p:spPr>
+        <p:txBody>
+          <a:bodyPr wrap="square" lIns="0" tIns="0" rIns="0" bIns="0" rtlCol="0" anchor="ctr"/>
+          <a:lstStyle/>
+          <a:p>
+            <a:pPr indent="0" marL="0">
+              <a:buNone/>
+            </a:pPr>
+            <a:r>
+              <a:rPr lang="en-US" sz="1500" b="1" dirty="0">
+                <a:solidFill>
+                  <a:srgbClr val="065A82"/>
+                </a:solidFill>
+                <a:latin typeface="맑은 고딕" pitchFamily="34" charset="0"/>
+                <a:ea typeface="맑은 고딕" pitchFamily="34" charset="-122"/>
+                <a:cs typeface="맑은 고딕" pitchFamily="34" charset="-120"/>
+              </a:rPr>
+              <a:t>촬영 사실 표시</a:t>
+            </a:r>
+            <a:endParaRPr lang="en-US" sz="1500" dirty="0"/>
+          </a:p>
+        </p:txBody>
+      </p:sp>
+      <p:sp>
+        <p:nvSpPr>
+          <p:cNvPr id="6" name="Text 4"/>
+          <p:cNvSpPr txBox="1"/>
+          <p:nvPr/>
+        </p:nvSpPr>
+        <p:spPr>
+          <a:xfrm>
+            <a:off x="749808" y="2048256"/>
+            <a:ext cx="3566160" cy="548640"/>
+          </a:xfrm>
+          <a:prstGeom prst="rect">
+            <a:avLst/>
+          </a:prstGeom>
+          <a:noFill/>
+          <a:ln/>
+        </p:spPr>
+        <p:txBody>
+          <a:bodyPr wrap="square" lIns="0" tIns="0" rIns="0" bIns="0" rtlCol="0" anchor="ctr"/>
+          <a:lstStyle/>
+          <a:p>
+            <a:pPr indent="0" marL="0">
+              <a:lnSpc>
+                <a:spcPct val="120000"/>
+              </a:lnSpc>
+              <a:buNone/>
+            </a:pPr>
+            <a:r>
+              <a:rPr lang="en-US" sz="1100" dirty="0">
+                <a:solidFill>
+                  <a:srgbClr val="5A6A78"/>
+                </a:solidFill>
+                <a:latin typeface="맑은 고딕" pitchFamily="34" charset="0"/>
+                <a:ea typeface="맑은 고딕" pitchFamily="34" charset="-122"/>
+                <a:cs typeface="맑은 고딕" pitchFamily="34" charset="-120"/>
+              </a:rPr>
+              <a:t>언제 어디서 촬영되는지</a:t>
+            </a:r>
+            <a:endParaRPr lang="en-US" sz="1100" dirty="0"/>
+          </a:p>
+          <a:p>
+            <a:pPr indent="0" marL="0">
+              <a:lnSpc>
+                <a:spcPct val="120000"/>
+              </a:lnSpc>
+              <a:buNone/>
+            </a:pPr>
+            <a:r>
+              <a:rPr lang="en-US" sz="1100" dirty="0">
+                <a:solidFill>
+                  <a:srgbClr val="5A6A78"/>
+                </a:solidFill>
+                <a:latin typeface="맑은 고딕" pitchFamily="34" charset="0"/>
+                <a:ea typeface="맑은 고딕" pitchFamily="34" charset="-122"/>
+                <a:cs typeface="맑은 고딕" pitchFamily="34" charset="-120"/>
+              </a:rPr>
+              <a:t>도민이 알 수 있게 한다</a:t>
+            </a:r>
+            <a:endParaRPr lang="en-US" sz="1100" dirty="0"/>
+          </a:p>
+        </p:txBody>
+      </p:sp>
+      <p:sp>
+        <p:nvSpPr>
+          <p:cNvPr id="7" name="Shape 5"/>
+          <p:cNvSpPr/>
+          <p:nvPr/>
+        </p:nvSpPr>
+        <p:spPr>
+          <a:xfrm>
+            <a:off x="4663440" y="1572768"/>
+            <a:ext cx="3931920" cy="1115568"/>
+          </a:xfrm>
+          <a:prstGeom prst="roundRect">
+            <a:avLst>
+              <a:gd name="adj" fmla="val 4918"/>
+            </a:avLst>
+          </a:prstGeom>
+          <a:solidFill>
+            <a:srgbClr val="F2F6F9"/>
+          </a:solidFill>
+          <a:ln w="12700">
+            <a:solidFill>
+              <a:srgbClr val="E3EAF0"/>
+            </a:solidFill>
+            <a:prstDash val="solid"/>
+          </a:ln>
+          <a:effectLst>
+            <a:outerShdw sx="100000" sy="100000" kx="0" ky="0" algn="bl" rotWithShape="0" blurRad="101600" dist="25400" dir="5400000">
+              <a:srgbClr val="0B1B2B">
+                <a:alpha val="12000"/>
+              </a:srgbClr>
+            </a:outerShdw>
+          </a:effectLst>
+        </p:spPr>
+      </p:sp>
+      <p:sp>
+        <p:nvSpPr>
+          <p:cNvPr id="8" name="Text 6"/>
+          <p:cNvSpPr txBox="1"/>
+          <p:nvPr/>
+        </p:nvSpPr>
+        <p:spPr>
+          <a:xfrm>
+            <a:off x="4864608" y="1700784"/>
+            <a:ext cx="3566160" cy="329184"/>
+          </a:xfrm>
+          <a:prstGeom prst="rect">
+            <a:avLst/>
+          </a:prstGeom>
+          <a:noFill/>
+          <a:ln/>
+        </p:spPr>
+        <p:txBody>
+          <a:bodyPr wrap="square" lIns="0" tIns="0" rIns="0" bIns="0" rtlCol="0" anchor="ctr"/>
+          <a:lstStyle/>
+          <a:p>
+            <a:pPr indent="0" marL="0">
+              <a:buNone/>
+            </a:pPr>
+            <a:r>
+              <a:rPr lang="en-US" sz="1500" b="1" dirty="0">
+                <a:solidFill>
+                  <a:srgbClr val="065A82"/>
+                </a:solidFill>
+                <a:latin typeface="맑은 고딕" pitchFamily="34" charset="0"/>
+                <a:ea typeface="맑은 고딕" pitchFamily="34" charset="-122"/>
+                <a:cs typeface="맑은 고딕" pitchFamily="34" charset="-120"/>
+              </a:rPr>
+              <a:t>목적 외 이용 금지</a:t>
+            </a:r>
+            <a:endParaRPr lang="en-US" sz="1500" dirty="0"/>
+          </a:p>
+        </p:txBody>
+      </p:sp>
+      <p:sp>
+        <p:nvSpPr>
+          <p:cNvPr id="9" name="Text 7"/>
+          <p:cNvSpPr txBox="1"/>
+          <p:nvPr/>
+        </p:nvSpPr>
+        <p:spPr>
+          <a:xfrm>
+            <a:off x="4864608" y="2048256"/>
+            <a:ext cx="3566160" cy="548640"/>
+          </a:xfrm>
+          <a:prstGeom prst="rect">
+            <a:avLst/>
+          </a:prstGeom>
+          <a:noFill/>
+          <a:ln/>
+        </p:spPr>
+        <p:txBody>
+          <a:bodyPr wrap="square" lIns="0" tIns="0" rIns="0" bIns="0" rtlCol="0" anchor="ctr"/>
+          <a:lstStyle/>
+          <a:p>
+            <a:pPr indent="0" marL="0">
+              <a:lnSpc>
+                <a:spcPct val="120000"/>
+              </a:lnSpc>
+              <a:buNone/>
+            </a:pPr>
+            <a:r>
+              <a:rPr lang="en-US" sz="1100" dirty="0">
+                <a:solidFill>
+                  <a:srgbClr val="5A6A78"/>
+                </a:solidFill>
+                <a:latin typeface="맑은 고딕" pitchFamily="34" charset="0"/>
+                <a:ea typeface="맑은 고딕" pitchFamily="34" charset="-122"/>
+                <a:cs typeface="맑은 고딕" pitchFamily="34" charset="-120"/>
+              </a:rPr>
+              <a:t>신고 기반 출동 원칙.</a:t>
+            </a:r>
+            <a:endParaRPr lang="en-US" sz="1100" dirty="0"/>
+          </a:p>
+          <a:p>
+            <a:pPr indent="0" marL="0">
+              <a:lnSpc>
+                <a:spcPct val="120000"/>
+              </a:lnSpc>
+              <a:buNone/>
+            </a:pPr>
+            <a:r>
+              <a:rPr lang="en-US" sz="1100" dirty="0">
+                <a:solidFill>
+                  <a:srgbClr val="5A6A78"/>
+                </a:solidFill>
+                <a:latin typeface="맑은 고딕" pitchFamily="34" charset="0"/>
+                <a:ea typeface="맑은 고딕" pitchFamily="34" charset="-122"/>
+                <a:cs typeface="맑은 고딕" pitchFamily="34" charset="-120"/>
+              </a:rPr>
+              <a:t>특정 집단 감시 수단이 아니다</a:t>
+            </a:r>
+            <a:endParaRPr lang="en-US" sz="1100" dirty="0"/>
+          </a:p>
+        </p:txBody>
+      </p:sp>
+      <p:sp>
+        <p:nvSpPr>
+          <p:cNvPr id="10" name="Shape 8"/>
+          <p:cNvSpPr/>
+          <p:nvPr/>
+        </p:nvSpPr>
+        <p:spPr>
+          <a:xfrm>
+            <a:off x="548640" y="2834640"/>
+            <a:ext cx="3931920" cy="1115568"/>
+          </a:xfrm>
+          <a:prstGeom prst="roundRect">
+            <a:avLst>
+              <a:gd name="adj" fmla="val 4918"/>
+            </a:avLst>
+          </a:prstGeom>
+          <a:solidFill>
+            <a:srgbClr val="F2F6F9"/>
+          </a:solidFill>
+          <a:ln w="12700">
+            <a:solidFill>
+              <a:srgbClr val="E3EAF0"/>
+            </a:solidFill>
+            <a:prstDash val="solid"/>
+          </a:ln>
+          <a:effectLst>
+            <a:outerShdw sx="100000" sy="100000" kx="0" ky="0" algn="bl" rotWithShape="0" blurRad="101600" dist="25400" dir="5400000">
+              <a:srgbClr val="0B1B2B">
+                <a:alpha val="12000"/>
+              </a:srgbClr>
+            </a:outerShdw>
+          </a:effectLst>
+        </p:spPr>
+      </p:sp>
+      <p:sp>
+        <p:nvSpPr>
+          <p:cNvPr id="11" name="Text 9"/>
+          <p:cNvSpPr txBox="1"/>
+          <p:nvPr/>
+        </p:nvSpPr>
+        <p:spPr>
+          <a:xfrm>
+            <a:off x="749808" y="2962656"/>
+            <a:ext cx="3566160" cy="329184"/>
+          </a:xfrm>
+          <a:prstGeom prst="rect">
+            <a:avLst/>
+          </a:prstGeom>
+          <a:noFill/>
+          <a:ln/>
+        </p:spPr>
+        <p:txBody>
+          <a:bodyPr wrap="square" lIns="0" tIns="0" rIns="0" bIns="0" rtlCol="0" anchor="ctr"/>
+          <a:lstStyle/>
+          <a:p>
+            <a:pPr indent="0" marL="0">
+              <a:buNone/>
+            </a:pPr>
+            <a:r>
+              <a:rPr lang="en-US" sz="1500" b="1" dirty="0">
+                <a:solidFill>
+                  <a:srgbClr val="065A82"/>
+                </a:solidFill>
+                <a:latin typeface="맑은 고딕" pitchFamily="34" charset="0"/>
+                <a:ea typeface="맑은 고딕" pitchFamily="34" charset="-122"/>
+                <a:cs typeface="맑은 고딕" pitchFamily="34" charset="-120"/>
+              </a:rPr>
+              <a:t>보관기간 · 접근 로그</a:t>
+            </a:r>
+            <a:endParaRPr lang="en-US" sz="1500" dirty="0"/>
+          </a:p>
+        </p:txBody>
+      </p:sp>
+      <p:sp>
+        <p:nvSpPr>
+          <p:cNvPr id="12" name="Text 10"/>
+          <p:cNvSpPr txBox="1"/>
+          <p:nvPr/>
+        </p:nvSpPr>
+        <p:spPr>
+          <a:xfrm>
+            <a:off x="749808" y="3310128"/>
+            <a:ext cx="3566160" cy="548640"/>
+          </a:xfrm>
+          <a:prstGeom prst="rect">
+            <a:avLst/>
+          </a:prstGeom>
+          <a:noFill/>
+          <a:ln/>
+        </p:spPr>
+        <p:txBody>
+          <a:bodyPr wrap="square" lIns="0" tIns="0" rIns="0" bIns="0" rtlCol="0" anchor="ctr"/>
+          <a:lstStyle/>
+          <a:p>
+            <a:pPr indent="0" marL="0">
+              <a:lnSpc>
+                <a:spcPct val="120000"/>
+              </a:lnSpc>
+              <a:buNone/>
+            </a:pPr>
+            <a:r>
+              <a:rPr lang="en-US" sz="1100" dirty="0">
+                <a:solidFill>
+                  <a:srgbClr val="5A6A78"/>
+                </a:solidFill>
+                <a:latin typeface="맑은 고딕" pitchFamily="34" charset="0"/>
+                <a:ea typeface="맑은 고딕" pitchFamily="34" charset="-122"/>
+                <a:cs typeface="맑은 고딕" pitchFamily="34" charset="-120"/>
+              </a:rPr>
+              <a:t>누가 언제 어떤 영상을</a:t>
+            </a:r>
+            <a:endParaRPr lang="en-US" sz="1100" dirty="0"/>
+          </a:p>
+          <a:p>
+            <a:pPr indent="0" marL="0">
+              <a:lnSpc>
+                <a:spcPct val="120000"/>
+              </a:lnSpc>
+              <a:buNone/>
+            </a:pPr>
+            <a:r>
+              <a:rPr lang="en-US" sz="1100" dirty="0">
+                <a:solidFill>
+                  <a:srgbClr val="5A6A78"/>
+                </a:solidFill>
+                <a:latin typeface="맑은 고딕" pitchFamily="34" charset="0"/>
+                <a:ea typeface="맑은 고딕" pitchFamily="34" charset="-122"/>
+                <a:cs typeface="맑은 고딕" pitchFamily="34" charset="-120"/>
+              </a:rPr>
+              <a:t>열람했는지 자동 기록</a:t>
+            </a:r>
+            <a:endParaRPr lang="en-US" sz="1100" dirty="0"/>
+          </a:p>
+        </p:txBody>
+      </p:sp>
+      <p:sp>
+        <p:nvSpPr>
+          <p:cNvPr id="13" name="Shape 11"/>
+          <p:cNvSpPr/>
+          <p:nvPr/>
+        </p:nvSpPr>
+        <p:spPr>
+          <a:xfrm>
+            <a:off x="4663440" y="2834640"/>
+            <a:ext cx="3931920" cy="1115568"/>
+          </a:xfrm>
+          <a:prstGeom prst="roundRect">
+            <a:avLst>
+              <a:gd name="adj" fmla="val 4918"/>
+            </a:avLst>
+          </a:prstGeom>
+          <a:solidFill>
+            <a:srgbClr val="F2F6F9"/>
+          </a:solidFill>
+          <a:ln w="12700">
+            <a:solidFill>
+              <a:srgbClr val="E3EAF0"/>
+            </a:solidFill>
+            <a:prstDash val="solid"/>
+          </a:ln>
+          <a:effectLst>
+            <a:outerShdw sx="100000" sy="100000" kx="0" ky="0" algn="bl" rotWithShape="0" blurRad="101600" dist="25400" dir="5400000">
+              <a:srgbClr val="0B1B2B">
+                <a:alpha val="12000"/>
+              </a:srgbClr>
+            </a:outerShdw>
+          </a:effectLst>
+        </p:spPr>
+      </p:sp>
+      <p:sp>
+        <p:nvSpPr>
+          <p:cNvPr id="14" name="Text 12"/>
+          <p:cNvSpPr txBox="1"/>
+          <p:nvPr/>
+        </p:nvSpPr>
+        <p:spPr>
+          <a:xfrm>
+            <a:off x="4864608" y="2962656"/>
+            <a:ext cx="3566160" cy="329184"/>
+          </a:xfrm>
+          <a:prstGeom prst="rect">
+            <a:avLst/>
+          </a:prstGeom>
+          <a:noFill/>
+          <a:ln/>
+        </p:spPr>
+        <p:txBody>
+          <a:bodyPr wrap="square" lIns="0" tIns="0" rIns="0" bIns="0" rtlCol="0" anchor="ctr"/>
+          <a:lstStyle/>
+          <a:p>
+            <a:pPr indent="0" marL="0">
+              <a:buNone/>
+            </a:pPr>
+            <a:r>
+              <a:rPr lang="en-US" sz="1500" b="1" dirty="0">
+                <a:solidFill>
+                  <a:srgbClr val="065A82"/>
+                </a:solidFill>
+                <a:latin typeface="맑은 고딕" pitchFamily="34" charset="0"/>
+                <a:ea typeface="맑은 고딕" pitchFamily="34" charset="-122"/>
+                <a:cs typeface="맑은 고딕" pitchFamily="34" charset="-120"/>
+              </a:rPr>
+              <a:t>도민 감시기구</a:t>
+            </a:r>
+            <a:endParaRPr lang="en-US" sz="1500" dirty="0"/>
+          </a:p>
+        </p:txBody>
+      </p:sp>
+      <p:sp>
+        <p:nvSpPr>
+          <p:cNvPr id="15" name="Text 13"/>
+          <p:cNvSpPr txBox="1"/>
+          <p:nvPr/>
+        </p:nvSpPr>
+        <p:spPr>
+          <a:xfrm>
+            <a:off x="4864608" y="3310128"/>
+            <a:ext cx="3566160" cy="548640"/>
+          </a:xfrm>
+          <a:prstGeom prst="rect">
+            <a:avLst/>
+          </a:prstGeom>
+          <a:noFill/>
+          <a:ln/>
+        </p:spPr>
+        <p:txBody>
+          <a:bodyPr wrap="square" lIns="0" tIns="0" rIns="0" bIns="0" rtlCol="0" anchor="ctr"/>
+          <a:lstStyle/>
+          <a:p>
+            <a:pPr indent="0" marL="0">
+              <a:lnSpc>
+                <a:spcPct val="120000"/>
+              </a:lnSpc>
+              <a:buNone/>
+            </a:pPr>
+            <a:r>
+              <a:rPr lang="en-US" sz="1100" dirty="0">
+                <a:solidFill>
+                  <a:srgbClr val="5A6A78"/>
+                </a:solidFill>
+                <a:latin typeface="맑은 고딕" pitchFamily="34" charset="0"/>
+                <a:ea typeface="맑은 고딕" pitchFamily="34" charset="-122"/>
+                <a:cs typeface="맑은 고딕" pitchFamily="34" charset="-120"/>
+              </a:rPr>
+              <a:t>운영 실태를 도민이</a:t>
+            </a:r>
+            <a:endParaRPr lang="en-US" sz="1100" dirty="0"/>
+          </a:p>
+          <a:p>
+            <a:pPr indent="0" marL="0">
+              <a:lnSpc>
+                <a:spcPct val="120000"/>
+              </a:lnSpc>
+              <a:buNone/>
+            </a:pPr>
+            <a:r>
+              <a:rPr lang="en-US" sz="1100" dirty="0">
+                <a:solidFill>
+                  <a:srgbClr val="5A6A78"/>
+                </a:solidFill>
+                <a:latin typeface="맑은 고딕" pitchFamily="34" charset="0"/>
+                <a:ea typeface="맑은 고딕" pitchFamily="34" charset="-122"/>
+                <a:cs typeface="맑은 고딕" pitchFamily="34" charset="-120"/>
+              </a:rPr>
+              <a:t>직접 점검한다</a:t>
+            </a:r>
+            <a:endParaRPr lang="en-US" sz="1100" dirty="0"/>
+          </a:p>
+        </p:txBody>
+      </p:sp>
+      <p:sp>
+        <p:nvSpPr>
+          <p:cNvPr id="16" name="Text 14"/>
+          <p:cNvSpPr txBox="1"/>
+          <p:nvPr/>
+        </p:nvSpPr>
+        <p:spPr>
+          <a:xfrm>
+            <a:off x="548640" y="4160520"/>
+            <a:ext cx="8046720" cy="292608"/>
+          </a:xfrm>
+          <a:prstGeom prst="rect">
+            <a:avLst/>
+          </a:prstGeom>
+          <a:noFill/>
+          <a:ln/>
+        </p:spPr>
+        <p:txBody>
+          <a:bodyPr wrap="square" lIns="0" tIns="0" rIns="0" bIns="0" rtlCol="0" anchor="ctr"/>
+          <a:lstStyle/>
+          <a:p>
+            <a:pPr indent="0" marL="0">
+              <a:buNone/>
+            </a:pPr>
+            <a:r>
+              <a:rPr lang="en-US" sz="1250" b="1" dirty="0">
+                <a:solidFill>
+                  <a:srgbClr val="10243A"/>
+                </a:solidFill>
+                <a:latin typeface="맑은 고딕" pitchFamily="34" charset="0"/>
+                <a:ea typeface="맑은 고딕" pitchFamily="34" charset="-122"/>
+                <a:cs typeface="맑은 고딕" pitchFamily="34" charset="-120"/>
+              </a:rPr>
+              <a:t>＋  민간 드론 인력 등록제 · 출동 계약제 — 자원봉사가 아니라 산업으로</a:t>
+            </a:r>
+            <a:endParaRPr lang="en-US" sz="1250" dirty="0"/>
+          </a:p>
+        </p:txBody>
+      </p:sp>
+      <p:sp>
+        <p:nvSpPr>
+          <p:cNvPr id="17" name="Text 15"/>
+          <p:cNvSpPr txBox="1"/>
+          <p:nvPr/>
+        </p:nvSpPr>
+        <p:spPr>
+          <a:xfrm>
+            <a:off x="548640" y="4480560"/>
+            <a:ext cx="8046720" cy="292608"/>
+          </a:xfrm>
+          <a:prstGeom prst="rect">
+            <a:avLst/>
+          </a:prstGeom>
+          <a:noFill/>
+          <a:ln/>
+        </p:spPr>
+        <p:txBody>
+          <a:bodyPr wrap="square" lIns="0" tIns="0" rIns="0" bIns="0" rtlCol="0" anchor="ctr"/>
+          <a:lstStyle/>
+          <a:p>
+            <a:pPr indent="0" marL="0">
+              <a:buNone/>
+            </a:pPr>
+            <a:r>
+              <a:rPr lang="en-US" sz="1250" b="1" dirty="0">
+                <a:solidFill>
+                  <a:srgbClr val="065A82"/>
+                </a:solidFill>
+                <a:latin typeface="맑은 고딕" pitchFamily="34" charset="0"/>
+                <a:ea typeface="맑은 고딕" pitchFamily="34" charset="-122"/>
+                <a:cs typeface="맑은 고딕" pitchFamily="34" charset="-120"/>
+              </a:rPr>
+              <a:t>＋  '제주 안전 대시보드' — 신고와 해제 건수, 초동 확인 시간을 도가 직접 공개</a:t>
+            </a:r>
+            <a:endParaRPr lang="en-US" sz="1250" dirty="0"/>
+          </a:p>
+        </p:txBody>
+      </p:sp>
+    </p:spTree>
+  </p:cSld>
+  <p:clrMapOvr>
+    <a:masterClrMapping/>
+  </p:clrMapOvr>
+</p:sld>
+</file>
+
+<file path=ppt/slides/slide13.xml><?xml version="1.0" encoding="utf-8"?>
+<p:sld xmlns:a="http://schemas.openxmlformats.org/drawingml/2006/main" xmlns:r="http://schemas.openxmlformats.org/officeDocument/2006/relationships" xmlns:p="http://schemas.openxmlformats.org/presentationml/2006/main">
+  <p:cSld name="Slide 13">
+    <p:spTree>
+      <p:nvGrpSpPr>
+        <p:cNvPr id="1" name=""/>
+        <p:cNvGrpSpPr/>
+        <p:nvPr/>
+      </p:nvGrpSpPr>
+      <p:grpSpPr>
+        <a:xfrm>
+          <a:off x="0" y="0"/>
+          <a:ext cx="0" cy="0"/>
+          <a:chOff x="0" y="0"/>
+          <a:chExt cx="0" cy="0"/>
+        </a:xfrm>
+      </p:grpSpPr>
+      <p:sp>
+        <p:nvSpPr>
+          <p:cNvPr id="2" name="Text 0"/>
+          <p:cNvSpPr txBox="1"/>
+          <p:nvPr/>
+        </p:nvSpPr>
+        <p:spPr>
+          <a:xfrm>
+            <a:off x="548640" y="384048"/>
+            <a:ext cx="8046720" cy="566928"/>
+          </a:xfrm>
+          <a:prstGeom prst="rect">
+            <a:avLst/>
+          </a:prstGeom>
+          <a:noFill/>
+          <a:ln/>
+        </p:spPr>
+        <p:txBody>
+          <a:bodyPr wrap="square" lIns="0" tIns="0" rIns="0" bIns="0" rtlCol="0" anchor="ctr"/>
+          <a:lstStyle/>
+          <a:p>
+            <a:pPr indent="0" marL="0">
+              <a:buNone/>
+            </a:pPr>
+            <a:r>
               <a:rPr lang="en-US" sz="3000" b="1" dirty="0">
                 <a:solidFill>
                   <a:srgbClr val="10243A"/>
@@ -4028,9 +5093,9 @@
 </p:sld>
 </file>
 
-<file path=ppt/slides/slide13.xml><?xml version="1.0" encoding="utf-8"?>
+<file path=ppt/slides/slide14.xml><?xml version="1.0" encoding="utf-8"?>
 <p:sld xmlns:a="http://schemas.openxmlformats.org/drawingml/2006/main" xmlns:r="http://schemas.openxmlformats.org/officeDocument/2006/relationships" xmlns:p="http://schemas.openxmlformats.org/presentationml/2006/main">
-  <p:cSld name="Slide 13">
+  <p:cSld name="Slide 14">
     <p:bg>
       <p:bgPr>
         <a:solidFill>
@@ -11043,7 +12108,7 @@
                 <a:ea typeface="맑은 고딕" pitchFamily="34" charset="-122"/>
                 <a:cs typeface="맑은 고딕" pitchFamily="34" charset="-120"/>
               </a:rPr>
-              <a:t>왜 제주에서 가능한가</a:t>
+              <a:t>새로운 실험이 아닙니다</a:t>
             </a:r>
             <a:endParaRPr lang="en-US" sz="3000" dirty="0"/>
           </a:p>
@@ -11082,7 +12147,7 @@
                 <a:ea typeface="맑은 고딕" pitchFamily="34" charset="-122"/>
                 <a:cs typeface="맑은 고딕" pitchFamily="34" charset="-120"/>
               </a:rPr>
-              <a:t>이 네 가지가 동시에 갖춰진 곳은 제주뿐입니다</a:t>
+              <a:t>이미 운영되고 있고, 국내에도 선례가 있습니다</a:t>
             </a:r>
             <a:endParaRPr lang="en-US" sz="1300" dirty="0"/>
           </a:p>
@@ -11096,12 +12161,12 @@
         </p:nvSpPr>
         <p:spPr>
           <a:xfrm>
-            <a:off x="548640" y="1572768"/>
-            <a:ext cx="1883664" cy="2331720"/>
+            <a:off x="548640" y="1554480"/>
+            <a:ext cx="2596896" cy="2286000"/>
           </a:xfrm>
           <a:prstGeom prst="roundRect">
             <a:avLst>
-              <a:gd name="adj" fmla="val 2913"/>
+              <a:gd name="adj" fmla="val 2400"/>
             </a:avLst>
           </a:prstGeom>
           <a:solidFill>
@@ -11130,24 +12195,63 @@
         </p:nvSpPr>
         <p:spPr>
           <a:xfrm>
-            <a:off x="694944" y="1783080"/>
-            <a:ext cx="1591056" cy="365760"/>
-          </a:xfrm>
-          <a:prstGeom prst="rect">
-            <a:avLst/>
-          </a:prstGeom>
-          <a:noFill/>
-          <a:ln/>
-        </p:spPr>
-        <p:txBody>
-          <a:bodyPr wrap="square" lIns="0" tIns="0" rIns="0" bIns="0" rtlCol="0" anchor="ctr"/>
-          <a:lstStyle/>
-          <a:p>
-            <a:pPr indent="0" marL="0">
-              <a:buNone/>
-            </a:pPr>
-            <a:r>
-              <a:rPr lang="en-US" sz="1700" b="1" dirty="0">
+            <a:off x="749808" y="1700784"/>
+            <a:ext cx="2194560" cy="329184"/>
+          </a:xfrm>
+          <a:prstGeom prst="rect">
+            <a:avLst/>
+          </a:prstGeom>
+          <a:noFill/>
+          <a:ln/>
+        </p:spPr>
+        <p:txBody>
+          <a:bodyPr wrap="square" lIns="0" tIns="0" rIns="0" bIns="0" rtlCol="0" anchor="ctr"/>
+          <a:lstStyle/>
+          <a:p>
+            <a:pPr indent="0" marL="0">
+              <a:buNone/>
+            </a:pPr>
+            <a:r>
+              <a:rPr lang="en-US" sz="1350" b="1" dirty="0">
+                <a:solidFill>
+                  <a:srgbClr val="10243A"/>
+                </a:solidFill>
+                <a:latin typeface="맑은 고딕" pitchFamily="34" charset="0"/>
+                <a:ea typeface="맑은 고딕" pitchFamily="34" charset="-122"/>
+                <a:cs typeface="맑은 고딕" pitchFamily="34" charset="-120"/>
+              </a:rPr>
+              <a:t>미국 출라비스타 경찰</a:t>
+            </a:r>
+            <a:endParaRPr lang="en-US" sz="1350" dirty="0"/>
+          </a:p>
+        </p:txBody>
+      </p:sp>
+      <p:sp>
+        <p:nvSpPr>
+          <p:cNvPr id="6" name="Text 4"/>
+          <p:cNvSpPr txBox="1"/>
+          <p:nvPr/>
+        </p:nvSpPr>
+        <p:spPr>
+          <a:xfrm>
+            <a:off x="749808" y="2029968"/>
+            <a:ext cx="2194560" cy="237744"/>
+          </a:xfrm>
+          <a:prstGeom prst="rect">
+            <a:avLst/>
+          </a:prstGeom>
+          <a:noFill/>
+          <a:ln/>
+        </p:spPr>
+        <p:txBody>
+          <a:bodyPr wrap="square" lIns="0" tIns="0" rIns="0" bIns="0" rtlCol="0" anchor="ctr"/>
+          <a:lstStyle/>
+          <a:p>
+            <a:pPr indent="0" marL="0">
+              <a:buNone/>
+            </a:pPr>
+            <a:r>
+              <a:rPr lang="en-US" sz="1000" dirty="0">
                 <a:solidFill>
                   <a:srgbClr val="065A82"/>
                 </a:solidFill>
@@ -11155,48 +12259,9 @@
                 <a:ea typeface="맑은 고딕" pitchFamily="34" charset="-122"/>
                 <a:cs typeface="맑은 고딕" pitchFamily="34" charset="-120"/>
               </a:rPr>
-              <a:t>전국 유일</a:t>
-            </a:r>
-            <a:endParaRPr lang="en-US" sz="1700" dirty="0"/>
-          </a:p>
-        </p:txBody>
-      </p:sp>
-      <p:sp>
-        <p:nvSpPr>
-          <p:cNvPr id="6" name="Text 4"/>
-          <p:cNvSpPr txBox="1"/>
-          <p:nvPr/>
-        </p:nvSpPr>
-        <p:spPr>
-          <a:xfrm>
-            <a:off x="694944" y="2212848"/>
-            <a:ext cx="1591056" cy="548640"/>
-          </a:xfrm>
-          <a:prstGeom prst="rect">
-            <a:avLst/>
-          </a:prstGeom>
-          <a:noFill/>
-          <a:ln/>
-        </p:spPr>
-        <p:txBody>
-          <a:bodyPr wrap="square" lIns="0" tIns="0" rIns="0" bIns="0" rtlCol="0" anchor="ctr"/>
-          <a:lstStyle/>
-          <a:p>
-            <a:pPr indent="0" marL="0">
-              <a:buNone/>
-            </a:pPr>
-            <a:r>
-              <a:rPr lang="en-US" sz="1300" b="1" dirty="0">
-                <a:solidFill>
-                  <a:srgbClr val="10243A"/>
-                </a:solidFill>
-                <a:latin typeface="맑은 고딕" pitchFamily="34" charset="0"/>
-                <a:ea typeface="맑은 고딕" pitchFamily="34" charset="-122"/>
-                <a:cs typeface="맑은 고딕" pitchFamily="34" charset="-120"/>
-              </a:rPr>
-              <a:t>자치경찰단 169명</a:t>
-            </a:r>
-            <a:endParaRPr lang="en-US" sz="1300" dirty="0"/>
+              <a:t>2018년~</a:t>
+            </a:r>
+            <a:endParaRPr lang="en-US" sz="1000" dirty="0"/>
           </a:p>
         </p:txBody>
       </p:sp>
@@ -11208,8 +12273,8 @@
         </p:nvSpPr>
         <p:spPr>
           <a:xfrm>
-            <a:off x="694944" y="2834640"/>
-            <a:ext cx="1591056" cy="868680"/>
+            <a:off x="749808" y="2340864"/>
+            <a:ext cx="2194560" cy="1280160"/>
           </a:xfrm>
           <a:prstGeom prst="rect">
             <a:avLst/>
@@ -11223,12 +12288,12 @@
           <a:p>
             <a:pPr indent="0" marL="0">
               <a:lnSpc>
-                <a:spcPct val="115000"/>
+                <a:spcPct val="125000"/>
               </a:lnSpc>
               <a:buNone/>
             </a:pPr>
             <a:r>
-              <a:rPr lang="en-US" sz="1000" dirty="0">
+              <a:rPr lang="en-US" sz="1050" dirty="0">
                 <a:solidFill>
                   <a:srgbClr val="5A6A78"/>
                 </a:solidFill>
@@ -11236,19 +12301,19 @@
                 <a:ea typeface="맑은 고딕" pitchFamily="34" charset="-122"/>
                 <a:cs typeface="맑은 고딕" pitchFamily="34" charset="-120"/>
               </a:rPr>
-              <a:t>제주특별법 제88조</a:t>
-            </a:r>
-            <a:endParaRPr lang="en-US" sz="1000" dirty="0"/>
+              <a:t>누적 출동 25,000건 이상</a:t>
+            </a:r>
+            <a:endParaRPr lang="en-US" sz="1050" dirty="0"/>
           </a:p>
           <a:p>
             <a:pPr indent="0" marL="0">
               <a:lnSpc>
-                <a:spcPct val="115000"/>
+                <a:spcPct val="125000"/>
               </a:lnSpc>
               <a:buNone/>
             </a:pPr>
             <a:r>
-              <a:rPr lang="en-US" sz="1000" dirty="0">
+              <a:rPr lang="en-US" sz="1050" dirty="0">
                 <a:solidFill>
                   <a:srgbClr val="5A6A78"/>
                 </a:solidFill>
@@ -11256,9 +12321,49 @@
                 <a:ea typeface="맑은 고딕" pitchFamily="34" charset="-122"/>
                 <a:cs typeface="맑은 고딕" pitchFamily="34" charset="-120"/>
               </a:rPr>
-              <a:t>도지사 소속</a:t>
-            </a:r>
-            <a:endParaRPr lang="en-US" sz="1000" dirty="0"/>
+              <a:t>그중 17,170건 드론 선도착</a:t>
+            </a:r>
+            <a:endParaRPr lang="en-US" sz="1050" dirty="0"/>
+          </a:p>
+          <a:p>
+            <a:pPr indent="0" marL="0">
+              <a:lnSpc>
+                <a:spcPct val="125000"/>
+              </a:lnSpc>
+              <a:buNone/>
+            </a:pPr>
+            <a:r>
+              <a:rPr lang="en-US" sz="1050" dirty="0">
+                <a:solidFill>
+                  <a:srgbClr val="5A6A78"/>
+                </a:solidFill>
+                <a:latin typeface="맑은 고딕" pitchFamily="34" charset="0"/>
+                <a:ea typeface="맑은 고딕" pitchFamily="34" charset="-122"/>
+                <a:cs typeface="맑은 고딕" pitchFamily="34" charset="-120"/>
+              </a:rPr>
+              <a:t>평균 3.5분 (순찰차 8분)</a:t>
+            </a:r>
+            <a:endParaRPr lang="en-US" sz="1050" dirty="0"/>
+          </a:p>
+          <a:p>
+            <a:pPr indent="0" marL="0">
+              <a:lnSpc>
+                <a:spcPct val="125000"/>
+              </a:lnSpc>
+              <a:buNone/>
+            </a:pPr>
+            <a:r>
+              <a:rPr lang="en-US" sz="1050" dirty="0">
+                <a:solidFill>
+                  <a:srgbClr val="5A6A78"/>
+                </a:solidFill>
+                <a:latin typeface="맑은 고딕" pitchFamily="34" charset="0"/>
+                <a:ea typeface="맑은 고딕" pitchFamily="34" charset="-122"/>
+                <a:cs typeface="맑은 고딕" pitchFamily="34" charset="-120"/>
+              </a:rPr>
+              <a:t>OECD 혁신사례 등재</a:t>
+            </a:r>
+            <a:endParaRPr lang="en-US" sz="1050" dirty="0"/>
           </a:p>
         </p:txBody>
       </p:sp>
@@ -11270,12 +12375,12 @@
         </p:nvSpPr>
         <p:spPr>
           <a:xfrm>
-            <a:off x="2615184" y="1572768"/>
-            <a:ext cx="1883664" cy="2331720"/>
+            <a:off x="3273552" y="1554480"/>
+            <a:ext cx="2596896" cy="2286000"/>
           </a:xfrm>
           <a:prstGeom prst="roundRect">
             <a:avLst>
-              <a:gd name="adj" fmla="val 2913"/>
+              <a:gd name="adj" fmla="val 2400"/>
             </a:avLst>
           </a:prstGeom>
           <a:solidFill>
@@ -11304,24 +12409,63 @@
         </p:nvSpPr>
         <p:spPr>
           <a:xfrm>
-            <a:off x="2761488" y="1783080"/>
-            <a:ext cx="1591056" cy="365760"/>
-          </a:xfrm>
-          <a:prstGeom prst="rect">
-            <a:avLst/>
-          </a:prstGeom>
-          <a:noFill/>
-          <a:ln/>
-        </p:spPr>
-        <p:txBody>
-          <a:bodyPr wrap="square" lIns="0" tIns="0" rIns="0" bIns="0" rtlCol="0" anchor="ctr"/>
-          <a:lstStyle/>
-          <a:p>
-            <a:pPr indent="0" marL="0">
-              <a:buNone/>
-            </a:pPr>
-            <a:r>
-              <a:rPr lang="en-US" sz="1700" b="1" dirty="0">
+            <a:off x="3474720" y="1700784"/>
+            <a:ext cx="2194560" cy="329184"/>
+          </a:xfrm>
+          <a:prstGeom prst="rect">
+            <a:avLst/>
+          </a:prstGeom>
+          <a:noFill/>
+          <a:ln/>
+        </p:spPr>
+        <p:txBody>
+          <a:bodyPr wrap="square" lIns="0" tIns="0" rIns="0" bIns="0" rtlCol="0" anchor="ctr"/>
+          <a:lstStyle/>
+          <a:p>
+            <a:pPr indent="0" marL="0">
+              <a:buNone/>
+            </a:pPr>
+            <a:r>
+              <a:rPr lang="en-US" sz="1350" b="1" dirty="0">
+                <a:solidFill>
+                  <a:srgbClr val="10243A"/>
+                </a:solidFill>
+                <a:latin typeface="맑은 고딕" pitchFamily="34" charset="0"/>
+                <a:ea typeface="맑은 고딕" pitchFamily="34" charset="-122"/>
+                <a:cs typeface="맑은 고딕" pitchFamily="34" charset="-120"/>
+              </a:rPr>
+              <a:t>전남경찰청 드론팀</a:t>
+            </a:r>
+            <a:endParaRPr lang="en-US" sz="1350" dirty="0"/>
+          </a:p>
+        </p:txBody>
+      </p:sp>
+      <p:sp>
+        <p:nvSpPr>
+          <p:cNvPr id="10" name="Text 8"/>
+          <p:cNvSpPr txBox="1"/>
+          <p:nvPr/>
+        </p:nvSpPr>
+        <p:spPr>
+          <a:xfrm>
+            <a:off x="3474720" y="2029968"/>
+            <a:ext cx="2194560" cy="237744"/>
+          </a:xfrm>
+          <a:prstGeom prst="rect">
+            <a:avLst/>
+          </a:prstGeom>
+          <a:noFill/>
+          <a:ln/>
+        </p:spPr>
+        <p:txBody>
+          <a:bodyPr wrap="square" lIns="0" tIns="0" rIns="0" bIns="0" rtlCol="0" anchor="ctr"/>
+          <a:lstStyle/>
+          <a:p>
+            <a:pPr indent="0" marL="0">
+              <a:buNone/>
+            </a:pPr>
+            <a:r>
+              <a:rPr lang="en-US" sz="1000" dirty="0">
                 <a:solidFill>
                   <a:srgbClr val="065A82"/>
                 </a:solidFill>
@@ -11329,48 +12473,9 @@
                 <a:ea typeface="맑은 고딕" pitchFamily="34" charset="-122"/>
                 <a:cs typeface="맑은 고딕" pitchFamily="34" charset="-120"/>
               </a:rPr>
-              <a:t>전국 최초</a:t>
-            </a:r>
-            <a:endParaRPr lang="en-US" sz="1700" dirty="0"/>
-          </a:p>
-        </p:txBody>
-      </p:sp>
-      <p:sp>
-        <p:nvSpPr>
-          <p:cNvPr id="10" name="Text 8"/>
-          <p:cNvSpPr txBox="1"/>
-          <p:nvPr/>
-        </p:nvSpPr>
-        <p:spPr>
-          <a:xfrm>
-            <a:off x="2761488" y="2212848"/>
-            <a:ext cx="1591056" cy="548640"/>
-          </a:xfrm>
-          <a:prstGeom prst="rect">
-            <a:avLst/>
-          </a:prstGeom>
-          <a:noFill/>
-          <a:ln/>
-        </p:spPr>
-        <p:txBody>
-          <a:bodyPr wrap="square" lIns="0" tIns="0" rIns="0" bIns="0" rtlCol="0" anchor="ctr"/>
-          <a:lstStyle/>
-          <a:p>
-            <a:pPr indent="0" marL="0">
-              <a:buNone/>
-            </a:pPr>
-            <a:r>
-              <a:rPr lang="en-US" sz="1300" b="1" dirty="0">
-                <a:solidFill>
-                  <a:srgbClr val="10243A"/>
-                </a:solidFill>
-                <a:latin typeface="맑은 고딕" pitchFamily="34" charset="0"/>
-                <a:ea typeface="맑은 고딕" pitchFamily="34" charset="-122"/>
-                <a:cs typeface="맑은 고딕" pitchFamily="34" charset="-120"/>
-              </a:rPr>
-              <a:t>AI 치안드론</a:t>
-            </a:r>
-            <a:endParaRPr lang="en-US" sz="1300" dirty="0"/>
+              <a:t>2026. 2. 출범</a:t>
+            </a:r>
+            <a:endParaRPr lang="en-US" sz="1000" dirty="0"/>
           </a:p>
         </p:txBody>
       </p:sp>
@@ -11382,8 +12487,8 @@
         </p:nvSpPr>
         <p:spPr>
           <a:xfrm>
-            <a:off x="2761488" y="2834640"/>
-            <a:ext cx="1591056" cy="868680"/>
+            <a:off x="3474720" y="2340864"/>
+            <a:ext cx="2194560" cy="1280160"/>
           </a:xfrm>
           <a:prstGeom prst="rect">
             <a:avLst/>
@@ -11397,12 +12502,12 @@
           <a:p>
             <a:pPr indent="0" marL="0">
               <a:lnSpc>
-                <a:spcPct val="115000"/>
+                <a:spcPct val="125000"/>
               </a:lnSpc>
               <a:buNone/>
             </a:pPr>
             <a:r>
-              <a:rPr lang="en-US" sz="1000" dirty="0">
+              <a:rPr lang="en-US" sz="1050" dirty="0">
                 <a:solidFill>
                   <a:srgbClr val="5A6A78"/>
                 </a:solidFill>
@@ -11410,19 +12515,19 @@
                 <a:ea typeface="맑은 고딕" pitchFamily="34" charset="-122"/>
                 <a:cs typeface="맑은 고딕" pitchFamily="34" charset="-120"/>
               </a:rPr>
-              <a:t>국비 8억 · 도비 2억</a:t>
-            </a:r>
-            <a:endParaRPr lang="en-US" sz="1000" dirty="0"/>
+              <a:t>지상·공중 입체순찰</a:t>
+            </a:r>
+            <a:endParaRPr lang="en-US" sz="1050" dirty="0"/>
           </a:p>
           <a:p>
             <a:pPr indent="0" marL="0">
               <a:lnSpc>
-                <a:spcPct val="115000"/>
+                <a:spcPct val="125000"/>
               </a:lnSpc>
               <a:buNone/>
             </a:pPr>
             <a:r>
-              <a:rPr lang="en-US" sz="1000" dirty="0">
+              <a:rPr lang="en-US" sz="1050" dirty="0">
                 <a:solidFill>
                   <a:srgbClr val="5A6A78"/>
                 </a:solidFill>
@@ -11430,9 +12535,49 @@
                 <a:ea typeface="맑은 고딕" pitchFamily="34" charset="-122"/>
                 <a:cs typeface="맑은 고딕" pitchFamily="34" charset="-120"/>
               </a:rPr>
-              <a:t>2027년 현장 투입</a:t>
-            </a:r>
-            <a:endParaRPr lang="en-US" sz="1000" dirty="0"/>
+              <a:t>5월 담양 실종자를 CCTV로</a:t>
+            </a:r>
+            <a:endParaRPr lang="en-US" sz="1050" dirty="0"/>
+          </a:p>
+          <a:p>
+            <a:pPr indent="0" marL="0">
+              <a:lnSpc>
+                <a:spcPct val="125000"/>
+              </a:lnSpc>
+              <a:buNone/>
+            </a:pPr>
+            <a:r>
+              <a:rPr lang="en-US" sz="1050" dirty="0">
+                <a:solidFill>
+                  <a:srgbClr val="5A6A78"/>
+                </a:solidFill>
+                <a:latin typeface="맑은 고딕" pitchFamily="34" charset="0"/>
+                <a:ea typeface="맑은 고딕" pitchFamily="34" charset="-122"/>
+                <a:cs typeface="맑은 고딕" pitchFamily="34" charset="-120"/>
+              </a:rPr>
+              <a:t>동선 파악 후 드론 수색으로</a:t>
+            </a:r>
+            <a:endParaRPr lang="en-US" sz="1050" dirty="0"/>
+          </a:p>
+          <a:p>
+            <a:pPr indent="0" marL="0">
+              <a:lnSpc>
+                <a:spcPct val="125000"/>
+              </a:lnSpc>
+              <a:buNone/>
+            </a:pPr>
+            <a:r>
+              <a:rPr lang="en-US" sz="1050" dirty="0">
+                <a:solidFill>
+                  <a:srgbClr val="5A6A78"/>
+                </a:solidFill>
+                <a:latin typeface="맑은 고딕" pitchFamily="34" charset="0"/>
+                <a:ea typeface="맑은 고딕" pitchFamily="34" charset="-122"/>
+                <a:cs typeface="맑은 고딕" pitchFamily="34" charset="-120"/>
+              </a:rPr>
+              <a:t>담양호 상류에서 발견</a:t>
+            </a:r>
+            <a:endParaRPr lang="en-US" sz="1050" dirty="0"/>
           </a:p>
         </p:txBody>
       </p:sp>
@@ -11444,12 +12589,12 @@
         </p:nvSpPr>
         <p:spPr>
           <a:xfrm>
-            <a:off x="4681728" y="1572768"/>
-            <a:ext cx="1883664" cy="2331720"/>
+            <a:off x="5998464" y="1554480"/>
+            <a:ext cx="2596896" cy="2286000"/>
           </a:xfrm>
           <a:prstGeom prst="roundRect">
             <a:avLst>
-              <a:gd name="adj" fmla="val 2913"/>
+              <a:gd name="adj" fmla="val 2400"/>
             </a:avLst>
           </a:prstGeom>
           <a:solidFill>
@@ -11478,24 +12623,63 @@
         </p:nvSpPr>
         <p:spPr>
           <a:xfrm>
-            <a:off x="4828032" y="1783080"/>
-            <a:ext cx="1591056" cy="365760"/>
-          </a:xfrm>
-          <a:prstGeom prst="rect">
-            <a:avLst/>
-          </a:prstGeom>
-          <a:noFill/>
-          <a:ln/>
-        </p:spPr>
-        <p:txBody>
-          <a:bodyPr wrap="square" lIns="0" tIns="0" rIns="0" bIns="0" rtlCol="0" anchor="ctr"/>
-          <a:lstStyle/>
-          <a:p>
-            <a:pPr indent="0" marL="0">
-              <a:buNone/>
-            </a:pPr>
-            <a:r>
-              <a:rPr lang="en-US" sz="1700" b="1" dirty="0">
+            <a:off x="6199632" y="1700784"/>
+            <a:ext cx="2194560" cy="329184"/>
+          </a:xfrm>
+          <a:prstGeom prst="rect">
+            <a:avLst/>
+          </a:prstGeom>
+          <a:noFill/>
+          <a:ln/>
+        </p:spPr>
+        <p:txBody>
+          <a:bodyPr wrap="square" lIns="0" tIns="0" rIns="0" bIns="0" rtlCol="0" anchor="ctr"/>
+          <a:lstStyle/>
+          <a:p>
+            <a:pPr indent="0" marL="0">
+              <a:buNone/>
+            </a:pPr>
+            <a:r>
+              <a:rPr lang="en-US" sz="1350" b="1" dirty="0">
+                <a:solidFill>
+                  <a:srgbClr val="10243A"/>
+                </a:solidFill>
+                <a:latin typeface="맑은 고딕" pitchFamily="34" charset="0"/>
+                <a:ea typeface="맑은 고딕" pitchFamily="34" charset="-122"/>
+                <a:cs typeface="맑은 고딕" pitchFamily="34" charset="-120"/>
+              </a:rPr>
+              <a:t>일본 지바현 이치노미야초</a:t>
+            </a:r>
+            <a:endParaRPr lang="en-US" sz="1350" dirty="0"/>
+          </a:p>
+        </p:txBody>
+      </p:sp>
+      <p:sp>
+        <p:nvSpPr>
+          <p:cNvPr id="14" name="Text 12"/>
+          <p:cNvSpPr txBox="1"/>
+          <p:nvPr/>
+        </p:nvSpPr>
+        <p:spPr>
+          <a:xfrm>
+            <a:off x="6199632" y="2029968"/>
+            <a:ext cx="2194560" cy="237744"/>
+          </a:xfrm>
+          <a:prstGeom prst="rect">
+            <a:avLst/>
+          </a:prstGeom>
+          <a:noFill/>
+          <a:ln/>
+        </p:spPr>
+        <p:txBody>
+          <a:bodyPr wrap="square" lIns="0" tIns="0" rIns="0" bIns="0" rtlCol="0" anchor="ctr"/>
+          <a:lstStyle/>
+          <a:p>
+            <a:pPr indent="0" marL="0">
+              <a:buNone/>
+            </a:pPr>
+            <a:r>
+              <a:rPr lang="en-US" sz="1000" dirty="0">
                 <a:solidFill>
                   <a:srgbClr val="065A82"/>
                 </a:solidFill>
@@ -11503,48 +12687,9 @@
                 <a:ea typeface="맑은 고딕" pitchFamily="34" charset="-122"/>
                 <a:cs typeface="맑은 고딕" pitchFamily="34" charset="-120"/>
               </a:rPr>
-              <a:t>전국 최대</a:t>
-            </a:r>
-            <a:endParaRPr lang="en-US" sz="1700" dirty="0"/>
-          </a:p>
-        </p:txBody>
-      </p:sp>
-      <p:sp>
-        <p:nvSpPr>
-          <p:cNvPr id="14" name="Text 12"/>
-          <p:cNvSpPr txBox="1"/>
-          <p:nvPr/>
-        </p:nvSpPr>
-        <p:spPr>
-          <a:xfrm>
-            <a:off x="4828032" y="2212848"/>
-            <a:ext cx="1591056" cy="548640"/>
-          </a:xfrm>
-          <a:prstGeom prst="rect">
-            <a:avLst/>
-          </a:prstGeom>
-          <a:noFill/>
-          <a:ln/>
-        </p:spPr>
-        <p:txBody>
-          <a:bodyPr wrap="square" lIns="0" tIns="0" rIns="0" bIns="0" rtlCol="0" anchor="ctr"/>
-          <a:lstStyle/>
-          <a:p>
-            <a:pPr indent="0" marL="0">
-              <a:buNone/>
-            </a:pPr>
-            <a:r>
-              <a:rPr lang="en-US" sz="1300" b="1" dirty="0">
-                <a:solidFill>
-                  <a:srgbClr val="10243A"/>
-                </a:solidFill>
-                <a:latin typeface="맑은 고딕" pitchFamily="34" charset="0"/>
-                <a:ea typeface="맑은 고딕" pitchFamily="34" charset="-122"/>
-                <a:cs typeface="맑은 고딕" pitchFamily="34" charset="-120"/>
-              </a:rPr>
-              <a:t>드론특별자유화구역</a:t>
-            </a:r>
-            <a:endParaRPr lang="en-US" sz="1300" dirty="0"/>
+              <a:t>운영 중</a:t>
+            </a:r>
+            <a:endParaRPr lang="en-US" sz="1000" dirty="0"/>
           </a:p>
         </p:txBody>
       </p:sp>
@@ -11556,8 +12701,8 @@
         </p:nvSpPr>
         <p:spPr>
           <a:xfrm>
-            <a:off x="4828032" y="2834640"/>
-            <a:ext cx="1591056" cy="868680"/>
+            <a:off x="6199632" y="2340864"/>
+            <a:ext cx="2194560" cy="1280160"/>
           </a:xfrm>
           <a:prstGeom prst="rect">
             <a:avLst/>
@@ -11571,12 +12716,12 @@
           <a:p>
             <a:pPr indent="0" marL="0">
               <a:lnSpc>
-                <a:spcPct val="115000"/>
+                <a:spcPct val="125000"/>
               </a:lnSpc>
               <a:buNone/>
             </a:pPr>
             <a:r>
-              <a:rPr lang="en-US" sz="1000" dirty="0">
+              <a:rPr lang="en-US" sz="1050" dirty="0">
                 <a:solidFill>
                   <a:srgbClr val="5A6A78"/>
                 </a:solidFill>
@@ -11584,19 +12729,19 @@
                 <a:ea typeface="맑은 고딕" pitchFamily="34" charset="-122"/>
                 <a:cs typeface="맑은 고딕" pitchFamily="34" charset="-120"/>
               </a:rPr>
-              <a:t>1,283㎢</a:t>
-            </a:r>
-            <a:endParaRPr lang="en-US" sz="1000" dirty="0"/>
+              <a:t>쓰나미 경보 수신 시</a:t>
+            </a:r>
+            <a:endParaRPr lang="en-US" sz="1050" dirty="0"/>
           </a:p>
           <a:p>
             <a:pPr indent="0" marL="0">
               <a:lnSpc>
-                <a:spcPct val="115000"/>
+                <a:spcPct val="125000"/>
               </a:lnSpc>
               <a:buNone/>
             </a:pPr>
             <a:r>
-              <a:rPr lang="en-US" sz="1000" dirty="0">
+              <a:rPr lang="en-US" sz="1050" dirty="0">
                 <a:solidFill>
                   <a:srgbClr val="5A6A78"/>
                 </a:solidFill>
@@ -11604,9 +12749,49 @@
                 <a:ea typeface="맑은 고딕" pitchFamily="34" charset="-122"/>
                 <a:cs typeface="맑은 고딕" pitchFamily="34" charset="-120"/>
               </a:rPr>
-              <a:t>3차 연장(2027.6) 신청</a:t>
-            </a:r>
-            <a:endParaRPr lang="en-US" sz="1000" dirty="0"/>
+              <a:t>드론이 자동 이륙</a:t>
+            </a:r>
+            <a:endParaRPr lang="en-US" sz="1050" dirty="0"/>
+          </a:p>
+          <a:p>
+            <a:pPr indent="0" marL="0">
+              <a:lnSpc>
+                <a:spcPct val="125000"/>
+              </a:lnSpc>
+              <a:buNone/>
+            </a:pPr>
+            <a:r>
+              <a:rPr lang="en-US" sz="1050" dirty="0">
+                <a:solidFill>
+                  <a:srgbClr val="5A6A78"/>
+                </a:solidFill>
+                <a:latin typeface="맑은 고딕" pitchFamily="34" charset="0"/>
+                <a:ea typeface="맑은 고딕" pitchFamily="34" charset="-122"/>
+                <a:cs typeface="맑은 고딕" pitchFamily="34" charset="-120"/>
+              </a:rPr>
+              <a:t>해안 대피 방송 + 촬영</a:t>
+            </a:r>
+            <a:endParaRPr lang="en-US" sz="1050" dirty="0"/>
+          </a:p>
+          <a:p>
+            <a:pPr indent="0" marL="0">
+              <a:lnSpc>
+                <a:spcPct val="125000"/>
+              </a:lnSpc>
+              <a:buNone/>
+            </a:pPr>
+            <a:r>
+              <a:rPr lang="en-US" sz="1050" dirty="0">
+                <a:solidFill>
+                  <a:srgbClr val="5A6A78"/>
+                </a:solidFill>
+                <a:latin typeface="맑은 고딕" pitchFamily="34" charset="0"/>
+                <a:ea typeface="맑은 고딕" pitchFamily="34" charset="-122"/>
+                <a:cs typeface="맑은 고딕" pitchFamily="34" charset="-120"/>
+              </a:rPr>
+              <a:t>방재 부서가 운영</a:t>
+            </a:r>
+            <a:endParaRPr lang="en-US" sz="1050" dirty="0"/>
           </a:p>
         </p:txBody>
       </p:sp>
@@ -11618,12 +12803,12 @@
         </p:nvSpPr>
         <p:spPr>
           <a:xfrm>
-            <a:off x="6748272" y="1572768"/>
-            <a:ext cx="1883664" cy="2331720"/>
+            <a:off x="548640" y="4005072"/>
+            <a:ext cx="8046720" cy="603504"/>
           </a:xfrm>
           <a:prstGeom prst="roundRect">
             <a:avLst>
-              <a:gd name="adj" fmla="val 2913"/>
+              <a:gd name="adj" fmla="val 9091"/>
             </a:avLst>
           </a:prstGeom>
           <a:solidFill>
@@ -11635,13 +12820,6 @@
             </a:solidFill>
             <a:prstDash val="solid"/>
           </a:ln>
-          <a:effectLst>
-            <a:outerShdw sx="100000" sy="100000" kx="0" ky="0" algn="bl" rotWithShape="0" blurRad="101600" dist="25400" dir="5400000">
-              <a:srgbClr val="0B1B2B">
-                <a:alpha val="12000"/>
-              </a:srgbClr>
-            </a:outerShdw>
-          </a:effectLst>
         </p:spPr>
       </p:sp>
       <p:sp>
@@ -11652,24 +12830,63 @@
         </p:nvSpPr>
         <p:spPr>
           <a:xfrm>
-            <a:off x="6894576" y="1783080"/>
-            <a:ext cx="1591056" cy="365760"/>
-          </a:xfrm>
-          <a:prstGeom prst="rect">
-            <a:avLst/>
-          </a:prstGeom>
-          <a:noFill/>
-          <a:ln/>
-        </p:spPr>
-        <p:txBody>
-          <a:bodyPr wrap="square" lIns="0" tIns="0" rIns="0" bIns="0" rtlCol="0" anchor="ctr"/>
-          <a:lstStyle/>
-          <a:p>
-            <a:pPr indent="0" marL="0">
-              <a:buNone/>
-            </a:pPr>
-            <a:r>
-              <a:rPr lang="en-US" sz="1700" b="1" dirty="0">
+            <a:off x="731520" y="4005072"/>
+            <a:ext cx="7680960" cy="301752"/>
+          </a:xfrm>
+          <a:prstGeom prst="rect">
+            <a:avLst/>
+          </a:prstGeom>
+          <a:noFill/>
+          <a:ln/>
+        </p:spPr>
+        <p:txBody>
+          <a:bodyPr wrap="square" lIns="0" tIns="0" rIns="0" bIns="0" rtlCol="0" anchor="ctr"/>
+          <a:lstStyle/>
+          <a:p>
+            <a:pPr indent="0" marL="0">
+              <a:buNone/>
+            </a:pPr>
+            <a:r>
+              <a:rPr lang="en-US" sz="1150" dirty="0">
+                <a:solidFill>
+                  <a:srgbClr val="10243A"/>
+                </a:solidFill>
+                <a:latin typeface="맑은 고딕" pitchFamily="34" charset="0"/>
+                <a:ea typeface="맑은 고딕" pitchFamily="34" charset="-122"/>
+                <a:cs typeface="맑은 고딕" pitchFamily="34" charset="-120"/>
+              </a:rPr>
+              <a:t>다만 과장하지 않겠습니다 — 연구는 "드론 투입 시 약 3분 단축, 전체 발견 성공률은 유사"라고 말합니다.</a:t>
+            </a:r>
+            <a:endParaRPr lang="en-US" sz="1150" dirty="0"/>
+          </a:p>
+        </p:txBody>
+      </p:sp>
+      <p:sp>
+        <p:nvSpPr>
+          <p:cNvPr id="18" name="Text 16"/>
+          <p:cNvSpPr txBox="1"/>
+          <p:nvPr/>
+        </p:nvSpPr>
+        <p:spPr>
+          <a:xfrm>
+            <a:off x="731520" y="4279392"/>
+            <a:ext cx="7680960" cy="301752"/>
+          </a:xfrm>
+          <a:prstGeom prst="rect">
+            <a:avLst/>
+          </a:prstGeom>
+          <a:noFill/>
+          <a:ln/>
+        </p:spPr>
+        <p:txBody>
+          <a:bodyPr wrap="square" lIns="0" tIns="0" rIns="0" bIns="0" rtlCol="0" anchor="ctr"/>
+          <a:lstStyle/>
+          <a:p>
+            <a:pPr indent="0" marL="0">
+              <a:buNone/>
+            </a:pPr>
+            <a:r>
+              <a:rPr lang="en-US" sz="1150" b="1" dirty="0">
                 <a:solidFill>
                   <a:srgbClr val="065A82"/>
                 </a:solidFill>
@@ -11677,48 +12894,9 @@
                 <a:ea typeface="맑은 고딕" pitchFamily="34" charset="-122"/>
                 <a:cs typeface="맑은 고딕" pitchFamily="34" charset="-120"/>
               </a:rPr>
-              <a:t>1,543명</a:t>
-            </a:r>
-            <a:endParaRPr lang="en-US" sz="1700" dirty="0"/>
-          </a:p>
-        </p:txBody>
-      </p:sp>
-      <p:sp>
-        <p:nvSpPr>
-          <p:cNvPr id="18" name="Text 16"/>
-          <p:cNvSpPr txBox="1"/>
-          <p:nvPr/>
-        </p:nvSpPr>
-        <p:spPr>
-          <a:xfrm>
-            <a:off x="6894576" y="2212848"/>
-            <a:ext cx="1591056" cy="548640"/>
-          </a:xfrm>
-          <a:prstGeom prst="rect">
-            <a:avLst/>
-          </a:prstGeom>
-          <a:noFill/>
-          <a:ln/>
-        </p:spPr>
-        <p:txBody>
-          <a:bodyPr wrap="square" lIns="0" tIns="0" rIns="0" bIns="0" rtlCol="0" anchor="ctr"/>
-          <a:lstStyle/>
-          <a:p>
-            <a:pPr indent="0" marL="0">
-              <a:buNone/>
-            </a:pPr>
-            <a:r>
-              <a:rPr lang="en-US" sz="1300" b="1" dirty="0">
-                <a:solidFill>
-                  <a:srgbClr val="10243A"/>
-                </a:solidFill>
-                <a:latin typeface="맑은 고딕" pitchFamily="34" charset="0"/>
-                <a:ea typeface="맑은 고딕" pitchFamily="34" charset="-122"/>
-                <a:cs typeface="맑은 고딕" pitchFamily="34" charset="-120"/>
-              </a:rPr>
-              <a:t>민관 공동체 치안망</a:t>
-            </a:r>
-            <a:endParaRPr lang="en-US" sz="1300" dirty="0"/>
+              <a:t>그리고 그 연구의 결론은 "성패는 기체가 아니라 훈련과 절차에 달려 있다"는 것입니다.</a:t>
+            </a:r>
+            <a:endParaRPr lang="en-US" sz="1150" dirty="0"/>
           </a:p>
         </p:txBody>
       </p:sp>
@@ -11730,96 +12908,34 @@
         </p:nvSpPr>
         <p:spPr>
           <a:xfrm>
-            <a:off x="6894576" y="2834640"/>
-            <a:ext cx="1591056" cy="868680"/>
-          </a:xfrm>
-          <a:prstGeom prst="rect">
-            <a:avLst/>
-          </a:prstGeom>
-          <a:noFill/>
-          <a:ln/>
-        </p:spPr>
-        <p:txBody>
-          <a:bodyPr wrap="square" lIns="0" tIns="0" rIns="0" bIns="0" rtlCol="0" anchor="ctr"/>
-          <a:lstStyle/>
-          <a:p>
-            <a:pPr indent="0" marL="0">
-              <a:lnSpc>
-                <a:spcPct val="115000"/>
-              </a:lnSpc>
-              <a:buNone/>
-            </a:pPr>
-            <a:r>
-              <a:rPr lang="en-US" sz="1000" dirty="0">
-                <a:solidFill>
-                  <a:srgbClr val="5A6A78"/>
-                </a:solidFill>
-                <a:latin typeface="맑은 고딕" pitchFamily="34" charset="0"/>
-                <a:ea typeface="맑은 고딕" pitchFamily="34" charset="-122"/>
-                <a:cs typeface="맑은 고딕" pitchFamily="34" charset="-120"/>
-              </a:rPr>
-              <a:t>주민자치경찰대 · 시니어</a:t>
-            </a:r>
-            <a:endParaRPr lang="en-US" sz="1000" dirty="0"/>
-          </a:p>
-          <a:p>
-            <a:pPr indent="0" marL="0">
-              <a:lnSpc>
-                <a:spcPct val="115000"/>
-              </a:lnSpc>
-              <a:buNone/>
-            </a:pPr>
-            <a:r>
-              <a:rPr lang="en-US" sz="1000" dirty="0">
-                <a:solidFill>
-                  <a:srgbClr val="5A6A78"/>
-                </a:solidFill>
-                <a:latin typeface="맑은 고딕" pitchFamily="34" charset="0"/>
-                <a:ea typeface="맑은 고딕" pitchFamily="34" charset="-122"/>
-                <a:cs typeface="맑은 고딕" pitchFamily="34" charset="-120"/>
-              </a:rPr>
-              <a:t>민간경비 · 민간드론</a:t>
-            </a:r>
-            <a:endParaRPr lang="en-US" sz="1000" dirty="0"/>
-          </a:p>
-        </p:txBody>
-      </p:sp>
-      <p:sp>
-        <p:nvSpPr>
-          <p:cNvPr id="20" name="Text 18"/>
-          <p:cNvSpPr txBox="1"/>
-          <p:nvPr/>
-        </p:nvSpPr>
-        <p:spPr>
-          <a:xfrm>
-            <a:off x="548640" y="4407408"/>
-            <a:ext cx="8046720" cy="365760"/>
-          </a:xfrm>
-          <a:prstGeom prst="rect">
-            <a:avLst/>
-          </a:prstGeom>
-          <a:noFill/>
-          <a:ln/>
-        </p:spPr>
-        <p:txBody>
-          <a:bodyPr wrap="square" lIns="0" tIns="0" rIns="0" bIns="0" rtlCol="0" anchor="ctr"/>
-          <a:lstStyle/>
-          <a:p>
-            <a:pPr indent="0" marL="0">
-              <a:buNone/>
-            </a:pPr>
-            <a:r>
-              <a:rPr lang="en-US" sz="1200" dirty="0">
-                <a:solidFill>
-                  <a:srgbClr val="10243A"/>
-                </a:solidFill>
-                <a:latin typeface="맑은 고딕" pitchFamily="34" charset="0"/>
-                <a:ea typeface="맑은 고딕" pitchFamily="34" charset="-122"/>
-                <a:cs typeface="맑은 고딕" pitchFamily="34" charset="-120"/>
-              </a:rPr>
-              <a:t>새 사업을 만들자는 제안이 아닙니다. 있는 자산을 하나의 출동 체계로 잇자는 제안입니다.</a:t>
-            </a:r>
-            <a:endParaRPr lang="en-US" sz="1200" dirty="0"/>
+            <a:off x="548640" y="4773168"/>
+            <a:ext cx="8046720" cy="256032"/>
+          </a:xfrm>
+          <a:prstGeom prst="rect">
+            <a:avLst/>
+          </a:prstGeom>
+          <a:noFill/>
+          <a:ln/>
+        </p:spPr>
+        <p:txBody>
+          <a:bodyPr wrap="square" lIns="0" tIns="0" rIns="0" bIns="0" rtlCol="0" anchor="ctr"/>
+          <a:lstStyle/>
+          <a:p>
+            <a:pPr indent="0" marL="0">
+              <a:buNone/>
+            </a:pPr>
+            <a:r>
+              <a:rPr lang="en-US" sz="850" dirty="0">
+                <a:solidFill>
+                  <a:srgbClr val="8895A2"/>
+                </a:solidFill>
+                <a:latin typeface="맑은 고딕" pitchFamily="34" charset="0"/>
+                <a:ea typeface="맑은 고딕" pitchFamily="34" charset="-122"/>
+                <a:cs typeface="맑은 고딕" pitchFamily="34" charset="-120"/>
+              </a:rPr>
+              <a:t>출처: City of Chula Vista · OECD OPSI · 머니투데이(2026.9.8) · DroneLife / Drone Efficacy Study(AOPA)</a:t>
+            </a:r>
+            <a:endParaRPr lang="en-US" sz="850" dirty="0"/>
           </a:p>
         </p:txBody>
       </p:sp>
@@ -11873,7 +12989,7 @@
               <a:buNone/>
             </a:pPr>
             <a:r>
-              <a:rPr lang="en-US" sz="2800" b="1" dirty="0">
+              <a:rPr lang="en-US" sz="3000" b="1" dirty="0">
                 <a:solidFill>
                   <a:srgbClr val="10243A"/>
                 </a:solidFill>
@@ -11881,9 +12997,9 @@
                 <a:ea typeface="맑은 고딕" pitchFamily="34" charset="-122"/>
                 <a:cs typeface="맑은 고딕" pitchFamily="34" charset="-120"/>
               </a:rPr>
-              <a:t>제언 ①   거점 — '3분 도달' 네트워크</a:t>
-            </a:r>
-            <a:endParaRPr lang="en-US" sz="2800" dirty="0"/>
+              <a:t>왜 제주에서 가능한가</a:t>
+            </a:r>
+            <a:endParaRPr lang="en-US" sz="3000" dirty="0"/>
           </a:p>
         </p:txBody>
       </p:sp>
@@ -11920,7 +13036,7 @@
                 <a:ea typeface="맑은 고딕" pitchFamily="34" charset="-122"/>
                 <a:cs typeface="맑은 고딕" pitchFamily="34" charset="-120"/>
               </a:rPr>
-              <a:t>새 부지가 아니라, 있는 시설 위에 얹는 방식입니다</a:t>
+              <a:t>이 네 가지가 동시에 갖춰진 곳은 제주뿐입니다</a:t>
             </a:r>
             <a:endParaRPr lang="en-US" sz="1300" dirty="0"/>
           </a:p>
@@ -11934,124 +13050,12 @@
         </p:nvSpPr>
         <p:spPr>
           <a:xfrm>
-            <a:off x="548640" y="1554480"/>
-            <a:ext cx="2743200" cy="1325880"/>
+            <a:off x="548640" y="1572768"/>
+            <a:ext cx="1883664" cy="2331720"/>
           </a:xfrm>
           <a:prstGeom prst="roundRect">
             <a:avLst>
-              <a:gd name="adj" fmla="val 4138"/>
-            </a:avLst>
-          </a:prstGeom>
-          <a:solidFill>
-            <a:srgbClr val="10243A"/>
-          </a:solidFill>
-          <a:ln w="12700">
-            <a:solidFill>
-              <a:srgbClr val="10243A"/>
-            </a:solidFill>
-            <a:prstDash val="solid"/>
-          </a:ln>
-          <a:effectLst>
-            <a:outerShdw sx="100000" sy="100000" kx="0" ky="0" algn="bl" rotWithShape="0" blurRad="101600" dist="25400" dir="5400000">
-              <a:srgbClr val="0B1B2B">
-                <a:alpha val="12000"/>
-              </a:srgbClr>
-            </a:outerShdw>
-          </a:effectLst>
-        </p:spPr>
-      </p:sp>
-      <p:sp>
-        <p:nvSpPr>
-          <p:cNvPr id="5" name="Text 3"/>
-          <p:cNvSpPr txBox="1"/>
-          <p:nvPr/>
-        </p:nvSpPr>
-        <p:spPr>
-          <a:xfrm>
-            <a:off x="685800" y="1609344"/>
-            <a:ext cx="2468880" cy="749808"/>
-          </a:xfrm>
-          <a:prstGeom prst="rect">
-            <a:avLst/>
-          </a:prstGeom>
-          <a:noFill/>
-          <a:ln/>
-        </p:spPr>
-        <p:txBody>
-          <a:bodyPr wrap="square" lIns="0" tIns="0" rIns="0" bIns="0" rtlCol="0" anchor="ctr"/>
-          <a:lstStyle/>
-          <a:p>
-            <a:pPr indent="0" marL="0">
-              <a:buNone/>
-            </a:pPr>
-            <a:r>
-              <a:rPr lang="en-US" sz="4000" b="1" dirty="0">
-                <a:solidFill>
-                  <a:srgbClr val="FFFFFF"/>
-                </a:solidFill>
-                <a:latin typeface="맑은 고딕" pitchFamily="34" charset="0"/>
-                <a:ea typeface="맑은 고딕" pitchFamily="34" charset="-122"/>
-                <a:cs typeface="맑은 고딕" pitchFamily="34" charset="-120"/>
-              </a:rPr>
-              <a:t>3분</a:t>
-            </a:r>
-            <a:endParaRPr lang="en-US" sz="4000" dirty="0"/>
-          </a:p>
-        </p:txBody>
-      </p:sp>
-      <p:sp>
-        <p:nvSpPr>
-          <p:cNvPr id="6" name="Text 4"/>
-          <p:cNvSpPr txBox="1"/>
-          <p:nvPr/>
-        </p:nvSpPr>
-        <p:spPr>
-          <a:xfrm>
-            <a:off x="713232" y="2395728"/>
-            <a:ext cx="2468880" cy="365760"/>
-          </a:xfrm>
-          <a:prstGeom prst="rect">
-            <a:avLst/>
-          </a:prstGeom>
-          <a:noFill/>
-          <a:ln/>
-        </p:spPr>
-        <p:txBody>
-          <a:bodyPr wrap="square" lIns="0" tIns="0" rIns="0" bIns="0" rtlCol="0" anchor="ctr"/>
-          <a:lstStyle/>
-          <a:p>
-            <a:pPr indent="0" marL="0">
-              <a:buNone/>
-            </a:pPr>
-            <a:r>
-              <a:rPr lang="en-US" sz="1300" dirty="0">
-                <a:solidFill>
-                  <a:srgbClr val="CADCFC"/>
-                </a:solidFill>
-                <a:latin typeface="맑은 고딕" pitchFamily="34" charset="0"/>
-                <a:ea typeface="맑은 고딕" pitchFamily="34" charset="-122"/>
-                <a:cs typeface="맑은 고딕" pitchFamily="34" charset="-120"/>
-              </a:rPr>
-              <a:t>이내 현장 상공 도달</a:t>
-            </a:r>
-            <a:endParaRPr lang="en-US" sz="1300" dirty="0"/>
-          </a:p>
-        </p:txBody>
-      </p:sp>
-      <p:sp>
-        <p:nvSpPr>
-          <p:cNvPr id="7" name="Shape 5"/>
-          <p:cNvSpPr/>
-          <p:nvPr/>
-        </p:nvSpPr>
-        <p:spPr>
-          <a:xfrm>
-            <a:off x="548640" y="3017520"/>
-            <a:ext cx="2743200" cy="1234440"/>
-          </a:xfrm>
-          <a:prstGeom prst="roundRect">
-            <a:avLst>
-              <a:gd name="adj" fmla="val 4444"/>
+              <a:gd name="adj" fmla="val 2913"/>
             </a:avLst>
           </a:prstGeom>
           <a:solidFill>
@@ -12074,30 +13078,30 @@
       </p:sp>
       <p:sp>
         <p:nvSpPr>
-          <p:cNvPr id="8" name="Text 6"/>
-          <p:cNvSpPr txBox="1"/>
-          <p:nvPr/>
-        </p:nvSpPr>
-        <p:spPr>
-          <a:xfrm>
-            <a:off x="713232" y="3154680"/>
-            <a:ext cx="2468880" cy="320040"/>
-          </a:xfrm>
-          <a:prstGeom prst="rect">
-            <a:avLst/>
-          </a:prstGeom>
-          <a:noFill/>
-          <a:ln/>
-        </p:spPr>
-        <p:txBody>
-          <a:bodyPr wrap="square" lIns="0" tIns="0" rIns="0" bIns="0" rtlCol="0" anchor="ctr"/>
-          <a:lstStyle/>
-          <a:p>
-            <a:pPr indent="0" marL="0">
-              <a:buNone/>
-            </a:pPr>
-            <a:r>
-              <a:rPr lang="en-US" sz="1400" b="1" dirty="0">
+          <p:cNvPr id="5" name="Text 3"/>
+          <p:cNvSpPr txBox="1"/>
+          <p:nvPr/>
+        </p:nvSpPr>
+        <p:spPr>
+          <a:xfrm>
+            <a:off x="694944" y="1783080"/>
+            <a:ext cx="1591056" cy="365760"/>
+          </a:xfrm>
+          <a:prstGeom prst="rect">
+            <a:avLst/>
+          </a:prstGeom>
+          <a:noFill/>
+          <a:ln/>
+        </p:spPr>
+        <p:txBody>
+          <a:bodyPr wrap="square" lIns="0" tIns="0" rIns="0" bIns="0" rtlCol="0" anchor="ctr"/>
+          <a:lstStyle/>
+          <a:p>
+            <a:pPr indent="0" marL="0">
+              <a:buNone/>
+            </a:pPr>
+            <a:r>
+              <a:rPr lang="en-US" sz="1700" b="1" dirty="0">
                 <a:solidFill>
                   <a:srgbClr val="065A82"/>
                 </a:solidFill>
@@ -12105,22 +13109,61 @@
                 <a:ea typeface="맑은 고딕" pitchFamily="34" charset="-122"/>
                 <a:cs typeface="맑은 고딕" pitchFamily="34" charset="-120"/>
               </a:rPr>
-              <a:t>신규 부지 불필요</a:t>
-            </a:r>
-            <a:endParaRPr lang="en-US" sz="1400" dirty="0"/>
-          </a:p>
-        </p:txBody>
-      </p:sp>
-      <p:sp>
-        <p:nvSpPr>
-          <p:cNvPr id="9" name="Text 7"/>
-          <p:cNvSpPr txBox="1"/>
-          <p:nvPr/>
-        </p:nvSpPr>
-        <p:spPr>
-          <a:xfrm>
-            <a:off x="713232" y="3474720"/>
-            <a:ext cx="2468880" cy="731520"/>
+              <a:t>전국 유일</a:t>
+            </a:r>
+            <a:endParaRPr lang="en-US" sz="1700" dirty="0"/>
+          </a:p>
+        </p:txBody>
+      </p:sp>
+      <p:sp>
+        <p:nvSpPr>
+          <p:cNvPr id="6" name="Text 4"/>
+          <p:cNvSpPr txBox="1"/>
+          <p:nvPr/>
+        </p:nvSpPr>
+        <p:spPr>
+          <a:xfrm>
+            <a:off x="694944" y="2212848"/>
+            <a:ext cx="1591056" cy="548640"/>
+          </a:xfrm>
+          <a:prstGeom prst="rect">
+            <a:avLst/>
+          </a:prstGeom>
+          <a:noFill/>
+          <a:ln/>
+        </p:spPr>
+        <p:txBody>
+          <a:bodyPr wrap="square" lIns="0" tIns="0" rIns="0" bIns="0" rtlCol="0" anchor="ctr"/>
+          <a:lstStyle/>
+          <a:p>
+            <a:pPr indent="0" marL="0">
+              <a:buNone/>
+            </a:pPr>
+            <a:r>
+              <a:rPr lang="en-US" sz="1300" b="1" dirty="0">
+                <a:solidFill>
+                  <a:srgbClr val="10243A"/>
+                </a:solidFill>
+                <a:latin typeface="맑은 고딕" pitchFamily="34" charset="0"/>
+                <a:ea typeface="맑은 고딕" pitchFamily="34" charset="-122"/>
+                <a:cs typeface="맑은 고딕" pitchFamily="34" charset="-120"/>
+              </a:rPr>
+              <a:t>자치경찰단 169명</a:t>
+            </a:r>
+            <a:endParaRPr lang="en-US" sz="1300" dirty="0"/>
+          </a:p>
+        </p:txBody>
+      </p:sp>
+      <p:sp>
+        <p:nvSpPr>
+          <p:cNvPr id="7" name="Text 5"/>
+          <p:cNvSpPr txBox="1"/>
+          <p:nvPr/>
+        </p:nvSpPr>
+        <p:spPr>
+          <a:xfrm>
+            <a:off x="694944" y="2834640"/>
+            <a:ext cx="1591056" cy="868680"/>
           </a:xfrm>
           <a:prstGeom prst="rect">
             <a:avLst/>
@@ -12134,12 +13177,12 @@
           <a:p>
             <a:pPr indent="0" marL="0">
               <a:lnSpc>
-                <a:spcPct val="120000"/>
+                <a:spcPct val="115000"/>
               </a:lnSpc>
               <a:buNone/>
             </a:pPr>
             <a:r>
-              <a:rPr lang="en-US" sz="1100" dirty="0">
+              <a:rPr lang="en-US" sz="1000" dirty="0">
                 <a:solidFill>
                   <a:srgbClr val="5A6A78"/>
                 </a:solidFill>
@@ -12147,19 +13190,19 @@
                 <a:ea typeface="맑은 고딕" pitchFamily="34" charset="-122"/>
                 <a:cs typeface="맑은 고딕" pitchFamily="34" charset="-120"/>
               </a:rPr>
-              <a:t>자치경찰 지구대 · CCTV</a:t>
-            </a:r>
-            <a:endParaRPr lang="en-US" sz="1100" dirty="0"/>
+              <a:t>제주특별법 제88조</a:t>
+            </a:r>
+            <a:endParaRPr lang="en-US" sz="1000" dirty="0"/>
           </a:p>
           <a:p>
             <a:pPr indent="0" marL="0">
               <a:lnSpc>
-                <a:spcPct val="120000"/>
+                <a:spcPct val="115000"/>
               </a:lnSpc>
               <a:buNone/>
             </a:pPr>
             <a:r>
-              <a:rPr lang="en-US" sz="1100" dirty="0">
+              <a:rPr lang="en-US" sz="1000" dirty="0">
                 <a:solidFill>
                   <a:srgbClr val="5A6A78"/>
                 </a:solidFill>
@@ -12167,85 +13210,26 @@
                 <a:ea typeface="맑은 고딕" pitchFamily="34" charset="-122"/>
                 <a:cs typeface="맑은 고딕" pitchFamily="34" charset="-120"/>
               </a:rPr>
-              <a:t>통합관제센터에 무인 격납고를</a:t>
-            </a:r>
-            <a:endParaRPr lang="en-US" sz="1100" dirty="0"/>
-          </a:p>
-          <a:p>
-            <a:pPr indent="0" marL="0">
-              <a:lnSpc>
-                <a:spcPct val="120000"/>
-              </a:lnSpc>
-              <a:buNone/>
-            </a:pPr>
-            <a:r>
-              <a:rPr lang="en-US" sz="1100" dirty="0">
-                <a:solidFill>
-                  <a:srgbClr val="5A6A78"/>
-                </a:solidFill>
-                <a:latin typeface="맑은 고딕" pitchFamily="34" charset="0"/>
-                <a:ea typeface="맑은 고딕" pitchFamily="34" charset="-122"/>
-                <a:cs typeface="맑은 고딕" pitchFamily="34" charset="-120"/>
-              </a:rPr>
-              <a:t>병설하는 구조</a:t>
-            </a:r>
-            <a:endParaRPr lang="en-US" sz="1100" dirty="0"/>
-          </a:p>
-        </p:txBody>
-      </p:sp>
-      <p:sp>
-        <p:nvSpPr>
-          <p:cNvPr id="10" name="Text 8"/>
-          <p:cNvSpPr txBox="1"/>
-          <p:nvPr/>
-        </p:nvSpPr>
-        <p:spPr>
-          <a:xfrm>
-            <a:off x="3611880" y="1572768"/>
-            <a:ext cx="4983480" cy="320040"/>
-          </a:xfrm>
-          <a:prstGeom prst="rect">
-            <a:avLst/>
-          </a:prstGeom>
-          <a:noFill/>
-          <a:ln/>
-        </p:spPr>
-        <p:txBody>
-          <a:bodyPr wrap="square" lIns="0" tIns="0" rIns="0" bIns="0" rtlCol="0" anchor="ctr"/>
-          <a:lstStyle/>
-          <a:p>
-            <a:pPr indent="0" marL="0">
-              <a:buNone/>
-            </a:pPr>
-            <a:r>
-              <a:rPr lang="en-US" sz="1300" b="1" dirty="0">
-                <a:solidFill>
-                  <a:srgbClr val="10243A"/>
-                </a:solidFill>
-                <a:latin typeface="맑은 고딕" pitchFamily="34" charset="0"/>
-                <a:ea typeface="맑은 고딕" pitchFamily="34" charset="-122"/>
-                <a:cs typeface="맑은 고딕" pitchFamily="34" charset="-120"/>
-              </a:rPr>
-              <a:t>1단계 시범 대상지(안)   ·   8개소</a:t>
-            </a:r>
-            <a:endParaRPr lang="en-US" sz="1300" dirty="0"/>
-          </a:p>
-        </p:txBody>
-      </p:sp>
-      <p:sp>
-        <p:nvSpPr>
-          <p:cNvPr id="11" name="Shape 9"/>
+              <a:t>도지사 소속</a:t>
+            </a:r>
+            <a:endParaRPr lang="en-US" sz="1000" dirty="0"/>
+          </a:p>
+        </p:txBody>
+      </p:sp>
+      <p:sp>
+        <p:nvSpPr>
+          <p:cNvPr id="8" name="Shape 6"/>
           <p:cNvSpPr/>
           <p:nvPr/>
         </p:nvSpPr>
         <p:spPr>
           <a:xfrm>
-            <a:off x="3611880" y="2011680"/>
-            <a:ext cx="2395728" cy="457200"/>
+            <a:off x="2615184" y="1572768"/>
+            <a:ext cx="1883664" cy="2331720"/>
           </a:xfrm>
           <a:prstGeom prst="roundRect">
             <a:avLst>
-              <a:gd name="adj" fmla="val 12000"/>
+              <a:gd name="adj" fmla="val 2913"/>
             </a:avLst>
           </a:prstGeom>
           <a:solidFill>
@@ -12257,34 +13241,80 @@
             </a:solidFill>
             <a:prstDash val="solid"/>
           </a:ln>
-        </p:spPr>
-      </p:sp>
-      <p:sp>
-        <p:nvSpPr>
-          <p:cNvPr id="12" name="Text 10"/>
-          <p:cNvSpPr txBox="1"/>
-          <p:nvPr/>
-        </p:nvSpPr>
-        <p:spPr>
-          <a:xfrm>
-            <a:off x="3739896" y="2011680"/>
-            <a:ext cx="2194560" cy="457200"/>
-          </a:xfrm>
-          <a:prstGeom prst="rect">
-            <a:avLst/>
-          </a:prstGeom>
-          <a:noFill/>
-          <a:ln/>
-        </p:spPr>
-        <p:txBody>
-          <a:bodyPr wrap="square" lIns="0" tIns="0" rIns="0" bIns="0" rtlCol="0" anchor="ctr"/>
-          <a:lstStyle/>
-          <a:p>
-            <a:pPr indent="0" marL="0">
-              <a:buNone/>
-            </a:pPr>
-            <a:r>
-              <a:rPr lang="en-US" sz="1100" dirty="0">
+          <a:effectLst>
+            <a:outerShdw sx="100000" sy="100000" kx="0" ky="0" algn="bl" rotWithShape="0" blurRad="101600" dist="25400" dir="5400000">
+              <a:srgbClr val="0B1B2B">
+                <a:alpha val="12000"/>
+              </a:srgbClr>
+            </a:outerShdw>
+          </a:effectLst>
+        </p:spPr>
+      </p:sp>
+      <p:sp>
+        <p:nvSpPr>
+          <p:cNvPr id="9" name="Text 7"/>
+          <p:cNvSpPr txBox="1"/>
+          <p:nvPr/>
+        </p:nvSpPr>
+        <p:spPr>
+          <a:xfrm>
+            <a:off x="2761488" y="1783080"/>
+            <a:ext cx="1591056" cy="365760"/>
+          </a:xfrm>
+          <a:prstGeom prst="rect">
+            <a:avLst/>
+          </a:prstGeom>
+          <a:noFill/>
+          <a:ln/>
+        </p:spPr>
+        <p:txBody>
+          <a:bodyPr wrap="square" lIns="0" tIns="0" rIns="0" bIns="0" rtlCol="0" anchor="ctr"/>
+          <a:lstStyle/>
+          <a:p>
+            <a:pPr indent="0" marL="0">
+              <a:buNone/>
+            </a:pPr>
+            <a:r>
+              <a:rPr lang="en-US" sz="1700" b="1" dirty="0">
+                <a:solidFill>
+                  <a:srgbClr val="065A82"/>
+                </a:solidFill>
+                <a:latin typeface="맑은 고딕" pitchFamily="34" charset="0"/>
+                <a:ea typeface="맑은 고딕" pitchFamily="34" charset="-122"/>
+                <a:cs typeface="맑은 고딕" pitchFamily="34" charset="-120"/>
+              </a:rPr>
+              <a:t>전국 최초</a:t>
+            </a:r>
+            <a:endParaRPr lang="en-US" sz="1700" dirty="0"/>
+          </a:p>
+        </p:txBody>
+      </p:sp>
+      <p:sp>
+        <p:nvSpPr>
+          <p:cNvPr id="10" name="Text 8"/>
+          <p:cNvSpPr txBox="1"/>
+          <p:nvPr/>
+        </p:nvSpPr>
+        <p:spPr>
+          <a:xfrm>
+            <a:off x="2761488" y="2212848"/>
+            <a:ext cx="1591056" cy="548640"/>
+          </a:xfrm>
+          <a:prstGeom prst="rect">
+            <a:avLst/>
+          </a:prstGeom>
+          <a:noFill/>
+          <a:ln/>
+        </p:spPr>
+        <p:txBody>
+          <a:bodyPr wrap="square" lIns="0" tIns="0" rIns="0" bIns="0" rtlCol="0" anchor="ctr"/>
+          <a:lstStyle/>
+          <a:p>
+            <a:pPr indent="0" marL="0">
+              <a:buNone/>
+            </a:pPr>
+            <a:r>
+              <a:rPr lang="en-US" sz="1300" b="1" dirty="0">
                 <a:solidFill>
                   <a:srgbClr val="10243A"/>
                 </a:solidFill>
@@ -12292,26 +13322,88 @@
                 <a:ea typeface="맑은 고딕" pitchFamily="34" charset="-122"/>
                 <a:cs typeface="맑은 고딕" pitchFamily="34" charset="-120"/>
               </a:rPr>
-              <a:t>제주시 동부 권역</a:t>
-            </a:r>
-            <a:endParaRPr lang="en-US" sz="1100" dirty="0"/>
-          </a:p>
-        </p:txBody>
-      </p:sp>
-      <p:sp>
-        <p:nvSpPr>
-          <p:cNvPr id="13" name="Shape 11"/>
+              <a:t>AI 치안드론</a:t>
+            </a:r>
+            <a:endParaRPr lang="en-US" sz="1300" dirty="0"/>
+          </a:p>
+        </p:txBody>
+      </p:sp>
+      <p:sp>
+        <p:nvSpPr>
+          <p:cNvPr id="11" name="Text 9"/>
+          <p:cNvSpPr txBox="1"/>
+          <p:nvPr/>
+        </p:nvSpPr>
+        <p:spPr>
+          <a:xfrm>
+            <a:off x="2761488" y="2834640"/>
+            <a:ext cx="1591056" cy="868680"/>
+          </a:xfrm>
+          <a:prstGeom prst="rect">
+            <a:avLst/>
+          </a:prstGeom>
+          <a:noFill/>
+          <a:ln/>
+        </p:spPr>
+        <p:txBody>
+          <a:bodyPr wrap="square" lIns="0" tIns="0" rIns="0" bIns="0" rtlCol="0" anchor="ctr"/>
+          <a:lstStyle/>
+          <a:p>
+            <a:pPr indent="0" marL="0">
+              <a:lnSpc>
+                <a:spcPct val="115000"/>
+              </a:lnSpc>
+              <a:buNone/>
+            </a:pPr>
+            <a:r>
+              <a:rPr lang="en-US" sz="1000" dirty="0">
+                <a:solidFill>
+                  <a:srgbClr val="5A6A78"/>
+                </a:solidFill>
+                <a:latin typeface="맑은 고딕" pitchFamily="34" charset="0"/>
+                <a:ea typeface="맑은 고딕" pitchFamily="34" charset="-122"/>
+                <a:cs typeface="맑은 고딕" pitchFamily="34" charset="-120"/>
+              </a:rPr>
+              <a:t>국비 8억 · 도비 2억</a:t>
+            </a:r>
+            <a:endParaRPr lang="en-US" sz="1000" dirty="0"/>
+          </a:p>
+          <a:p>
+            <a:pPr indent="0" marL="0">
+              <a:lnSpc>
+                <a:spcPct val="115000"/>
+              </a:lnSpc>
+              <a:buNone/>
+            </a:pPr>
+            <a:r>
+              <a:rPr lang="en-US" sz="1000" dirty="0">
+                <a:solidFill>
+                  <a:srgbClr val="5A6A78"/>
+                </a:solidFill>
+                <a:latin typeface="맑은 고딕" pitchFamily="34" charset="0"/>
+                <a:ea typeface="맑은 고딕" pitchFamily="34" charset="-122"/>
+                <a:cs typeface="맑은 고딕" pitchFamily="34" charset="-120"/>
+              </a:rPr>
+              <a:t>2027년 현장 투입</a:t>
+            </a:r>
+            <a:endParaRPr lang="en-US" sz="1000" dirty="0"/>
+          </a:p>
+        </p:txBody>
+      </p:sp>
+      <p:sp>
+        <p:nvSpPr>
+          <p:cNvPr id="12" name="Shape 10"/>
           <p:cNvSpPr/>
           <p:nvPr/>
         </p:nvSpPr>
         <p:spPr>
           <a:xfrm>
-            <a:off x="6153912" y="2011680"/>
-            <a:ext cx="2395728" cy="457200"/>
+            <a:off x="4681728" y="1572768"/>
+            <a:ext cx="1883664" cy="2331720"/>
           </a:xfrm>
           <a:prstGeom prst="roundRect">
             <a:avLst>
-              <a:gd name="adj" fmla="val 12000"/>
+              <a:gd name="adj" fmla="val 2913"/>
             </a:avLst>
           </a:prstGeom>
           <a:solidFill>
@@ -12323,7 +13415,53 @@
             </a:solidFill>
             <a:prstDash val="solid"/>
           </a:ln>
-        </p:spPr>
+          <a:effectLst>
+            <a:outerShdw sx="100000" sy="100000" kx="0" ky="0" algn="bl" rotWithShape="0" blurRad="101600" dist="25400" dir="5400000">
+              <a:srgbClr val="0B1B2B">
+                <a:alpha val="12000"/>
+              </a:srgbClr>
+            </a:outerShdw>
+          </a:effectLst>
+        </p:spPr>
+      </p:sp>
+      <p:sp>
+        <p:nvSpPr>
+          <p:cNvPr id="13" name="Text 11"/>
+          <p:cNvSpPr txBox="1"/>
+          <p:nvPr/>
+        </p:nvSpPr>
+        <p:spPr>
+          <a:xfrm>
+            <a:off x="4828032" y="1783080"/>
+            <a:ext cx="1591056" cy="365760"/>
+          </a:xfrm>
+          <a:prstGeom prst="rect">
+            <a:avLst/>
+          </a:prstGeom>
+          <a:noFill/>
+          <a:ln/>
+        </p:spPr>
+        <p:txBody>
+          <a:bodyPr wrap="square" lIns="0" tIns="0" rIns="0" bIns="0" rtlCol="0" anchor="ctr"/>
+          <a:lstStyle/>
+          <a:p>
+            <a:pPr indent="0" marL="0">
+              <a:buNone/>
+            </a:pPr>
+            <a:r>
+              <a:rPr lang="en-US" sz="1700" b="1" dirty="0">
+                <a:solidFill>
+                  <a:srgbClr val="065A82"/>
+                </a:solidFill>
+                <a:latin typeface="맑은 고딕" pitchFamily="34" charset="0"/>
+                <a:ea typeface="맑은 고딕" pitchFamily="34" charset="-122"/>
+                <a:cs typeface="맑은 고딕" pitchFamily="34" charset="-120"/>
+              </a:rPr>
+              <a:t>전국 최대</a:t>
+            </a:r>
+            <a:endParaRPr lang="en-US" sz="1700" dirty="0"/>
+          </a:p>
+        </p:txBody>
       </p:sp>
       <p:sp>
         <p:nvSpPr>
@@ -12333,24 +13471,24 @@
         </p:nvSpPr>
         <p:spPr>
           <a:xfrm>
-            <a:off x="6281928" y="2011680"/>
-            <a:ext cx="2194560" cy="457200"/>
-          </a:xfrm>
-          <a:prstGeom prst="rect">
-            <a:avLst/>
-          </a:prstGeom>
-          <a:noFill/>
-          <a:ln/>
-        </p:spPr>
-        <p:txBody>
-          <a:bodyPr wrap="square" lIns="0" tIns="0" rIns="0" bIns="0" rtlCol="0" anchor="ctr"/>
-          <a:lstStyle/>
-          <a:p>
-            <a:pPr indent="0" marL="0">
-              <a:buNone/>
-            </a:pPr>
-            <a:r>
-              <a:rPr lang="en-US" sz="1100" dirty="0">
+            <a:off x="4828032" y="2212848"/>
+            <a:ext cx="1591056" cy="548640"/>
+          </a:xfrm>
+          <a:prstGeom prst="rect">
+            <a:avLst/>
+          </a:prstGeom>
+          <a:noFill/>
+          <a:ln/>
+        </p:spPr>
+        <p:txBody>
+          <a:bodyPr wrap="square" lIns="0" tIns="0" rIns="0" bIns="0" rtlCol="0" anchor="ctr"/>
+          <a:lstStyle/>
+          <a:p>
+            <a:pPr indent="0" marL="0">
+              <a:buNone/>
+            </a:pPr>
+            <a:r>
+              <a:rPr lang="en-US" sz="1300" b="1" dirty="0">
                 <a:solidFill>
                   <a:srgbClr val="10243A"/>
                 </a:solidFill>
@@ -12358,26 +13496,88 @@
                 <a:ea typeface="맑은 고딕" pitchFamily="34" charset="-122"/>
                 <a:cs typeface="맑은 고딕" pitchFamily="34" charset="-120"/>
               </a:rPr>
-              <a:t>제주시 서부 권역</a:t>
-            </a:r>
-            <a:endParaRPr lang="en-US" sz="1100" dirty="0"/>
-          </a:p>
-        </p:txBody>
-      </p:sp>
-      <p:sp>
-        <p:nvSpPr>
-          <p:cNvPr id="15" name="Shape 13"/>
+              <a:t>드론특별자유화구역</a:t>
+            </a:r>
+            <a:endParaRPr lang="en-US" sz="1300" dirty="0"/>
+          </a:p>
+        </p:txBody>
+      </p:sp>
+      <p:sp>
+        <p:nvSpPr>
+          <p:cNvPr id="15" name="Text 13"/>
+          <p:cNvSpPr txBox="1"/>
+          <p:nvPr/>
+        </p:nvSpPr>
+        <p:spPr>
+          <a:xfrm>
+            <a:off x="4828032" y="2834640"/>
+            <a:ext cx="1591056" cy="868680"/>
+          </a:xfrm>
+          <a:prstGeom prst="rect">
+            <a:avLst/>
+          </a:prstGeom>
+          <a:noFill/>
+          <a:ln/>
+        </p:spPr>
+        <p:txBody>
+          <a:bodyPr wrap="square" lIns="0" tIns="0" rIns="0" bIns="0" rtlCol="0" anchor="ctr"/>
+          <a:lstStyle/>
+          <a:p>
+            <a:pPr indent="0" marL="0">
+              <a:lnSpc>
+                <a:spcPct val="115000"/>
+              </a:lnSpc>
+              <a:buNone/>
+            </a:pPr>
+            <a:r>
+              <a:rPr lang="en-US" sz="1000" dirty="0">
+                <a:solidFill>
+                  <a:srgbClr val="5A6A78"/>
+                </a:solidFill>
+                <a:latin typeface="맑은 고딕" pitchFamily="34" charset="0"/>
+                <a:ea typeface="맑은 고딕" pitchFamily="34" charset="-122"/>
+                <a:cs typeface="맑은 고딕" pitchFamily="34" charset="-120"/>
+              </a:rPr>
+              <a:t>1,283㎢</a:t>
+            </a:r>
+            <a:endParaRPr lang="en-US" sz="1000" dirty="0"/>
+          </a:p>
+          <a:p>
+            <a:pPr indent="0" marL="0">
+              <a:lnSpc>
+                <a:spcPct val="115000"/>
+              </a:lnSpc>
+              <a:buNone/>
+            </a:pPr>
+            <a:r>
+              <a:rPr lang="en-US" sz="1000" dirty="0">
+                <a:solidFill>
+                  <a:srgbClr val="5A6A78"/>
+                </a:solidFill>
+                <a:latin typeface="맑은 고딕" pitchFamily="34" charset="0"/>
+                <a:ea typeface="맑은 고딕" pitchFamily="34" charset="-122"/>
+                <a:cs typeface="맑은 고딕" pitchFamily="34" charset="-120"/>
+              </a:rPr>
+              <a:t>3차 연장(2027.6) 신청</a:t>
+            </a:r>
+            <a:endParaRPr lang="en-US" sz="1000" dirty="0"/>
+          </a:p>
+        </p:txBody>
+      </p:sp>
+      <p:sp>
+        <p:nvSpPr>
+          <p:cNvPr id="16" name="Shape 14"/>
           <p:cNvSpPr/>
           <p:nvPr/>
         </p:nvSpPr>
         <p:spPr>
           <a:xfrm>
-            <a:off x="3611880" y="2578608"/>
-            <a:ext cx="2395728" cy="457200"/>
+            <a:off x="6748272" y="1572768"/>
+            <a:ext cx="1883664" cy="2331720"/>
           </a:xfrm>
           <a:prstGeom prst="roundRect">
             <a:avLst>
-              <a:gd name="adj" fmla="val 12000"/>
+              <a:gd name="adj" fmla="val 2913"/>
             </a:avLst>
           </a:prstGeom>
           <a:solidFill>
@@ -12389,34 +13589,80 @@
             </a:solidFill>
             <a:prstDash val="solid"/>
           </a:ln>
-        </p:spPr>
-      </p:sp>
-      <p:sp>
-        <p:nvSpPr>
-          <p:cNvPr id="16" name="Text 14"/>
-          <p:cNvSpPr txBox="1"/>
-          <p:nvPr/>
-        </p:nvSpPr>
-        <p:spPr>
-          <a:xfrm>
-            <a:off x="3739896" y="2578608"/>
-            <a:ext cx="2194560" cy="457200"/>
-          </a:xfrm>
-          <a:prstGeom prst="rect">
-            <a:avLst/>
-          </a:prstGeom>
-          <a:noFill/>
-          <a:ln/>
-        </p:spPr>
-        <p:txBody>
-          <a:bodyPr wrap="square" lIns="0" tIns="0" rIns="0" bIns="0" rtlCol="0" anchor="ctr"/>
-          <a:lstStyle/>
-          <a:p>
-            <a:pPr indent="0" marL="0">
-              <a:buNone/>
-            </a:pPr>
-            <a:r>
-              <a:rPr lang="en-US" sz="1100" dirty="0">
+          <a:effectLst>
+            <a:outerShdw sx="100000" sy="100000" kx="0" ky="0" algn="bl" rotWithShape="0" blurRad="101600" dist="25400" dir="5400000">
+              <a:srgbClr val="0B1B2B">
+                <a:alpha val="12000"/>
+              </a:srgbClr>
+            </a:outerShdw>
+          </a:effectLst>
+        </p:spPr>
+      </p:sp>
+      <p:sp>
+        <p:nvSpPr>
+          <p:cNvPr id="17" name="Text 15"/>
+          <p:cNvSpPr txBox="1"/>
+          <p:nvPr/>
+        </p:nvSpPr>
+        <p:spPr>
+          <a:xfrm>
+            <a:off x="6894576" y="1783080"/>
+            <a:ext cx="1591056" cy="365760"/>
+          </a:xfrm>
+          <a:prstGeom prst="rect">
+            <a:avLst/>
+          </a:prstGeom>
+          <a:noFill/>
+          <a:ln/>
+        </p:spPr>
+        <p:txBody>
+          <a:bodyPr wrap="square" lIns="0" tIns="0" rIns="0" bIns="0" rtlCol="0" anchor="ctr"/>
+          <a:lstStyle/>
+          <a:p>
+            <a:pPr indent="0" marL="0">
+              <a:buNone/>
+            </a:pPr>
+            <a:r>
+              <a:rPr lang="en-US" sz="1700" b="1" dirty="0">
+                <a:solidFill>
+                  <a:srgbClr val="065A82"/>
+                </a:solidFill>
+                <a:latin typeface="맑은 고딕" pitchFamily="34" charset="0"/>
+                <a:ea typeface="맑은 고딕" pitchFamily="34" charset="-122"/>
+                <a:cs typeface="맑은 고딕" pitchFamily="34" charset="-120"/>
+              </a:rPr>
+              <a:t>1,543명</a:t>
+            </a:r>
+            <a:endParaRPr lang="en-US" sz="1700" dirty="0"/>
+          </a:p>
+        </p:txBody>
+      </p:sp>
+      <p:sp>
+        <p:nvSpPr>
+          <p:cNvPr id="18" name="Text 16"/>
+          <p:cNvSpPr txBox="1"/>
+          <p:nvPr/>
+        </p:nvSpPr>
+        <p:spPr>
+          <a:xfrm>
+            <a:off x="6894576" y="2212848"/>
+            <a:ext cx="1591056" cy="548640"/>
+          </a:xfrm>
+          <a:prstGeom prst="rect">
+            <a:avLst/>
+          </a:prstGeom>
+          <a:noFill/>
+          <a:ln/>
+        </p:spPr>
+        <p:txBody>
+          <a:bodyPr wrap="square" lIns="0" tIns="0" rIns="0" bIns="0" rtlCol="0" anchor="ctr"/>
+          <a:lstStyle/>
+          <a:p>
+            <a:pPr indent="0" marL="0">
+              <a:buNone/>
+            </a:pPr>
+            <a:r>
+              <a:rPr lang="en-US" sz="1300" b="1" dirty="0">
                 <a:solidFill>
                   <a:srgbClr val="10243A"/>
                 </a:solidFill>
@@ -12424,65 +13670,100 @@
                 <a:ea typeface="맑은 고딕" pitchFamily="34" charset="-122"/>
                 <a:cs typeface="맑은 고딕" pitchFamily="34" charset="-120"/>
               </a:rPr>
-              <a:t>서귀포 시가지</a:t>
-            </a:r>
-            <a:endParaRPr lang="en-US" sz="1100" dirty="0"/>
-          </a:p>
-        </p:txBody>
-      </p:sp>
-      <p:sp>
-        <p:nvSpPr>
-          <p:cNvPr id="17" name="Shape 15"/>
-          <p:cNvSpPr/>
-          <p:nvPr/>
-        </p:nvSpPr>
-        <p:spPr>
-          <a:xfrm>
-            <a:off x="6153912" y="2578608"/>
-            <a:ext cx="2395728" cy="457200"/>
-          </a:xfrm>
-          <a:prstGeom prst="roundRect">
-            <a:avLst>
-              <a:gd name="adj" fmla="val 12000"/>
-            </a:avLst>
-          </a:prstGeom>
-          <a:solidFill>
-            <a:srgbClr val="F2F6F9"/>
-          </a:solidFill>
-          <a:ln w="12700">
-            <a:solidFill>
-              <a:srgbClr val="E3EAF0"/>
-            </a:solidFill>
-            <a:prstDash val="solid"/>
-          </a:ln>
-        </p:spPr>
-      </p:sp>
-      <p:sp>
-        <p:nvSpPr>
-          <p:cNvPr id="18" name="Text 16"/>
-          <p:cNvSpPr txBox="1"/>
-          <p:nvPr/>
-        </p:nvSpPr>
-        <p:spPr>
-          <a:xfrm>
-            <a:off x="6281928" y="2578608"/>
-            <a:ext cx="2194560" cy="457200"/>
-          </a:xfrm>
-          <a:prstGeom prst="rect">
-            <a:avLst/>
-          </a:prstGeom>
-          <a:noFill/>
-          <a:ln/>
-        </p:spPr>
-        <p:txBody>
-          <a:bodyPr wrap="square" lIns="0" tIns="0" rIns="0" bIns="0" rtlCol="0" anchor="ctr"/>
-          <a:lstStyle/>
-          <a:p>
-            <a:pPr indent="0" marL="0">
-              <a:buNone/>
-            </a:pPr>
-            <a:r>
-              <a:rPr lang="en-US" sz="1100" dirty="0">
+              <a:t>민관 공동체 치안망</a:t>
+            </a:r>
+            <a:endParaRPr lang="en-US" sz="1300" dirty="0"/>
+          </a:p>
+        </p:txBody>
+      </p:sp>
+      <p:sp>
+        <p:nvSpPr>
+          <p:cNvPr id="19" name="Text 17"/>
+          <p:cNvSpPr txBox="1"/>
+          <p:nvPr/>
+        </p:nvSpPr>
+        <p:spPr>
+          <a:xfrm>
+            <a:off x="6894576" y="2834640"/>
+            <a:ext cx="1591056" cy="868680"/>
+          </a:xfrm>
+          <a:prstGeom prst="rect">
+            <a:avLst/>
+          </a:prstGeom>
+          <a:noFill/>
+          <a:ln/>
+        </p:spPr>
+        <p:txBody>
+          <a:bodyPr wrap="square" lIns="0" tIns="0" rIns="0" bIns="0" rtlCol="0" anchor="ctr"/>
+          <a:lstStyle/>
+          <a:p>
+            <a:pPr indent="0" marL="0">
+              <a:lnSpc>
+                <a:spcPct val="115000"/>
+              </a:lnSpc>
+              <a:buNone/>
+            </a:pPr>
+            <a:r>
+              <a:rPr lang="en-US" sz="1000" dirty="0">
+                <a:solidFill>
+                  <a:srgbClr val="5A6A78"/>
+                </a:solidFill>
+                <a:latin typeface="맑은 고딕" pitchFamily="34" charset="0"/>
+                <a:ea typeface="맑은 고딕" pitchFamily="34" charset="-122"/>
+                <a:cs typeface="맑은 고딕" pitchFamily="34" charset="-120"/>
+              </a:rPr>
+              <a:t>주민자치경찰대 · 시니어</a:t>
+            </a:r>
+            <a:endParaRPr lang="en-US" sz="1000" dirty="0"/>
+          </a:p>
+          <a:p>
+            <a:pPr indent="0" marL="0">
+              <a:lnSpc>
+                <a:spcPct val="115000"/>
+              </a:lnSpc>
+              <a:buNone/>
+            </a:pPr>
+            <a:r>
+              <a:rPr lang="en-US" sz="1000" dirty="0">
+                <a:solidFill>
+                  <a:srgbClr val="5A6A78"/>
+                </a:solidFill>
+                <a:latin typeface="맑은 고딕" pitchFamily="34" charset="0"/>
+                <a:ea typeface="맑은 고딕" pitchFamily="34" charset="-122"/>
+                <a:cs typeface="맑은 고딕" pitchFamily="34" charset="-120"/>
+              </a:rPr>
+              <a:t>민간경비 · 민간드론</a:t>
+            </a:r>
+            <a:endParaRPr lang="en-US" sz="1000" dirty="0"/>
+          </a:p>
+        </p:txBody>
+      </p:sp>
+      <p:sp>
+        <p:nvSpPr>
+          <p:cNvPr id="20" name="Text 18"/>
+          <p:cNvSpPr txBox="1"/>
+          <p:nvPr/>
+        </p:nvSpPr>
+        <p:spPr>
+          <a:xfrm>
+            <a:off x="548640" y="4407408"/>
+            <a:ext cx="8046720" cy="365760"/>
+          </a:xfrm>
+          <a:prstGeom prst="rect">
+            <a:avLst/>
+          </a:prstGeom>
+          <a:noFill/>
+          <a:ln/>
+        </p:spPr>
+        <p:txBody>
+          <a:bodyPr wrap="square" lIns="0" tIns="0" rIns="0" bIns="0" rtlCol="0" anchor="ctr"/>
+          <a:lstStyle/>
+          <a:p>
+            <a:pPr indent="0" marL="0">
+              <a:buNone/>
+            </a:pPr>
+            <a:r>
+              <a:rPr lang="en-US" sz="1200" dirty="0">
                 <a:solidFill>
                   <a:srgbClr val="10243A"/>
                 </a:solidFill>
@@ -12490,312 +13771,9 @@
                 <a:ea typeface="맑은 고딕" pitchFamily="34" charset="-122"/>
                 <a:cs typeface="맑은 고딕" pitchFamily="34" charset="-120"/>
               </a:rPr>
-              <a:t>애월 해안</a:t>
-            </a:r>
-            <a:endParaRPr lang="en-US" sz="1100" dirty="0"/>
-          </a:p>
-        </p:txBody>
-      </p:sp>
-      <p:sp>
-        <p:nvSpPr>
-          <p:cNvPr id="19" name="Shape 17"/>
-          <p:cNvSpPr/>
-          <p:nvPr/>
-        </p:nvSpPr>
-        <p:spPr>
-          <a:xfrm>
-            <a:off x="3611880" y="3145536"/>
-            <a:ext cx="2395728" cy="457200"/>
-          </a:xfrm>
-          <a:prstGeom prst="roundRect">
-            <a:avLst>
-              <a:gd name="adj" fmla="val 12000"/>
-            </a:avLst>
-          </a:prstGeom>
-          <a:solidFill>
-            <a:srgbClr val="F2F6F9"/>
-          </a:solidFill>
-          <a:ln w="12700">
-            <a:solidFill>
-              <a:srgbClr val="E3EAF0"/>
-            </a:solidFill>
-            <a:prstDash val="solid"/>
-          </a:ln>
-        </p:spPr>
-      </p:sp>
-      <p:sp>
-        <p:nvSpPr>
-          <p:cNvPr id="20" name="Text 18"/>
-          <p:cNvSpPr txBox="1"/>
-          <p:nvPr/>
-        </p:nvSpPr>
-        <p:spPr>
-          <a:xfrm>
-            <a:off x="3739896" y="3145536"/>
-            <a:ext cx="2194560" cy="457200"/>
-          </a:xfrm>
-          <a:prstGeom prst="rect">
-            <a:avLst/>
-          </a:prstGeom>
-          <a:noFill/>
-          <a:ln/>
-        </p:spPr>
-        <p:txBody>
-          <a:bodyPr wrap="square" lIns="0" tIns="0" rIns="0" bIns="0" rtlCol="0" anchor="ctr"/>
-          <a:lstStyle/>
-          <a:p>
-            <a:pPr indent="0" marL="0">
-              <a:buNone/>
-            </a:pPr>
-            <a:r>
-              <a:rPr lang="en-US" sz="1100" dirty="0">
-                <a:solidFill>
-                  <a:srgbClr val="10243A"/>
-                </a:solidFill>
-                <a:latin typeface="맑은 고딕" pitchFamily="34" charset="0"/>
-                <a:ea typeface="맑은 고딕" pitchFamily="34" charset="-122"/>
-                <a:cs typeface="맑은 고딕" pitchFamily="34" charset="-120"/>
-              </a:rPr>
-              <a:t>성산</a:t>
-            </a:r>
-            <a:endParaRPr lang="en-US" sz="1100" dirty="0"/>
-          </a:p>
-        </p:txBody>
-      </p:sp>
-      <p:sp>
-        <p:nvSpPr>
-          <p:cNvPr id="21" name="Shape 19"/>
-          <p:cNvSpPr/>
-          <p:nvPr/>
-        </p:nvSpPr>
-        <p:spPr>
-          <a:xfrm>
-            <a:off x="6153912" y="3145536"/>
-            <a:ext cx="2395728" cy="457200"/>
-          </a:xfrm>
-          <a:prstGeom prst="roundRect">
-            <a:avLst>
-              <a:gd name="adj" fmla="val 12000"/>
-            </a:avLst>
-          </a:prstGeom>
-          <a:solidFill>
-            <a:srgbClr val="F2F6F9"/>
-          </a:solidFill>
-          <a:ln w="12700">
-            <a:solidFill>
-              <a:srgbClr val="E3EAF0"/>
-            </a:solidFill>
-            <a:prstDash val="solid"/>
-          </a:ln>
-        </p:spPr>
-      </p:sp>
-      <p:sp>
-        <p:nvSpPr>
-          <p:cNvPr id="22" name="Text 20"/>
-          <p:cNvSpPr txBox="1"/>
-          <p:nvPr/>
-        </p:nvSpPr>
-        <p:spPr>
-          <a:xfrm>
-            <a:off x="6281928" y="3145536"/>
-            <a:ext cx="2194560" cy="457200"/>
-          </a:xfrm>
-          <a:prstGeom prst="rect">
-            <a:avLst/>
-          </a:prstGeom>
-          <a:noFill/>
-          <a:ln/>
-        </p:spPr>
-        <p:txBody>
-          <a:bodyPr wrap="square" lIns="0" tIns="0" rIns="0" bIns="0" rtlCol="0" anchor="ctr"/>
-          <a:lstStyle/>
-          <a:p>
-            <a:pPr indent="0" marL="0">
-              <a:buNone/>
-            </a:pPr>
-            <a:r>
-              <a:rPr lang="en-US" sz="1100" dirty="0">
-                <a:solidFill>
-                  <a:srgbClr val="10243A"/>
-                </a:solidFill>
-                <a:latin typeface="맑은 고딕" pitchFamily="34" charset="0"/>
-                <a:ea typeface="맑은 고딕" pitchFamily="34" charset="-122"/>
-                <a:cs typeface="맑은 고딕" pitchFamily="34" charset="-120"/>
-              </a:rPr>
-              <a:t>중문</a:t>
-            </a:r>
-            <a:endParaRPr lang="en-US" sz="1100" dirty="0"/>
-          </a:p>
-        </p:txBody>
-      </p:sp>
-      <p:sp>
-        <p:nvSpPr>
-          <p:cNvPr id="23" name="Shape 21"/>
-          <p:cNvSpPr/>
-          <p:nvPr/>
-        </p:nvSpPr>
-        <p:spPr>
-          <a:xfrm>
-            <a:off x="3611880" y="3712464"/>
-            <a:ext cx="2395728" cy="457200"/>
-          </a:xfrm>
-          <a:prstGeom prst="roundRect">
-            <a:avLst>
-              <a:gd name="adj" fmla="val 12000"/>
-            </a:avLst>
-          </a:prstGeom>
-          <a:solidFill>
-            <a:srgbClr val="F2F6F9"/>
-          </a:solidFill>
-          <a:ln w="12700">
-            <a:solidFill>
-              <a:srgbClr val="E3EAF0"/>
-            </a:solidFill>
-            <a:prstDash val="solid"/>
-          </a:ln>
-        </p:spPr>
-      </p:sp>
-      <p:sp>
-        <p:nvSpPr>
-          <p:cNvPr id="24" name="Text 22"/>
-          <p:cNvSpPr txBox="1"/>
-          <p:nvPr/>
-        </p:nvSpPr>
-        <p:spPr>
-          <a:xfrm>
-            <a:off x="3739896" y="3712464"/>
-            <a:ext cx="2194560" cy="457200"/>
-          </a:xfrm>
-          <a:prstGeom prst="rect">
-            <a:avLst/>
-          </a:prstGeom>
-          <a:noFill/>
-          <a:ln/>
-        </p:spPr>
-        <p:txBody>
-          <a:bodyPr wrap="square" lIns="0" tIns="0" rIns="0" bIns="0" rtlCol="0" anchor="ctr"/>
-          <a:lstStyle/>
-          <a:p>
-            <a:pPr indent="0" marL="0">
-              <a:buNone/>
-            </a:pPr>
-            <a:r>
-              <a:rPr lang="en-US" sz="1100" dirty="0">
-                <a:solidFill>
-                  <a:srgbClr val="10243A"/>
-                </a:solidFill>
-                <a:latin typeface="맑은 고딕" pitchFamily="34" charset="0"/>
-                <a:ea typeface="맑은 고딕" pitchFamily="34" charset="-122"/>
-                <a:cs typeface="맑은 고딕" pitchFamily="34" charset="-120"/>
-              </a:rPr>
-              <a:t>한라산 주요 탐방로 진입부</a:t>
-            </a:r>
-            <a:endParaRPr lang="en-US" sz="1100" dirty="0"/>
-          </a:p>
-        </p:txBody>
-      </p:sp>
-      <p:sp>
-        <p:nvSpPr>
-          <p:cNvPr id="25" name="Shape 23"/>
-          <p:cNvSpPr/>
-          <p:nvPr/>
-        </p:nvSpPr>
-        <p:spPr>
-          <a:xfrm>
-            <a:off x="6153912" y="3712464"/>
-            <a:ext cx="2395728" cy="457200"/>
-          </a:xfrm>
-          <a:prstGeom prst="roundRect">
-            <a:avLst>
-              <a:gd name="adj" fmla="val 12000"/>
-            </a:avLst>
-          </a:prstGeom>
-          <a:solidFill>
-            <a:srgbClr val="F2F6F9"/>
-          </a:solidFill>
-          <a:ln w="12700">
-            <a:solidFill>
-              <a:srgbClr val="E3EAF0"/>
-            </a:solidFill>
-            <a:prstDash val="solid"/>
-          </a:ln>
-        </p:spPr>
-      </p:sp>
-      <p:sp>
-        <p:nvSpPr>
-          <p:cNvPr id="26" name="Text 24"/>
-          <p:cNvSpPr txBox="1"/>
-          <p:nvPr/>
-        </p:nvSpPr>
-        <p:spPr>
-          <a:xfrm>
-            <a:off x="6281928" y="3712464"/>
-            <a:ext cx="2194560" cy="457200"/>
-          </a:xfrm>
-          <a:prstGeom prst="rect">
-            <a:avLst/>
-          </a:prstGeom>
-          <a:noFill/>
-          <a:ln/>
-        </p:spPr>
-        <p:txBody>
-          <a:bodyPr wrap="square" lIns="0" tIns="0" rIns="0" bIns="0" rtlCol="0" anchor="ctr"/>
-          <a:lstStyle/>
-          <a:p>
-            <a:pPr indent="0" marL="0">
-              <a:buNone/>
-            </a:pPr>
-            <a:r>
-              <a:rPr lang="en-US" sz="1100" dirty="0">
-                <a:solidFill>
-                  <a:srgbClr val="10243A"/>
-                </a:solidFill>
-                <a:latin typeface="맑은 고딕" pitchFamily="34" charset="0"/>
-                <a:ea typeface="맑은 고딕" pitchFamily="34" charset="-122"/>
-                <a:cs typeface="맑은 고딕" pitchFamily="34" charset="-120"/>
-              </a:rPr>
-              <a:t>올레길 위험 구간</a:t>
-            </a:r>
-            <a:endParaRPr lang="en-US" sz="1100" dirty="0"/>
-          </a:p>
-        </p:txBody>
-      </p:sp>
-      <p:sp>
-        <p:nvSpPr>
-          <p:cNvPr id="27" name="Text 25"/>
-          <p:cNvSpPr txBox="1"/>
-          <p:nvPr/>
-        </p:nvSpPr>
-        <p:spPr>
-          <a:xfrm>
-            <a:off x="3611880" y="4370832"/>
-            <a:ext cx="4983480" cy="320040"/>
-          </a:xfrm>
-          <a:prstGeom prst="rect">
-            <a:avLst/>
-          </a:prstGeom>
-          <a:noFill/>
-          <a:ln/>
-        </p:spPr>
-        <p:txBody>
-          <a:bodyPr wrap="square" lIns="0" tIns="0" rIns="0" bIns="0" rtlCol="0" anchor="ctr"/>
-          <a:lstStyle/>
-          <a:p>
-            <a:pPr indent="0" marL="0">
-              <a:buNone/>
-            </a:pPr>
-            <a:r>
-              <a:rPr lang="en-US" sz="1050" dirty="0">
-                <a:solidFill>
-                  <a:srgbClr val="5A6A78"/>
-                </a:solidFill>
-                <a:latin typeface="맑은 고딕" pitchFamily="34" charset="0"/>
-                <a:ea typeface="맑은 고딕" pitchFamily="34" charset="-122"/>
-                <a:cs typeface="맑은 고딕" pitchFamily="34" charset="-120"/>
-              </a:rPr>
-              <a:t>배치 우선순위는 도가 이미 운영 중인 인구빅데이터(생활인구·입도객)로 결정</a:t>
-            </a:r>
-            <a:endParaRPr lang="en-US" sz="1050" dirty="0"/>
+              <a:t>새 사업을 만들자는 제안이 아닙니다. 있는 자산을 하나의 출동 체계로 잇자는 제안입니다.</a:t>
+            </a:r>
+            <a:endParaRPr lang="en-US" sz="1200" dirty="0"/>
           </a:p>
         </p:txBody>
       </p:sp>
